--- a/dev/ppt/out/Deck.pptx
+++ b/dev/ppt/out/Deck.pptx
@@ -6396,7 +6396,7 @@
                 <a:ea typeface="Arial"/>
                 <a:cs typeface="Arial"/>
               </a:rPr>
-              <a:t>“先让她真的住在电脑里，再让她走到你身边。”</a:t>
+              <a:t>“别人做「桌面上的形象」，我们做「住在电脑里的人」”</a:t>
             </a:r>
           </a:p>
           <a:p>
@@ -6414,7 +6414,7 @@
                 <a:ea typeface="Arial"/>
                 <a:cs typeface="Arial"/>
               </a:rPr>
-              <a:t>—— 路线取舍</a:t>
+              <a:t>—— 定位：整合者，而非首创者</a:t>
             </a:r>
           </a:p>
         </p:txBody>
@@ -8803,6 +8803,46 @@
               <a:t>  安卓端已在推进（同一套后端协议）</a:t>
             </a:r>
           </a:p>
+          <a:p>
+            <a:pPr>
+              <a:spcAft>
+                <a:spcPts val="1400"/>
+              </a:spcAft>
+            </a:pPr>
+            <a:r>
+              <a:rPr sz="1600" b="0">
+                <a:solidFill>
+                  <a:srgbClr val="A03A35"/>
+                </a:solidFill>
+                <a:latin typeface="微软雅黑"/>
+                <a:ea typeface="微软雅黑"/>
+                <a:cs typeface="微软雅黑"/>
+              </a:rPr>
+              <a:t>▪  </a:t>
+            </a:r>
+            <a:r>
+              <a:rPr sz="1600" b="0">
+                <a:solidFill>
+                  <a:srgbClr val="3B2B26"/>
+                </a:solidFill>
+                <a:latin typeface="微软雅黑"/>
+                <a:ea typeface="微软雅黑"/>
+                <a:cs typeface="微软雅黑"/>
+              </a:rPr>
+              <a:t>诚实定位：并非首创</a:t>
+            </a:r>
+            <a:r>
+              <a:rPr sz="1300" b="0">
+                <a:solidFill>
+                  <a:srgbClr val="6B5850"/>
+                </a:solidFill>
+                <a:latin typeface="微软雅黑"/>
+                <a:ea typeface="微软雅黑"/>
+                <a:cs typeface="微软雅黑"/>
+              </a:rPr>
+              <a:t>  但已进入极稀疏地带——唯一查到做齐且仍在活跃的是 super-agent-party</a:t>
+            </a:r>
+          </a:p>
         </p:txBody>
       </p:sp>
       <p:sp>
@@ -8911,7 +8951,7 @@
                 <a:ea typeface="Arial"/>
                 <a:cs typeface="Arial"/>
               </a:rPr>
-              <a:t>“别人做的是“桌面上的一个形象”，我们做的是“住在你电脑里的人”。”</a:t>
+              <a:t>“别人做「桌面上的形象」，我们做「住在电脑里的人」”</a:t>
             </a:r>
           </a:p>
           <a:p>
@@ -8929,7 +8969,7 @@
                 <a:ea typeface="Arial"/>
                 <a:cs typeface="Arial"/>
               </a:rPr>
-              <a:t>—— 本项目的定位</a:t>
+              <a:t>—— 定位：整合者，而非首创者</a:t>
             </a:r>
           </a:p>
         </p:txBody>

--- a/dev/ppt/out/Deck.pptx
+++ b/dev/ppt/out/Deck.pptx
@@ -125,6 +125,1826 @@
     </a:lvl9pPr>
   </p:defaultTextStyle>
 </p:presentation>
+</file>
+
+<file path=ppt/notesMasters/notesMaster1.xml><?xml version="1.0" encoding="utf-8"?>
+<p:notesMaster xmlns:a="http://schemas.openxmlformats.org/drawingml/2006/main" xmlns:p="http://schemas.openxmlformats.org/presentationml/2006/main" xmlns:r="http://schemas.openxmlformats.org/officeDocument/2006/relationships">
+  <p:cSld>
+    <p:bg>
+      <p:bgRef idx="1001">
+        <a:schemeClr val="bg1"/>
+      </p:bgRef>
+    </p:bg>
+    <p:spTree>
+      <p:nvGrpSpPr>
+        <p:cNvPr id="1" name=""/>
+        <p:cNvGrpSpPr/>
+        <p:nvPr/>
+      </p:nvGrpSpPr>
+      <p:grpSpPr>
+        <a:xfrm>
+          <a:off x="0" y="0"/>
+          <a:ext cx="0" cy="0"/>
+          <a:chOff x="0" y="0"/>
+          <a:chExt cx="0" cy="0"/>
+        </a:xfrm>
+      </p:grpSpPr>
+      <p:sp>
+        <p:nvSpPr>
+          <p:cNvPr id="2" name="Header Placeholder 1"/>
+          <p:cNvSpPr>
+            <a:spLocks noGrp="1"/>
+          </p:cNvSpPr>
+          <p:nvPr>
+            <p:ph type="hdr" sz="quarter"/>
+          </p:nvPr>
+        </p:nvSpPr>
+        <p:spPr>
+          <a:xfrm>
+            <a:off x="0" y="0"/>
+            <a:ext cx="2971800" cy="457200"/>
+          </a:xfrm>
+          <a:prstGeom prst="rect">
+            <a:avLst/>
+          </a:prstGeom>
+        </p:spPr>
+        <p:txBody>
+          <a:bodyPr vert="horz" lIns="91440" tIns="45720" rIns="91440" bIns="45720" rtlCol="0"/>
+          <a:lstStyle>
+            <a:lvl1pPr algn="l">
+              <a:defRPr sz="1200"/>
+            </a:lvl1pPr>
+          </a:lstStyle>
+          <a:p>
+            <a:endParaRPr lang="en-US"/>
+          </a:p>
+        </p:txBody>
+      </p:sp>
+      <p:sp>
+        <p:nvSpPr>
+          <p:cNvPr id="3" name="Date Placeholder 2"/>
+          <p:cNvSpPr>
+            <a:spLocks noGrp="1"/>
+          </p:cNvSpPr>
+          <p:nvPr>
+            <p:ph type="dt" idx="1"/>
+          </p:nvPr>
+        </p:nvSpPr>
+        <p:spPr>
+          <a:xfrm>
+            <a:off x="3884613" y="0"/>
+            <a:ext cx="2971800" cy="457200"/>
+          </a:xfrm>
+          <a:prstGeom prst="rect">
+            <a:avLst/>
+          </a:prstGeom>
+        </p:spPr>
+        <p:txBody>
+          <a:bodyPr vert="horz" lIns="91440" tIns="45720" rIns="91440" bIns="45720" rtlCol="0"/>
+          <a:lstStyle>
+            <a:lvl1pPr algn="r">
+              <a:defRPr sz="1200"/>
+            </a:lvl1pPr>
+          </a:lstStyle>
+          <a:p>
+            <a:fld id="{0F89C1C7-3DCD-1040-A9CF-14679D8B5DDD}" type="datetimeFigureOut">
+              <a:rPr lang="en-US" smtClean="0"/>
+              <a:t>10/17/16</a:t>
+            </a:fld>
+            <a:endParaRPr lang="en-US"/>
+          </a:p>
+        </p:txBody>
+      </p:sp>
+      <p:sp>
+        <p:nvSpPr>
+          <p:cNvPr id="4" name="Slide Image Placeholder 3"/>
+          <p:cNvSpPr>
+            <a:spLocks noGrp="1" noRot="1" noChangeAspect="1"/>
+          </p:cNvSpPr>
+          <p:nvPr>
+            <p:ph type="sldImg" idx="2"/>
+          </p:nvPr>
+        </p:nvSpPr>
+        <p:spPr>
+          <a:xfrm>
+            <a:off x="1143000" y="685800"/>
+            <a:ext cx="4572000" cy="3429000"/>
+          </a:xfrm>
+          <a:prstGeom prst="rect">
+            <a:avLst/>
+          </a:prstGeom>
+          <a:noFill/>
+          <a:ln w="12700">
+            <a:solidFill>
+              <a:prstClr val="black"/>
+            </a:solidFill>
+          </a:ln>
+        </p:spPr>
+        <p:txBody>
+          <a:bodyPr vert="horz" lIns="91440" tIns="45720" rIns="91440" bIns="45720" rtlCol="0" anchor="ctr"/>
+          <a:lstStyle/>
+          <a:p>
+            <a:endParaRPr lang="en-US"/>
+          </a:p>
+        </p:txBody>
+      </p:sp>
+      <p:sp>
+        <p:nvSpPr>
+          <p:cNvPr id="5" name="Notes Placeholder 4"/>
+          <p:cNvSpPr>
+            <a:spLocks noGrp="1"/>
+          </p:cNvSpPr>
+          <p:nvPr>
+            <p:ph type="body" sz="quarter" idx="3"/>
+          </p:nvPr>
+        </p:nvSpPr>
+        <p:spPr>
+          <a:xfrm>
+            <a:off x="685800" y="4343400"/>
+            <a:ext cx="5486400" cy="4114800"/>
+          </a:xfrm>
+          <a:prstGeom prst="rect">
+            <a:avLst/>
+          </a:prstGeom>
+        </p:spPr>
+        <p:txBody>
+          <a:bodyPr vert="horz" lIns="91440" tIns="45720" rIns="91440" bIns="45720" rtlCol="0"/>
+          <a:lstStyle/>
+          <a:p>
+            <a:pPr lvl="0"/>
+            <a:r>
+              <a:rPr lang="en-US" smtClean="0"/>
+              <a:t>Click to edit Master text styles</a:t>
+            </a:r>
+          </a:p>
+          <a:p>
+            <a:pPr lvl="1"/>
+            <a:r>
+              <a:rPr lang="en-US" smtClean="0"/>
+              <a:t>Second level</a:t>
+            </a:r>
+          </a:p>
+          <a:p>
+            <a:pPr lvl="2"/>
+            <a:r>
+              <a:rPr lang="en-US" smtClean="0"/>
+              <a:t>Third level</a:t>
+            </a:r>
+          </a:p>
+          <a:p>
+            <a:pPr lvl="3"/>
+            <a:r>
+              <a:rPr lang="en-US" smtClean="0"/>
+              <a:t>Fourth level</a:t>
+            </a:r>
+          </a:p>
+          <a:p>
+            <a:pPr lvl="4"/>
+            <a:r>
+              <a:rPr lang="en-US" smtClean="0"/>
+              <a:t>Fifth level</a:t>
+            </a:r>
+            <a:endParaRPr lang="en-US"/>
+          </a:p>
+        </p:txBody>
+      </p:sp>
+      <p:sp>
+        <p:nvSpPr>
+          <p:cNvPr id="6" name="Footer Placeholder 5"/>
+          <p:cNvSpPr>
+            <a:spLocks noGrp="1"/>
+          </p:cNvSpPr>
+          <p:nvPr>
+            <p:ph type="ftr" sz="quarter" idx="4"/>
+          </p:nvPr>
+        </p:nvSpPr>
+        <p:spPr>
+          <a:xfrm>
+            <a:off x="0" y="8685213"/>
+            <a:ext cx="2971800" cy="457200"/>
+          </a:xfrm>
+          <a:prstGeom prst="rect">
+            <a:avLst/>
+          </a:prstGeom>
+        </p:spPr>
+        <p:txBody>
+          <a:bodyPr vert="horz" lIns="91440" tIns="45720" rIns="91440" bIns="45720" rtlCol="0" anchor="b"/>
+          <a:lstStyle>
+            <a:lvl1pPr algn="l">
+              <a:defRPr sz="1200"/>
+            </a:lvl1pPr>
+          </a:lstStyle>
+          <a:p>
+            <a:endParaRPr lang="en-US"/>
+          </a:p>
+        </p:txBody>
+      </p:sp>
+      <p:sp>
+        <p:nvSpPr>
+          <p:cNvPr id="7" name="Slide Number Placeholder 6"/>
+          <p:cNvSpPr>
+            <a:spLocks noGrp="1"/>
+          </p:cNvSpPr>
+          <p:nvPr>
+            <p:ph type="sldNum" sz="quarter" idx="5"/>
+          </p:nvPr>
+        </p:nvSpPr>
+        <p:spPr>
+          <a:xfrm>
+            <a:off x="3884613" y="8685213"/>
+            <a:ext cx="2971800" cy="457200"/>
+          </a:xfrm>
+          <a:prstGeom prst="rect">
+            <a:avLst/>
+          </a:prstGeom>
+        </p:spPr>
+        <p:txBody>
+          <a:bodyPr vert="horz" lIns="91440" tIns="45720" rIns="91440" bIns="45720" rtlCol="0" anchor="b"/>
+          <a:lstStyle>
+            <a:lvl1pPr algn="r">
+              <a:defRPr sz="1200"/>
+            </a:lvl1pPr>
+          </a:lstStyle>
+          <a:p>
+            <a:fld id="{BB5E49A5-4136-284D-997B-48E1D791AD67}" type="slidenum">
+              <a:rPr lang="en-US" smtClean="0"/>
+              <a:t>‹#›</a:t>
+            </a:fld>
+            <a:endParaRPr lang="en-US"/>
+          </a:p>
+        </p:txBody>
+      </p:sp>
+    </p:spTree>
+    <p:extLst>
+      <p:ext uri="{BB962C8B-B14F-4D97-AF65-F5344CB8AC3E}">
+        <p14:creationId xmlns:p14="http://schemas.microsoft.com/office/powerpoint/2010/main" val="2623252185"/>
+      </p:ext>
+    </p:extLst>
+  </p:cSld>
+  <p:clrMap bg1="lt1" tx1="dk1" bg2="lt2" tx2="dk2" accent1="accent1" accent2="accent2" accent3="accent3" accent4="accent4" accent5="accent5" accent6="accent6" hlink="hlink" folHlink="folHlink"/>
+  <p:notesStyle>
+    <a:lvl1pPr marL="0" algn="l" defTabSz="457200" rtl="0" eaLnBrk="1" latinLnBrk="0" hangingPunct="1">
+      <a:defRPr sz="1200" kern="1200">
+        <a:solidFill>
+          <a:schemeClr val="tx1"/>
+        </a:solidFill>
+        <a:latin typeface="+mn-lt"/>
+        <a:ea typeface="+mn-ea"/>
+        <a:cs typeface="+mn-cs"/>
+      </a:defRPr>
+    </a:lvl1pPr>
+    <a:lvl2pPr marL="457200" algn="l" defTabSz="457200" rtl="0" eaLnBrk="1" latinLnBrk="0" hangingPunct="1">
+      <a:defRPr sz="1200" kern="1200">
+        <a:solidFill>
+          <a:schemeClr val="tx1"/>
+        </a:solidFill>
+        <a:latin typeface="+mn-lt"/>
+        <a:ea typeface="+mn-ea"/>
+        <a:cs typeface="+mn-cs"/>
+      </a:defRPr>
+    </a:lvl2pPr>
+    <a:lvl3pPr marL="914400" algn="l" defTabSz="457200" rtl="0" eaLnBrk="1" latinLnBrk="0" hangingPunct="1">
+      <a:defRPr sz="1200" kern="1200">
+        <a:solidFill>
+          <a:schemeClr val="tx1"/>
+        </a:solidFill>
+        <a:latin typeface="+mn-lt"/>
+        <a:ea typeface="+mn-ea"/>
+        <a:cs typeface="+mn-cs"/>
+      </a:defRPr>
+    </a:lvl3pPr>
+    <a:lvl4pPr marL="1371600" algn="l" defTabSz="457200" rtl="0" eaLnBrk="1" latinLnBrk="0" hangingPunct="1">
+      <a:defRPr sz="1200" kern="1200">
+        <a:solidFill>
+          <a:schemeClr val="tx1"/>
+        </a:solidFill>
+        <a:latin typeface="+mn-lt"/>
+        <a:ea typeface="+mn-ea"/>
+        <a:cs typeface="+mn-cs"/>
+      </a:defRPr>
+    </a:lvl4pPr>
+    <a:lvl5pPr marL="1828800" algn="l" defTabSz="457200" rtl="0" eaLnBrk="1" latinLnBrk="0" hangingPunct="1">
+      <a:defRPr sz="1200" kern="1200">
+        <a:solidFill>
+          <a:schemeClr val="tx1"/>
+        </a:solidFill>
+        <a:latin typeface="+mn-lt"/>
+        <a:ea typeface="+mn-ea"/>
+        <a:cs typeface="+mn-cs"/>
+      </a:defRPr>
+    </a:lvl5pPr>
+    <a:lvl6pPr marL="2286000" algn="l" defTabSz="457200" rtl="0" eaLnBrk="1" latinLnBrk="0" hangingPunct="1">
+      <a:defRPr sz="1200" kern="1200">
+        <a:solidFill>
+          <a:schemeClr val="tx1"/>
+        </a:solidFill>
+        <a:latin typeface="+mn-lt"/>
+        <a:ea typeface="+mn-ea"/>
+        <a:cs typeface="+mn-cs"/>
+      </a:defRPr>
+    </a:lvl6pPr>
+    <a:lvl7pPr marL="2743200" algn="l" defTabSz="457200" rtl="0" eaLnBrk="1" latinLnBrk="0" hangingPunct="1">
+      <a:defRPr sz="1200" kern="1200">
+        <a:solidFill>
+          <a:schemeClr val="tx1"/>
+        </a:solidFill>
+        <a:latin typeface="+mn-lt"/>
+        <a:ea typeface="+mn-ea"/>
+        <a:cs typeface="+mn-cs"/>
+      </a:defRPr>
+    </a:lvl7pPr>
+    <a:lvl8pPr marL="3200400" algn="l" defTabSz="457200" rtl="0" eaLnBrk="1" latinLnBrk="0" hangingPunct="1">
+      <a:defRPr sz="1200" kern="1200">
+        <a:solidFill>
+          <a:schemeClr val="tx1"/>
+        </a:solidFill>
+        <a:latin typeface="+mn-lt"/>
+        <a:ea typeface="+mn-ea"/>
+        <a:cs typeface="+mn-cs"/>
+      </a:defRPr>
+    </a:lvl8pPr>
+    <a:lvl9pPr marL="3657600" algn="l" defTabSz="457200" rtl="0" eaLnBrk="1" latinLnBrk="0" hangingPunct="1">
+      <a:defRPr sz="1200" kern="1200">
+        <a:solidFill>
+          <a:schemeClr val="tx1"/>
+        </a:solidFill>
+        <a:latin typeface="+mn-lt"/>
+        <a:ea typeface="+mn-ea"/>
+        <a:cs typeface="+mn-cs"/>
+      </a:defRPr>
+    </a:lvl9pPr>
+  </p:notesStyle>
+</p:notesMaster>
+</file>
+
+<file path=ppt/notesSlides/notesSlide1.xml><?xml version="1.0" encoding="utf-8"?>
+<p:notes xmlns:a="http://schemas.openxmlformats.org/drawingml/2006/main" xmlns:p="http://schemas.openxmlformats.org/presentationml/2006/main" xmlns:r="http://schemas.openxmlformats.org/officeDocument/2006/relationships">
+  <p:cSld>
+    <p:spTree>
+      <p:nvGrpSpPr>
+        <p:cNvPr id="1" name=""/>
+        <p:cNvGrpSpPr/>
+        <p:nvPr/>
+      </p:nvGrpSpPr>
+      <p:grpSpPr>
+        <a:xfrm>
+          <a:off x="0" y="0"/>
+          <a:ext cx="0" cy="0"/>
+          <a:chOff x="0" y="0"/>
+          <a:chExt cx="0" cy="0"/>
+        </a:xfrm>
+      </p:grpSpPr>
+      <p:sp>
+        <p:nvSpPr>
+          <p:cNvPr id="2" name="Slide Image Placeholder 1"/>
+          <p:cNvSpPr>
+            <a:spLocks noGrp="1"/>
+          </p:cNvSpPr>
+          <p:nvPr>
+            <p:ph type="sldImg" idx="2"/>
+          </p:nvPr>
+        </p:nvSpPr>
+        <p:spPr/>
+      </p:sp>
+      <p:sp>
+        <p:nvSpPr>
+          <p:cNvPr id="3" name="Notes Placeholder 2"/>
+          <p:cNvSpPr>
+            <a:spLocks noGrp="1"/>
+          </p:cNvSpPr>
+          <p:nvPr>
+            <p:ph type="body" idx="3" sz="quarter"/>
+          </p:nvPr>
+        </p:nvSpPr>
+        <p:spPr/>
+        <p:txBody>
+          <a:bodyPr/>
+          <a:lstStyle/>
+          <a:p>
+            <a:r>
+              <a:t>开场一句话定调：这不是一个壁纸，是一个住在电脑里的角色。她有自己的形象、声音、记忆，还能替我干活。</a:t>
+            </a:r>
+          </a:p>
+        </p:txBody>
+      </p:sp>
+      <p:sp>
+        <p:nvSpPr>
+          <p:cNvPr id="4" name="Slide Number Placeholder 3"/>
+          <p:cNvSpPr>
+            <a:spLocks noGrp="1"/>
+          </p:cNvSpPr>
+          <p:nvPr>
+            <p:ph type="sldNum" idx="5" sz="quarter"/>
+          </p:nvPr>
+        </p:nvSpPr>
+        <p:spPr/>
+      </p:sp>
+    </p:spTree>
+  </p:cSld>
+  <p:clrMapOvr>
+    <a:masterClrMapping/>
+  </p:clrMapOvr>
+</p:notes>
+</file>
+
+<file path=ppt/notesSlides/notesSlide10.xml><?xml version="1.0" encoding="utf-8"?>
+<p:notes xmlns:a="http://schemas.openxmlformats.org/drawingml/2006/main" xmlns:p="http://schemas.openxmlformats.org/presentationml/2006/main" xmlns:r="http://schemas.openxmlformats.org/officeDocument/2006/relationships">
+  <p:cSld>
+    <p:spTree>
+      <p:nvGrpSpPr>
+        <p:cNvPr id="1" name=""/>
+        <p:cNvGrpSpPr/>
+        <p:nvPr/>
+      </p:nvGrpSpPr>
+      <p:grpSpPr>
+        <a:xfrm>
+          <a:off x="0" y="0"/>
+          <a:ext cx="0" cy="0"/>
+          <a:chOff x="0" y="0"/>
+          <a:chExt cx="0" cy="0"/>
+        </a:xfrm>
+      </p:grpSpPr>
+      <p:sp>
+        <p:nvSpPr>
+          <p:cNvPr id="2" name="Slide Image Placeholder 1"/>
+          <p:cNvSpPr>
+            <a:spLocks noGrp="1"/>
+          </p:cNvSpPr>
+          <p:nvPr>
+            <p:ph type="sldImg" idx="2"/>
+          </p:nvPr>
+        </p:nvSpPr>
+        <p:spPr/>
+      </p:sp>
+      <p:sp>
+        <p:nvSpPr>
+          <p:cNvPr id="3" name="Notes Placeholder 2"/>
+          <p:cNvSpPr>
+            <a:spLocks noGrp="1"/>
+          </p:cNvSpPr>
+          <p:nvPr>
+            <p:ph type="body" idx="3" sz="quarter"/>
+          </p:nvPr>
+        </p:nvSpPr>
+        <p:spPr/>
+        <p:txBody>
+          <a:bodyPr/>
+          <a:lstStyle/>
+          <a:p>
+            <a:r>
+              <a:t>她目前能做的五件事：有形象地陪着、用自己的声音说话、记得住我、能替我干活、还能出桌面去 QQ/微信里继续聊。</a:t>
+            </a:r>
+          </a:p>
+        </p:txBody>
+      </p:sp>
+      <p:sp>
+        <p:nvSpPr>
+          <p:cNvPr id="4" name="Slide Number Placeholder 3"/>
+          <p:cNvSpPr>
+            <a:spLocks noGrp="1"/>
+          </p:cNvSpPr>
+          <p:nvPr>
+            <p:ph type="sldNum" idx="5" sz="quarter"/>
+          </p:nvPr>
+        </p:nvSpPr>
+        <p:spPr/>
+      </p:sp>
+    </p:spTree>
+  </p:cSld>
+  <p:clrMapOvr>
+    <a:masterClrMapping/>
+  </p:clrMapOvr>
+</p:notes>
+</file>
+
+<file path=ppt/notesSlides/notesSlide11.xml><?xml version="1.0" encoding="utf-8"?>
+<p:notes xmlns:a="http://schemas.openxmlformats.org/drawingml/2006/main" xmlns:p="http://schemas.openxmlformats.org/presentationml/2006/main" xmlns:r="http://schemas.openxmlformats.org/officeDocument/2006/relationships">
+  <p:cSld>
+    <p:spTree>
+      <p:nvGrpSpPr>
+        <p:cNvPr id="1" name=""/>
+        <p:cNvGrpSpPr/>
+        <p:nvPr/>
+      </p:nvGrpSpPr>
+      <p:grpSpPr>
+        <a:xfrm>
+          <a:off x="0" y="0"/>
+          <a:ext cx="0" cy="0"/>
+          <a:chOff x="0" y="0"/>
+          <a:chExt cx="0" cy="0"/>
+        </a:xfrm>
+      </p:grpSpPr>
+      <p:sp>
+        <p:nvSpPr>
+          <p:cNvPr id="2" name="Slide Image Placeholder 1"/>
+          <p:cNvSpPr>
+            <a:spLocks noGrp="1"/>
+          </p:cNvSpPr>
+          <p:nvPr>
+            <p:ph type="sldImg" idx="2"/>
+          </p:nvPr>
+        </p:nvSpPr>
+        <p:spPr/>
+      </p:sp>
+      <p:sp>
+        <p:nvSpPr>
+          <p:cNvPr id="3" name="Notes Placeholder 2"/>
+          <p:cNvSpPr>
+            <a:spLocks noGrp="1"/>
+          </p:cNvSpPr>
+          <p:nvPr>
+            <p:ph type="body" idx="3" sz="quarter"/>
+          </p:nvPr>
+        </p:nvSpPr>
+        <p:spPr/>
+        <p:txBody>
+          <a:bodyPr/>
+          <a:lstStyle/>
+          <a:p>
+            <a:r>
+              <a:t>形象这块的核心设计是：**装扮即数据**。衣服、发型、装饰、姿势都是层号，换装就是换层再合成，所以 Live2D 和 2D 立绘能共用同一套装扮。语音是角色专属模型，独立服务常驻。</a:t>
+            </a:r>
+          </a:p>
+        </p:txBody>
+      </p:sp>
+      <p:sp>
+        <p:nvSpPr>
+          <p:cNvPr id="4" name="Slide Number Placeholder 3"/>
+          <p:cNvSpPr>
+            <a:spLocks noGrp="1"/>
+          </p:cNvSpPr>
+          <p:nvPr>
+            <p:ph type="sldNum" idx="5" sz="quarter"/>
+          </p:nvPr>
+        </p:nvSpPr>
+        <p:spPr/>
+      </p:sp>
+    </p:spTree>
+  </p:cSld>
+  <p:clrMapOvr>
+    <a:masterClrMapping/>
+  </p:clrMapOvr>
+</p:notes>
+</file>
+
+<file path=ppt/notesSlides/notesSlide12.xml><?xml version="1.0" encoding="utf-8"?>
+<p:notes xmlns:a="http://schemas.openxmlformats.org/drawingml/2006/main" xmlns:p="http://schemas.openxmlformats.org/presentationml/2006/main" xmlns:r="http://schemas.openxmlformats.org/officeDocument/2006/relationships">
+  <p:cSld>
+    <p:spTree>
+      <p:nvGrpSpPr>
+        <p:cNvPr id="1" name=""/>
+        <p:cNvGrpSpPr/>
+        <p:nvPr/>
+      </p:nvGrpSpPr>
+      <p:grpSpPr>
+        <a:xfrm>
+          <a:off x="0" y="0"/>
+          <a:ext cx="0" cy="0"/>
+          <a:chOff x="0" y="0"/>
+          <a:chExt cx="0" cy="0"/>
+        </a:xfrm>
+      </p:grpSpPr>
+      <p:sp>
+        <p:nvSpPr>
+          <p:cNvPr id="2" name="Slide Image Placeholder 1"/>
+          <p:cNvSpPr>
+            <a:spLocks noGrp="1"/>
+          </p:cNvSpPr>
+          <p:nvPr>
+            <p:ph type="sldImg" idx="2"/>
+          </p:nvPr>
+        </p:nvSpPr>
+        <p:spPr/>
+      </p:sp>
+      <p:sp>
+        <p:nvSpPr>
+          <p:cNvPr id="3" name="Notes Placeholder 2"/>
+          <p:cNvSpPr>
+            <a:spLocks noGrp="1"/>
+          </p:cNvSpPr>
+          <p:nvPr>
+            <p:ph type="body" idx="3" sz="quarter"/>
+          </p:nvPr>
+        </p:nvSpPr>
+        <p:spPr/>
+        <p:txBody>
+          <a:bodyPr/>
+          <a:lstStyle/>
+          <a:p>
+            <a:r>
+              <a:t>记忆是分层的：对话记忆、长期记忆、日记、状态快照各管一段。关系值按真实相处证据抬升，不靠嘴甜。她会自己补课、自己归纳关于我的事。</a:t>
+            </a:r>
+          </a:p>
+        </p:txBody>
+      </p:sp>
+      <p:sp>
+        <p:nvSpPr>
+          <p:cNvPr id="4" name="Slide Number Placeholder 3"/>
+          <p:cNvSpPr>
+            <a:spLocks noGrp="1"/>
+          </p:cNvSpPr>
+          <p:nvPr>
+            <p:ph type="sldNum" idx="5" sz="quarter"/>
+          </p:nvPr>
+        </p:nvSpPr>
+        <p:spPr/>
+      </p:sp>
+    </p:spTree>
+  </p:cSld>
+  <p:clrMapOvr>
+    <a:masterClrMapping/>
+  </p:clrMapOvr>
+</p:notes>
+</file>
+
+<file path=ppt/notesSlides/notesSlide13.xml><?xml version="1.0" encoding="utf-8"?>
+<p:notes xmlns:a="http://schemas.openxmlformats.org/drawingml/2006/main" xmlns:p="http://schemas.openxmlformats.org/presentationml/2006/main" xmlns:r="http://schemas.openxmlformats.org/officeDocument/2006/relationships">
+  <p:cSld>
+    <p:spTree>
+      <p:nvGrpSpPr>
+        <p:cNvPr id="1" name=""/>
+        <p:cNvGrpSpPr/>
+        <p:nvPr/>
+      </p:nvGrpSpPr>
+      <p:grpSpPr>
+        <a:xfrm>
+          <a:off x="0" y="0"/>
+          <a:ext cx="0" cy="0"/>
+          <a:chOff x="0" y="0"/>
+          <a:chExt cx="0" cy="0"/>
+        </a:xfrm>
+      </p:grpSpPr>
+      <p:sp>
+        <p:nvSpPr>
+          <p:cNvPr id="2" name="Slide Image Placeholder 1"/>
+          <p:cNvSpPr>
+            <a:spLocks noGrp="1"/>
+          </p:cNvSpPr>
+          <p:nvPr>
+            <p:ph type="sldImg" idx="2"/>
+          </p:nvPr>
+        </p:nvSpPr>
+        <p:spPr/>
+      </p:sp>
+      <p:sp>
+        <p:nvSpPr>
+          <p:cNvPr id="3" name="Notes Placeholder 2"/>
+          <p:cNvSpPr>
+            <a:spLocks noGrp="1"/>
+          </p:cNvSpPr>
+          <p:nvPr>
+            <p:ph type="body" idx="3" sz="quarter"/>
+          </p:nvPr>
+        </p:nvSpPr>
+        <p:spPr/>
+        <p:txBody>
+          <a:bodyPr/>
+          <a:lstStyle/>
+          <a:p>
+            <a:r>
+              <a:t>出桌面这块：QQ/微信桥接用同一套人设和记忆，连立绘都是同一件衣服。手机端走同一套后端协议。</a:t>
+            </a:r>
+          </a:p>
+        </p:txBody>
+      </p:sp>
+      <p:sp>
+        <p:nvSpPr>
+          <p:cNvPr id="4" name="Slide Number Placeholder 3"/>
+          <p:cNvSpPr>
+            <a:spLocks noGrp="1"/>
+          </p:cNvSpPr>
+          <p:nvPr>
+            <p:ph type="sldNum" idx="5" sz="quarter"/>
+          </p:nvPr>
+        </p:nvSpPr>
+        <p:spPr/>
+      </p:sp>
+    </p:spTree>
+  </p:cSld>
+  <p:clrMapOvr>
+    <a:masterClrMapping/>
+  </p:clrMapOvr>
+</p:notes>
+</file>
+
+<file path=ppt/notesSlides/notesSlide14.xml><?xml version="1.0" encoding="utf-8"?>
+<p:notes xmlns:a="http://schemas.openxmlformats.org/drawingml/2006/main" xmlns:p="http://schemas.openxmlformats.org/presentationml/2006/main" xmlns:r="http://schemas.openxmlformats.org/officeDocument/2006/relationships">
+  <p:cSld>
+    <p:spTree>
+      <p:nvGrpSpPr>
+        <p:cNvPr id="1" name=""/>
+        <p:cNvGrpSpPr/>
+        <p:nvPr/>
+      </p:nvGrpSpPr>
+      <p:grpSpPr>
+        <a:xfrm>
+          <a:off x="0" y="0"/>
+          <a:ext cx="0" cy="0"/>
+          <a:chOff x="0" y="0"/>
+          <a:chExt cx="0" cy="0"/>
+        </a:xfrm>
+      </p:grpSpPr>
+      <p:sp>
+        <p:nvSpPr>
+          <p:cNvPr id="2" name="Slide Image Placeholder 1"/>
+          <p:cNvSpPr>
+            <a:spLocks noGrp="1"/>
+          </p:cNvSpPr>
+          <p:nvPr>
+            <p:ph type="sldImg" idx="2"/>
+          </p:nvPr>
+        </p:nvSpPr>
+        <p:spPr/>
+      </p:sp>
+      <p:sp>
+        <p:nvSpPr>
+          <p:cNvPr id="3" name="Notes Placeholder 2"/>
+          <p:cNvSpPr>
+            <a:spLocks noGrp="1"/>
+          </p:cNvSpPr>
+          <p:nvPr>
+            <p:ph type="body" idx="3" sz="quarter"/>
+          </p:nvPr>
+        </p:nvSpPr>
+        <p:spPr/>
+        <p:txBody>
+          <a:bodyPr/>
+          <a:lstStyle/>
+          <a:p>
+            <a:r>
+              <a:t>工程这块我想强调一句：这不是『我这儿能跑』。仓库自带 381 项自检，一条命令可复现，现在是全绿。换装差异、立绘底色这种观感问题，我们用像素级比对来验收。</a:t>
+            </a:r>
+          </a:p>
+        </p:txBody>
+      </p:sp>
+      <p:sp>
+        <p:nvSpPr>
+          <p:cNvPr id="4" name="Slide Number Placeholder 3"/>
+          <p:cNvSpPr>
+            <a:spLocks noGrp="1"/>
+          </p:cNvSpPr>
+          <p:nvPr>
+            <p:ph type="sldNum" idx="5" sz="quarter"/>
+          </p:nvPr>
+        </p:nvSpPr>
+        <p:spPr/>
+      </p:sp>
+    </p:spTree>
+  </p:cSld>
+  <p:clrMapOvr>
+    <a:masterClrMapping/>
+  </p:clrMapOvr>
+</p:notes>
+</file>
+
+<file path=ppt/notesSlides/notesSlide15.xml><?xml version="1.0" encoding="utf-8"?>
+<p:notes xmlns:a="http://schemas.openxmlformats.org/drawingml/2006/main" xmlns:p="http://schemas.openxmlformats.org/presentationml/2006/main" xmlns:r="http://schemas.openxmlformats.org/officeDocument/2006/relationships">
+  <p:cSld>
+    <p:spTree>
+      <p:nvGrpSpPr>
+        <p:cNvPr id="1" name=""/>
+        <p:cNvGrpSpPr/>
+        <p:nvPr/>
+      </p:nvGrpSpPr>
+      <p:grpSpPr>
+        <a:xfrm>
+          <a:off x="0" y="0"/>
+          <a:ext cx="0" cy="0"/>
+          <a:chOff x="0" y="0"/>
+          <a:chExt cx="0" cy="0"/>
+        </a:xfrm>
+      </p:grpSpPr>
+      <p:sp>
+        <p:nvSpPr>
+          <p:cNvPr id="2" name="Slide Image Placeholder 1"/>
+          <p:cNvSpPr>
+            <a:spLocks noGrp="1"/>
+          </p:cNvSpPr>
+          <p:nvPr>
+            <p:ph type="sldImg" idx="2"/>
+          </p:nvPr>
+        </p:nvSpPr>
+        <p:spPr/>
+      </p:sp>
+      <p:sp>
+        <p:nvSpPr>
+          <p:cNvPr id="3" name="Notes Placeholder 2"/>
+          <p:cNvSpPr>
+            <a:spLocks noGrp="1"/>
+          </p:cNvSpPr>
+          <p:nvPr>
+            <p:ph type="body" idx="3" sz="quarter"/>
+          </p:nvPr>
+        </p:nvSpPr>
+        <p:spPr/>
+        <p:txBody>
+          <a:bodyPr/>
+          <a:lstStyle/>
+          <a:p>
+            <a:r>
+              <a:t>第三部分，未来规划。</a:t>
+            </a:r>
+          </a:p>
+        </p:txBody>
+      </p:sp>
+      <p:sp>
+        <p:nvSpPr>
+          <p:cNvPr id="4" name="Slide Number Placeholder 3"/>
+          <p:cNvSpPr>
+            <a:spLocks noGrp="1"/>
+          </p:cNvSpPr>
+          <p:nvPr>
+            <p:ph type="sldNum" idx="5" sz="quarter"/>
+          </p:nvPr>
+        </p:nvSpPr>
+        <p:spPr/>
+      </p:sp>
+    </p:spTree>
+  </p:cSld>
+  <p:clrMapOvr>
+    <a:masterClrMapping/>
+  </p:clrMapOvr>
+</p:notes>
+</file>
+
+<file path=ppt/notesSlides/notesSlide16.xml><?xml version="1.0" encoding="utf-8"?>
+<p:notes xmlns:a="http://schemas.openxmlformats.org/drawingml/2006/main" xmlns:p="http://schemas.openxmlformats.org/presentationml/2006/main" xmlns:r="http://schemas.openxmlformats.org/officeDocument/2006/relationships">
+  <p:cSld>
+    <p:spTree>
+      <p:nvGrpSpPr>
+        <p:cNvPr id="1" name=""/>
+        <p:cNvGrpSpPr/>
+        <p:nvPr/>
+      </p:nvGrpSpPr>
+      <p:grpSpPr>
+        <a:xfrm>
+          <a:off x="0" y="0"/>
+          <a:ext cx="0" cy="0"/>
+          <a:chOff x="0" y="0"/>
+          <a:chExt cx="0" cy="0"/>
+        </a:xfrm>
+      </p:grpSpPr>
+      <p:sp>
+        <p:nvSpPr>
+          <p:cNvPr id="2" name="Slide Image Placeholder 1"/>
+          <p:cNvSpPr>
+            <a:spLocks noGrp="1"/>
+          </p:cNvSpPr>
+          <p:nvPr>
+            <p:ph type="sldImg" idx="2"/>
+          </p:nvPr>
+        </p:nvSpPr>
+        <p:spPr/>
+      </p:sp>
+      <p:sp>
+        <p:nvSpPr>
+          <p:cNvPr id="3" name="Notes Placeholder 2"/>
+          <p:cNvSpPr>
+            <a:spLocks noGrp="1"/>
+          </p:cNvSpPr>
+          <p:nvPr>
+            <p:ph type="body" idx="3" sz="quarter"/>
+          </p:nvPr>
+        </p:nvSpPr>
+        <p:spPr/>
+        <p:txBody>
+          <a:bodyPr/>
+          <a:lstStyle/>
+          <a:p>
+            <a:r>
+              <a:t>近期三件事：手机端对齐与优化、3D 模型方案评估（建模成本要算清楚）、多角色支持。</a:t>
+            </a:r>
+          </a:p>
+        </p:txBody>
+      </p:sp>
+      <p:sp>
+        <p:nvSpPr>
+          <p:cNvPr id="4" name="Slide Number Placeholder 3"/>
+          <p:cNvSpPr>
+            <a:spLocks noGrp="1"/>
+          </p:cNvSpPr>
+          <p:nvPr>
+            <p:ph type="sldNum" idx="5" sz="quarter"/>
+          </p:nvPr>
+        </p:nvSpPr>
+        <p:spPr/>
+      </p:sp>
+    </p:spTree>
+  </p:cSld>
+  <p:clrMapOvr>
+    <a:masterClrMapping/>
+  </p:clrMapOvr>
+</p:notes>
+</file>
+
+<file path=ppt/notesSlides/notesSlide17.xml><?xml version="1.0" encoding="utf-8"?>
+<p:notes xmlns:a="http://schemas.openxmlformats.org/drawingml/2006/main" xmlns:p="http://schemas.openxmlformats.org/presentationml/2006/main" xmlns:r="http://schemas.openxmlformats.org/officeDocument/2006/relationships">
+  <p:cSld>
+    <p:spTree>
+      <p:nvGrpSpPr>
+        <p:cNvPr id="1" name=""/>
+        <p:cNvGrpSpPr/>
+        <p:nvPr/>
+      </p:nvGrpSpPr>
+      <p:grpSpPr>
+        <a:xfrm>
+          <a:off x="0" y="0"/>
+          <a:ext cx="0" cy="0"/>
+          <a:chOff x="0" y="0"/>
+          <a:chExt cx="0" cy="0"/>
+        </a:xfrm>
+      </p:grpSpPr>
+      <p:sp>
+        <p:nvSpPr>
+          <p:cNvPr id="2" name="Slide Image Placeholder 1"/>
+          <p:cNvSpPr>
+            <a:spLocks noGrp="1"/>
+          </p:cNvSpPr>
+          <p:nvPr>
+            <p:ph type="sldImg" idx="2"/>
+          </p:nvPr>
+        </p:nvSpPr>
+        <p:spPr/>
+      </p:sp>
+      <p:sp>
+        <p:nvSpPr>
+          <p:cNvPr id="3" name="Notes Placeholder 2"/>
+          <p:cNvSpPr>
+            <a:spLocks noGrp="1"/>
+          </p:cNvSpPr>
+          <p:nvPr>
+            <p:ph type="body" idx="3" sz="quarter"/>
+          </p:nvPr>
+        </p:nvSpPr>
+        <p:spPr/>
+        <p:txBody>
+          <a:bodyPr/>
+          <a:lstStyle/>
+          <a:p>
+            <a:r>
+              <a:t>中期想让互动更自然：手部动捕驱动视线跟随、识别动作并给反应。摄像头链路现在已经通了。</a:t>
+            </a:r>
+          </a:p>
+        </p:txBody>
+      </p:sp>
+      <p:sp>
+        <p:nvSpPr>
+          <p:cNvPr id="4" name="Slide Number Placeholder 3"/>
+          <p:cNvSpPr>
+            <a:spLocks noGrp="1"/>
+          </p:cNvSpPr>
+          <p:nvPr>
+            <p:ph type="sldNum" idx="5" sz="quarter"/>
+          </p:nvPr>
+        </p:nvSpPr>
+        <p:spPr/>
+      </p:sp>
+    </p:spTree>
+  </p:cSld>
+  <p:clrMapOvr>
+    <a:masterClrMapping/>
+  </p:clrMapOvr>
+</p:notes>
+</file>
+
+<file path=ppt/notesSlides/notesSlide18.xml><?xml version="1.0" encoding="utf-8"?>
+<p:notes xmlns:a="http://schemas.openxmlformats.org/drawingml/2006/main" xmlns:p="http://schemas.openxmlformats.org/presentationml/2006/main" xmlns:r="http://schemas.openxmlformats.org/officeDocument/2006/relationships">
+  <p:cSld>
+    <p:spTree>
+      <p:nvGrpSpPr>
+        <p:cNvPr id="1" name=""/>
+        <p:cNvGrpSpPr/>
+        <p:nvPr/>
+      </p:nvGrpSpPr>
+      <p:grpSpPr>
+        <a:xfrm>
+          <a:off x="0" y="0"/>
+          <a:ext cx="0" cy="0"/>
+          <a:chOff x="0" y="0"/>
+          <a:chExt cx="0" cy="0"/>
+        </a:xfrm>
+      </p:grpSpPr>
+      <p:sp>
+        <p:nvSpPr>
+          <p:cNvPr id="2" name="Slide Image Placeholder 1"/>
+          <p:cNvSpPr>
+            <a:spLocks noGrp="1"/>
+          </p:cNvSpPr>
+          <p:nvPr>
+            <p:ph type="sldImg" idx="2"/>
+          </p:nvPr>
+        </p:nvSpPr>
+        <p:spPr/>
+      </p:sp>
+      <p:sp>
+        <p:nvSpPr>
+          <p:cNvPr id="3" name="Notes Placeholder 2"/>
+          <p:cNvSpPr>
+            <a:spLocks noGrp="1"/>
+          </p:cNvSpPr>
+          <p:nvPr>
+            <p:ph type="body" idx="3" sz="quarter"/>
+          </p:nvPr>
+        </p:nvSpPr>
+        <p:spPr/>
+        <p:txBody>
+          <a:bodyPr/>
+          <a:lstStyle/>
+          <a:p>
+            <a:r>
+              <a:t>另一条中期的路是毫米波雷达：不依赖光线和镜头，隐私友好、能全天运行。科研课上已经有可复用的动作采集装置，课题结束后可以迁移过来。</a:t>
+            </a:r>
+          </a:p>
+        </p:txBody>
+      </p:sp>
+      <p:sp>
+        <p:nvSpPr>
+          <p:cNvPr id="4" name="Slide Number Placeholder 3"/>
+          <p:cNvSpPr>
+            <a:spLocks noGrp="1"/>
+          </p:cNvSpPr>
+          <p:nvPr>
+            <p:ph type="sldNum" idx="5" sz="quarter"/>
+          </p:nvPr>
+        </p:nvSpPr>
+        <p:spPr/>
+      </p:sp>
+    </p:spTree>
+  </p:cSld>
+  <p:clrMapOvr>
+    <a:masterClrMapping/>
+  </p:clrMapOvr>
+</p:notes>
+</file>
+
+<file path=ppt/notesSlides/notesSlide19.xml><?xml version="1.0" encoding="utf-8"?>
+<p:notes xmlns:a="http://schemas.openxmlformats.org/drawingml/2006/main" xmlns:p="http://schemas.openxmlformats.org/presentationml/2006/main" xmlns:r="http://schemas.openxmlformats.org/officeDocument/2006/relationships">
+  <p:cSld>
+    <p:spTree>
+      <p:nvGrpSpPr>
+        <p:cNvPr id="1" name=""/>
+        <p:cNvGrpSpPr/>
+        <p:nvPr/>
+      </p:nvGrpSpPr>
+      <p:grpSpPr>
+        <a:xfrm>
+          <a:off x="0" y="0"/>
+          <a:ext cx="0" cy="0"/>
+          <a:chOff x="0" y="0"/>
+          <a:chExt cx="0" cy="0"/>
+        </a:xfrm>
+      </p:grpSpPr>
+      <p:sp>
+        <p:nvSpPr>
+          <p:cNvPr id="2" name="Slide Image Placeholder 1"/>
+          <p:cNvSpPr>
+            <a:spLocks noGrp="1"/>
+          </p:cNvSpPr>
+          <p:nvPr>
+            <p:ph type="sldImg" idx="2"/>
+          </p:nvPr>
+        </p:nvSpPr>
+        <p:spPr/>
+      </p:sp>
+      <p:sp>
+        <p:nvSpPr>
+          <p:cNvPr id="3" name="Notes Placeholder 2"/>
+          <p:cNvSpPr>
+            <a:spLocks noGrp="1"/>
+          </p:cNvSpPr>
+          <p:nvPr>
+            <p:ph type="body" idx="3" sz="quarter"/>
+          </p:nvPr>
+        </p:nvSpPr>
+        <p:spPr/>
+        <p:txBody>
+          <a:bodyPr/>
+          <a:lstStyle/>
+          <a:p>
+            <a:r>
+              <a:t>远期是形态自由：AR 呈现（同类多是 iPhone 生态，安卓侧还是空白）、系统级常驻、以及角色与语音都能替换的开放生态。</a:t>
+            </a:r>
+          </a:p>
+        </p:txBody>
+      </p:sp>
+      <p:sp>
+        <p:nvSpPr>
+          <p:cNvPr id="4" name="Slide Number Placeholder 3"/>
+          <p:cNvSpPr>
+            <a:spLocks noGrp="1"/>
+          </p:cNvSpPr>
+          <p:nvPr>
+            <p:ph type="sldNum" idx="5" sz="quarter"/>
+          </p:nvPr>
+        </p:nvSpPr>
+        <p:spPr/>
+      </p:sp>
+    </p:spTree>
+  </p:cSld>
+  <p:clrMapOvr>
+    <a:masterClrMapping/>
+  </p:clrMapOvr>
+</p:notes>
+</file>
+
+<file path=ppt/notesSlides/notesSlide2.xml><?xml version="1.0" encoding="utf-8"?>
+<p:notes xmlns:a="http://schemas.openxmlformats.org/drawingml/2006/main" xmlns:p="http://schemas.openxmlformats.org/presentationml/2006/main" xmlns:r="http://schemas.openxmlformats.org/officeDocument/2006/relationships">
+  <p:cSld>
+    <p:spTree>
+      <p:nvGrpSpPr>
+        <p:cNvPr id="1" name=""/>
+        <p:cNvGrpSpPr/>
+        <p:nvPr/>
+      </p:nvGrpSpPr>
+      <p:grpSpPr>
+        <a:xfrm>
+          <a:off x="0" y="0"/>
+          <a:ext cx="0" cy="0"/>
+          <a:chOff x="0" y="0"/>
+          <a:chExt cx="0" cy="0"/>
+        </a:xfrm>
+      </p:grpSpPr>
+      <p:sp>
+        <p:nvSpPr>
+          <p:cNvPr id="2" name="Slide Image Placeholder 1"/>
+          <p:cNvSpPr>
+            <a:spLocks noGrp="1"/>
+          </p:cNvSpPr>
+          <p:nvPr>
+            <p:ph type="sldImg" idx="2"/>
+          </p:nvPr>
+        </p:nvSpPr>
+        <p:spPr/>
+      </p:sp>
+      <p:sp>
+        <p:nvSpPr>
+          <p:cNvPr id="3" name="Notes Placeholder 2"/>
+          <p:cNvSpPr>
+            <a:spLocks noGrp="1"/>
+          </p:cNvSpPr>
+          <p:nvPr>
+            <p:ph type="body" idx="3" sz="quarter"/>
+          </p:nvPr>
+        </p:nvSpPr>
+        <p:spPr/>
+        <p:txBody>
+          <a:bodyPr/>
+          <a:lstStyle/>
+          <a:p>
+            <a:r>
+              <a:t>先讲市场。我把市面上的做法分成四类：开源桌宠、Steam 商业桌宠、AI 桌宠新秀、以及像《你妈》这种靠话题出圈的。</a:t>
+            </a:r>
+          </a:p>
+        </p:txBody>
+      </p:sp>
+      <p:sp>
+        <p:nvSpPr>
+          <p:cNvPr id="4" name="Slide Number Placeholder 3"/>
+          <p:cNvSpPr>
+            <a:spLocks noGrp="1"/>
+          </p:cNvSpPr>
+          <p:nvPr>
+            <p:ph type="sldNum" idx="5" sz="quarter"/>
+          </p:nvPr>
+        </p:nvSpPr>
+        <p:spPr/>
+      </p:sp>
+    </p:spTree>
+  </p:cSld>
+  <p:clrMapOvr>
+    <a:masterClrMapping/>
+  </p:clrMapOvr>
+</p:notes>
+</file>
+
+<file path=ppt/notesSlides/notesSlide20.xml><?xml version="1.0" encoding="utf-8"?>
+<p:notes xmlns:a="http://schemas.openxmlformats.org/drawingml/2006/main" xmlns:p="http://schemas.openxmlformats.org/presentationml/2006/main" xmlns:r="http://schemas.openxmlformats.org/officeDocument/2006/relationships">
+  <p:cSld>
+    <p:spTree>
+      <p:nvGrpSpPr>
+        <p:cNvPr id="1" name=""/>
+        <p:cNvGrpSpPr/>
+        <p:nvPr/>
+      </p:nvGrpSpPr>
+      <p:grpSpPr>
+        <a:xfrm>
+          <a:off x="0" y="0"/>
+          <a:ext cx="0" cy="0"/>
+          <a:chOff x="0" y="0"/>
+          <a:chExt cx="0" cy="0"/>
+        </a:xfrm>
+      </p:grpSpPr>
+      <p:sp>
+        <p:nvSpPr>
+          <p:cNvPr id="2" name="Slide Image Placeholder 1"/>
+          <p:cNvSpPr>
+            <a:spLocks noGrp="1"/>
+          </p:cNvSpPr>
+          <p:nvPr>
+            <p:ph type="sldImg" idx="2"/>
+          </p:nvPr>
+        </p:nvSpPr>
+        <p:spPr/>
+      </p:sp>
+      <p:sp>
+        <p:nvSpPr>
+          <p:cNvPr id="3" name="Notes Placeholder 2"/>
+          <p:cNvSpPr>
+            <a:spLocks noGrp="1"/>
+          </p:cNvSpPr>
+          <p:nvPr>
+            <p:ph type="body" idx="3" sz="quarter"/>
+          </p:nvPr>
+        </p:nvSpPr>
+        <p:spPr/>
+        <p:txBody>
+          <a:bodyPr/>
+          <a:lstStyle/>
+          <a:p>
+            <a:r>
+              <a:t>一句话收束路线取舍：先让她真的住在电脑里，再让她走到你身边。</a:t>
+            </a:r>
+          </a:p>
+        </p:txBody>
+      </p:sp>
+      <p:sp>
+        <p:nvSpPr>
+          <p:cNvPr id="4" name="Slide Number Placeholder 3"/>
+          <p:cNvSpPr>
+            <a:spLocks noGrp="1"/>
+          </p:cNvSpPr>
+          <p:nvPr>
+            <p:ph type="sldNum" idx="5" sz="quarter"/>
+          </p:nvPr>
+        </p:nvSpPr>
+        <p:spPr/>
+      </p:sp>
+    </p:spTree>
+  </p:cSld>
+  <p:clrMapOvr>
+    <a:masterClrMapping/>
+  </p:clrMapOvr>
+</p:notes>
+</file>
+
+<file path=ppt/notesSlides/notesSlide21.xml><?xml version="1.0" encoding="utf-8"?>
+<p:notes xmlns:a="http://schemas.openxmlformats.org/drawingml/2006/main" xmlns:p="http://schemas.openxmlformats.org/presentationml/2006/main" xmlns:r="http://schemas.openxmlformats.org/officeDocument/2006/relationships">
+  <p:cSld>
+    <p:spTree>
+      <p:nvGrpSpPr>
+        <p:cNvPr id="1" name=""/>
+        <p:cNvGrpSpPr/>
+        <p:nvPr/>
+      </p:nvGrpSpPr>
+      <p:grpSpPr>
+        <a:xfrm>
+          <a:off x="0" y="0"/>
+          <a:ext cx="0" cy="0"/>
+          <a:chOff x="0" y="0"/>
+          <a:chExt cx="0" cy="0"/>
+        </a:xfrm>
+      </p:grpSpPr>
+      <p:sp>
+        <p:nvSpPr>
+          <p:cNvPr id="2" name="Slide Image Placeholder 1"/>
+          <p:cNvSpPr>
+            <a:spLocks noGrp="1"/>
+          </p:cNvSpPr>
+          <p:nvPr>
+            <p:ph type="sldImg" idx="2"/>
+          </p:nvPr>
+        </p:nvSpPr>
+        <p:spPr/>
+      </p:sp>
+      <p:sp>
+        <p:nvSpPr>
+          <p:cNvPr id="3" name="Notes Placeholder 2"/>
+          <p:cNvSpPr>
+            <a:spLocks noGrp="1"/>
+          </p:cNvSpPr>
+          <p:nvPr>
+            <p:ph type="body" idx="3" sz="quarter"/>
+          </p:nvPr>
+        </p:nvSpPr>
+        <p:spPr/>
+        <p:txBody>
+          <a:bodyPr/>
+          <a:lstStyle/>
+          <a:p>
+            <a:r>
+              <a:t>最后留现场演示：形象、换装、对话、记忆、桌面操作。</a:t>
+            </a:r>
+          </a:p>
+        </p:txBody>
+      </p:sp>
+      <p:sp>
+        <p:nvSpPr>
+          <p:cNvPr id="4" name="Slide Number Placeholder 3"/>
+          <p:cNvSpPr>
+            <a:spLocks noGrp="1"/>
+          </p:cNvSpPr>
+          <p:nvPr>
+            <p:ph type="sldNum" idx="5" sz="quarter"/>
+          </p:nvPr>
+        </p:nvSpPr>
+        <p:spPr/>
+      </p:sp>
+    </p:spTree>
+  </p:cSld>
+  <p:clrMapOvr>
+    <a:masterClrMapping/>
+  </p:clrMapOvr>
+</p:notes>
+</file>
+
+<file path=ppt/notesSlides/notesSlide3.xml><?xml version="1.0" encoding="utf-8"?>
+<p:notes xmlns:a="http://schemas.openxmlformats.org/drawingml/2006/main" xmlns:p="http://schemas.openxmlformats.org/presentationml/2006/main" xmlns:r="http://schemas.openxmlformats.org/officeDocument/2006/relationships">
+  <p:cSld>
+    <p:spTree>
+      <p:nvGrpSpPr>
+        <p:cNvPr id="1" name=""/>
+        <p:cNvGrpSpPr/>
+        <p:nvPr/>
+      </p:nvGrpSpPr>
+      <p:grpSpPr>
+        <a:xfrm>
+          <a:off x="0" y="0"/>
+          <a:ext cx="0" cy="0"/>
+          <a:chOff x="0" y="0"/>
+          <a:chExt cx="0" cy="0"/>
+        </a:xfrm>
+      </p:grpSpPr>
+      <p:sp>
+        <p:nvSpPr>
+          <p:cNvPr id="2" name="Slide Image Placeholder 1"/>
+          <p:cNvSpPr>
+            <a:spLocks noGrp="1"/>
+          </p:cNvSpPr>
+          <p:nvPr>
+            <p:ph type="sldImg" idx="2"/>
+          </p:nvPr>
+        </p:nvSpPr>
+        <p:spPr/>
+      </p:sp>
+      <p:sp>
+        <p:nvSpPr>
+          <p:cNvPr id="3" name="Notes Placeholder 2"/>
+          <p:cNvSpPr>
+            <a:spLocks noGrp="1"/>
+          </p:cNvSpPr>
+          <p:nvPr>
+            <p:ph type="body" idx="3" sz="quarter"/>
+          </p:nvPr>
+        </p:nvSpPr>
+        <p:spPr/>
+        <p:txBody>
+          <a:bodyPr/>
+          <a:lstStyle/>
+          <a:p>
+            <a:r>
+              <a:t>开源这块做得最久。它们强在动——能爬窗口、会掉下去、有养成数值；但普遍没有长期记忆，关掉就忘，也不碰本机操作。</a:t>
+            </a:r>
+          </a:p>
+        </p:txBody>
+      </p:sp>
+      <p:sp>
+        <p:nvSpPr>
+          <p:cNvPr id="4" name="Slide Number Placeholder 3"/>
+          <p:cNvSpPr>
+            <a:spLocks noGrp="1"/>
+          </p:cNvSpPr>
+          <p:nvPr>
+            <p:ph type="sldNum" idx="5" sz="quarter"/>
+          </p:nvPr>
+        </p:nvSpPr>
+        <p:spPr/>
+      </p:sp>
+    </p:spTree>
+  </p:cSld>
+  <p:clrMapOvr>
+    <a:masterClrMapping/>
+  </p:clrMapOvr>
+</p:notes>
+</file>
+
+<file path=ppt/notesSlides/notesSlide4.xml><?xml version="1.0" encoding="utf-8"?>
+<p:notes xmlns:a="http://schemas.openxmlformats.org/drawingml/2006/main" xmlns:p="http://schemas.openxmlformats.org/presentationml/2006/main" xmlns:r="http://schemas.openxmlformats.org/officeDocument/2006/relationships">
+  <p:cSld>
+    <p:spTree>
+      <p:nvGrpSpPr>
+        <p:cNvPr id="1" name=""/>
+        <p:cNvGrpSpPr/>
+        <p:nvPr/>
+      </p:nvGrpSpPr>
+      <p:grpSpPr>
+        <a:xfrm>
+          <a:off x="0" y="0"/>
+          <a:ext cx="0" cy="0"/>
+          <a:chOff x="0" y="0"/>
+          <a:chExt cx="0" cy="0"/>
+        </a:xfrm>
+      </p:grpSpPr>
+      <p:sp>
+        <p:nvSpPr>
+          <p:cNvPr id="2" name="Slide Image Placeholder 1"/>
+          <p:cNvSpPr>
+            <a:spLocks noGrp="1"/>
+          </p:cNvSpPr>
+          <p:nvPr>
+            <p:ph type="sldImg" idx="2"/>
+          </p:nvPr>
+        </p:nvSpPr>
+        <p:spPr/>
+      </p:sp>
+      <p:sp>
+        <p:nvSpPr>
+          <p:cNvPr id="3" name="Notes Placeholder 2"/>
+          <p:cNvSpPr>
+            <a:spLocks noGrp="1"/>
+          </p:cNvSpPr>
+          <p:nvPr>
+            <p:ph type="body" idx="3" sz="quarter"/>
+          </p:nvPr>
+        </p:nvSpPr>
+        <p:spPr/>
+        <p:txBody>
+          <a:bodyPr/>
+          <a:lstStyle/>
+          <a:p>
+            <a:r>
+              <a:t>Steam 上卖的是形象和皮肤：Desktop Mate 靠 IP 联名，Live2DViewerEX 靠创作生态，Wallpaper Engine 更偏桌面美化。它们的共同天花板是：出不了桌面这个窗口，也不理解你的生活。</a:t>
+            </a:r>
+          </a:p>
+        </p:txBody>
+      </p:sp>
+      <p:sp>
+        <p:nvSpPr>
+          <p:cNvPr id="4" name="Slide Number Placeholder 3"/>
+          <p:cNvSpPr>
+            <a:spLocks noGrp="1"/>
+          </p:cNvSpPr>
+          <p:nvPr>
+            <p:ph type="sldNum" idx="5" sz="quarter"/>
+          </p:nvPr>
+        </p:nvSpPr>
+        <p:spPr/>
+      </p:sp>
+    </p:spTree>
+  </p:cSld>
+  <p:clrMapOvr>
+    <a:masterClrMapping/>
+  </p:clrMapOvr>
+</p:notes>
+</file>
+
+<file path=ppt/notesSlides/notesSlide5.xml><?xml version="1.0" encoding="utf-8"?>
+<p:notes xmlns:a="http://schemas.openxmlformats.org/drawingml/2006/main" xmlns:p="http://schemas.openxmlformats.org/presentationml/2006/main" xmlns:r="http://schemas.openxmlformats.org/officeDocument/2006/relationships">
+  <p:cSld>
+    <p:spTree>
+      <p:nvGrpSpPr>
+        <p:cNvPr id="1" name=""/>
+        <p:cNvGrpSpPr/>
+        <p:nvPr/>
+      </p:nvGrpSpPr>
+      <p:grpSpPr>
+        <a:xfrm>
+          <a:off x="0" y="0"/>
+          <a:ext cx="0" cy="0"/>
+          <a:chOff x="0" y="0"/>
+          <a:chExt cx="0" cy="0"/>
+        </a:xfrm>
+      </p:grpSpPr>
+      <p:sp>
+        <p:nvSpPr>
+          <p:cNvPr id="2" name="Slide Image Placeholder 1"/>
+          <p:cNvSpPr>
+            <a:spLocks noGrp="1"/>
+          </p:cNvSpPr>
+          <p:nvPr>
+            <p:ph type="sldImg" idx="2"/>
+          </p:nvPr>
+        </p:nvSpPr>
+        <p:spPr/>
+      </p:sp>
+      <p:sp>
+        <p:nvSpPr>
+          <p:cNvPr id="3" name="Notes Placeholder 2"/>
+          <p:cNvSpPr>
+            <a:spLocks noGrp="1"/>
+          </p:cNvSpPr>
+          <p:nvPr>
+            <p:ph type="body" idx="3" sz="quarter"/>
+          </p:nvPr>
+        </p:nvSpPr>
+        <p:spPr/>
+        <p:txBody>
+          <a:bodyPr/>
+          <a:lstStyle/>
+          <a:p>
+            <a:r>
+              <a:t>另一条线是 AI 聊天机器人。接 QQ/微信的很多，有形象的也很多，但很少有项目两头都占。这句话可以记住：有形象的都不接 QQ/微信，接 QQ/微信的都没形象。</a:t>
+            </a:r>
+          </a:p>
+        </p:txBody>
+      </p:sp>
+      <p:sp>
+        <p:nvSpPr>
+          <p:cNvPr id="4" name="Slide Number Placeholder 3"/>
+          <p:cNvSpPr>
+            <a:spLocks noGrp="1"/>
+          </p:cNvSpPr>
+          <p:nvPr>
+            <p:ph type="sldNum" idx="5" sz="quarter"/>
+          </p:nvPr>
+        </p:nvSpPr>
+        <p:spPr/>
+      </p:sp>
+    </p:spTree>
+  </p:cSld>
+  <p:clrMapOvr>
+    <a:masterClrMapping/>
+  </p:clrMapOvr>
+</p:notes>
+</file>
+
+<file path=ppt/notesSlides/notesSlide6.xml><?xml version="1.0" encoding="utf-8"?>
+<p:notes xmlns:a="http://schemas.openxmlformats.org/drawingml/2006/main" xmlns:p="http://schemas.openxmlformats.org/presentationml/2006/main" xmlns:r="http://schemas.openxmlformats.org/officeDocument/2006/relationships">
+  <p:cSld>
+    <p:spTree>
+      <p:nvGrpSpPr>
+        <p:cNvPr id="1" name=""/>
+        <p:cNvGrpSpPr/>
+        <p:nvPr/>
+      </p:nvGrpSpPr>
+      <p:grpSpPr>
+        <a:xfrm>
+          <a:off x="0" y="0"/>
+          <a:ext cx="0" cy="0"/>
+          <a:chOff x="0" y="0"/>
+          <a:chExt cx="0" cy="0"/>
+        </a:xfrm>
+      </p:grpSpPr>
+      <p:sp>
+        <p:nvSpPr>
+          <p:cNvPr id="2" name="Slide Image Placeholder 1"/>
+          <p:cNvSpPr>
+            <a:spLocks noGrp="1"/>
+          </p:cNvSpPr>
+          <p:nvPr>
+            <p:ph type="sldImg" idx="2"/>
+          </p:nvPr>
+        </p:nvSpPr>
+        <p:spPr/>
+      </p:sp>
+      <p:sp>
+        <p:nvSpPr>
+          <p:cNvPr id="3" name="Notes Placeholder 2"/>
+          <p:cNvSpPr>
+            <a:spLocks noGrp="1"/>
+          </p:cNvSpPr>
+          <p:nvPr>
+            <p:ph type="body" idx="3" sz="quarter"/>
+          </p:nvPr>
+        </p:nvSpPr>
+        <p:spPr/>
+        <p:txBody>
+          <a:bodyPr/>
+          <a:lstStyle/>
+          <a:p>
+            <a:r>
+              <a:t>这一页是把我们放进去比。形象、记忆、聊天软件、真声线、桌面操作、手机端——六条里我们能同时给。</a:t>
+            </a:r>
+          </a:p>
+        </p:txBody>
+      </p:sp>
+      <p:sp>
+        <p:nvSpPr>
+          <p:cNvPr id="4" name="Slide Number Placeholder 3"/>
+          <p:cNvSpPr>
+            <a:spLocks noGrp="1"/>
+          </p:cNvSpPr>
+          <p:nvPr>
+            <p:ph type="sldNum" idx="5" sz="quarter"/>
+          </p:nvPr>
+        </p:nvSpPr>
+        <p:spPr/>
+      </p:sp>
+    </p:spTree>
+  </p:cSld>
+  <p:clrMapOvr>
+    <a:masterClrMapping/>
+  </p:clrMapOvr>
+</p:notes>
+</file>
+
+<file path=ppt/notesSlides/notesSlide7.xml><?xml version="1.0" encoding="utf-8"?>
+<p:notes xmlns:a="http://schemas.openxmlformats.org/drawingml/2006/main" xmlns:p="http://schemas.openxmlformats.org/presentationml/2006/main" xmlns:r="http://schemas.openxmlformats.org/officeDocument/2006/relationships">
+  <p:cSld>
+    <p:spTree>
+      <p:nvGrpSpPr>
+        <p:cNvPr id="1" name=""/>
+        <p:cNvGrpSpPr/>
+        <p:nvPr/>
+      </p:nvGrpSpPr>
+      <p:grpSpPr>
+        <a:xfrm>
+          <a:off x="0" y="0"/>
+          <a:ext cx="0" cy="0"/>
+          <a:chOff x="0" y="0"/>
+          <a:chExt cx="0" cy="0"/>
+        </a:xfrm>
+      </p:grpSpPr>
+      <p:sp>
+        <p:nvSpPr>
+          <p:cNvPr id="2" name="Slide Image Placeholder 1"/>
+          <p:cNvSpPr>
+            <a:spLocks noGrp="1"/>
+          </p:cNvSpPr>
+          <p:nvPr>
+            <p:ph type="sldImg" idx="2"/>
+          </p:nvPr>
+        </p:nvSpPr>
+        <p:spPr/>
+      </p:sp>
+      <p:sp>
+        <p:nvSpPr>
+          <p:cNvPr id="3" name="Notes Placeholder 2"/>
+          <p:cNvSpPr>
+            <a:spLocks noGrp="1"/>
+          </p:cNvSpPr>
+          <p:nvPr>
+            <p:ph type="body" idx="3" sz="quarter"/>
+          </p:nvPr>
+        </p:nvSpPr>
+        <p:spPr/>
+        <p:txBody>
+          <a:bodyPr/>
+          <a:lstStyle/>
+          <a:p>
+            <a:r>
+              <a:t>这页最重要，也是我特意加的诚实定位：我们**并非首创**。唯一查到把这几条同时做齐且还在活跃的是 super-agent-party。所以我们的定位是整合者，差异化落在产品整合度、开箱体验和本地化深度上——而不是我们做了别人没做过的事。</a:t>
+            </a:r>
+          </a:p>
+        </p:txBody>
+      </p:sp>
+      <p:sp>
+        <p:nvSpPr>
+          <p:cNvPr id="4" name="Slide Number Placeholder 3"/>
+          <p:cNvSpPr>
+            <a:spLocks noGrp="1"/>
+          </p:cNvSpPr>
+          <p:nvPr>
+            <p:ph type="sldNum" idx="5" sz="quarter"/>
+          </p:nvPr>
+        </p:nvSpPr>
+        <p:spPr/>
+      </p:sp>
+    </p:spTree>
+  </p:cSld>
+  <p:clrMapOvr>
+    <a:masterClrMapping/>
+  </p:clrMapOvr>
+</p:notes>
+</file>
+
+<file path=ppt/notesSlides/notesSlide8.xml><?xml version="1.0" encoding="utf-8"?>
+<p:notes xmlns:a="http://schemas.openxmlformats.org/drawingml/2006/main" xmlns:p="http://schemas.openxmlformats.org/presentationml/2006/main" xmlns:r="http://schemas.openxmlformats.org/officeDocument/2006/relationships">
+  <p:cSld>
+    <p:spTree>
+      <p:nvGrpSpPr>
+        <p:cNvPr id="1" name=""/>
+        <p:cNvGrpSpPr/>
+        <p:nvPr/>
+      </p:nvGrpSpPr>
+      <p:grpSpPr>
+        <a:xfrm>
+          <a:off x="0" y="0"/>
+          <a:ext cx="0" cy="0"/>
+          <a:chOff x="0" y="0"/>
+          <a:chExt cx="0" cy="0"/>
+        </a:xfrm>
+      </p:grpSpPr>
+      <p:sp>
+        <p:nvSpPr>
+          <p:cNvPr id="2" name="Slide Image Placeholder 1"/>
+          <p:cNvSpPr>
+            <a:spLocks noGrp="1"/>
+          </p:cNvSpPr>
+          <p:nvPr>
+            <p:ph type="sldImg" idx="2"/>
+          </p:nvPr>
+        </p:nvSpPr>
+        <p:spPr/>
+      </p:sp>
+      <p:sp>
+        <p:nvSpPr>
+          <p:cNvPr id="3" name="Notes Placeholder 2"/>
+          <p:cNvSpPr>
+            <a:spLocks noGrp="1"/>
+          </p:cNvSpPr>
+          <p:nvPr>
+            <p:ph type="body" idx="3" sz="quarter"/>
+          </p:nvPr>
+        </p:nvSpPr>
+        <p:spPr/>
+        <p:txBody>
+          <a:bodyPr/>
+          <a:lstStyle/>
+          <a:p>
+            <a:r>
+              <a:t>一句话概括定位。</a:t>
+            </a:r>
+          </a:p>
+        </p:txBody>
+      </p:sp>
+      <p:sp>
+        <p:nvSpPr>
+          <p:cNvPr id="4" name="Slide Number Placeholder 3"/>
+          <p:cNvSpPr>
+            <a:spLocks noGrp="1"/>
+          </p:cNvSpPr>
+          <p:nvPr>
+            <p:ph type="sldNum" idx="5" sz="quarter"/>
+          </p:nvPr>
+        </p:nvSpPr>
+        <p:spPr/>
+      </p:sp>
+    </p:spTree>
+  </p:cSld>
+  <p:clrMapOvr>
+    <a:masterClrMapping/>
+  </p:clrMapOvr>
+</p:notes>
+</file>
+
+<file path=ppt/notesSlides/notesSlide9.xml><?xml version="1.0" encoding="utf-8"?>
+<p:notes xmlns:a="http://schemas.openxmlformats.org/drawingml/2006/main" xmlns:p="http://schemas.openxmlformats.org/presentationml/2006/main" xmlns:r="http://schemas.openxmlformats.org/officeDocument/2006/relationships">
+  <p:cSld>
+    <p:spTree>
+      <p:nvGrpSpPr>
+        <p:cNvPr id="1" name=""/>
+        <p:cNvGrpSpPr/>
+        <p:nvPr/>
+      </p:nvGrpSpPr>
+      <p:grpSpPr>
+        <a:xfrm>
+          <a:off x="0" y="0"/>
+          <a:ext cx="0" cy="0"/>
+          <a:chOff x="0" y="0"/>
+          <a:chExt cx="0" cy="0"/>
+        </a:xfrm>
+      </p:grpSpPr>
+      <p:sp>
+        <p:nvSpPr>
+          <p:cNvPr id="2" name="Slide Image Placeholder 1"/>
+          <p:cNvSpPr>
+            <a:spLocks noGrp="1"/>
+          </p:cNvSpPr>
+          <p:nvPr>
+            <p:ph type="sldImg" idx="2"/>
+          </p:nvPr>
+        </p:nvSpPr>
+        <p:spPr/>
+      </p:sp>
+      <p:sp>
+        <p:nvSpPr>
+          <p:cNvPr id="3" name="Notes Placeholder 2"/>
+          <p:cNvSpPr>
+            <a:spLocks noGrp="1"/>
+          </p:cNvSpPr>
+          <p:nvPr>
+            <p:ph type="body" idx="3" sz="quarter"/>
+          </p:nvPr>
+        </p:nvSpPr>
+        <p:spPr/>
+        <p:txBody>
+          <a:bodyPr/>
+          <a:lstStyle/>
+          <a:p>
+            <a:r>
+              <a:t>下面进第二部分，讲功能和我们是怎么实现的。</a:t>
+            </a:r>
+          </a:p>
+        </p:txBody>
+      </p:sp>
+      <p:sp>
+        <p:nvSpPr>
+          <p:cNvPr id="4" name="Slide Number Placeholder 3"/>
+          <p:cNvSpPr>
+            <a:spLocks noGrp="1"/>
+          </p:cNvSpPr>
+          <p:nvPr>
+            <p:ph type="sldNum" idx="5" sz="quarter"/>
+          </p:nvPr>
+        </p:nvSpPr>
+        <p:spPr/>
+      </p:sp>
+    </p:spTree>
+  </p:cSld>
+  <p:clrMapOvr>
+    <a:masterClrMapping/>
+  </p:clrMapOvr>
+</p:notes>
 </file>
 
 <file path=ppt/slideLayouts/slideLayout1.xml><?xml version="1.0" encoding="utf-8"?>
@@ -9449,4 +11269,324 @@
   </a:objectDefaults>
   <a:extraClrSchemeLst/>
 </a:theme>
+</file>
+
+<file path=ppt/theme/theme2.xml><?xml version="1.0" encoding="utf-8"?>
+<a:theme xmlns:a="http://schemas.openxmlformats.org/drawingml/2006/main" name="Office Theme">
+  <a:themeElements>
+    <a:clrScheme name="Office">
+      <a:dk1>
+        <a:sysClr val="windowText" lastClr="000000"/>
+      </a:dk1>
+      <a:lt1>
+        <a:sysClr val="window" lastClr="FFFFFF"/>
+      </a:lt1>
+      <a:dk2>
+        <a:srgbClr val="1F497D"/>
+      </a:dk2>
+      <a:lt2>
+        <a:srgbClr val="EEECE1"/>
+      </a:lt2>
+      <a:accent1>
+        <a:srgbClr val="4F81BD"/>
+      </a:accent1>
+      <a:accent2>
+        <a:srgbClr val="C0504D"/>
+      </a:accent2>
+      <a:accent3>
+        <a:srgbClr val="9BBB59"/>
+      </a:accent3>
+      <a:accent4>
+        <a:srgbClr val="8064A2"/>
+      </a:accent4>
+      <a:accent5>
+        <a:srgbClr val="4BACC6"/>
+      </a:accent5>
+      <a:accent6>
+        <a:srgbClr val="F79646"/>
+      </a:accent6>
+      <a:hlink>
+        <a:srgbClr val="0000FF"/>
+      </a:hlink>
+      <a:folHlink>
+        <a:srgbClr val="800080"/>
+      </a:folHlink>
+    </a:clrScheme>
+    <a:fontScheme name="Office">
+      <a:majorFont>
+        <a:latin typeface="Calibri"/>
+        <a:ea typeface=""/>
+        <a:cs typeface=""/>
+        <a:font script="Jpan" typeface="ＭＳ Ｐゴシック"/>
+        <a:font script="Hang" typeface="맑은 고딕"/>
+        <a:font script="Hans" typeface="宋体"/>
+        <a:font script="Hant" typeface="新細明體"/>
+        <a:font script="Arab" typeface="Times New Roman"/>
+        <a:font script="Hebr" typeface="Times New Roman"/>
+        <a:font script="Thai" typeface="Angsana New"/>
+        <a:font script="Ethi" typeface="Nyala"/>
+        <a:font script="Beng" typeface="Vrinda"/>
+        <a:font script="Gujr" typeface="Shruti"/>
+        <a:font script="Khmr" typeface="MoolBoran"/>
+        <a:font script="Knda" typeface="Tunga"/>
+        <a:font script="Guru" typeface="Raavi"/>
+        <a:font script="Cans" typeface="Euphemia"/>
+        <a:font script="Cher" typeface="Plantagenet Cherokee"/>
+        <a:font script="Yiii" typeface="Microsoft Yi Baiti"/>
+        <a:font script="Tibt" typeface="Microsoft Himalaya"/>
+        <a:font script="Thaa" typeface="MV Boli"/>
+        <a:font script="Deva" typeface="Mangal"/>
+        <a:font script="Telu" typeface="Gautami"/>
+        <a:font script="Taml" typeface="Latha"/>
+        <a:font script="Syrc" typeface="Estrangelo Edessa"/>
+        <a:font script="Orya" typeface="Kalinga"/>
+        <a:font script="Mlym" typeface="Kartika"/>
+        <a:font script="Laoo" typeface="DokChampa"/>
+        <a:font script="Sinh" typeface="Iskoola Pota"/>
+        <a:font script="Mong" typeface="Mongolian Baiti"/>
+        <a:font script="Viet" typeface="Times New Roman"/>
+        <a:font script="Uigh" typeface="Microsoft Uighur"/>
+        <a:font script="Geor" typeface="Sylfaen"/>
+      </a:majorFont>
+      <a:minorFont>
+        <a:latin typeface="Calibri"/>
+        <a:ea typeface=""/>
+        <a:cs typeface=""/>
+        <a:font script="Jpan" typeface="ＭＳ Ｐゴシック"/>
+        <a:font script="Hang" typeface="맑은 고딕"/>
+        <a:font script="Hans" typeface="宋体"/>
+        <a:font script="Hant" typeface="新細明體"/>
+        <a:font script="Arab" typeface="Arial"/>
+        <a:font script="Hebr" typeface="Arial"/>
+        <a:font script="Thai" typeface="Cordia New"/>
+        <a:font script="Ethi" typeface="Nyala"/>
+        <a:font script="Beng" typeface="Vrinda"/>
+        <a:font script="Gujr" typeface="Shruti"/>
+        <a:font script="Khmr" typeface="DaunPenh"/>
+        <a:font script="Knda" typeface="Tunga"/>
+        <a:font script="Guru" typeface="Raavi"/>
+        <a:font script="Cans" typeface="Euphemia"/>
+        <a:font script="Cher" typeface="Plantagenet Cherokee"/>
+        <a:font script="Yiii" typeface="Microsoft Yi Baiti"/>
+        <a:font script="Tibt" typeface="Microsoft Himalaya"/>
+        <a:font script="Thaa" typeface="MV Boli"/>
+        <a:font script="Deva" typeface="Mangal"/>
+        <a:font script="Telu" typeface="Gautami"/>
+        <a:font script="Taml" typeface="Latha"/>
+        <a:font script="Syrc" typeface="Estrangelo Edessa"/>
+        <a:font script="Orya" typeface="Kalinga"/>
+        <a:font script="Mlym" typeface="Kartika"/>
+        <a:font script="Laoo" typeface="DokChampa"/>
+        <a:font script="Sinh" typeface="Iskoola Pota"/>
+        <a:font script="Mong" typeface="Mongolian Baiti"/>
+        <a:font script="Viet" typeface="Arial"/>
+        <a:font script="Uigh" typeface="Microsoft Uighur"/>
+        <a:font script="Geor" typeface="Sylfaen"/>
+      </a:minorFont>
+    </a:fontScheme>
+    <a:fmtScheme name="Office">
+      <a:fillStyleLst>
+        <a:solidFill>
+          <a:schemeClr val="phClr"/>
+        </a:solidFill>
+        <a:gradFill rotWithShape="1">
+          <a:gsLst>
+            <a:gs pos="0">
+              <a:schemeClr val="phClr">
+                <a:tint val="50000"/>
+                <a:satMod val="300000"/>
+              </a:schemeClr>
+            </a:gs>
+            <a:gs pos="35000">
+              <a:schemeClr val="phClr">
+                <a:tint val="37000"/>
+                <a:satMod val="300000"/>
+              </a:schemeClr>
+            </a:gs>
+            <a:gs pos="100000">
+              <a:schemeClr val="phClr">
+                <a:tint val="15000"/>
+                <a:satMod val="350000"/>
+              </a:schemeClr>
+            </a:gs>
+          </a:gsLst>
+          <a:lin ang="16200000" scaled="1"/>
+        </a:gradFill>
+        <a:gradFill rotWithShape="1">
+          <a:gsLst>
+            <a:gs pos="0">
+              <a:schemeClr val="phClr">
+                <a:tint val="100000"/>
+                <a:shade val="100000"/>
+                <a:satMod val="130000"/>
+              </a:schemeClr>
+            </a:gs>
+            <a:gs pos="100000">
+              <a:schemeClr val="phClr">
+                <a:tint val="50000"/>
+                <a:shade val="100000"/>
+                <a:satMod val="350000"/>
+              </a:schemeClr>
+            </a:gs>
+          </a:gsLst>
+          <a:lin ang="16200000" scaled="0"/>
+        </a:gradFill>
+      </a:fillStyleLst>
+      <a:lnStyleLst>
+        <a:ln w="9525" cap="flat" cmpd="sng" algn="ctr">
+          <a:solidFill>
+            <a:schemeClr val="phClr">
+              <a:shade val="95000"/>
+              <a:satMod val="105000"/>
+            </a:schemeClr>
+          </a:solidFill>
+          <a:prstDash val="solid"/>
+        </a:ln>
+        <a:ln w="25400" cap="flat" cmpd="sng" algn="ctr">
+          <a:solidFill>
+            <a:schemeClr val="phClr"/>
+          </a:solidFill>
+          <a:prstDash val="solid"/>
+        </a:ln>
+        <a:ln w="38100" cap="flat" cmpd="sng" algn="ctr">
+          <a:solidFill>
+            <a:schemeClr val="phClr"/>
+          </a:solidFill>
+          <a:prstDash val="solid"/>
+        </a:ln>
+      </a:lnStyleLst>
+      <a:effectStyleLst>
+        <a:effectStyle>
+          <a:effectLst>
+            <a:outerShdw blurRad="40000" dist="20000" dir="5400000" rotWithShape="0">
+              <a:srgbClr val="000000">
+                <a:alpha val="38000"/>
+              </a:srgbClr>
+            </a:outerShdw>
+          </a:effectLst>
+        </a:effectStyle>
+        <a:effectStyle>
+          <a:effectLst>
+            <a:outerShdw blurRad="40000" dist="23000" dir="5400000" rotWithShape="0">
+              <a:srgbClr val="000000">
+                <a:alpha val="35000"/>
+              </a:srgbClr>
+            </a:outerShdw>
+          </a:effectLst>
+        </a:effectStyle>
+        <a:effectStyle>
+          <a:effectLst>
+            <a:outerShdw blurRad="40000" dist="23000" dir="5400000" rotWithShape="0">
+              <a:srgbClr val="000000">
+                <a:alpha val="35000"/>
+              </a:srgbClr>
+            </a:outerShdw>
+          </a:effectLst>
+          <a:scene3d>
+            <a:camera prst="orthographicFront">
+              <a:rot lat="0" lon="0" rev="0"/>
+            </a:camera>
+            <a:lightRig rig="threePt" dir="t">
+              <a:rot lat="0" lon="0" rev="1200000"/>
+            </a:lightRig>
+          </a:scene3d>
+          <a:sp3d>
+            <a:bevelT w="63500" h="25400"/>
+          </a:sp3d>
+        </a:effectStyle>
+      </a:effectStyleLst>
+      <a:bgFillStyleLst>
+        <a:solidFill>
+          <a:schemeClr val="phClr"/>
+        </a:solidFill>
+        <a:gradFill rotWithShape="1">
+          <a:gsLst>
+            <a:gs pos="0">
+              <a:schemeClr val="phClr">
+                <a:tint val="40000"/>
+                <a:satMod val="350000"/>
+              </a:schemeClr>
+            </a:gs>
+            <a:gs pos="40000">
+              <a:schemeClr val="phClr">
+                <a:tint val="45000"/>
+                <a:shade val="99000"/>
+                <a:satMod val="350000"/>
+              </a:schemeClr>
+            </a:gs>
+            <a:gs pos="100000">
+              <a:schemeClr val="phClr">
+                <a:shade val="20000"/>
+                <a:satMod val="255000"/>
+              </a:schemeClr>
+            </a:gs>
+          </a:gsLst>
+          <a:path path="circle">
+            <a:fillToRect l="50000" t="-80000" r="50000" b="180000"/>
+          </a:path>
+        </a:gradFill>
+        <a:gradFill rotWithShape="1">
+          <a:gsLst>
+            <a:gs pos="0">
+              <a:schemeClr val="phClr">
+                <a:tint val="80000"/>
+                <a:satMod val="300000"/>
+              </a:schemeClr>
+            </a:gs>
+            <a:gs pos="100000">
+              <a:schemeClr val="phClr">
+                <a:shade val="30000"/>
+                <a:satMod val="200000"/>
+              </a:schemeClr>
+            </a:gs>
+          </a:gsLst>
+          <a:path path="circle">
+            <a:fillToRect l="50000" t="50000" r="50000" b="50000"/>
+          </a:path>
+        </a:gradFill>
+      </a:bgFillStyleLst>
+    </a:fmtScheme>
+  </a:themeElements>
+  <a:objectDefaults>
+    <a:spDef>
+      <a:spPr/>
+      <a:bodyPr/>
+      <a:lstStyle/>
+      <a:style>
+        <a:lnRef idx="1">
+          <a:schemeClr val="accent1"/>
+        </a:lnRef>
+        <a:fillRef idx="3">
+          <a:schemeClr val="accent1"/>
+        </a:fillRef>
+        <a:effectRef idx="2">
+          <a:schemeClr val="accent1"/>
+        </a:effectRef>
+        <a:fontRef idx="minor">
+          <a:schemeClr val="lt1"/>
+        </a:fontRef>
+      </a:style>
+    </a:spDef>
+    <a:lnDef>
+      <a:spPr/>
+      <a:bodyPr/>
+      <a:lstStyle/>
+      <a:style>
+        <a:lnRef idx="2">
+          <a:schemeClr val="accent1"/>
+        </a:lnRef>
+        <a:fillRef idx="0">
+          <a:schemeClr val="accent1"/>
+        </a:fillRef>
+        <a:effectRef idx="1">
+          <a:schemeClr val="accent1"/>
+        </a:effectRef>
+        <a:fontRef idx="minor">
+          <a:schemeClr val="tx1"/>
+        </a:fontRef>
+      </a:style>
+    </a:lnDef>
+  </a:objectDefaults>
+  <a:extraClrSchemeLst/>
+</a:theme>
 </file>
--- a/dev/ppt/out/Deck.pptx
+++ b/dev/ppt/out/Deck.pptx
@@ -26,6 +26,7 @@
     <p:sldId id="274" r:id="rId25"/>
     <p:sldId id="275" r:id="rId26"/>
     <p:sldId id="276" r:id="rId27"/>
+    <p:sldId id="277" r:id="rId28"/>
   </p:sldIdLst>
   <p:sldSz cx="12191695" cy="6858000" type="screen4x3"/>
   <p:notesSz cx="6858000" cy="9144000"/>
@@ -592,7 +593,7 @@
           <a:lstStyle/>
           <a:p>
             <a:r>
-              <a:t>她目前能做的五件事：有形象地陪着、用自己的声音说话、记得住我、能替我干活、还能出桌面去 QQ/微信里继续聊。</a:t>
+              <a:t>下面进第二部分：她具体能做什么，以及这些是怎么实现的。</a:t>
             </a:r>
           </a:p>
         </p:txBody>
@@ -662,7 +663,7 @@
           <a:lstStyle/>
           <a:p>
             <a:r>
-              <a:t>形象这块的核心设计是：**装扮即数据**。衣服、发型、装饰、姿势都是层号，换装就是换层再合成，所以 Live2D 和 2D 立绘能共用同一套装扮。语音是角色专属模型，独立服务常驻。</a:t>
+              <a:t>她目前能做的五件事：有形象地陪着、用自己的声音说话、记得住我、能替我干活、还能出桌面去 QQ/微信里继续聊。</a:t>
             </a:r>
           </a:p>
         </p:txBody>
@@ -732,7 +733,7 @@
           <a:lstStyle/>
           <a:p>
             <a:r>
-              <a:t>记忆是分层的：对话记忆、长期记忆、日记、状态快照各管一段。关系值按真实相处证据抬升，不靠嘴甜。她会自己补课、自己归纳关于我的事。</a:t>
+              <a:t>形象这块的核心设计是：**装扮即数据**。衣服、发型、装饰、姿势都是层号，换装就是换层再合成，所以 Live2D 和 2D 立绘能共用同一套装扮。语音是角色专属模型，独立服务常驻。</a:t>
             </a:r>
           </a:p>
         </p:txBody>
@@ -802,7 +803,7 @@
           <a:lstStyle/>
           <a:p>
             <a:r>
-              <a:t>出桌面这块：QQ/微信桥接用同一套人设和记忆，连立绘都是同一件衣服。手机端走同一套后端协议。</a:t>
+              <a:t>记忆是分层的：对话记忆、长期记忆、日记、状态快照各管一段。关系值按真实相处证据抬升，不靠嘴甜。她会自己补课、自己归纳关于我的事。</a:t>
             </a:r>
           </a:p>
         </p:txBody>
@@ -872,7 +873,7 @@
           <a:lstStyle/>
           <a:p>
             <a:r>
-              <a:t>工程这块我想强调一句：这不是『我这儿能跑』。仓库自带 381 项自检，一条命令可复现，现在是全绿。换装差异、立绘底色这种观感问题，我们用像素级比对来验收。</a:t>
+              <a:t>出桌面这块：QQ/微信桥接用同一套人设和记忆，连立绘都是同一件衣服。手机端走同一套后端协议。</a:t>
             </a:r>
           </a:p>
         </p:txBody>
@@ -942,7 +943,7 @@
           <a:lstStyle/>
           <a:p>
             <a:r>
-              <a:t>第三部分，未来规划。</a:t>
+              <a:t>工程这块我想强调一句：这不是『我这儿能跑』。仓库自带 381 项自检，一条命令可复现，现在是全绿。换装差异、立绘底色这种观感问题，我们用像素级比对来验收。</a:t>
             </a:r>
           </a:p>
         </p:txBody>
@@ -1012,7 +1013,7 @@
           <a:lstStyle/>
           <a:p>
             <a:r>
-              <a:t>近期三件事：手机端对齐与优化、3D 模型方案评估（建模成本要算清楚）、多角色支持。</a:t>
+              <a:t>第三部分，未来规划。</a:t>
             </a:r>
           </a:p>
         </p:txBody>
@@ -1082,7 +1083,7 @@
           <a:lstStyle/>
           <a:p>
             <a:r>
-              <a:t>中期想让互动更自然：手部动捕驱动视线跟随、识别动作并给反应。摄像头链路现在已经通了。</a:t>
+              <a:t>近期三件事：手机端对齐与优化、3D 模型方案评估（建模成本要算清楚，先验证再投入）、多角色支持。</a:t>
             </a:r>
           </a:p>
         </p:txBody>
@@ -1152,7 +1153,7 @@
           <a:lstStyle/>
           <a:p>
             <a:r>
-              <a:t>另一条中期的路是毫米波雷达：不依赖光线和镜头，隐私友好、能全天运行。科研课上已经有可复用的动作采集装置，课题结束后可以迁移过来。</a:t>
+              <a:t>中期想让互动更自然：手部动捕驱动视线跟随、识别动作并给反应。摄像头链路现在已经通了。</a:t>
             </a:r>
           </a:p>
         </p:txBody>
@@ -1222,7 +1223,7 @@
           <a:lstStyle/>
           <a:p>
             <a:r>
-              <a:t>远期是形态自由：AR 呈现（同类多是 iPhone 生态，安卓侧还是空白）、系统级常驻、以及角色与语音都能替换的开放生态。</a:t>
+              <a:t>另一条中期的路是毫米波雷达：不依赖光线和镜头、隐私友好、能全天运行。这里要诚实：毫米波做隐私友好交互已经有人做了（今年 9 月的 mmHRI，隔着帘子做机器人操作，动作识别 85%），所以我们不主张“第一次用毫米波”。我们的问题不同——他们做操纵、指标是准确率；我们做陪伴、指标是关系感知和打扰容忍度。这条线能不能立住，取决于接下来的用户研究。</a:t>
             </a:r>
           </a:p>
         </p:txBody>
@@ -1362,7 +1363,7 @@
           <a:lstStyle/>
           <a:p>
             <a:r>
-              <a:t>一句话收束路线取舍：先让她真的住在电脑里，再让她走到你身边。</a:t>
+              <a:t>远期是形态自由：AR 呈现（同类多是 iPhone 生态，安卓侧还是空白）、系统级常驻、以及角色与语音都能替换的开放生态。</a:t>
             </a:r>
           </a:p>
         </p:txBody>
@@ -1432,6 +1433,76 @@
           <a:lstStyle/>
           <a:p>
             <a:r>
+              <a:t>一句话收束路线取舍：先让她真的住在电脑里，再让她走到你身边。</a:t>
+            </a:r>
+          </a:p>
+        </p:txBody>
+      </p:sp>
+      <p:sp>
+        <p:nvSpPr>
+          <p:cNvPr id="4" name="Slide Number Placeholder 3"/>
+          <p:cNvSpPr>
+            <a:spLocks noGrp="1"/>
+          </p:cNvSpPr>
+          <p:nvPr>
+            <p:ph type="sldNum" idx="5" sz="quarter"/>
+          </p:nvPr>
+        </p:nvSpPr>
+        <p:spPr/>
+      </p:sp>
+    </p:spTree>
+  </p:cSld>
+  <p:clrMapOvr>
+    <a:masterClrMapping/>
+  </p:clrMapOvr>
+</p:notes>
+</file>
+
+<file path=ppt/notesSlides/notesSlide22.xml><?xml version="1.0" encoding="utf-8"?>
+<p:notes xmlns:a="http://schemas.openxmlformats.org/drawingml/2006/main" xmlns:p="http://schemas.openxmlformats.org/presentationml/2006/main" xmlns:r="http://schemas.openxmlformats.org/officeDocument/2006/relationships">
+  <p:cSld>
+    <p:spTree>
+      <p:nvGrpSpPr>
+        <p:cNvPr id="1" name=""/>
+        <p:cNvGrpSpPr/>
+        <p:nvPr/>
+      </p:nvGrpSpPr>
+      <p:grpSpPr>
+        <a:xfrm>
+          <a:off x="0" y="0"/>
+          <a:ext cx="0" cy="0"/>
+          <a:chOff x="0" y="0"/>
+          <a:chExt cx="0" cy="0"/>
+        </a:xfrm>
+      </p:grpSpPr>
+      <p:sp>
+        <p:nvSpPr>
+          <p:cNvPr id="2" name="Slide Image Placeholder 1"/>
+          <p:cNvSpPr>
+            <a:spLocks noGrp="1"/>
+          </p:cNvSpPr>
+          <p:nvPr>
+            <p:ph type="sldImg" idx="2"/>
+          </p:nvPr>
+        </p:nvSpPr>
+        <p:spPr/>
+      </p:sp>
+      <p:sp>
+        <p:nvSpPr>
+          <p:cNvPr id="3" name="Notes Placeholder 2"/>
+          <p:cNvSpPr>
+            <a:spLocks noGrp="1"/>
+          </p:cNvSpPr>
+          <p:nvPr>
+            <p:ph type="body" idx="3" sz="quarter"/>
+          </p:nvPr>
+        </p:nvSpPr>
+        <p:spPr/>
+        <p:txBody>
+          <a:bodyPr/>
+          <a:lstStyle/>
+          <a:p>
+            <a:r>
               <a:t>最后留现场演示：形象、换装、对话、记忆、桌面操作。</a:t>
             </a:r>
           </a:p>
@@ -1502,7 +1573,7 @@
           <a:lstStyle/>
           <a:p>
             <a:r>
-              <a:t>开源这块做得最久。它们强在动——能爬窗口、会掉下去、有养成数值；但普遍没有长期记忆，关掉就忘，也不碰本机操作。</a:t>
+              <a:t>这里先给一个时间线，说明这波不是我们自己在想：2026 年 3 月到 9 月，腾讯、Anthropic、OpenAI、还有北大的仓鼠元元，全部在做桌宠。但请注意它们走的是同一条线——办公和生产力，宠物是入口、是身份锚点。没有一个人负责回答“她还是不是她本人”。这句话是今天整个故事的支点。</a:t>
             </a:r>
           </a:p>
         </p:txBody>
@@ -1572,7 +1643,7 @@
           <a:lstStyle/>
           <a:p>
             <a:r>
-              <a:t>Steam 上卖的是形象和皮肤：Desktop Mate 靠 IP 联名，Live2DViewerEX 靠创作生态，Wallpaper Engine 更偏桌面美化。它们的共同天花板是：出不了桌面这个窗口，也不理解你的生活。</a:t>
+              <a:t>市面上的做法可以分四类：开源桌宠、Steam 商业桌宠、AI 桌宠新秀，以及像《你妈》这种靠话题出圈的。下面逐类看它们强在哪、缺什么。</a:t>
             </a:r>
           </a:p>
         </p:txBody>
@@ -1642,7 +1713,7 @@
           <a:lstStyle/>
           <a:p>
             <a:r>
-              <a:t>另一条线是 AI 聊天机器人。接 QQ/微信的很多，有形象的也很多，但很少有项目两头都占。这句话可以记住：有形象的都不接 QQ/微信，接 QQ/微信的都没形象。</a:t>
+              <a:t>开源这块做得最久。它们强在动——能爬窗口、会掉下去、有养成数值；但普遍没有长期记忆，关掉就忘，也不碰本机操作。</a:t>
             </a:r>
           </a:p>
         </p:txBody>
@@ -1712,7 +1783,7 @@
           <a:lstStyle/>
           <a:p>
             <a:r>
-              <a:t>这一页是把我们放进去比。形象、记忆、聊天软件、真声线、桌面操作、手机端——六条里我们能同时给。</a:t>
+              <a:t>Steam 上卖的是形象和皮肤：Desktop Mate 靠 IP 联名，Live2DViewerEX 靠创作生态，Wallpaper Engine 更偏桌面美化。它们的共同天花板是：出不了桌面这个窗口，也不理解你的生活。</a:t>
             </a:r>
           </a:p>
         </p:txBody>
@@ -1782,7 +1853,7 @@
           <a:lstStyle/>
           <a:p>
             <a:r>
-              <a:t>这页最重要，也是我特意加的诚实定位：我们**并非首创**。唯一查到把这几条同时做齐且还在活跃的是 super-agent-party。所以我们的定位是整合者，差异化落在产品整合度、开箱体验和本地化深度上——而不是我们做了别人没做过的事。</a:t>
+              <a:t>另一条线是 AI 聊天机器人。接 QQ/微信的很多，有形象的也很多，但很少有项目两头都占。这句话可以记住：有形象的都不接 QQ/微信，接 QQ/微信的都没形象。</a:t>
             </a:r>
           </a:p>
         </p:txBody>
@@ -1852,7 +1923,12 @@
           <a:lstStyle/>
           <a:p>
             <a:r>
-              <a:t>一句话概括定位。</a:t>
+              <a:t>这一页是把我们放进去比。六条里我们能同时给：形象、人格与记忆、聊天软件打通、真声线、桌面操作、手机端。</a:t>
+            </a:r>
+          </a:p>
+          <a:p>
+            <a:r>
+              <a:t>最后那条“并非首创”我想主动说出来：我查到唯一把形象、聊天软件、本地操作、语音同时做齐且还在活跃的是 super-agent-party。这件事写在页面上，但它不是今天的开场——开场那句在下一页。</a:t>
             </a:r>
           </a:p>
         </p:txBody>
@@ -1922,7 +1998,17 @@
           <a:lstStyle/>
           <a:p>
             <a:r>
-              <a:t>下面进第二部分，讲功能和我们是怎么实现的。</a:t>
+              <a:t>这句话是今天最想留下的一句：大厂在给 AI 装一只宠物，我们做的是一个人。</a:t>
+            </a:r>
+          </a:p>
+          <a:p>
+            <a:r>
+              <a:t>腾讯、Anthropic、OpenAI 都在把宠物放进办公工具——宠物是入口、是身份锚点，但那是一只通用的猫。没有人负责回答“她还是不是她本人”。</a:t>
+            </a:r>
+          </a:p>
+          <a:p>
+            <a:r>
+              <a:t>我们的全部工作都在这个问题上：固定的人格、固定的声线、跨端的长期记忆。</a:t>
             </a:r>
           </a:p>
         </p:txBody>
@@ -5094,6 +5180,114 @@
     <p:bg>
       <p:bgPr>
         <a:solidFill>
+          <a:srgbClr val="3B2B26"/>
+        </a:solidFill>
+        <a:effectLst/>
+      </p:bgPr>
+    </p:bg>
+    <p:spTree>
+      <p:nvGrpSpPr>
+        <p:cNvPr id="1" name=""/>
+        <p:cNvGrpSpPr/>
+        <p:nvPr/>
+      </p:nvGrpSpPr>
+      <p:grpSpPr/>
+      <p:sp>
+        <p:nvSpPr>
+          <p:cNvPr id="2" name="TextBox 1"/>
+          <p:cNvSpPr txBox="1"/>
+          <p:nvPr/>
+        </p:nvSpPr>
+        <p:spPr>
+          <a:xfrm>
+            <a:off x="822960" y="2011680"/>
+            <a:ext cx="10058400" cy="1280160"/>
+          </a:xfrm>
+          <a:prstGeom prst="rect">
+            <a:avLst/>
+          </a:prstGeom>
+          <a:noFill/>
+        </p:spPr>
+        <p:txBody>
+          <a:bodyPr wrap="square" anchor="t" lIns="0" rIns="0" tIns="0" bIns="0">
+            <a:spAutoFit/>
+          </a:bodyPr>
+          <a:lstStyle/>
+          <a:p>
+            <a:pPr algn="l">
+              <a:spcAft>
+                <a:spcPts val="0"/>
+              </a:spcAft>
+            </a:pPr>
+            <a:r>
+              <a:rPr sz="6000" b="1">
+                <a:solidFill>
+                  <a:srgbClr val="A03A35"/>
+                </a:solidFill>
+                <a:latin typeface="Arial"/>
+                <a:ea typeface="Arial"/>
+                <a:cs typeface="Arial"/>
+              </a:rPr>
+              <a:t>02</a:t>
+            </a:r>
+          </a:p>
+        </p:txBody>
+      </p:sp>
+      <p:sp>
+        <p:nvSpPr>
+          <p:cNvPr id="3" name="TextBox 2"/>
+          <p:cNvSpPr txBox="1"/>
+          <p:nvPr/>
+        </p:nvSpPr>
+        <p:spPr>
+          <a:xfrm>
+            <a:off x="822960" y="3383280"/>
+            <a:ext cx="10515600" cy="1097280"/>
+          </a:xfrm>
+          <a:prstGeom prst="rect">
+            <a:avLst/>
+          </a:prstGeom>
+          <a:noFill/>
+        </p:spPr>
+        <p:txBody>
+          <a:bodyPr wrap="square" anchor="t" lIns="0" rIns="0" tIns="0" bIns="0">
+            <a:spAutoFit/>
+          </a:bodyPr>
+          <a:lstStyle/>
+          <a:p>
+            <a:pPr algn="l">
+              <a:spcAft>
+                <a:spcPts val="0"/>
+              </a:spcAft>
+            </a:pPr>
+            <a:r>
+              <a:rPr sz="3400" b="1">
+                <a:solidFill>
+                  <a:srgbClr val="F7F1EA"/>
+                </a:solidFill>
+                <a:latin typeface="Arial"/>
+                <a:ea typeface="Arial"/>
+                <a:cs typeface="Arial"/>
+              </a:rPr>
+              <a:t>功能展示与实现方法</a:t>
+            </a:r>
+          </a:p>
+        </p:txBody>
+      </p:sp>
+    </p:spTree>
+  </p:cSld>
+  <p:clrMapOvr>
+    <a:masterClrMapping/>
+  </p:clrMapOvr>
+</p:sld>
+</file>
+
+<file path=ppt/slides/slide11.xml><?xml version="1.0" encoding="utf-8"?>
+<p:sld xmlns:a="http://schemas.openxmlformats.org/drawingml/2006/main" xmlns:p="http://schemas.openxmlformats.org/presentationml/2006/main" xmlns:r="http://schemas.openxmlformats.org/officeDocument/2006/relationships">
+  <p:cSld>
+    <p:bg>
+      <p:bgPr>
+        <a:solidFill>
           <a:srgbClr val="F7F1EA"/>
         </a:solidFill>
         <a:effectLst/>
@@ -5450,7 +5644,7 @@
                 <a:ea typeface="Arial"/>
                 <a:cs typeface="Arial"/>
               </a:rPr>
-              <a:t>10</a:t>
+              <a:t>11</a:t>
             </a:r>
           </a:p>
         </p:txBody>
@@ -5463,7 +5657,7 @@
 </p:sld>
 </file>
 
-<file path=ppt/slides/slide11.xml><?xml version="1.0" encoding="utf-8"?>
+<file path=ppt/slides/slide12.xml><?xml version="1.0" encoding="utf-8"?>
 <p:sld xmlns:a="http://schemas.openxmlformats.org/drawingml/2006/main" xmlns:p="http://schemas.openxmlformats.org/presentationml/2006/main" xmlns:r="http://schemas.openxmlformats.org/officeDocument/2006/relationships">
   <p:cSld>
     <p:bg>
@@ -5785,7 +5979,7 @@
                 <a:ea typeface="Arial"/>
                 <a:cs typeface="Arial"/>
               </a:rPr>
-              <a:t>11</a:t>
+              <a:t>12</a:t>
             </a:r>
           </a:p>
         </p:txBody>
@@ -5798,7 +5992,7 @@
 </p:sld>
 </file>
 
-<file path=ppt/slides/slide12.xml><?xml version="1.0" encoding="utf-8"?>
+<file path=ppt/slides/slide13.xml><?xml version="1.0" encoding="utf-8"?>
 <p:sld xmlns:a="http://schemas.openxmlformats.org/drawingml/2006/main" xmlns:p="http://schemas.openxmlformats.org/presentationml/2006/main" xmlns:r="http://schemas.openxmlformats.org/officeDocument/2006/relationships">
   <p:cSld>
     <p:bg>
@@ -6120,7 +6314,7 @@
                 <a:ea typeface="Arial"/>
                 <a:cs typeface="Arial"/>
               </a:rPr>
-              <a:t>12</a:t>
+              <a:t>13</a:t>
             </a:r>
           </a:p>
         </p:txBody>
@@ -6133,7 +6327,7 @@
 </p:sld>
 </file>
 
-<file path=ppt/slides/slide13.xml><?xml version="1.0" encoding="utf-8"?>
+<file path=ppt/slides/slide14.xml><?xml version="1.0" encoding="utf-8"?>
 <p:sld xmlns:a="http://schemas.openxmlformats.org/drawingml/2006/main" xmlns:p="http://schemas.openxmlformats.org/presentationml/2006/main" xmlns:r="http://schemas.openxmlformats.org/officeDocument/2006/relationships">
   <p:cSld>
     <p:bg>
@@ -6415,7 +6609,7 @@
                 <a:ea typeface="Arial"/>
                 <a:cs typeface="Arial"/>
               </a:rPr>
-              <a:t>13</a:t>
+              <a:t>14</a:t>
             </a:r>
           </a:p>
         </p:txBody>
@@ -6428,7 +6622,7 @@
 </p:sld>
 </file>
 
-<file path=ppt/slides/slide14.xml><?xml version="1.0" encoding="utf-8"?>
+<file path=ppt/slides/slide15.xml><?xml version="1.0" encoding="utf-8"?>
 <p:sld xmlns:a="http://schemas.openxmlformats.org/drawingml/2006/main" xmlns:p="http://schemas.openxmlformats.org/presentationml/2006/main" xmlns:r="http://schemas.openxmlformats.org/officeDocument/2006/relationships">
   <p:cSld>
     <p:bg>
@@ -6750,7 +6944,7 @@
                 <a:ea typeface="Arial"/>
                 <a:cs typeface="Arial"/>
               </a:rPr>
-              <a:t>14</a:t>
+              <a:t>15</a:t>
             </a:r>
           </a:p>
         </p:txBody>
@@ -6763,7 +6957,7 @@
 </p:sld>
 </file>
 
-<file path=ppt/slides/slide15.xml><?xml version="1.0" encoding="utf-8"?>
+<file path=ppt/slides/slide16.xml><?xml version="1.0" encoding="utf-8"?>
 <p:sld xmlns:a="http://schemas.openxmlformats.org/drawingml/2006/main" xmlns:p="http://schemas.openxmlformats.org/presentationml/2006/main" xmlns:r="http://schemas.openxmlformats.org/officeDocument/2006/relationships">
   <p:cSld>
     <p:bg>
@@ -6871,7 +7065,7 @@
 </p:sld>
 </file>
 
-<file path=ppt/slides/slide16.xml><?xml version="1.0" encoding="utf-8"?>
+<file path=ppt/slides/slide17.xml><?xml version="1.0" encoding="utf-8"?>
 <p:sld xmlns:a="http://schemas.openxmlformats.org/drawingml/2006/main" xmlns:p="http://schemas.openxmlformats.org/presentationml/2006/main" xmlns:r="http://schemas.openxmlformats.org/officeDocument/2006/relationships">
   <p:cSld>
     <p:bg>
@@ -7153,7 +7347,7 @@
                 <a:ea typeface="Arial"/>
                 <a:cs typeface="Arial"/>
               </a:rPr>
-              <a:t>16</a:t>
+              <a:t>17</a:t>
             </a:r>
           </a:p>
         </p:txBody>
@@ -7166,7 +7360,7 @@
 </p:sld>
 </file>
 
-<file path=ppt/slides/slide17.xml><?xml version="1.0" encoding="utf-8"?>
+<file path=ppt/slides/slide18.xml><?xml version="1.0" encoding="utf-8"?>
 <p:sld xmlns:a="http://schemas.openxmlformats.org/drawingml/2006/main" xmlns:p="http://schemas.openxmlformats.org/presentationml/2006/main" xmlns:r="http://schemas.openxmlformats.org/officeDocument/2006/relationships">
   <p:cSld>
     <p:bg>
@@ -7448,7 +7642,7 @@
                 <a:ea typeface="Arial"/>
                 <a:cs typeface="Arial"/>
               </a:rPr>
-              <a:t>17</a:t>
+              <a:t>18</a:t>
             </a:r>
           </a:p>
         </p:txBody>
@@ -7461,7 +7655,7 @@
 </p:sld>
 </file>
 
-<file path=ppt/slides/slide18.xml><?xml version="1.0" encoding="utf-8"?>
+<file path=ppt/slides/slide19.xml><?xml version="1.0" encoding="utf-8"?>
 <p:sld xmlns:a="http://schemas.openxmlformats.org/drawingml/2006/main" xmlns:p="http://schemas.openxmlformats.org/presentationml/2006/main" xmlns:r="http://schemas.openxmlformats.org/officeDocument/2006/relationships">
   <p:cSld>
     <p:bg>
@@ -7743,7 +7937,7 @@
                 <a:ea typeface="Arial"/>
                 <a:cs typeface="Arial"/>
               </a:rPr>
-              <a:t>18</a:t>
+              <a:t>19</a:t>
             </a:r>
           </a:p>
         </p:txBody>
@@ -7756,7 +7950,115 @@
 </p:sld>
 </file>
 
-<file path=ppt/slides/slide19.xml><?xml version="1.0" encoding="utf-8"?>
+<file path=ppt/slides/slide2.xml><?xml version="1.0" encoding="utf-8"?>
+<p:sld xmlns:a="http://schemas.openxmlformats.org/drawingml/2006/main" xmlns:p="http://schemas.openxmlformats.org/presentationml/2006/main" xmlns:r="http://schemas.openxmlformats.org/officeDocument/2006/relationships">
+  <p:cSld>
+    <p:bg>
+      <p:bgPr>
+        <a:solidFill>
+          <a:srgbClr val="3B2B26"/>
+        </a:solidFill>
+        <a:effectLst/>
+      </p:bgPr>
+    </p:bg>
+    <p:spTree>
+      <p:nvGrpSpPr>
+        <p:cNvPr id="1" name=""/>
+        <p:cNvGrpSpPr/>
+        <p:nvPr/>
+      </p:nvGrpSpPr>
+      <p:grpSpPr/>
+      <p:sp>
+        <p:nvSpPr>
+          <p:cNvPr id="2" name="TextBox 1"/>
+          <p:cNvSpPr txBox="1"/>
+          <p:nvPr/>
+        </p:nvSpPr>
+        <p:spPr>
+          <a:xfrm>
+            <a:off x="822960" y="2011680"/>
+            <a:ext cx="10058400" cy="1280160"/>
+          </a:xfrm>
+          <a:prstGeom prst="rect">
+            <a:avLst/>
+          </a:prstGeom>
+          <a:noFill/>
+        </p:spPr>
+        <p:txBody>
+          <a:bodyPr wrap="square" anchor="t" lIns="0" rIns="0" tIns="0" bIns="0">
+            <a:spAutoFit/>
+          </a:bodyPr>
+          <a:lstStyle/>
+          <a:p>
+            <a:pPr algn="l">
+              <a:spcAft>
+                <a:spcPts val="0"/>
+              </a:spcAft>
+            </a:pPr>
+            <a:r>
+              <a:rPr sz="6000" b="1">
+                <a:solidFill>
+                  <a:srgbClr val="A03A35"/>
+                </a:solidFill>
+                <a:latin typeface="Arial"/>
+                <a:ea typeface="Arial"/>
+                <a:cs typeface="Arial"/>
+              </a:rPr>
+              <a:t>01</a:t>
+            </a:r>
+          </a:p>
+        </p:txBody>
+      </p:sp>
+      <p:sp>
+        <p:nvSpPr>
+          <p:cNvPr id="3" name="TextBox 2"/>
+          <p:cNvSpPr txBox="1"/>
+          <p:nvPr/>
+        </p:nvSpPr>
+        <p:spPr>
+          <a:xfrm>
+            <a:off x="822960" y="3383280"/>
+            <a:ext cx="10515600" cy="1097280"/>
+          </a:xfrm>
+          <a:prstGeom prst="rect">
+            <a:avLst/>
+          </a:prstGeom>
+          <a:noFill/>
+        </p:spPr>
+        <p:txBody>
+          <a:bodyPr wrap="square" anchor="t" lIns="0" rIns="0" tIns="0" bIns="0">
+            <a:spAutoFit/>
+          </a:bodyPr>
+          <a:lstStyle/>
+          <a:p>
+            <a:pPr algn="l">
+              <a:spcAft>
+                <a:spcPts val="0"/>
+              </a:spcAft>
+            </a:pPr>
+            <a:r>
+              <a:rPr sz="3400" b="1">
+                <a:solidFill>
+                  <a:srgbClr val="F7F1EA"/>
+                </a:solidFill>
+                <a:latin typeface="Arial"/>
+                <a:ea typeface="Arial"/>
+                <a:cs typeface="Arial"/>
+              </a:rPr>
+              <a:t>桌宠市场：现在都做到了哪一步</a:t>
+            </a:r>
+          </a:p>
+        </p:txBody>
+      </p:sp>
+    </p:spTree>
+  </p:cSld>
+  <p:clrMapOvr>
+    <a:masterClrMapping/>
+  </p:clrMapOvr>
+</p:sld>
+</file>
+
+<file path=ppt/slides/slide20.xml><?xml version="1.0" encoding="utf-8"?>
 <p:sld xmlns:a="http://schemas.openxmlformats.org/drawingml/2006/main" xmlns:p="http://schemas.openxmlformats.org/presentationml/2006/main" xmlns:r="http://schemas.openxmlformats.org/officeDocument/2006/relationships">
   <p:cSld>
     <p:bg>
@@ -8038,7 +8340,7 @@
                 <a:ea typeface="Arial"/>
                 <a:cs typeface="Arial"/>
               </a:rPr>
-              <a:t>19</a:t>
+              <a:t>20</a:t>
             </a:r>
           </a:p>
         </p:txBody>
@@ -8051,115 +8353,7 @@
 </p:sld>
 </file>
 
-<file path=ppt/slides/slide2.xml><?xml version="1.0" encoding="utf-8"?>
-<p:sld xmlns:a="http://schemas.openxmlformats.org/drawingml/2006/main" xmlns:p="http://schemas.openxmlformats.org/presentationml/2006/main" xmlns:r="http://schemas.openxmlformats.org/officeDocument/2006/relationships">
-  <p:cSld>
-    <p:bg>
-      <p:bgPr>
-        <a:solidFill>
-          <a:srgbClr val="3B2B26"/>
-        </a:solidFill>
-        <a:effectLst/>
-      </p:bgPr>
-    </p:bg>
-    <p:spTree>
-      <p:nvGrpSpPr>
-        <p:cNvPr id="1" name=""/>
-        <p:cNvGrpSpPr/>
-        <p:nvPr/>
-      </p:nvGrpSpPr>
-      <p:grpSpPr/>
-      <p:sp>
-        <p:nvSpPr>
-          <p:cNvPr id="2" name="TextBox 1"/>
-          <p:cNvSpPr txBox="1"/>
-          <p:nvPr/>
-        </p:nvSpPr>
-        <p:spPr>
-          <a:xfrm>
-            <a:off x="822960" y="2011680"/>
-            <a:ext cx="10058400" cy="1280160"/>
-          </a:xfrm>
-          <a:prstGeom prst="rect">
-            <a:avLst/>
-          </a:prstGeom>
-          <a:noFill/>
-        </p:spPr>
-        <p:txBody>
-          <a:bodyPr wrap="square" anchor="t" lIns="0" rIns="0" tIns="0" bIns="0">
-            <a:spAutoFit/>
-          </a:bodyPr>
-          <a:lstStyle/>
-          <a:p>
-            <a:pPr algn="l">
-              <a:spcAft>
-                <a:spcPts val="0"/>
-              </a:spcAft>
-            </a:pPr>
-            <a:r>
-              <a:rPr sz="6000" b="1">
-                <a:solidFill>
-                  <a:srgbClr val="A03A35"/>
-                </a:solidFill>
-                <a:latin typeface="Arial"/>
-                <a:ea typeface="Arial"/>
-                <a:cs typeface="Arial"/>
-              </a:rPr>
-              <a:t>01</a:t>
-            </a:r>
-          </a:p>
-        </p:txBody>
-      </p:sp>
-      <p:sp>
-        <p:nvSpPr>
-          <p:cNvPr id="3" name="TextBox 2"/>
-          <p:cNvSpPr txBox="1"/>
-          <p:nvPr/>
-        </p:nvSpPr>
-        <p:spPr>
-          <a:xfrm>
-            <a:off x="822960" y="3383280"/>
-            <a:ext cx="10515600" cy="1097280"/>
-          </a:xfrm>
-          <a:prstGeom prst="rect">
-            <a:avLst/>
-          </a:prstGeom>
-          <a:noFill/>
-        </p:spPr>
-        <p:txBody>
-          <a:bodyPr wrap="square" anchor="t" lIns="0" rIns="0" tIns="0" bIns="0">
-            <a:spAutoFit/>
-          </a:bodyPr>
-          <a:lstStyle/>
-          <a:p>
-            <a:pPr algn="l">
-              <a:spcAft>
-                <a:spcPts val="0"/>
-              </a:spcAft>
-            </a:pPr>
-            <a:r>
-              <a:rPr sz="3400" b="1">
-                <a:solidFill>
-                  <a:srgbClr val="F7F1EA"/>
-                </a:solidFill>
-                <a:latin typeface="Arial"/>
-                <a:ea typeface="Arial"/>
-                <a:cs typeface="Arial"/>
-              </a:rPr>
-              <a:t>桌宠市场：现在都做到了哪一步</a:t>
-            </a:r>
-          </a:p>
-        </p:txBody>
-      </p:sp>
-    </p:spTree>
-  </p:cSld>
-  <p:clrMapOvr>
-    <a:masterClrMapping/>
-  </p:clrMapOvr>
-</p:sld>
-</file>
-
-<file path=ppt/slides/slide20.xml><?xml version="1.0" encoding="utf-8"?>
+<file path=ppt/slides/slide21.xml><?xml version="1.0" encoding="utf-8"?>
 <p:sld xmlns:a="http://schemas.openxmlformats.org/drawingml/2006/main" xmlns:p="http://schemas.openxmlformats.org/presentationml/2006/main" xmlns:r="http://schemas.openxmlformats.org/officeDocument/2006/relationships">
   <p:cSld>
     <p:bg>
@@ -8216,7 +8410,7 @@
                 <a:ea typeface="Arial"/>
                 <a:cs typeface="Arial"/>
               </a:rPr>
-              <a:t>“别人做「桌面上的形象」，我们做「住在电脑里的人」”</a:t>
+              <a:t>“先让她真的住进电脑里，再让她走到你身边”</a:t>
             </a:r>
           </a:p>
           <a:p>
@@ -8234,7 +8428,7 @@
                 <a:ea typeface="Arial"/>
                 <a:cs typeface="Arial"/>
               </a:rPr>
-              <a:t>—— 定位：整合者，而非首创者</a:t>
+              <a:t>—— 路线取舍：先做深关系，再谈形态自由</a:t>
             </a:r>
           </a:p>
         </p:txBody>
@@ -8275,7 +8469,7 @@
                 <a:ea typeface="Arial"/>
                 <a:cs typeface="Arial"/>
               </a:rPr>
-              <a:t>20</a:t>
+              <a:t>21</a:t>
             </a:r>
           </a:p>
         </p:txBody>
@@ -8288,7 +8482,7 @@
 </p:sld>
 </file>
 
-<file path=ppt/slides/slide21.xml><?xml version="1.0" encoding="utf-8"?>
+<file path=ppt/slides/slide22.xml><?xml version="1.0" encoding="utf-8"?>
 <p:sld xmlns:a="http://schemas.openxmlformats.org/drawingml/2006/main" xmlns:p="http://schemas.openxmlformats.org/presentationml/2006/main" xmlns:r="http://schemas.openxmlformats.org/officeDocument/2006/relationships">
   <p:cSld>
     <p:bg>
@@ -8427,7 +8621,7 @@
                 <a:ea typeface="Arial"/>
                 <a:cs typeface="Arial"/>
               </a:rPr>
-              <a:t>市面上的四类做法</a:t>
+              <a:t>2026：大厂集体入局，但走的是同一条线</a:t>
             </a:r>
           </a:p>
         </p:txBody>
@@ -8523,7 +8717,7 @@
                 <a:ea typeface="微软雅黑"/>
                 <a:cs typeface="微软雅黑"/>
               </a:rPr>
-              <a:t>开源桌宠</a:t>
+              <a:t>2026-04　Anthropic</a:t>
             </a:r>
             <a:r>
               <a:rPr sz="1300" b="0">
@@ -8534,7 +8728,7 @@
                 <a:ea typeface="微软雅黑"/>
                 <a:cs typeface="微软雅黑"/>
               </a:rPr>
-              <a:t>  Shimeji / Ukagaka(SSP) / VPet / uDesktopMascot</a:t>
+              <a:t>  Claude Code 加虚拟宠物 Buddy —— 陪着写代码</a:t>
             </a:r>
           </a:p>
           <a:p>
@@ -8563,7 +8757,7 @@
                 <a:ea typeface="微软雅黑"/>
                 <a:cs typeface="微软雅黑"/>
               </a:rPr>
-              <a:t>Steam 商业桌宠</a:t>
+              <a:t>2026-04　元空AI（仓鼠元元）</a:t>
             </a:r>
             <a:r>
               <a:rPr sz="1300" b="0">
@@ -8574,7 +8768,7 @@
                 <a:ea typeface="微软雅黑"/>
                 <a:cs typeface="微软雅黑"/>
               </a:rPr>
-              <a:t>  Desktop Mate / Live2DViewerEX / Wallpaper Engine</a:t>
+              <a:t>  自称“中国首个 AI 办公桌宠”，定位办公效率：划词即用、常驻多轮对话</a:t>
             </a:r>
           </a:p>
           <a:p>
@@ -8603,7 +8797,7 @@
                 <a:ea typeface="微软雅黑"/>
                 <a:cs typeface="微软雅黑"/>
               </a:rPr>
-              <a:t>AI 桌宠新秀</a:t>
+              <a:t>2026-05　腾讯 WorkBuddy</a:t>
             </a:r>
             <a:r>
               <a:rPr sz="1300" b="0">
@@ -8614,7 +8808,7 @@
                 <a:ea typeface="微软雅黑"/>
                 <a:cs typeface="微软雅黑"/>
               </a:rPr>
-              <a:t>  Open-LLM-VTuber / MateEngine（接大模型、能说话）</a:t>
+              <a:t>  上线养成玩法：积分 / 盲盒 / 装扮 / 派它去旅行</a:t>
             </a:r>
           </a:p>
           <a:p>
@@ -8643,7 +8837,7 @@
                 <a:ea typeface="微软雅黑"/>
                 <a:cs typeface="微软雅黑"/>
               </a:rPr>
-              <a:t>抽象向热点</a:t>
+              <a:t>2026-09　腾讯 ×《和平精英》</a:t>
             </a:r>
             <a:r>
               <a:rPr sz="1300" b="0">
@@ -8654,7 +8848,87 @@
                 <a:ea typeface="微软雅黑"/>
                 <a:cs typeface="微软雅黑"/>
               </a:rPr>
-              <a:t>  《你妈》—— 靠话题度出圈，功能其实很薄</a:t>
+              <a:t>  Buddy 猫穿上游离子皮肤；开放平台首批 100+ 伙伴、10+ 品类</a:t>
+            </a:r>
+          </a:p>
+          <a:p>
+            <a:pPr>
+              <a:spcAft>
+                <a:spcPts val="1400"/>
+              </a:spcAft>
+            </a:pPr>
+            <a:r>
+              <a:rPr sz="1600" b="0">
+                <a:solidFill>
+                  <a:srgbClr val="A03A35"/>
+                </a:solidFill>
+                <a:latin typeface="微软雅黑"/>
+                <a:ea typeface="微软雅黑"/>
+                <a:cs typeface="微软雅黑"/>
+              </a:rPr>
+              <a:t>▪  </a:t>
+            </a:r>
+            <a:r>
+              <a:rPr sz="1600" b="0">
+                <a:solidFill>
+                  <a:srgbClr val="3B2B26"/>
+                </a:solidFill>
+                <a:latin typeface="微软雅黑"/>
+                <a:ea typeface="微软雅黑"/>
+                <a:cs typeface="微软雅黑"/>
+              </a:rPr>
+              <a:t>2026-03　PetClaw</a:t>
+            </a:r>
+            <a:r>
+              <a:rPr sz="1300" b="0">
+                <a:solidFill>
+                  <a:srgbClr val="6B5850"/>
+                </a:solidFill>
+                <a:latin typeface="微软雅黑"/>
+                <a:ea typeface="微软雅黑"/>
+                <a:cs typeface="微软雅黑"/>
+              </a:rPr>
+              <a:t>  自称 24 小时桌面伴侣：跨应用替你做事 + 长期记忆</a:t>
+            </a:r>
+          </a:p>
+          <a:p>
+            <a:pPr>
+              <a:spcAft>
+                <a:spcPts val="1400"/>
+              </a:spcAft>
+            </a:pPr>
+            <a:r>
+              <a:rPr sz="1600" b="0">
+                <a:solidFill>
+                  <a:srgbClr val="A03A35"/>
+                </a:solidFill>
+                <a:latin typeface="微软雅黑"/>
+                <a:ea typeface="微软雅黑"/>
+                <a:cs typeface="微软雅黑"/>
+              </a:rPr>
+              <a:t>▪  </a:t>
+            </a:r>
+            <a:r>
+              <a:rPr sz="1600" b="0">
+                <a:solidFill>
+                  <a:srgbClr val="3B2B26"/>
+                </a:solidFill>
+                <a:latin typeface="微软雅黑"/>
+                <a:ea typeface="微软雅黑"/>
+                <a:cs typeface="微软雅黑"/>
+              </a:rPr>
+              <a:t>读法：全部是「办公 / 生产力 + 一只通用宠物」</a:t>
+            </a:r>
+            <a:r>
+              <a:rPr sz="1300" b="0">
+                <a:solidFill>
+                  <a:srgbClr val="6B5850"/>
+                </a:solidFill>
+                <a:latin typeface="微软雅黑"/>
+                <a:ea typeface="微软雅黑"/>
+                <a:cs typeface="微软雅黑"/>
+              </a:rPr>
+              <a:t>  它们要的是任务；宠物是入口、是身份锚点 —— 但没有人负责回答“她是不是她本人”</a:t>
             </a:r>
           </a:p>
         </p:txBody>
@@ -8762,7 +9036,7 @@
                 <a:ea typeface="Arial"/>
                 <a:cs typeface="Arial"/>
               </a:rPr>
-              <a:t>开源桌宠：能力强在“动”，弱在“记”</a:t>
+              <a:t>市面上的四类做法</a:t>
             </a:r>
           </a:p>
         </p:txBody>
@@ -8819,6 +9093,341 @@
         </p:nvSpPr>
         <p:spPr>
           <a:xfrm>
+            <a:off x="548640" y="1600200"/>
+            <a:ext cx="11064240" cy="4480560"/>
+          </a:xfrm>
+          <a:prstGeom prst="rect">
+            <a:avLst/>
+          </a:prstGeom>
+          <a:noFill/>
+        </p:spPr>
+        <p:txBody>
+          <a:bodyPr wrap="square" anchor="t" lIns="0" rIns="0" tIns="0" bIns="0">
+            <a:spAutoFit/>
+          </a:bodyPr>
+          <a:lstStyle/>
+          <a:p>
+            <a:pPr>
+              <a:spcAft>
+                <a:spcPts val="1400"/>
+              </a:spcAft>
+            </a:pPr>
+            <a:r>
+              <a:rPr sz="1600" b="0">
+                <a:solidFill>
+                  <a:srgbClr val="A03A35"/>
+                </a:solidFill>
+                <a:latin typeface="微软雅黑"/>
+                <a:ea typeface="微软雅黑"/>
+                <a:cs typeface="微软雅黑"/>
+              </a:rPr>
+              <a:t>▪  </a:t>
+            </a:r>
+            <a:r>
+              <a:rPr sz="1600" b="0">
+                <a:solidFill>
+                  <a:srgbClr val="3B2B26"/>
+                </a:solidFill>
+                <a:latin typeface="微软雅黑"/>
+                <a:ea typeface="微软雅黑"/>
+                <a:cs typeface="微软雅黑"/>
+              </a:rPr>
+              <a:t>开源桌宠</a:t>
+            </a:r>
+            <a:r>
+              <a:rPr sz="1300" b="0">
+                <a:solidFill>
+                  <a:srgbClr val="6B5850"/>
+                </a:solidFill>
+                <a:latin typeface="微软雅黑"/>
+                <a:ea typeface="微软雅黑"/>
+                <a:cs typeface="微软雅黑"/>
+              </a:rPr>
+              <a:t>  Shimeji / Ukagaka(SSP) / VPet / uDesktopMascot</a:t>
+            </a:r>
+          </a:p>
+          <a:p>
+            <a:pPr>
+              <a:spcAft>
+                <a:spcPts val="1400"/>
+              </a:spcAft>
+            </a:pPr>
+            <a:r>
+              <a:rPr sz="1600" b="0">
+                <a:solidFill>
+                  <a:srgbClr val="A03A35"/>
+                </a:solidFill>
+                <a:latin typeface="微软雅黑"/>
+                <a:ea typeface="微软雅黑"/>
+                <a:cs typeface="微软雅黑"/>
+              </a:rPr>
+              <a:t>▪  </a:t>
+            </a:r>
+            <a:r>
+              <a:rPr sz="1600" b="0">
+                <a:solidFill>
+                  <a:srgbClr val="3B2B26"/>
+                </a:solidFill>
+                <a:latin typeface="微软雅黑"/>
+                <a:ea typeface="微软雅黑"/>
+                <a:cs typeface="微软雅黑"/>
+              </a:rPr>
+              <a:t>Steam 商业桌宠</a:t>
+            </a:r>
+            <a:r>
+              <a:rPr sz="1300" b="0">
+                <a:solidFill>
+                  <a:srgbClr val="6B5850"/>
+                </a:solidFill>
+                <a:latin typeface="微软雅黑"/>
+                <a:ea typeface="微软雅黑"/>
+                <a:cs typeface="微软雅黑"/>
+              </a:rPr>
+              <a:t>  Desktop Mate / Live2DViewerEX / Wallpaper Engine</a:t>
+            </a:r>
+          </a:p>
+          <a:p>
+            <a:pPr>
+              <a:spcAft>
+                <a:spcPts val="1400"/>
+              </a:spcAft>
+            </a:pPr>
+            <a:r>
+              <a:rPr sz="1600" b="0">
+                <a:solidFill>
+                  <a:srgbClr val="A03A35"/>
+                </a:solidFill>
+                <a:latin typeface="微软雅黑"/>
+                <a:ea typeface="微软雅黑"/>
+                <a:cs typeface="微软雅黑"/>
+              </a:rPr>
+              <a:t>▪  </a:t>
+            </a:r>
+            <a:r>
+              <a:rPr sz="1600" b="0">
+                <a:solidFill>
+                  <a:srgbClr val="3B2B26"/>
+                </a:solidFill>
+                <a:latin typeface="微软雅黑"/>
+                <a:ea typeface="微软雅黑"/>
+                <a:cs typeface="微软雅黑"/>
+              </a:rPr>
+              <a:t>AI 桌宠新秀</a:t>
+            </a:r>
+            <a:r>
+              <a:rPr sz="1300" b="0">
+                <a:solidFill>
+                  <a:srgbClr val="6B5850"/>
+                </a:solidFill>
+                <a:latin typeface="微软雅黑"/>
+                <a:ea typeface="微软雅黑"/>
+                <a:cs typeface="微软雅黑"/>
+              </a:rPr>
+              <a:t>  Open-LLM-VTuber / MateEngine（接大模型、能说话）</a:t>
+            </a:r>
+          </a:p>
+          <a:p>
+            <a:pPr>
+              <a:spcAft>
+                <a:spcPts val="1400"/>
+              </a:spcAft>
+            </a:pPr>
+            <a:r>
+              <a:rPr sz="1600" b="0">
+                <a:solidFill>
+                  <a:srgbClr val="A03A35"/>
+                </a:solidFill>
+                <a:latin typeface="微软雅黑"/>
+                <a:ea typeface="微软雅黑"/>
+                <a:cs typeface="微软雅黑"/>
+              </a:rPr>
+              <a:t>▪  </a:t>
+            </a:r>
+            <a:r>
+              <a:rPr sz="1600" b="0">
+                <a:solidFill>
+                  <a:srgbClr val="3B2B26"/>
+                </a:solidFill>
+                <a:latin typeface="微软雅黑"/>
+                <a:ea typeface="微软雅黑"/>
+                <a:cs typeface="微软雅黑"/>
+              </a:rPr>
+              <a:t>抽象向热点</a:t>
+            </a:r>
+            <a:r>
+              <a:rPr sz="1300" b="0">
+                <a:solidFill>
+                  <a:srgbClr val="6B5850"/>
+                </a:solidFill>
+                <a:latin typeface="微软雅黑"/>
+                <a:ea typeface="微软雅黑"/>
+                <a:cs typeface="微软雅黑"/>
+              </a:rPr>
+              <a:t>  《你妈》—— 靠话题度出圈，功能其实很薄</a:t>
+            </a:r>
+          </a:p>
+        </p:txBody>
+      </p:sp>
+      <p:sp>
+        <p:nvSpPr>
+          <p:cNvPr id="5" name="TextBox 4"/>
+          <p:cNvSpPr txBox="1"/>
+          <p:nvPr/>
+        </p:nvSpPr>
+        <p:spPr>
+          <a:xfrm>
+            <a:off x="548640" y="6473952"/>
+            <a:ext cx="11064240" cy="274320"/>
+          </a:xfrm>
+          <a:prstGeom prst="rect">
+            <a:avLst/>
+          </a:prstGeom>
+          <a:noFill/>
+        </p:spPr>
+        <p:txBody>
+          <a:bodyPr wrap="square" anchor="t" lIns="0" rIns="0" tIns="0" bIns="0">
+            <a:spAutoFit/>
+          </a:bodyPr>
+          <a:lstStyle/>
+          <a:p>
+            <a:pPr algn="r">
+              <a:spcAft>
+                <a:spcPts val="0"/>
+              </a:spcAft>
+            </a:pPr>
+            <a:r>
+              <a:rPr sz="1000" b="0">
+                <a:solidFill>
+                  <a:srgbClr val="6B5850"/>
+                </a:solidFill>
+                <a:latin typeface="Arial"/>
+                <a:ea typeface="Arial"/>
+                <a:cs typeface="Arial"/>
+              </a:rPr>
+              <a:t>04</a:t>
+            </a:r>
+          </a:p>
+        </p:txBody>
+      </p:sp>
+    </p:spTree>
+  </p:cSld>
+  <p:clrMapOvr>
+    <a:masterClrMapping/>
+  </p:clrMapOvr>
+</p:sld>
+</file>
+
+<file path=ppt/slides/slide5.xml><?xml version="1.0" encoding="utf-8"?>
+<p:sld xmlns:a="http://schemas.openxmlformats.org/drawingml/2006/main" xmlns:p="http://schemas.openxmlformats.org/presentationml/2006/main" xmlns:r="http://schemas.openxmlformats.org/officeDocument/2006/relationships">
+  <p:cSld>
+    <p:bg>
+      <p:bgPr>
+        <a:solidFill>
+          <a:srgbClr val="F7F1EA"/>
+        </a:solidFill>
+        <a:effectLst/>
+      </p:bgPr>
+    </p:bg>
+    <p:spTree>
+      <p:nvGrpSpPr>
+        <p:cNvPr id="1" name=""/>
+        <p:cNvGrpSpPr/>
+        <p:nvPr/>
+      </p:nvGrpSpPr>
+      <p:grpSpPr/>
+      <p:sp>
+        <p:nvSpPr>
+          <p:cNvPr id="2" name="TextBox 1"/>
+          <p:cNvSpPr txBox="1"/>
+          <p:nvPr/>
+        </p:nvSpPr>
+        <p:spPr>
+          <a:xfrm>
+            <a:off x="548640" y="502920"/>
+            <a:ext cx="11064240" cy="1005840"/>
+          </a:xfrm>
+          <a:prstGeom prst="rect">
+            <a:avLst/>
+          </a:prstGeom>
+          <a:noFill/>
+        </p:spPr>
+        <p:txBody>
+          <a:bodyPr wrap="square" anchor="t" lIns="0" rIns="0" tIns="0" bIns="0">
+            <a:spAutoFit/>
+          </a:bodyPr>
+          <a:lstStyle/>
+          <a:p>
+            <a:pPr algn="l">
+              <a:spcAft>
+                <a:spcPts val="0"/>
+              </a:spcAft>
+            </a:pPr>
+            <a:r>
+              <a:rPr sz="3000" b="1">
+                <a:solidFill>
+                  <a:srgbClr val="3B2B26"/>
+                </a:solidFill>
+                <a:latin typeface="Arial"/>
+                <a:ea typeface="Arial"/>
+                <a:cs typeface="Arial"/>
+              </a:rPr>
+              <a:t>开源桌宠：能力强在“动”，弱在“记”</a:t>
+            </a:r>
+          </a:p>
+        </p:txBody>
+      </p:sp>
+      <p:sp>
+        <p:nvSpPr>
+          <p:cNvPr id="3" name="Rectangle 2"/>
+          <p:cNvSpPr/>
+          <p:nvPr/>
+        </p:nvSpPr>
+        <p:spPr>
+          <a:xfrm>
+            <a:off x="548640" y="1069848"/>
+            <a:ext cx="1005840" cy="53340"/>
+          </a:xfrm>
+          <a:prstGeom prst="rect">
+            <a:avLst/>
+          </a:prstGeom>
+          <a:solidFill>
+            <a:srgbClr val="A03A35"/>
+          </a:solidFill>
+          <a:ln>
+            <a:noFill/>
+          </a:ln>
+          <a:effectLst/>
+        </p:spPr>
+        <p:style>
+          <a:lnRef idx="1">
+            <a:schemeClr val="accent1"/>
+          </a:lnRef>
+          <a:fillRef idx="3">
+            <a:schemeClr val="accent1"/>
+          </a:fillRef>
+          <a:effectRef idx="2">
+            <a:schemeClr val="accent1"/>
+          </a:effectRef>
+          <a:fontRef idx="minor">
+            <a:schemeClr val="lt1"/>
+          </a:fontRef>
+        </p:style>
+        <p:txBody>
+          <a:bodyPr rtlCol="0" anchor="ctr"/>
+          <a:lstStyle/>
+          <a:p>
+            <a:pPr algn="ctr"/>
+          </a:p>
+        </p:txBody>
+      </p:sp>
+      <p:sp>
+        <p:nvSpPr>
+          <p:cNvPr id="4" name="TextBox 3"/>
+          <p:cNvSpPr txBox="1"/>
+          <p:nvPr/>
+        </p:nvSpPr>
+        <p:spPr>
+          <a:xfrm>
             <a:off x="548640" y="1645920"/>
             <a:ext cx="5394960" cy="548640"/>
           </a:xfrm>
@@ -9303,7 +9912,7 @@
                 <a:ea typeface="Arial"/>
                 <a:cs typeface="Arial"/>
               </a:rPr>
-              <a:t>04</a:t>
+              <a:t>05</a:t>
             </a:r>
           </a:p>
         </p:txBody>
@@ -9316,7 +9925,7 @@
 </p:sld>
 </file>
 
-<file path=ppt/slides/slide5.xml><?xml version="1.0" encoding="utf-8"?>
+<file path=ppt/slides/slide6.xml><?xml version="1.0" encoding="utf-8"?>
 <p:sld xmlns:a="http://schemas.openxmlformats.org/drawingml/2006/main" xmlns:p="http://schemas.openxmlformats.org/presentationml/2006/main" xmlns:r="http://schemas.openxmlformats.org/officeDocument/2006/relationships">
   <p:cSld>
     <p:bg>
@@ -9911,7 +10520,7 @@
                 <a:ea typeface="Arial"/>
                 <a:cs typeface="Arial"/>
               </a:rPr>
-              <a:t>05</a:t>
+              <a:t>06</a:t>
             </a:r>
           </a:p>
         </p:txBody>
@@ -9924,7 +10533,7 @@
 </p:sld>
 </file>
 
-<file path=ppt/slides/slide6.xml><?xml version="1.0" encoding="utf-8"?>
+<file path=ppt/slides/slide7.xml><?xml version="1.0" encoding="utf-8"?>
 <p:sld xmlns:a="http://schemas.openxmlformats.org/drawingml/2006/main" xmlns:p="http://schemas.openxmlformats.org/presentationml/2006/main" xmlns:r="http://schemas.openxmlformats.org/officeDocument/2006/relationships">
   <p:cSld>
     <p:bg>
@@ -10246,7 +10855,7 @@
                 <a:ea typeface="Arial"/>
                 <a:cs typeface="Arial"/>
               </a:rPr>
-              <a:t>06</a:t>
+              <a:t>07</a:t>
             </a:r>
           </a:p>
         </p:txBody>
@@ -10259,7 +10868,7 @@
 </p:sld>
 </file>
 
-<file path=ppt/slides/slide7.xml><?xml version="1.0" encoding="utf-8"?>
+<file path=ppt/slides/slide8.xml><?xml version="1.0" encoding="utf-8"?>
 <p:sld xmlns:a="http://schemas.openxmlformats.org/drawingml/2006/main" xmlns:p="http://schemas.openxmlformats.org/presentationml/2006/main" xmlns:r="http://schemas.openxmlformats.org/officeDocument/2006/relationships">
   <p:cSld>
     <p:bg>
@@ -10313,7 +10922,7 @@
                 <a:ea typeface="Arial"/>
                 <a:cs typeface="Arial"/>
               </a:rPr>
-              <a:t>横向对比：我们站在什么位置</a:t>
+              <a:t>我们的位置：办公线做「任务」，我们做「关系」</a:t>
             </a:r>
           </a:p>
         </p:txBody>
@@ -10409,7 +11018,7 @@
                 <a:ea typeface="微软雅黑"/>
                 <a:cs typeface="微软雅黑"/>
               </a:rPr>
-              <a:t>形象</a:t>
+              <a:t>主张</a:t>
             </a:r>
             <a:r>
               <a:rPr sz="1300" b="0">
@@ -10420,7 +11029,7 @@
                 <a:ea typeface="微软雅黑"/>
                 <a:cs typeface="微软雅黑"/>
               </a:rPr>
-              <a:t>  Live2D + 2D 立绘双形态，可换装、随情绪联动</a:t>
+              <a:t>  把「角色的人格连续性」当变量：她是不是她本人、还记不记得你</a:t>
             </a:r>
           </a:p>
           <a:p>
@@ -10449,7 +11058,7 @@
                 <a:ea typeface="微软雅黑"/>
                 <a:cs typeface="微软雅黑"/>
               </a:rPr>
-              <a:t>长期记忆与作息</a:t>
+              <a:t>对照：办公线</a:t>
             </a:r>
             <a:r>
               <a:rPr sz="1300" b="0">
@@ -10460,7 +11069,7 @@
                 <a:ea typeface="微软雅黑"/>
                 <a:cs typeface="微软雅黑"/>
               </a:rPr>
-              <a:t>  会攒关于主人的事、写日记、记习惯</a:t>
+              <a:t>  腾讯 / Anthropic / OpenAI / 仓鼠元元的宠物是通用吉祥物，指标是效率与留存</a:t>
             </a:r>
           </a:p>
           <a:p>
@@ -10489,7 +11098,7 @@
                 <a:ea typeface="微软雅黑"/>
                 <a:cs typeface="微软雅黑"/>
               </a:rPr>
-              <a:t>聊天软件打通</a:t>
+              <a:t>形象</a:t>
             </a:r>
             <a:r>
               <a:rPr sz="1300" b="0">
@@ -10500,7 +11109,7 @@
                 <a:ea typeface="微软雅黑"/>
                 <a:cs typeface="微软雅黑"/>
               </a:rPr>
-              <a:t>  QQ / 微信桥接，QQ 侧立绘与桌宠同一套装扮</a:t>
+              <a:t>  Live2D + 2D 立绘双形态，可换装、随情绪联动；QQ 侧与桌宠同一套装扮</a:t>
             </a:r>
           </a:p>
           <a:p>
@@ -10529,7 +11138,7 @@
                 <a:ea typeface="微软雅黑"/>
                 <a:cs typeface="微软雅黑"/>
               </a:rPr>
-              <a:t>真声线</a:t>
+              <a:t>人格与记忆</a:t>
             </a:r>
             <a:r>
               <a:rPr sz="1300" b="0">
@@ -10540,7 +11149,7 @@
                 <a:ea typeface="微软雅黑"/>
                 <a:cs typeface="微软雅黑"/>
               </a:rPr>
-              <a:t>  角色专属 GPT-SoVITS 模型（她自己的声音）</a:t>
+              <a:t>  固定人设不 OOC、角色专属 GPT-SoVITS 声线、长期记忆与关系值（按相处证据抬升）</a:t>
             </a:r>
           </a:p>
           <a:p>
@@ -10569,7 +11178,7 @@
                 <a:ea typeface="微软雅黑"/>
                 <a:cs typeface="微软雅黑"/>
               </a:rPr>
-              <a:t>桌面操作</a:t>
+              <a:t>出桌面</a:t>
             </a:r>
             <a:r>
               <a:rPr sz="1300" b="0">
@@ -10580,7 +11189,7 @@
                 <a:ea typeface="微软雅黑"/>
                 <a:cs typeface="微软雅黑"/>
               </a:rPr>
-              <a:t>  键鼠 / 看屏幕 / 文件只读访问</a:t>
+              <a:t>  QQ / 微信桥接同一套人设与记忆；手机端共用同一套协议与记忆文件</a:t>
             </a:r>
           </a:p>
           <a:p>
@@ -10609,7 +11218,7 @@
                 <a:ea typeface="微软雅黑"/>
                 <a:cs typeface="微软雅黑"/>
               </a:rPr>
-              <a:t>手机端</a:t>
+              <a:t>桌面操作</a:t>
             </a:r>
             <a:r>
               <a:rPr sz="1300" b="0">
@@ -10620,7 +11229,7 @@
                 <a:ea typeface="微软雅黑"/>
                 <a:cs typeface="微软雅黑"/>
               </a:rPr>
-              <a:t>  安卓端已在推进（同一套后端协议）</a:t>
+              <a:t>  键鼠 / 看屏幕 / 文件只读访问 —— 能做事的角色，而不是只会聊天的窗口</a:t>
             </a:r>
           </a:p>
           <a:p>
@@ -10649,7 +11258,7 @@
                 <a:ea typeface="微软雅黑"/>
                 <a:cs typeface="微软雅黑"/>
               </a:rPr>
-              <a:t>诚实定位：并非首创</a:t>
+              <a:t>诚实边界</a:t>
             </a:r>
             <a:r>
               <a:rPr sz="1300" b="0">
@@ -10660,7 +11269,7 @@
                 <a:ea typeface="微软雅黑"/>
                 <a:cs typeface="微软雅黑"/>
               </a:rPr>
-              <a:t>  但已进入极稀疏地带——唯一查到做齐且仍在活跃的是 super-agent-party</a:t>
+              <a:t>  并非首创：唯一查到把这几条同时做齐且活跃的是 super-agent-party（详见备注）</a:t>
             </a:r>
           </a:p>
         </p:txBody>
@@ -10701,7 +11310,7 @@
                 <a:ea typeface="Arial"/>
                 <a:cs typeface="Arial"/>
               </a:rPr>
-              <a:t>07</a:t>
+              <a:t>08</a:t>
             </a:r>
           </a:p>
         </p:txBody>
@@ -10714,7 +11323,7 @@
 </p:sld>
 </file>
 
-<file path=ppt/slides/slide8.xml><?xml version="1.0" encoding="utf-8"?>
+<file path=ppt/slides/slide9.xml><?xml version="1.0" encoding="utf-8"?>
 <p:sld xmlns:a="http://schemas.openxmlformats.org/drawingml/2006/main" xmlns:p="http://schemas.openxmlformats.org/presentationml/2006/main" xmlns:r="http://schemas.openxmlformats.org/officeDocument/2006/relationships">
   <p:cSld>
     <p:bg>
@@ -10771,7 +11380,7 @@
                 <a:ea typeface="Arial"/>
                 <a:cs typeface="Arial"/>
               </a:rPr>
-              <a:t>“别人做「桌面上的形象」，我们做「住在电脑里的人」”</a:t>
+              <a:t>“大厂在给 AI 装一只宠物；我们做的是一个人”</a:t>
             </a:r>
           </a:p>
           <a:p>
@@ -10789,7 +11398,7 @@
                 <a:ea typeface="Arial"/>
                 <a:cs typeface="Arial"/>
               </a:rPr>
-              <a:t>—— 定位：整合者，而非首创者</a:t>
+              <a:t>—— 她在办公线是吉祥物，在我们这儿是角色</a:t>
             </a:r>
           </a:p>
         </p:txBody>
@@ -10830,115 +11439,7 @@
                 <a:ea typeface="Arial"/>
                 <a:cs typeface="Arial"/>
               </a:rPr>
-              <a:t>08</a:t>
-            </a:r>
-          </a:p>
-        </p:txBody>
-      </p:sp>
-    </p:spTree>
-  </p:cSld>
-  <p:clrMapOvr>
-    <a:masterClrMapping/>
-  </p:clrMapOvr>
-</p:sld>
-</file>
-
-<file path=ppt/slides/slide9.xml><?xml version="1.0" encoding="utf-8"?>
-<p:sld xmlns:a="http://schemas.openxmlformats.org/drawingml/2006/main" xmlns:p="http://schemas.openxmlformats.org/presentationml/2006/main" xmlns:r="http://schemas.openxmlformats.org/officeDocument/2006/relationships">
-  <p:cSld>
-    <p:bg>
-      <p:bgPr>
-        <a:solidFill>
-          <a:srgbClr val="3B2B26"/>
-        </a:solidFill>
-        <a:effectLst/>
-      </p:bgPr>
-    </p:bg>
-    <p:spTree>
-      <p:nvGrpSpPr>
-        <p:cNvPr id="1" name=""/>
-        <p:cNvGrpSpPr/>
-        <p:nvPr/>
-      </p:nvGrpSpPr>
-      <p:grpSpPr/>
-      <p:sp>
-        <p:nvSpPr>
-          <p:cNvPr id="2" name="TextBox 1"/>
-          <p:cNvSpPr txBox="1"/>
-          <p:nvPr/>
-        </p:nvSpPr>
-        <p:spPr>
-          <a:xfrm>
-            <a:off x="822960" y="2011680"/>
-            <a:ext cx="10058400" cy="1280160"/>
-          </a:xfrm>
-          <a:prstGeom prst="rect">
-            <a:avLst/>
-          </a:prstGeom>
-          <a:noFill/>
-        </p:spPr>
-        <p:txBody>
-          <a:bodyPr wrap="square" anchor="t" lIns="0" rIns="0" tIns="0" bIns="0">
-            <a:spAutoFit/>
-          </a:bodyPr>
-          <a:lstStyle/>
-          <a:p>
-            <a:pPr algn="l">
-              <a:spcAft>
-                <a:spcPts val="0"/>
-              </a:spcAft>
-            </a:pPr>
-            <a:r>
-              <a:rPr sz="6000" b="1">
-                <a:solidFill>
-                  <a:srgbClr val="A03A35"/>
-                </a:solidFill>
-                <a:latin typeface="Arial"/>
-                <a:ea typeface="Arial"/>
-                <a:cs typeface="Arial"/>
-              </a:rPr>
-              <a:t>02</a:t>
-            </a:r>
-          </a:p>
-        </p:txBody>
-      </p:sp>
-      <p:sp>
-        <p:nvSpPr>
-          <p:cNvPr id="3" name="TextBox 2"/>
-          <p:cNvSpPr txBox="1"/>
-          <p:nvPr/>
-        </p:nvSpPr>
-        <p:spPr>
-          <a:xfrm>
-            <a:off x="822960" y="3383280"/>
-            <a:ext cx="10515600" cy="1097280"/>
-          </a:xfrm>
-          <a:prstGeom prst="rect">
-            <a:avLst/>
-          </a:prstGeom>
-          <a:noFill/>
-        </p:spPr>
-        <p:txBody>
-          <a:bodyPr wrap="square" anchor="t" lIns="0" rIns="0" tIns="0" bIns="0">
-            <a:spAutoFit/>
-          </a:bodyPr>
-          <a:lstStyle/>
-          <a:p>
-            <a:pPr algn="l">
-              <a:spcAft>
-                <a:spcPts val="0"/>
-              </a:spcAft>
-            </a:pPr>
-            <a:r>
-              <a:rPr sz="3400" b="1">
-                <a:solidFill>
-                  <a:srgbClr val="F7F1EA"/>
-                </a:solidFill>
-                <a:latin typeface="Arial"/>
-                <a:ea typeface="Arial"/>
-                <a:cs typeface="Arial"/>
-              </a:rPr>
-              <a:t>功能展示与实现方法</a:t>
+              <a:t>09</a:t>
             </a:r>
           </a:p>
         </p:txBody>

--- a/dev/ppt/out/Deck.pptx
+++ b/dev/ppt/out/Deck.pptx
@@ -27,6 +27,7 @@
     <p:sldId id="275" r:id="rId26"/>
     <p:sldId id="276" r:id="rId27"/>
     <p:sldId id="277" r:id="rId28"/>
+    <p:sldId id="278" r:id="rId29"/>
   </p:sldIdLst>
   <p:sldSz cx="12191695" cy="6858000" type="screen4x3"/>
   <p:notesSz cx="6858000" cy="9144000"/>
@@ -593,7 +594,17 @@
           <a:lstStyle/>
           <a:p>
             <a:r>
-              <a:t>下面进第二部分：她具体能做什么，以及这些是怎么实现的。</a:t>
+              <a:t>这句话是今天最想留下的一句：大厂在给 AI 装一只宠物，我们做的是一个人。</a:t>
+            </a:r>
+          </a:p>
+          <a:p>
+            <a:r>
+              <a:t>腾讯、Anthropic、OpenAI 都在把宠物放进办公工具——宠物是入口、是身份锚点，但那是一只通用的猫。没有人负责回答“她还是不是她本人”。</a:t>
+            </a:r>
+          </a:p>
+          <a:p>
+            <a:r>
+              <a:t>我们的全部工作都在这个问题上：固定的人格、固定的声线、跨端的长期记忆。</a:t>
             </a:r>
           </a:p>
         </p:txBody>
@@ -663,7 +674,7 @@
           <a:lstStyle/>
           <a:p>
             <a:r>
-              <a:t>她目前能做的五件事：有形象地陪着、用自己的声音说话、记得住我、能替我干活、还能出桌面去 QQ/微信里继续聊。</a:t>
+              <a:t>下面进第二部分：她具体能做什么，以及这些是怎么实现的。</a:t>
             </a:r>
           </a:p>
         </p:txBody>
@@ -733,7 +744,7 @@
           <a:lstStyle/>
           <a:p>
             <a:r>
-              <a:t>形象这块的核心设计是：**装扮即数据**。衣服、发型、装饰、姿势都是层号，换装就是换层再合成，所以 Live2D 和 2D 立绘能共用同一套装扮。语音是角色专属模型，独立服务常驻。</a:t>
+              <a:t>她目前能做的五件事：有形象地陪着、用自己的声音说话、记得住我、能替我干活、还能出桌面去 QQ/微信里继续聊。</a:t>
             </a:r>
           </a:p>
         </p:txBody>
@@ -803,7 +814,7 @@
           <a:lstStyle/>
           <a:p>
             <a:r>
-              <a:t>记忆是分层的：对话记忆、长期记忆、日记、状态快照各管一段。关系值按真实相处证据抬升，不靠嘴甜。她会自己补课、自己归纳关于我的事。</a:t>
+              <a:t>形象这块的核心设计是：**装扮即数据**。衣服、发型、装饰、姿势都是层号，换装就是换层再合成，所以 Live2D 和 2D 立绘能共用同一套装扮。语音是角色专属模型，独立服务常驻。</a:t>
             </a:r>
           </a:p>
         </p:txBody>
@@ -873,7 +884,7 @@
           <a:lstStyle/>
           <a:p>
             <a:r>
-              <a:t>出桌面这块：QQ/微信桥接用同一套人设和记忆，连立绘都是同一件衣服。手机端走同一套后端协议。</a:t>
+              <a:t>记忆是分层的：对话记忆、长期记忆、日记、状态快照各管一段。关系值按真实相处证据抬升，不靠嘴甜。她会自己补课、自己归纳关于我的事。</a:t>
             </a:r>
           </a:p>
         </p:txBody>
@@ -943,7 +954,7 @@
           <a:lstStyle/>
           <a:p>
             <a:r>
-              <a:t>工程这块我想强调一句：这不是『我这儿能跑』。仓库自带 381 项自检，一条命令可复现，现在是全绿。换装差异、立绘底色这种观感问题，我们用像素级比对来验收。</a:t>
+              <a:t>出桌面这块：QQ/微信桥接用同一套人设和记忆，连立绘都是同一件衣服。手机端走同一套后端协议。</a:t>
             </a:r>
           </a:p>
         </p:txBody>
@@ -1013,7 +1024,7 @@
           <a:lstStyle/>
           <a:p>
             <a:r>
-              <a:t>第三部分，未来规划。</a:t>
+              <a:t>工程这块我想强调一句：这不是『我这儿能跑』。仓库自带 381 项自检，一条命令可复现，现在是全绿。换装差异、立绘底色这种观感问题，我们用像素级比对来验收。</a:t>
             </a:r>
           </a:p>
         </p:txBody>
@@ -1083,7 +1094,7 @@
           <a:lstStyle/>
           <a:p>
             <a:r>
-              <a:t>近期三件事：手机端对齐与优化、3D 模型方案评估（建模成本要算清楚，先验证再投入）、多角色支持。</a:t>
+              <a:t>第三部分，未来规划。</a:t>
             </a:r>
           </a:p>
         </p:txBody>
@@ -1153,7 +1164,7 @@
           <a:lstStyle/>
           <a:p>
             <a:r>
-              <a:t>中期想让互动更自然：手部动捕驱动视线跟随、识别动作并给反应。摄像头链路现在已经通了。</a:t>
+              <a:t>近期三件事：手机端对齐与优化、3D 模型方案评估（建模成本要算清楚，先验证再投入）、多角色支持。</a:t>
             </a:r>
           </a:p>
         </p:txBody>
@@ -1223,7 +1234,7 @@
           <a:lstStyle/>
           <a:p>
             <a:r>
-              <a:t>另一条中期的路是毫米波雷达：不依赖光线和镜头、隐私友好、能全天运行。这里要诚实：毫米波做隐私友好交互已经有人做了（今年 9 月的 mmHRI，隔着帘子做机器人操作，动作识别 85%），所以我们不主张“第一次用毫米波”。我们的问题不同——他们做操纵、指标是准确率；我们做陪伴、指标是关系感知和打扰容忍度。这条线能不能立住，取决于接下来的用户研究。</a:t>
+              <a:t>中期想让互动更自然：手部动捕驱动视线跟随、识别动作并给反应。摄像头链路现在已经通了。</a:t>
             </a:r>
           </a:p>
         </p:txBody>
@@ -1363,7 +1374,7 @@
           <a:lstStyle/>
           <a:p>
             <a:r>
-              <a:t>远期是形态自由：AR 呈现（同类多是 iPhone 生态，安卓侧还是空白）、系统级常驻、以及角色与语音都能替换的开放生态。</a:t>
+              <a:t>另一条中期的路是毫米波雷达：不依赖光线和镜头、隐私友好、能全天运行。这里要诚实：毫米波做隐私友好交互已经有人做了（今年 9 月的 mmHRI，隔着帘子做机器人操作，动作识别 85%），所以我们不主张“第一次用毫米波”。我们的问题不同——他们做操纵、指标是准确率；我们做陪伴、指标是关系感知和打扰容忍度。这条线能不能立住，取决于接下来的用户研究。</a:t>
             </a:r>
           </a:p>
         </p:txBody>
@@ -1433,7 +1444,7 @@
           <a:lstStyle/>
           <a:p>
             <a:r>
-              <a:t>一句话收束路线取舍：先让她真的住在电脑里，再让她走到你身边。</a:t>
+              <a:t>远期是形态自由：AR 呈现（同类多是 iPhone 生态，安卓侧还是空白）、系统级常驻、以及角色与语音都能替换的开放生态。</a:t>
             </a:r>
           </a:p>
         </p:txBody>
@@ -1503,6 +1514,76 @@
           <a:lstStyle/>
           <a:p>
             <a:r>
+              <a:t>一句话收束路线取舍：先让她真的住在电脑里，再让她走到你身边。</a:t>
+            </a:r>
+          </a:p>
+        </p:txBody>
+      </p:sp>
+      <p:sp>
+        <p:nvSpPr>
+          <p:cNvPr id="4" name="Slide Number Placeholder 3"/>
+          <p:cNvSpPr>
+            <a:spLocks noGrp="1"/>
+          </p:cNvSpPr>
+          <p:nvPr>
+            <p:ph type="sldNum" idx="5" sz="quarter"/>
+          </p:nvPr>
+        </p:nvSpPr>
+        <p:spPr/>
+      </p:sp>
+    </p:spTree>
+  </p:cSld>
+  <p:clrMapOvr>
+    <a:masterClrMapping/>
+  </p:clrMapOvr>
+</p:notes>
+</file>
+
+<file path=ppt/notesSlides/notesSlide23.xml><?xml version="1.0" encoding="utf-8"?>
+<p:notes xmlns:a="http://schemas.openxmlformats.org/drawingml/2006/main" xmlns:p="http://schemas.openxmlformats.org/presentationml/2006/main" xmlns:r="http://schemas.openxmlformats.org/officeDocument/2006/relationships">
+  <p:cSld>
+    <p:spTree>
+      <p:nvGrpSpPr>
+        <p:cNvPr id="1" name=""/>
+        <p:cNvGrpSpPr/>
+        <p:nvPr/>
+      </p:nvGrpSpPr>
+      <p:grpSpPr>
+        <a:xfrm>
+          <a:off x="0" y="0"/>
+          <a:ext cx="0" cy="0"/>
+          <a:chOff x="0" y="0"/>
+          <a:chExt cx="0" cy="0"/>
+        </a:xfrm>
+      </p:grpSpPr>
+      <p:sp>
+        <p:nvSpPr>
+          <p:cNvPr id="2" name="Slide Image Placeholder 1"/>
+          <p:cNvSpPr>
+            <a:spLocks noGrp="1"/>
+          </p:cNvSpPr>
+          <p:nvPr>
+            <p:ph type="sldImg" idx="2"/>
+          </p:nvPr>
+        </p:nvSpPr>
+        <p:spPr/>
+      </p:sp>
+      <p:sp>
+        <p:nvSpPr>
+          <p:cNvPr id="3" name="Notes Placeholder 2"/>
+          <p:cNvSpPr>
+            <a:spLocks noGrp="1"/>
+          </p:cNvSpPr>
+          <p:nvPr>
+            <p:ph type="body" idx="3" sz="quarter"/>
+          </p:nvPr>
+        </p:nvSpPr>
+        <p:spPr/>
+        <p:txBody>
+          <a:bodyPr/>
+          <a:lstStyle/>
+          <a:p>
+            <a:r>
               <a:t>最后留现场演示：形象、换装、对话、记忆、桌面操作。</a:t>
             </a:r>
           </a:p>
@@ -1998,17 +2079,17 @@
           <a:lstStyle/>
           <a:p>
             <a:r>
-              <a:t>这句话是今天最想留下的一句：大厂在给 AI 装一只宠物，我们做的是一个人。</a:t>
-            </a:r>
-          </a:p>
-          <a:p>
-            <a:r>
-              <a:t>腾讯、Anthropic、OpenAI 都在把宠物放进办公工具——宠物是入口、是身份锚点，但那是一只通用的猫。没有人负责回答“她还是不是她本人”。</a:t>
-            </a:r>
-          </a:p>
-          <a:p>
-            <a:r>
-              <a:t>我们的全部工作都在这个问题上：固定的人格、固定的声线、跨端的长期记忆。</a:t>
+              <a:t>同一件事，两种做法，放在一起看最清楚。</a:t>
+            </a:r>
+          </a:p>
+          <a:p>
+            <a:r>
+              <a:t>左边是办公线：宠物是通用吉祥物，目标是任务，指标是效率和留存——所以换皮、联名都不影响产品成立。</a:t>
+            </a:r>
+          </a:p>
+          <a:p>
+            <a:r>
+              <a:t>右边是我们：角色是具体的人，人格连续性是核心变量，指标是关系感知和打扰容忍度。这一页就是回答“有什么是我们有、别人没有的”。</a:t>
             </a:r>
           </a:p>
         </p:txBody>
@@ -5180,6 +5261,135 @@
     <p:bg>
       <p:bgPr>
         <a:solidFill>
+          <a:srgbClr val="F7F1EA"/>
+        </a:solidFill>
+        <a:effectLst/>
+      </p:bgPr>
+    </p:bg>
+    <p:spTree>
+      <p:nvGrpSpPr>
+        <p:cNvPr id="1" name=""/>
+        <p:cNvGrpSpPr/>
+        <p:nvPr/>
+      </p:nvGrpSpPr>
+      <p:grpSpPr/>
+      <p:sp>
+        <p:nvSpPr>
+          <p:cNvPr id="2" name="TextBox 1"/>
+          <p:cNvSpPr txBox="1"/>
+          <p:nvPr/>
+        </p:nvSpPr>
+        <p:spPr>
+          <a:xfrm>
+            <a:off x="1097280" y="2103120"/>
+            <a:ext cx="9966960" cy="2377440"/>
+          </a:xfrm>
+          <a:prstGeom prst="rect">
+            <a:avLst/>
+          </a:prstGeom>
+          <a:noFill/>
+        </p:spPr>
+        <p:txBody>
+          <a:bodyPr wrap="square" anchor="ctr" lIns="0" rIns="0" tIns="0" bIns="0">
+            <a:spAutoFit/>
+          </a:bodyPr>
+          <a:lstStyle/>
+          <a:p>
+            <a:pPr algn="ctr">
+              <a:lnSpc>
+                <a:spcPct val="120000"/>
+              </a:lnSpc>
+              <a:spcAft>
+                <a:spcPts val="1400"/>
+              </a:spcAft>
+            </a:pPr>
+            <a:r>
+              <a:rPr sz="2600" b="1">
+                <a:solidFill>
+                  <a:srgbClr val="3B2B26"/>
+                </a:solidFill>
+                <a:latin typeface="Arial"/>
+                <a:ea typeface="Arial"/>
+                <a:cs typeface="Arial"/>
+              </a:rPr>
+              <a:t>“大厂在给 AI 装一只宠物；我们做的是一个人”</a:t>
+            </a:r>
+          </a:p>
+          <a:p>
+            <a:pPr algn="ctr">
+              <a:spcAft>
+                <a:spcPts val="0"/>
+              </a:spcAft>
+            </a:pPr>
+            <a:r>
+              <a:rPr sz="1400" b="0">
+                <a:solidFill>
+                  <a:srgbClr val="6B5850"/>
+                </a:solidFill>
+                <a:latin typeface="Arial"/>
+                <a:ea typeface="Arial"/>
+                <a:cs typeface="Arial"/>
+              </a:rPr>
+              <a:t>—— 她在办公线是吉祥物，在我们这儿是角色</a:t>
+            </a:r>
+          </a:p>
+        </p:txBody>
+      </p:sp>
+      <p:sp>
+        <p:nvSpPr>
+          <p:cNvPr id="3" name="TextBox 2"/>
+          <p:cNvSpPr txBox="1"/>
+          <p:nvPr/>
+        </p:nvSpPr>
+        <p:spPr>
+          <a:xfrm>
+            <a:off x="548640" y="6473952"/>
+            <a:ext cx="11064240" cy="274320"/>
+          </a:xfrm>
+          <a:prstGeom prst="rect">
+            <a:avLst/>
+          </a:prstGeom>
+          <a:noFill/>
+        </p:spPr>
+        <p:txBody>
+          <a:bodyPr wrap="square" anchor="t" lIns="0" rIns="0" tIns="0" bIns="0">
+            <a:spAutoFit/>
+          </a:bodyPr>
+          <a:lstStyle/>
+          <a:p>
+            <a:pPr algn="r">
+              <a:spcAft>
+                <a:spcPts val="0"/>
+              </a:spcAft>
+            </a:pPr>
+            <a:r>
+              <a:rPr sz="1000" b="0">
+                <a:solidFill>
+                  <a:srgbClr val="6B5850"/>
+                </a:solidFill>
+                <a:latin typeface="Arial"/>
+                <a:ea typeface="Arial"/>
+                <a:cs typeface="Arial"/>
+              </a:rPr>
+              <a:t>10</a:t>
+            </a:r>
+          </a:p>
+        </p:txBody>
+      </p:sp>
+    </p:spTree>
+  </p:cSld>
+  <p:clrMapOvr>
+    <a:masterClrMapping/>
+  </p:clrMapOvr>
+</p:sld>
+</file>
+
+<file path=ppt/slides/slide11.xml><?xml version="1.0" encoding="utf-8"?>
+<p:sld xmlns:a="http://schemas.openxmlformats.org/drawingml/2006/main" xmlns:p="http://schemas.openxmlformats.org/presentationml/2006/main" xmlns:r="http://schemas.openxmlformats.org/officeDocument/2006/relationships">
+  <p:cSld>
+    <p:bg>
+      <p:bgPr>
+        <a:solidFill>
           <a:srgbClr val="3B2B26"/>
         </a:solidFill>
         <a:effectLst/>
@@ -5282,7 +5492,7 @@
 </p:sld>
 </file>
 
-<file path=ppt/slides/slide11.xml><?xml version="1.0" encoding="utf-8"?>
+<file path=ppt/slides/slide12.xml><?xml version="1.0" encoding="utf-8"?>
 <p:sld xmlns:a="http://schemas.openxmlformats.org/drawingml/2006/main" xmlns:p="http://schemas.openxmlformats.org/presentationml/2006/main" xmlns:r="http://schemas.openxmlformats.org/officeDocument/2006/relationships">
   <p:cSld>
     <p:bg>
@@ -5644,7 +5854,7 @@
                 <a:ea typeface="Arial"/>
                 <a:cs typeface="Arial"/>
               </a:rPr>
-              <a:t>11</a:t>
+              <a:t>12</a:t>
             </a:r>
           </a:p>
         </p:txBody>
@@ -5657,7 +5867,7 @@
 </p:sld>
 </file>
 
-<file path=ppt/slides/slide12.xml><?xml version="1.0" encoding="utf-8"?>
+<file path=ppt/slides/slide13.xml><?xml version="1.0" encoding="utf-8"?>
 <p:sld xmlns:a="http://schemas.openxmlformats.org/drawingml/2006/main" xmlns:p="http://schemas.openxmlformats.org/presentationml/2006/main" xmlns:r="http://schemas.openxmlformats.org/officeDocument/2006/relationships">
   <p:cSld>
     <p:bg>
@@ -5979,7 +6189,7 @@
                 <a:ea typeface="Arial"/>
                 <a:cs typeface="Arial"/>
               </a:rPr>
-              <a:t>12</a:t>
+              <a:t>13</a:t>
             </a:r>
           </a:p>
         </p:txBody>
@@ -5992,7 +6202,7 @@
 </p:sld>
 </file>
 
-<file path=ppt/slides/slide13.xml><?xml version="1.0" encoding="utf-8"?>
+<file path=ppt/slides/slide14.xml><?xml version="1.0" encoding="utf-8"?>
 <p:sld xmlns:a="http://schemas.openxmlformats.org/drawingml/2006/main" xmlns:p="http://schemas.openxmlformats.org/presentationml/2006/main" xmlns:r="http://schemas.openxmlformats.org/officeDocument/2006/relationships">
   <p:cSld>
     <p:bg>
@@ -6314,7 +6524,7 @@
                 <a:ea typeface="Arial"/>
                 <a:cs typeface="Arial"/>
               </a:rPr>
-              <a:t>13</a:t>
+              <a:t>14</a:t>
             </a:r>
           </a:p>
         </p:txBody>
@@ -6327,7 +6537,7 @@
 </p:sld>
 </file>
 
-<file path=ppt/slides/slide14.xml><?xml version="1.0" encoding="utf-8"?>
+<file path=ppt/slides/slide15.xml><?xml version="1.0" encoding="utf-8"?>
 <p:sld xmlns:a="http://schemas.openxmlformats.org/drawingml/2006/main" xmlns:p="http://schemas.openxmlformats.org/presentationml/2006/main" xmlns:r="http://schemas.openxmlformats.org/officeDocument/2006/relationships">
   <p:cSld>
     <p:bg>
@@ -6609,7 +6819,7 @@
                 <a:ea typeface="Arial"/>
                 <a:cs typeface="Arial"/>
               </a:rPr>
-              <a:t>14</a:t>
+              <a:t>15</a:t>
             </a:r>
           </a:p>
         </p:txBody>
@@ -6622,7 +6832,7 @@
 </p:sld>
 </file>
 
-<file path=ppt/slides/slide15.xml><?xml version="1.0" encoding="utf-8"?>
+<file path=ppt/slides/slide16.xml><?xml version="1.0" encoding="utf-8"?>
 <p:sld xmlns:a="http://schemas.openxmlformats.org/drawingml/2006/main" xmlns:p="http://schemas.openxmlformats.org/presentationml/2006/main" xmlns:r="http://schemas.openxmlformats.org/officeDocument/2006/relationships">
   <p:cSld>
     <p:bg>
@@ -6944,7 +7154,7 @@
                 <a:ea typeface="Arial"/>
                 <a:cs typeface="Arial"/>
               </a:rPr>
-              <a:t>15</a:t>
+              <a:t>16</a:t>
             </a:r>
           </a:p>
         </p:txBody>
@@ -6957,7 +7167,7 @@
 </p:sld>
 </file>
 
-<file path=ppt/slides/slide16.xml><?xml version="1.0" encoding="utf-8"?>
+<file path=ppt/slides/slide17.xml><?xml version="1.0" encoding="utf-8"?>
 <p:sld xmlns:a="http://schemas.openxmlformats.org/drawingml/2006/main" xmlns:p="http://schemas.openxmlformats.org/presentationml/2006/main" xmlns:r="http://schemas.openxmlformats.org/officeDocument/2006/relationships">
   <p:cSld>
     <p:bg>
@@ -7065,7 +7275,7 @@
 </p:sld>
 </file>
 
-<file path=ppt/slides/slide17.xml><?xml version="1.0" encoding="utf-8"?>
+<file path=ppt/slides/slide18.xml><?xml version="1.0" encoding="utf-8"?>
 <p:sld xmlns:a="http://schemas.openxmlformats.org/drawingml/2006/main" xmlns:p="http://schemas.openxmlformats.org/presentationml/2006/main" xmlns:r="http://schemas.openxmlformats.org/officeDocument/2006/relationships">
   <p:cSld>
     <p:bg>
@@ -7347,7 +7557,7 @@
                 <a:ea typeface="Arial"/>
                 <a:cs typeface="Arial"/>
               </a:rPr>
-              <a:t>17</a:t>
+              <a:t>18</a:t>
             </a:r>
           </a:p>
         </p:txBody>
@@ -7360,7 +7570,7 @@
 </p:sld>
 </file>
 
-<file path=ppt/slides/slide18.xml><?xml version="1.0" encoding="utf-8"?>
+<file path=ppt/slides/slide19.xml><?xml version="1.0" encoding="utf-8"?>
 <p:sld xmlns:a="http://schemas.openxmlformats.org/drawingml/2006/main" xmlns:p="http://schemas.openxmlformats.org/presentationml/2006/main" xmlns:r="http://schemas.openxmlformats.org/officeDocument/2006/relationships">
   <p:cSld>
     <p:bg>
@@ -7642,7 +7852,7 @@
                 <a:ea typeface="Arial"/>
                 <a:cs typeface="Arial"/>
               </a:rPr>
-              <a:t>18</a:t>
+              <a:t>19</a:t>
             </a:r>
           </a:p>
         </p:txBody>
@@ -7655,7 +7865,115 @@
 </p:sld>
 </file>
 
-<file path=ppt/slides/slide19.xml><?xml version="1.0" encoding="utf-8"?>
+<file path=ppt/slides/slide2.xml><?xml version="1.0" encoding="utf-8"?>
+<p:sld xmlns:a="http://schemas.openxmlformats.org/drawingml/2006/main" xmlns:p="http://schemas.openxmlformats.org/presentationml/2006/main" xmlns:r="http://schemas.openxmlformats.org/officeDocument/2006/relationships">
+  <p:cSld>
+    <p:bg>
+      <p:bgPr>
+        <a:solidFill>
+          <a:srgbClr val="3B2B26"/>
+        </a:solidFill>
+        <a:effectLst/>
+      </p:bgPr>
+    </p:bg>
+    <p:spTree>
+      <p:nvGrpSpPr>
+        <p:cNvPr id="1" name=""/>
+        <p:cNvGrpSpPr/>
+        <p:nvPr/>
+      </p:nvGrpSpPr>
+      <p:grpSpPr/>
+      <p:sp>
+        <p:nvSpPr>
+          <p:cNvPr id="2" name="TextBox 1"/>
+          <p:cNvSpPr txBox="1"/>
+          <p:nvPr/>
+        </p:nvSpPr>
+        <p:spPr>
+          <a:xfrm>
+            <a:off x="822960" y="2011680"/>
+            <a:ext cx="10058400" cy="1280160"/>
+          </a:xfrm>
+          <a:prstGeom prst="rect">
+            <a:avLst/>
+          </a:prstGeom>
+          <a:noFill/>
+        </p:spPr>
+        <p:txBody>
+          <a:bodyPr wrap="square" anchor="t" lIns="0" rIns="0" tIns="0" bIns="0">
+            <a:spAutoFit/>
+          </a:bodyPr>
+          <a:lstStyle/>
+          <a:p>
+            <a:pPr algn="l">
+              <a:spcAft>
+                <a:spcPts val="0"/>
+              </a:spcAft>
+            </a:pPr>
+            <a:r>
+              <a:rPr sz="6000" b="1">
+                <a:solidFill>
+                  <a:srgbClr val="A03A35"/>
+                </a:solidFill>
+                <a:latin typeface="Arial"/>
+                <a:ea typeface="Arial"/>
+                <a:cs typeface="Arial"/>
+              </a:rPr>
+              <a:t>01</a:t>
+            </a:r>
+          </a:p>
+        </p:txBody>
+      </p:sp>
+      <p:sp>
+        <p:nvSpPr>
+          <p:cNvPr id="3" name="TextBox 2"/>
+          <p:cNvSpPr txBox="1"/>
+          <p:nvPr/>
+        </p:nvSpPr>
+        <p:spPr>
+          <a:xfrm>
+            <a:off x="822960" y="3383280"/>
+            <a:ext cx="10515600" cy="1097280"/>
+          </a:xfrm>
+          <a:prstGeom prst="rect">
+            <a:avLst/>
+          </a:prstGeom>
+          <a:noFill/>
+        </p:spPr>
+        <p:txBody>
+          <a:bodyPr wrap="square" anchor="t" lIns="0" rIns="0" tIns="0" bIns="0">
+            <a:spAutoFit/>
+          </a:bodyPr>
+          <a:lstStyle/>
+          <a:p>
+            <a:pPr algn="l">
+              <a:spcAft>
+                <a:spcPts val="0"/>
+              </a:spcAft>
+            </a:pPr>
+            <a:r>
+              <a:rPr sz="3400" b="1">
+                <a:solidFill>
+                  <a:srgbClr val="F7F1EA"/>
+                </a:solidFill>
+                <a:latin typeface="Arial"/>
+                <a:ea typeface="Arial"/>
+                <a:cs typeface="Arial"/>
+              </a:rPr>
+              <a:t>桌宠市场：现在都做到了哪一步</a:t>
+            </a:r>
+          </a:p>
+        </p:txBody>
+      </p:sp>
+    </p:spTree>
+  </p:cSld>
+  <p:clrMapOvr>
+    <a:masterClrMapping/>
+  </p:clrMapOvr>
+</p:sld>
+</file>
+
+<file path=ppt/slides/slide20.xml><?xml version="1.0" encoding="utf-8"?>
 <p:sld xmlns:a="http://schemas.openxmlformats.org/drawingml/2006/main" xmlns:p="http://schemas.openxmlformats.org/presentationml/2006/main" xmlns:r="http://schemas.openxmlformats.org/officeDocument/2006/relationships">
   <p:cSld>
     <p:bg>
@@ -7937,7 +8255,7 @@
                 <a:ea typeface="Arial"/>
                 <a:cs typeface="Arial"/>
               </a:rPr>
-              <a:t>19</a:t>
+              <a:t>20</a:t>
             </a:r>
           </a:p>
         </p:txBody>
@@ -7950,115 +8268,7 @@
 </p:sld>
 </file>
 
-<file path=ppt/slides/slide2.xml><?xml version="1.0" encoding="utf-8"?>
-<p:sld xmlns:a="http://schemas.openxmlformats.org/drawingml/2006/main" xmlns:p="http://schemas.openxmlformats.org/presentationml/2006/main" xmlns:r="http://schemas.openxmlformats.org/officeDocument/2006/relationships">
-  <p:cSld>
-    <p:bg>
-      <p:bgPr>
-        <a:solidFill>
-          <a:srgbClr val="3B2B26"/>
-        </a:solidFill>
-        <a:effectLst/>
-      </p:bgPr>
-    </p:bg>
-    <p:spTree>
-      <p:nvGrpSpPr>
-        <p:cNvPr id="1" name=""/>
-        <p:cNvGrpSpPr/>
-        <p:nvPr/>
-      </p:nvGrpSpPr>
-      <p:grpSpPr/>
-      <p:sp>
-        <p:nvSpPr>
-          <p:cNvPr id="2" name="TextBox 1"/>
-          <p:cNvSpPr txBox="1"/>
-          <p:nvPr/>
-        </p:nvSpPr>
-        <p:spPr>
-          <a:xfrm>
-            <a:off x="822960" y="2011680"/>
-            <a:ext cx="10058400" cy="1280160"/>
-          </a:xfrm>
-          <a:prstGeom prst="rect">
-            <a:avLst/>
-          </a:prstGeom>
-          <a:noFill/>
-        </p:spPr>
-        <p:txBody>
-          <a:bodyPr wrap="square" anchor="t" lIns="0" rIns="0" tIns="0" bIns="0">
-            <a:spAutoFit/>
-          </a:bodyPr>
-          <a:lstStyle/>
-          <a:p>
-            <a:pPr algn="l">
-              <a:spcAft>
-                <a:spcPts val="0"/>
-              </a:spcAft>
-            </a:pPr>
-            <a:r>
-              <a:rPr sz="6000" b="1">
-                <a:solidFill>
-                  <a:srgbClr val="A03A35"/>
-                </a:solidFill>
-                <a:latin typeface="Arial"/>
-                <a:ea typeface="Arial"/>
-                <a:cs typeface="Arial"/>
-              </a:rPr>
-              <a:t>01</a:t>
-            </a:r>
-          </a:p>
-        </p:txBody>
-      </p:sp>
-      <p:sp>
-        <p:nvSpPr>
-          <p:cNvPr id="3" name="TextBox 2"/>
-          <p:cNvSpPr txBox="1"/>
-          <p:nvPr/>
-        </p:nvSpPr>
-        <p:spPr>
-          <a:xfrm>
-            <a:off x="822960" y="3383280"/>
-            <a:ext cx="10515600" cy="1097280"/>
-          </a:xfrm>
-          <a:prstGeom prst="rect">
-            <a:avLst/>
-          </a:prstGeom>
-          <a:noFill/>
-        </p:spPr>
-        <p:txBody>
-          <a:bodyPr wrap="square" anchor="t" lIns="0" rIns="0" tIns="0" bIns="0">
-            <a:spAutoFit/>
-          </a:bodyPr>
-          <a:lstStyle/>
-          <a:p>
-            <a:pPr algn="l">
-              <a:spcAft>
-                <a:spcPts val="0"/>
-              </a:spcAft>
-            </a:pPr>
-            <a:r>
-              <a:rPr sz="3400" b="1">
-                <a:solidFill>
-                  <a:srgbClr val="F7F1EA"/>
-                </a:solidFill>
-                <a:latin typeface="Arial"/>
-                <a:ea typeface="Arial"/>
-                <a:cs typeface="Arial"/>
-              </a:rPr>
-              <a:t>桌宠市场：现在都做到了哪一步</a:t>
-            </a:r>
-          </a:p>
-        </p:txBody>
-      </p:sp>
-    </p:spTree>
-  </p:cSld>
-  <p:clrMapOvr>
-    <a:masterClrMapping/>
-  </p:clrMapOvr>
-</p:sld>
-</file>
-
-<file path=ppt/slides/slide20.xml><?xml version="1.0" encoding="utf-8"?>
+<file path=ppt/slides/slide21.xml><?xml version="1.0" encoding="utf-8"?>
 <p:sld xmlns:a="http://schemas.openxmlformats.org/drawingml/2006/main" xmlns:p="http://schemas.openxmlformats.org/presentationml/2006/main" xmlns:r="http://schemas.openxmlformats.org/officeDocument/2006/relationships">
   <p:cSld>
     <p:bg>
@@ -8340,7 +8550,7 @@
                 <a:ea typeface="Arial"/>
                 <a:cs typeface="Arial"/>
               </a:rPr>
-              <a:t>20</a:t>
+              <a:t>21</a:t>
             </a:r>
           </a:p>
         </p:txBody>
@@ -8353,7 +8563,7 @@
 </p:sld>
 </file>
 
-<file path=ppt/slides/slide21.xml><?xml version="1.0" encoding="utf-8"?>
+<file path=ppt/slides/slide22.xml><?xml version="1.0" encoding="utf-8"?>
 <p:sld xmlns:a="http://schemas.openxmlformats.org/drawingml/2006/main" xmlns:p="http://schemas.openxmlformats.org/presentationml/2006/main" xmlns:r="http://schemas.openxmlformats.org/officeDocument/2006/relationships">
   <p:cSld>
     <p:bg>
@@ -8469,7 +8679,7 @@
                 <a:ea typeface="Arial"/>
                 <a:cs typeface="Arial"/>
               </a:rPr>
-              <a:t>21</a:t>
+              <a:t>22</a:t>
             </a:r>
           </a:p>
         </p:txBody>
@@ -8482,7 +8692,7 @@
 </p:sld>
 </file>
 
-<file path=ppt/slides/slide22.xml><?xml version="1.0" encoding="utf-8"?>
+<file path=ppt/slides/slide23.xml><?xml version="1.0" encoding="utf-8"?>
 <p:sld xmlns:a="http://schemas.openxmlformats.org/drawingml/2006/main" xmlns:p="http://schemas.openxmlformats.org/presentationml/2006/main" xmlns:r="http://schemas.openxmlformats.org/officeDocument/2006/relationships">
   <p:cSld>
     <p:bg>
@@ -11349,8 +11559,8 @@
         </p:nvSpPr>
         <p:spPr>
           <a:xfrm>
-            <a:off x="1097280" y="2103120"/>
-            <a:ext cx="9966960" cy="2377440"/>
+            <a:off x="548640" y="502920"/>
+            <a:ext cx="11064240" cy="1005840"/>
           </a:xfrm>
           <a:prstGeom prst="rect">
             <a:avLst/>
@@ -11358,54 +11568,693 @@
           <a:noFill/>
         </p:spPr>
         <p:txBody>
-          <a:bodyPr wrap="square" anchor="ctr" lIns="0" rIns="0" tIns="0" bIns="0">
+          <a:bodyPr wrap="square" anchor="t" lIns="0" rIns="0" tIns="0" bIns="0">
             <a:spAutoFit/>
           </a:bodyPr>
           <a:lstStyle/>
           <a:p>
-            <a:pPr algn="ctr">
-              <a:lnSpc>
-                <a:spcPct val="120000"/>
-              </a:lnSpc>
-              <a:spcAft>
-                <a:spcPts val="1400"/>
-              </a:spcAft>
-            </a:pPr>
-            <a:r>
-              <a:rPr sz="2600" b="1">
-                <a:solidFill>
-                  <a:srgbClr val="3B2B26"/>
-                </a:solidFill>
-                <a:latin typeface="Arial"/>
-                <a:ea typeface="Arial"/>
-                <a:cs typeface="Arial"/>
-              </a:rPr>
-              <a:t>“大厂在给 AI 装一只宠物；我们做的是一个人”</a:t>
-            </a:r>
-          </a:p>
-          <a:p>
-            <a:pPr algn="ctr">
+            <a:pPr algn="l">
               <a:spcAft>
                 <a:spcPts val="0"/>
               </a:spcAft>
             </a:pPr>
             <a:r>
-              <a:rPr sz="1400" b="0">
-                <a:solidFill>
-                  <a:srgbClr val="6B5850"/>
+              <a:rPr sz="3000" b="1">
+                <a:solidFill>
+                  <a:srgbClr val="3B2B26"/>
                 </a:solidFill>
                 <a:latin typeface="Arial"/>
                 <a:ea typeface="Arial"/>
                 <a:cs typeface="Arial"/>
               </a:rPr>
-              <a:t>—— 她在办公线是吉祥物，在我们这儿是角色</a:t>
-            </a:r>
-          </a:p>
-        </p:txBody>
-      </p:sp>
-      <p:sp>
-        <p:nvSpPr>
-          <p:cNvPr id="3" name="TextBox 2"/>
+              <a:t>同一个「宠物」位置，两种完全不同的做法</a:t>
+            </a:r>
+          </a:p>
+        </p:txBody>
+      </p:sp>
+      <p:sp>
+        <p:nvSpPr>
+          <p:cNvPr id="3" name="Rectangle 2"/>
+          <p:cNvSpPr/>
+          <p:nvPr/>
+        </p:nvSpPr>
+        <p:spPr>
+          <a:xfrm>
+            <a:off x="548640" y="1069848"/>
+            <a:ext cx="1005840" cy="53340"/>
+          </a:xfrm>
+          <a:prstGeom prst="rect">
+            <a:avLst/>
+          </a:prstGeom>
+          <a:solidFill>
+            <a:srgbClr val="A03A35"/>
+          </a:solidFill>
+          <a:ln>
+            <a:noFill/>
+          </a:ln>
+          <a:effectLst/>
+        </p:spPr>
+        <p:style>
+          <a:lnRef idx="1">
+            <a:schemeClr val="accent1"/>
+          </a:lnRef>
+          <a:fillRef idx="3">
+            <a:schemeClr val="accent1"/>
+          </a:fillRef>
+          <a:effectRef idx="2">
+            <a:schemeClr val="accent1"/>
+          </a:effectRef>
+          <a:fontRef idx="minor">
+            <a:schemeClr val="lt1"/>
+          </a:fontRef>
+        </p:style>
+        <p:txBody>
+          <a:bodyPr rtlCol="0" anchor="ctr"/>
+          <a:lstStyle/>
+          <a:p>
+            <a:pPr algn="ctr"/>
+          </a:p>
+        </p:txBody>
+      </p:sp>
+      <p:sp>
+        <p:nvSpPr>
+          <p:cNvPr id="4" name="TextBox 3"/>
+          <p:cNvSpPr txBox="1"/>
+          <p:nvPr/>
+        </p:nvSpPr>
+        <p:spPr>
+          <a:xfrm>
+            <a:off x="548640" y="1645920"/>
+            <a:ext cx="5394960" cy="548640"/>
+          </a:xfrm>
+          <a:prstGeom prst="rect">
+            <a:avLst/>
+          </a:prstGeom>
+          <a:noFill/>
+        </p:spPr>
+        <p:txBody>
+          <a:bodyPr wrap="square" anchor="t" lIns="0" rIns="0" tIns="0" bIns="0">
+            <a:spAutoFit/>
+          </a:bodyPr>
+          <a:lstStyle/>
+          <a:p>
+            <a:pPr algn="l">
+              <a:spcAft>
+                <a:spcPts val="0"/>
+              </a:spcAft>
+            </a:pPr>
+            <a:r>
+              <a:rPr sz="2000" b="1">
+                <a:solidFill>
+                  <a:srgbClr val="A03A35"/>
+                </a:solidFill>
+                <a:latin typeface="Arial"/>
+                <a:ea typeface="Arial"/>
+                <a:cs typeface="Arial"/>
+              </a:rPr>
+              <a:t>他们：办公 / 生产力线</a:t>
+            </a:r>
+          </a:p>
+        </p:txBody>
+      </p:sp>
+      <p:sp>
+        <p:nvSpPr>
+          <p:cNvPr id="5" name="Rectangle 4"/>
+          <p:cNvSpPr/>
+          <p:nvPr/>
+        </p:nvSpPr>
+        <p:spPr>
+          <a:xfrm>
+            <a:off x="548640" y="2240280"/>
+            <a:ext cx="5394960" cy="30480"/>
+          </a:xfrm>
+          <a:prstGeom prst="rect">
+            <a:avLst/>
+          </a:prstGeom>
+          <a:solidFill>
+            <a:srgbClr val="A03A35"/>
+          </a:solidFill>
+          <a:ln>
+            <a:noFill/>
+          </a:ln>
+          <a:effectLst/>
+        </p:spPr>
+        <p:style>
+          <a:lnRef idx="1">
+            <a:schemeClr val="accent1"/>
+          </a:lnRef>
+          <a:fillRef idx="3">
+            <a:schemeClr val="accent1"/>
+          </a:fillRef>
+          <a:effectRef idx="2">
+            <a:schemeClr val="accent1"/>
+          </a:effectRef>
+          <a:fontRef idx="minor">
+            <a:schemeClr val="lt1"/>
+          </a:fontRef>
+        </p:style>
+        <p:txBody>
+          <a:bodyPr rtlCol="0" anchor="ctr"/>
+          <a:lstStyle/>
+          <a:p>
+            <a:pPr algn="ctr"/>
+          </a:p>
+        </p:txBody>
+      </p:sp>
+      <p:sp>
+        <p:nvSpPr>
+          <p:cNvPr id="6" name="TextBox 5"/>
+          <p:cNvSpPr txBox="1"/>
+          <p:nvPr/>
+        </p:nvSpPr>
+        <p:spPr>
+          <a:xfrm>
+            <a:off x="548640" y="2468880"/>
+            <a:ext cx="5394960" cy="3657600"/>
+          </a:xfrm>
+          <a:prstGeom prst="rect">
+            <a:avLst/>
+          </a:prstGeom>
+          <a:noFill/>
+        </p:spPr>
+        <p:txBody>
+          <a:bodyPr wrap="square" anchor="t" lIns="0" rIns="0" tIns="0" bIns="0">
+            <a:spAutoFit/>
+          </a:bodyPr>
+          <a:lstStyle/>
+          <a:p>
+            <a:pPr>
+              <a:spcAft>
+                <a:spcPts val="800"/>
+              </a:spcAft>
+            </a:pPr>
+            <a:r>
+              <a:rPr sz="1500" b="0">
+                <a:solidFill>
+                  <a:srgbClr val="A03A35"/>
+                </a:solidFill>
+                <a:latin typeface="微软雅黑"/>
+                <a:ea typeface="微软雅黑"/>
+                <a:cs typeface="微软雅黑"/>
+              </a:rPr>
+              <a:t>▪  </a:t>
+            </a:r>
+            <a:r>
+              <a:rPr sz="1500" b="0">
+                <a:solidFill>
+                  <a:srgbClr val="3B2B26"/>
+                </a:solidFill>
+                <a:latin typeface="微软雅黑"/>
+                <a:ea typeface="微软雅黑"/>
+                <a:cs typeface="微软雅黑"/>
+              </a:rPr>
+              <a:t>宠物是通用吉祥物</a:t>
+            </a:r>
+            <a:r>
+              <a:rPr sz="1200" b="0">
+                <a:solidFill>
+                  <a:srgbClr val="6B5850"/>
+                </a:solidFill>
+                <a:latin typeface="微软雅黑"/>
+                <a:ea typeface="微软雅黑"/>
+                <a:cs typeface="微软雅黑"/>
+              </a:rPr>
+              <a:t>  一只猫、一只随机孵化的宠物；OpenAI 还允许自建 Custom Pet</a:t>
+            </a:r>
+          </a:p>
+          <a:p>
+            <a:pPr>
+              <a:spcAft>
+                <a:spcPts val="800"/>
+              </a:spcAft>
+            </a:pPr>
+            <a:r>
+              <a:rPr sz="1500" b="0">
+                <a:solidFill>
+                  <a:srgbClr val="A03A35"/>
+                </a:solidFill>
+                <a:latin typeface="微软雅黑"/>
+                <a:ea typeface="微软雅黑"/>
+                <a:cs typeface="微软雅黑"/>
+              </a:rPr>
+              <a:t>▪  </a:t>
+            </a:r>
+            <a:r>
+              <a:rPr sz="1500" b="0">
+                <a:solidFill>
+                  <a:srgbClr val="3B2B26"/>
+                </a:solidFill>
+                <a:latin typeface="微软雅黑"/>
+                <a:ea typeface="微软雅黑"/>
+                <a:cs typeface="微软雅黑"/>
+              </a:rPr>
+              <a:t>目标是任务</a:t>
+            </a:r>
+            <a:r>
+              <a:rPr sz="1200" b="0">
+                <a:solidFill>
+                  <a:srgbClr val="6B5850"/>
+                </a:solidFill>
+                <a:latin typeface="微软雅黑"/>
+                <a:ea typeface="微软雅黑"/>
+                <a:cs typeface="微软雅黑"/>
+              </a:rPr>
+              <a:t>  替你翻译、整理、跑代码、跨应用执行（WorkBuddy 想做“Agent 时代的操作系统”）</a:t>
+            </a:r>
+          </a:p>
+          <a:p>
+            <a:pPr>
+              <a:spcAft>
+                <a:spcPts val="800"/>
+              </a:spcAft>
+            </a:pPr>
+            <a:r>
+              <a:rPr sz="1500" b="0">
+                <a:solidFill>
+                  <a:srgbClr val="A03A35"/>
+                </a:solidFill>
+                <a:latin typeface="微软雅黑"/>
+                <a:ea typeface="微软雅黑"/>
+                <a:cs typeface="微软雅黑"/>
+              </a:rPr>
+              <a:t>▪  </a:t>
+            </a:r>
+            <a:r>
+              <a:rPr sz="1500" b="0">
+                <a:solidFill>
+                  <a:srgbClr val="3B2B26"/>
+                </a:solidFill>
+                <a:latin typeface="微软雅黑"/>
+                <a:ea typeface="微软雅黑"/>
+                <a:cs typeface="微软雅黑"/>
+              </a:rPr>
+              <a:t>指标是效率与留存</a:t>
+            </a:r>
+            <a:r>
+              <a:rPr sz="1200" b="0">
+                <a:solidFill>
+                  <a:srgbClr val="6B5850"/>
+                </a:solidFill>
+                <a:latin typeface="微软雅黑"/>
+                <a:ea typeface="微软雅黑"/>
+                <a:cs typeface="微软雅黑"/>
+              </a:rPr>
+              <a:t>  识别率、任务成功率、次日留存</a:t>
+            </a:r>
+          </a:p>
+          <a:p>
+            <a:pPr>
+              <a:spcAft>
+                <a:spcPts val="800"/>
+              </a:spcAft>
+            </a:pPr>
+            <a:r>
+              <a:rPr sz="1500" b="0">
+                <a:solidFill>
+                  <a:srgbClr val="A03A35"/>
+                </a:solidFill>
+                <a:latin typeface="微软雅黑"/>
+                <a:ea typeface="微软雅黑"/>
+                <a:cs typeface="微软雅黑"/>
+              </a:rPr>
+              <a:t>▪  </a:t>
+            </a:r>
+            <a:r>
+              <a:rPr sz="1500" b="0">
+                <a:solidFill>
+                  <a:srgbClr val="3B2B26"/>
+                </a:solidFill>
+                <a:latin typeface="微软雅黑"/>
+                <a:ea typeface="微软雅黑"/>
+                <a:cs typeface="微软雅黑"/>
+              </a:rPr>
+              <a:t>不要求“是她本人”</a:t>
+            </a:r>
+            <a:r>
+              <a:rPr sz="1200" b="0">
+                <a:solidFill>
+                  <a:srgbClr val="6B5850"/>
+                </a:solidFill>
+                <a:latin typeface="微软雅黑"/>
+                <a:ea typeface="微软雅黑"/>
+                <a:cs typeface="微软雅黑"/>
+              </a:rPr>
+              <a:t>  所以换皮、联名、装扮都不影响产品成立</a:t>
+            </a:r>
+          </a:p>
+          <a:p>
+            <a:pPr>
+              <a:spcAft>
+                <a:spcPts val="800"/>
+              </a:spcAft>
+            </a:pPr>
+            <a:r>
+              <a:rPr sz="1500" b="0">
+                <a:solidFill>
+                  <a:srgbClr val="A03A35"/>
+                </a:solidFill>
+                <a:latin typeface="微软雅黑"/>
+                <a:ea typeface="微软雅黑"/>
+                <a:cs typeface="微软雅黑"/>
+              </a:rPr>
+              <a:t>▪  </a:t>
+            </a:r>
+            <a:r>
+              <a:rPr sz="1500" b="0">
+                <a:solidFill>
+                  <a:srgbClr val="3B2B26"/>
+                </a:solidFill>
+                <a:latin typeface="微软雅黑"/>
+                <a:ea typeface="微软雅黑"/>
+                <a:cs typeface="微软雅黑"/>
+              </a:rPr>
+              <a:t>场景：办公桌 / 公共场所</a:t>
+            </a:r>
+            <a:r>
+              <a:rPr sz="1200" b="0">
+                <a:solidFill>
+                  <a:srgbClr val="6B5850"/>
+                </a:solidFill>
+                <a:latin typeface="微软雅黑"/>
+                <a:ea typeface="微软雅黑"/>
+                <a:cs typeface="微软雅黑"/>
+              </a:rPr>
+              <a:t>  mmHRI 这类研究甚至以医院病房、餐厅为例</a:t>
+            </a:r>
+          </a:p>
+        </p:txBody>
+      </p:sp>
+      <p:sp>
+        <p:nvSpPr>
+          <p:cNvPr id="7" name="TextBox 6"/>
+          <p:cNvSpPr txBox="1"/>
+          <p:nvPr/>
+        </p:nvSpPr>
+        <p:spPr>
+          <a:xfrm>
+            <a:off x="6217920" y="1645920"/>
+            <a:ext cx="5394960" cy="548640"/>
+          </a:xfrm>
+          <a:prstGeom prst="rect">
+            <a:avLst/>
+          </a:prstGeom>
+          <a:noFill/>
+        </p:spPr>
+        <p:txBody>
+          <a:bodyPr wrap="square" anchor="t" lIns="0" rIns="0" tIns="0" bIns="0">
+            <a:spAutoFit/>
+          </a:bodyPr>
+          <a:lstStyle/>
+          <a:p>
+            <a:pPr algn="l">
+              <a:spcAft>
+                <a:spcPts val="0"/>
+              </a:spcAft>
+            </a:pPr>
+            <a:r>
+              <a:rPr sz="2000" b="1">
+                <a:solidFill>
+                  <a:srgbClr val="C9A35F"/>
+                </a:solidFill>
+                <a:latin typeface="Arial"/>
+                <a:ea typeface="Arial"/>
+                <a:cs typeface="Arial"/>
+              </a:rPr>
+              <a:t>我们：角色 / 关系线</a:t>
+            </a:r>
+          </a:p>
+        </p:txBody>
+      </p:sp>
+      <p:sp>
+        <p:nvSpPr>
+          <p:cNvPr id="8" name="Rectangle 7"/>
+          <p:cNvSpPr/>
+          <p:nvPr/>
+        </p:nvSpPr>
+        <p:spPr>
+          <a:xfrm>
+            <a:off x="6217920" y="2240280"/>
+            <a:ext cx="5394960" cy="30480"/>
+          </a:xfrm>
+          <a:prstGeom prst="rect">
+            <a:avLst/>
+          </a:prstGeom>
+          <a:solidFill>
+            <a:srgbClr val="C9A35F"/>
+          </a:solidFill>
+          <a:ln>
+            <a:noFill/>
+          </a:ln>
+          <a:effectLst/>
+        </p:spPr>
+        <p:style>
+          <a:lnRef idx="1">
+            <a:schemeClr val="accent1"/>
+          </a:lnRef>
+          <a:fillRef idx="3">
+            <a:schemeClr val="accent1"/>
+          </a:fillRef>
+          <a:effectRef idx="2">
+            <a:schemeClr val="accent1"/>
+          </a:effectRef>
+          <a:fontRef idx="minor">
+            <a:schemeClr val="lt1"/>
+          </a:fontRef>
+        </p:style>
+        <p:txBody>
+          <a:bodyPr rtlCol="0" anchor="ctr"/>
+          <a:lstStyle/>
+          <a:p>
+            <a:pPr algn="ctr"/>
+          </a:p>
+        </p:txBody>
+      </p:sp>
+      <p:sp>
+        <p:nvSpPr>
+          <p:cNvPr id="9" name="TextBox 8"/>
+          <p:cNvSpPr txBox="1"/>
+          <p:nvPr/>
+        </p:nvSpPr>
+        <p:spPr>
+          <a:xfrm>
+            <a:off x="6217920" y="2468880"/>
+            <a:ext cx="5394960" cy="3657600"/>
+          </a:xfrm>
+          <a:prstGeom prst="rect">
+            <a:avLst/>
+          </a:prstGeom>
+          <a:noFill/>
+        </p:spPr>
+        <p:txBody>
+          <a:bodyPr wrap="square" anchor="t" lIns="0" rIns="0" tIns="0" bIns="0">
+            <a:spAutoFit/>
+          </a:bodyPr>
+          <a:lstStyle/>
+          <a:p>
+            <a:pPr>
+              <a:spcAft>
+                <a:spcPts val="800"/>
+              </a:spcAft>
+            </a:pPr>
+            <a:r>
+              <a:rPr sz="1500" b="0">
+                <a:solidFill>
+                  <a:srgbClr val="A03A35"/>
+                </a:solidFill>
+                <a:latin typeface="微软雅黑"/>
+                <a:ea typeface="微软雅黑"/>
+                <a:cs typeface="微软雅黑"/>
+              </a:rPr>
+              <a:t>▪  </a:t>
+            </a:r>
+            <a:r>
+              <a:rPr sz="1500" b="0">
+                <a:solidFill>
+                  <a:srgbClr val="3B2B26"/>
+                </a:solidFill>
+                <a:latin typeface="微软雅黑"/>
+                <a:ea typeface="微软雅黑"/>
+                <a:cs typeface="微软雅黑"/>
+              </a:rPr>
+              <a:t>角色是具体的人</a:t>
+            </a:r>
+            <a:r>
+              <a:rPr sz="1200" b="0">
+                <a:solidFill>
+                  <a:srgbClr val="6B5850"/>
+                </a:solidFill>
+                <a:latin typeface="微软雅黑"/>
+                <a:ea typeface="微软雅黑"/>
+                <a:cs typeface="微软雅黑"/>
+              </a:rPr>
+              <a:t>  固定人设不 OOC、角色专属 GPT-SoVITS 声线、Live2D + 2D 双形态</a:t>
+            </a:r>
+          </a:p>
+          <a:p>
+            <a:pPr>
+              <a:spcAft>
+                <a:spcPts val="800"/>
+              </a:spcAft>
+            </a:pPr>
+            <a:r>
+              <a:rPr sz="1500" b="0">
+                <a:solidFill>
+                  <a:srgbClr val="A03A35"/>
+                </a:solidFill>
+                <a:latin typeface="微软雅黑"/>
+                <a:ea typeface="微软雅黑"/>
+                <a:cs typeface="微软雅黑"/>
+              </a:rPr>
+              <a:t>▪  </a:t>
+            </a:r>
+            <a:r>
+              <a:rPr sz="1500" b="0">
+                <a:solidFill>
+                  <a:srgbClr val="3B2B26"/>
+                </a:solidFill>
+                <a:latin typeface="微软雅黑"/>
+                <a:ea typeface="微软雅黑"/>
+                <a:cs typeface="微软雅黑"/>
+              </a:rPr>
+              <a:t>目标是关系</a:t>
+            </a:r>
+            <a:r>
+              <a:rPr sz="1200" b="0">
+                <a:solidFill>
+                  <a:srgbClr val="6B5850"/>
+                </a:solidFill>
+                <a:latin typeface="微软雅黑"/>
+                <a:ea typeface="微软雅黑"/>
+                <a:cs typeface="微软雅黑"/>
+              </a:rPr>
+              <a:t>  长期记忆、习惯、日记、关系值 —— 按真实相处证据抬升，不靠嘴甜</a:t>
+            </a:r>
+          </a:p>
+          <a:p>
+            <a:pPr>
+              <a:spcAft>
+                <a:spcPts val="800"/>
+              </a:spcAft>
+            </a:pPr>
+            <a:r>
+              <a:rPr sz="1500" b="0">
+                <a:solidFill>
+                  <a:srgbClr val="A03A35"/>
+                </a:solidFill>
+                <a:latin typeface="微软雅黑"/>
+                <a:ea typeface="微软雅黑"/>
+                <a:cs typeface="微软雅黑"/>
+              </a:rPr>
+              <a:t>▪  </a:t>
+            </a:r>
+            <a:r>
+              <a:rPr sz="1500" b="0">
+                <a:solidFill>
+                  <a:srgbClr val="3B2B26"/>
+                </a:solidFill>
+                <a:latin typeface="微软雅黑"/>
+                <a:ea typeface="微软雅黑"/>
+                <a:cs typeface="微软雅黑"/>
+              </a:rPr>
+              <a:t>指标是关系感知与打扰容忍度</a:t>
+            </a:r>
+            <a:r>
+              <a:rPr sz="1200" b="0">
+                <a:solidFill>
+                  <a:srgbClr val="6B5850"/>
+                </a:solidFill>
+                <a:latin typeface="微软雅黑"/>
+                <a:ea typeface="微软雅黑"/>
+                <a:cs typeface="微软雅黑"/>
+              </a:rPr>
+              <a:t>  她该不该开口、什么时候该安静，是核心体验问题</a:t>
+            </a:r>
+          </a:p>
+          <a:p>
+            <a:pPr>
+              <a:spcAft>
+                <a:spcPts val="800"/>
+              </a:spcAft>
+            </a:pPr>
+            <a:r>
+              <a:rPr sz="1500" b="0">
+                <a:solidFill>
+                  <a:srgbClr val="A03A35"/>
+                </a:solidFill>
+                <a:latin typeface="微软雅黑"/>
+                <a:ea typeface="微软雅黑"/>
+                <a:cs typeface="微软雅黑"/>
+              </a:rPr>
+              <a:t>▪  </a:t>
+            </a:r>
+            <a:r>
+              <a:rPr sz="1500" b="0">
+                <a:solidFill>
+                  <a:srgbClr val="3B2B26"/>
+                </a:solidFill>
+                <a:latin typeface="微软雅黑"/>
+                <a:ea typeface="微软雅黑"/>
+                <a:cs typeface="微软雅黑"/>
+              </a:rPr>
+              <a:t>人格连续性是核心变量</a:t>
+            </a:r>
+            <a:r>
+              <a:rPr sz="1200" b="0">
+                <a:solidFill>
+                  <a:srgbClr val="6B5850"/>
+                </a:solidFill>
+                <a:latin typeface="微软雅黑"/>
+                <a:ea typeface="微软雅黑"/>
+                <a:cs typeface="微软雅黑"/>
+              </a:rPr>
+              <a:t>  换角色 = 换一个人，而不是换一张皮</a:t>
+            </a:r>
+          </a:p>
+          <a:p>
+            <a:pPr>
+              <a:spcAft>
+                <a:spcPts val="800"/>
+              </a:spcAft>
+            </a:pPr>
+            <a:r>
+              <a:rPr sz="1500" b="0">
+                <a:solidFill>
+                  <a:srgbClr val="A03A35"/>
+                </a:solidFill>
+                <a:latin typeface="微软雅黑"/>
+                <a:ea typeface="微软雅黑"/>
+                <a:cs typeface="微软雅黑"/>
+              </a:rPr>
+              <a:t>▪  </a:t>
+            </a:r>
+            <a:r>
+              <a:rPr sz="1500" b="0">
+                <a:solidFill>
+                  <a:srgbClr val="3B2B26"/>
+                </a:solidFill>
+                <a:latin typeface="微软雅黑"/>
+                <a:ea typeface="微软雅黑"/>
+                <a:cs typeface="微软雅黑"/>
+              </a:rPr>
+              <a:t>场景：桌面 + 手机里的日常</a:t>
+            </a:r>
+            <a:r>
+              <a:rPr sz="1200" b="0">
+                <a:solidFill>
+                  <a:srgbClr val="6B5850"/>
+                </a:solidFill>
+                <a:latin typeface="微软雅黑"/>
+                <a:ea typeface="微软雅黑"/>
+                <a:cs typeface="微软雅黑"/>
+              </a:rPr>
+              <a:t>  QQ / 微信桥接同一套人设与记忆，手机端共用同一份记忆文件</a:t>
+            </a:r>
+          </a:p>
+        </p:txBody>
+      </p:sp>
+      <p:sp>
+        <p:nvSpPr>
+          <p:cNvPr id="10" name="TextBox 9"/>
           <p:cNvSpPr txBox="1"/>
           <p:nvPr/>
         </p:nvSpPr>

--- a/dev/ppt/out/Deck.pptx
+++ b/dev/ppt/out/Deck.pptx
@@ -1164,7 +1164,7 @@
           <a:lstStyle/>
           <a:p>
             <a:r>
-              <a:t>近期三件事：手机端对齐与优化、3D 模型方案评估（建模成本要算清楚，先验证再投入）、多角色支持。</a:t>
+              <a:t>近期三件事：手机端的真机验证与调优（功能已经写好了）、3D 模型方案评估（先验证能不能跑起来，再谈建模成本）、多角色支持。</a:t>
             </a:r>
           </a:p>
         </p:txBody>
@@ -1234,7 +1234,12 @@
           <a:lstStyle/>
           <a:p>
             <a:r>
-              <a:t>中期想让互动更自然：手部动捕驱动视线跟随、识别动作并给反应。摄像头链路现在已经通了。</a:t>
+              <a:t>这一页要说得实在：手部互动我已经做出来一半了。手机端接了 21 个关键点的手部检测，链路是通的——她会看着你的手；还做了三个手势：捏合（捏脸）、握拳、挥手，一共 21 个单元测试。</a:t>
+            </a:r>
+          </a:p>
+          <a:p>
+            <a:r>
+              <a:t>但我要说清楚：**这些只到「编译和单测通过」**，真手伸过去她的眼睛是不是真的跟着转，必须真机上确认。所以这一页既是成果，也是下一步的清单。</a:t>
             </a:r>
           </a:p>
         </p:txBody>
@@ -1374,7 +1379,7 @@
           <a:lstStyle/>
           <a:p>
             <a:r>
-              <a:t>另一条中期的路是毫米波雷达：不依赖光线和镜头、隐私友好、能全天运行。这里要诚实：毫米波做隐私友好交互已经有人做了（今年 9 月的 mmHRI，隔着帘子做机器人操作，动作识别 85%），所以我们不主张“第一次用毫米波”。我们的问题不同——他们做操纵、指标是准确率；我们做陪伴、指标是关系感知和打扰容忍度。这条线能不能立住，取决于接下来的用户研究。</a:t>
+              <a:t>另一条中期的路是毫米波雷达：不依赖光线和镜头、隐私友好、能全天运行。这里要诚实：毫米波做隐私友好交互已经有人做了（今年 9 月的 mmHRI，隔着帘子做机器人操作，动作识别 85%），所以我们不主张「第一次用毫米波」。我们的问题不同——他们做操纵、指标是准确率；我们做陪伴、指标是关系感知和打扰容忍度。这条线能不能立住，取决于接下来的用户研究。</a:t>
             </a:r>
           </a:p>
         </p:txBody>
@@ -7425,7 +7430,7 @@
                 <a:ea typeface="微软雅黑"/>
                 <a:cs typeface="微软雅黑"/>
               </a:rPr>
-              <a:t>手机端完善</a:t>
+              <a:t>手机端：真机验证与调优</a:t>
             </a:r>
             <a:r>
               <a:rPr sz="1300" b="0">
@@ -7436,7 +7441,7 @@
                 <a:ea typeface="微软雅黑"/>
                 <a:cs typeface="微软雅黑"/>
               </a:rPr>
-              <a:t>  安卓端功能对齐、稳定性与耗电优化</a:t>
+              <a:t>  功能已写好（含手部互动），近期重点是插上真机跑全链路并调准相机参数</a:t>
             </a:r>
           </a:p>
           <a:p>
@@ -7476,7 +7481,7 @@
                 <a:ea typeface="微软雅黑"/>
                 <a:cs typeface="微软雅黑"/>
               </a:rPr>
-              <a:t>  3D 模型方案评估（建模成本与表现力的取舍）</a:t>
+              <a:t>  3D 模型方案评估（先验证能不能跑起来，再谈建模成本）</a:t>
             </a:r>
           </a:p>
           <a:p>
@@ -7624,7 +7629,7 @@
                 <a:ea typeface="Arial"/>
                 <a:cs typeface="Arial"/>
               </a:rPr>
-              <a:t>中期：让互动更自然</a:t>
+              <a:t>互动：从「看着你」到「看懂你」（已落地一半）</a:t>
             </a:r>
           </a:p>
         </p:txBody>
@@ -7720,7 +7725,7 @@
                 <a:ea typeface="微软雅黑"/>
                 <a:cs typeface="微软雅黑"/>
               </a:rPr>
-              <a:t>手部感知</a:t>
+              <a:t>已实现：手部 21 关键点检测</a:t>
             </a:r>
             <a:r>
               <a:rPr sz="1300" b="0">
@@ -7731,7 +7736,7 @@
                 <a:ea typeface="微软雅黑"/>
                 <a:cs typeface="微软雅黑"/>
               </a:rPr>
-              <a:t>  手部动捕驱动视线跟随——她会看着你的手</a:t>
+              <a:t>  手机端接入 MediaPipe HandLandmarker；相机帧 → 关键点 → 命中她 → 反应，链路已通</a:t>
             </a:r>
           </a:p>
           <a:p>
@@ -7760,7 +7765,7 @@
                 <a:ea typeface="微软雅黑"/>
                 <a:cs typeface="微软雅黑"/>
               </a:rPr>
-              <a:t>动作识别</a:t>
+              <a:t>已实现：视线跟随</a:t>
             </a:r>
             <a:r>
               <a:rPr sz="1300" b="0">
@@ -7771,7 +7776,7 @@
                 <a:ea typeface="微软雅黑"/>
                 <a:cs typeface="微软雅黑"/>
               </a:rPr>
-              <a:t>  识别捏脸等动作并给出反应（课题成果可复用）</a:t>
+              <a:t>  她自己「看着你的手」——关键点换算到屏幕后驱动 3D 角色的视线目标</a:t>
             </a:r>
           </a:p>
           <a:p>
@@ -7800,7 +7805,7 @@
                 <a:ea typeface="微软雅黑"/>
                 <a:cs typeface="微软雅黑"/>
               </a:rPr>
-              <a:t>摄像头互动</a:t>
+              <a:t>已实现：三个手势</a:t>
             </a:r>
             <a:r>
               <a:rPr sz="1300" b="0">
@@ -7811,7 +7816,87 @@
                 <a:ea typeface="微软雅黑"/>
                 <a:cs typeface="微软雅黑"/>
               </a:rPr>
-              <a:t>  现有摄像头链路已通，继续扩展识别能力</a:t>
+              <a:t>  捏合=捏脸、握拳、挥手；各自独立去抖（21 个单测：9+6+6）</a:t>
+            </a:r>
+          </a:p>
+          <a:p>
+            <a:pPr>
+              <a:spcAft>
+                <a:spcPts val="1400"/>
+              </a:spcAft>
+            </a:pPr>
+            <a:r>
+              <a:rPr sz="1600" b="0">
+                <a:solidFill>
+                  <a:srgbClr val="A03A35"/>
+                </a:solidFill>
+                <a:latin typeface="微软雅黑"/>
+                <a:ea typeface="微软雅黑"/>
+                <a:cs typeface="微软雅黑"/>
+              </a:rPr>
+              <a:t>▪  </a:t>
+            </a:r>
+            <a:r>
+              <a:rPr sz="1600" b="0">
+                <a:solidFill>
+                  <a:srgbClr val="3B2B26"/>
+                </a:solidFill>
+                <a:latin typeface="微软雅黑"/>
+                <a:ea typeface="微软雅黑"/>
+                <a:cs typeface="微软雅黑"/>
+              </a:rPr>
+              <a:t>下一步：更多手势 + 接进对话</a:t>
+            </a:r>
+            <a:r>
+              <a:rPr sz="1300" b="0">
+                <a:solidFill>
+                  <a:srgbClr val="6B5850"/>
+                </a:solidFill>
+                <a:latin typeface="微软雅黑"/>
+                <a:ea typeface="微软雅黑"/>
+                <a:cs typeface="微软雅黑"/>
+              </a:rPr>
+              <a:t>  比心 / 指向某处；挥手时顺便触发一句问候，把动作和她的性格连起来</a:t>
+            </a:r>
+          </a:p>
+          <a:p>
+            <a:pPr>
+              <a:spcAft>
+                <a:spcPts val="1400"/>
+              </a:spcAft>
+            </a:pPr>
+            <a:r>
+              <a:rPr sz="1600" b="0">
+                <a:solidFill>
+                  <a:srgbClr val="A03A35"/>
+                </a:solidFill>
+                <a:latin typeface="微软雅黑"/>
+                <a:ea typeface="微软雅黑"/>
+                <a:cs typeface="微软雅黑"/>
+              </a:rPr>
+              <a:t>▪  </a:t>
+            </a:r>
+            <a:r>
+              <a:rPr sz="1600" b="0">
+                <a:solidFill>
+                  <a:srgbClr val="3B2B26"/>
+                </a:solidFill>
+                <a:latin typeface="微软雅黑"/>
+                <a:ea typeface="微软雅黑"/>
+                <a:cs typeface="微软雅黑"/>
+              </a:rPr>
+              <a:t>还没做：真机调优</a:t>
+            </a:r>
+            <a:r>
+              <a:rPr sz="1300" b="0">
+                <a:solidFill>
+                  <a:srgbClr val="6B5850"/>
+                </a:solidFill>
+                <a:latin typeface="微软雅黑"/>
+                <a:ea typeface="微软雅黑"/>
+                <a:cs typeface="微软雅黑"/>
+              </a:rPr>
+              <a:t>  编译与单测都过了，但「手伸过去她眼睛是否跟着转」要真机确认；偏差只调相机</a:t>
             </a:r>
           </a:p>
         </p:txBody>

--- a/dev/ppt/out/Deck.pptx
+++ b/dev/ppt/out/Deck.pptx
@@ -1024,7 +1024,7 @@
           <a:lstStyle/>
           <a:p>
             <a:r>
-              <a:t>工程这块我想强调一句：这不是『我这儿能跑』。仓库自带 381 项自检，一条命令可复现，现在是全绿。换装差异、立绘底色这种观感问题，我们用像素级比对来验收。</a:t>
+              <a:t>工程这块我想强调一句：这不是『我这儿能跑』。仓库自带 386 项自检，一条命令可复现，现在是全绿。换装差异、立绘底色这种观感问题，我们用像素级比对来验收。</a:t>
             </a:r>
           </a:p>
         </p:txBody>
@@ -6987,7 +6987,7 @@
                 <a:ea typeface="微软雅黑"/>
                 <a:cs typeface="微软雅黑"/>
               </a:rPr>
-              <a:t>381 项自带自检</a:t>
+              <a:t>386 项自带自检</a:t>
             </a:r>
             <a:r>
               <a:rPr sz="1300" b="0">

--- a/dev/ppt/out/Deck.pptx
+++ b/dev/ppt/out/Deck.pptx
@@ -1379,7 +1379,12 @@
           <a:lstStyle/>
           <a:p>
             <a:r>
-              <a:t>另一条中期的路是毫米波雷达：不依赖光线和镜头、隐私友好、能全天运行。这里要诚实：毫米波做隐私友好交互已经有人做了（今年 9 月的 mmHRI，隔着帘子做机器人操作，动作识别 85%），所以我们不主张「第一次用毫米波」。我们的问题不同——他们做操纵、指标是准确率；我们做陪伴、指标是关系感知和打扰容忍度。这条线能不能立住，取决于接下来的用户研究。</a:t>
+              <a:t>另一条感知路线是毫米波雷达：不依赖光线和镜头、隐私友好、能全天运行。但这里必须诚实——**已经有人做了**：一是 mmHRI，毫米波做隐私友好人机交互，隔着帘子做机器人操作，动作识别 85%；二是「文心守护」，60GHz 雷达 + 大模型，人家明说做『健康分析与情感陪伴』，口号就是『存在即感知』，而且是开源的。</a:t>
+            </a:r>
+          </a:p>
+          <a:p>
+            <a:r>
+              <a:t>所以我们**不主张首创**。我们想做窄的那一块：把变量换成**角色的人格连续性**，把指标换成**关系感知与打扰容忍度**，对象是二次元角色、形态是她住在桌面和手机里。这条路先做用户研究，不先堆硬件。</a:t>
             </a:r>
           </a:p>
         </p:txBody>
@@ -8112,7 +8117,7 @@
                 <a:ea typeface="Arial"/>
                 <a:cs typeface="Arial"/>
               </a:rPr>
-              <a:t>中期：更省算力的动捕路线</a:t>
+              <a:t>中期：另一条感知路线（毫米波）——已有人做，我们做个窄的</a:t>
             </a:r>
           </a:p>
         </p:txBody>
@@ -8208,7 +8213,7 @@
                 <a:ea typeface="微软雅黑"/>
                 <a:cs typeface="微软雅黑"/>
               </a:rPr>
-              <a:t>毫米波雷达</a:t>
+              <a:t>为什么看这条路</a:t>
             </a:r>
             <a:r>
               <a:rPr sz="1300" b="0">
@@ -8219,7 +8224,7 @@
                 <a:ea typeface="微软雅黑"/>
                 <a:cs typeface="微软雅黑"/>
               </a:rPr>
-              <a:t>  不依赖光线与镜头，隐私友好、可全天运行</a:t>
+              <a:t>  不依赖光线与镜头、隐私友好、可全天运行；作为「她在不在、在做什么」的输入很合适</a:t>
             </a:r>
           </a:p>
           <a:p>
@@ -8248,7 +8253,7 @@
                 <a:ea typeface="微软雅黑"/>
                 <a:cs typeface="微软雅黑"/>
               </a:rPr>
-              <a:t>已有可复用装置</a:t>
+              <a:t>但已经有人做了（一）</a:t>
             </a:r>
             <a:r>
               <a:rPr sz="1300" b="0">
@@ -8259,7 +8264,7 @@
                 <a:ea typeface="微软雅黑"/>
                 <a:cs typeface="微软雅黑"/>
               </a:rPr>
-              <a:t>  科研课题中的动作采集装置，课题结束后可迁移</a:t>
+              <a:t>  mmHRI：毫米波做隐私友好人机交互，隔帘做机器人操作、动作识别 85%（2026-09）</a:t>
             </a:r>
           </a:p>
           <a:p>
@@ -8288,7 +8293,7 @@
                 <a:ea typeface="微软雅黑"/>
                 <a:cs typeface="微软雅黑"/>
               </a:rPr>
-              <a:t>迁移方向</a:t>
+              <a:t>但已经有人做了（二）</a:t>
             </a:r>
             <a:r>
               <a:rPr sz="1300" b="0">
@@ -8299,7 +8304,127 @@
                 <a:ea typeface="微软雅黑"/>
                 <a:cs typeface="微软雅黑"/>
               </a:rPr>
-              <a:t>  从“识别特定动作”到“识别人的姿态与意图”</a:t>
+              <a:t>  文心守护：60GHz 雷达 + 大模型，明说做「情感陪伴」与「存在即感知」，面向独居老人看护（开源）</a:t>
+            </a:r>
+          </a:p>
+          <a:p>
+            <a:pPr>
+              <a:spcAft>
+                <a:spcPts val="1400"/>
+              </a:spcAft>
+            </a:pPr>
+            <a:r>
+              <a:rPr sz="1600" b="0">
+                <a:solidFill>
+                  <a:srgbClr val="A03A35"/>
+                </a:solidFill>
+                <a:latin typeface="微软雅黑"/>
+                <a:ea typeface="微软雅黑"/>
+                <a:cs typeface="微软雅黑"/>
+              </a:rPr>
+              <a:t>▪  </a:t>
+            </a:r>
+            <a:r>
+              <a:rPr sz="1600" b="0">
+                <a:solidFill>
+                  <a:srgbClr val="3B2B26"/>
+                </a:solidFill>
+                <a:latin typeface="微软雅黑"/>
+                <a:ea typeface="微软雅黑"/>
+                <a:cs typeface="微软雅黑"/>
+              </a:rPr>
+              <a:t>所以我们不主张「首创」</a:t>
+            </a:r>
+            <a:r>
+              <a:rPr sz="1300" b="0">
+                <a:solidFill>
+                  <a:srgbClr val="6B5850"/>
+                </a:solidFill>
+                <a:latin typeface="微软雅黑"/>
+                <a:ea typeface="微软雅黑"/>
+                <a:cs typeface="微软雅黑"/>
+              </a:rPr>
+              <a:t>  不写「第一次用毫米波做陪伴」——那两处已占，写了会被当场问倒</a:t>
+            </a:r>
+          </a:p>
+          <a:p>
+            <a:pPr>
+              <a:spcAft>
+                <a:spcPts val="1400"/>
+              </a:spcAft>
+            </a:pPr>
+            <a:r>
+              <a:rPr sz="1600" b="0">
+                <a:solidFill>
+                  <a:srgbClr val="A03A35"/>
+                </a:solidFill>
+                <a:latin typeface="微软雅黑"/>
+                <a:ea typeface="微软雅黑"/>
+                <a:cs typeface="微软雅黑"/>
+              </a:rPr>
+              <a:t>▪  </a:t>
+            </a:r>
+            <a:r>
+              <a:rPr sz="1600" b="0">
+                <a:solidFill>
+                  <a:srgbClr val="3B2B26"/>
+                </a:solidFill>
+                <a:latin typeface="微软雅黑"/>
+                <a:ea typeface="微软雅黑"/>
+                <a:cs typeface="微软雅黑"/>
+              </a:rPr>
+              <a:t>我们要做的那一小块</a:t>
+            </a:r>
+            <a:r>
+              <a:rPr sz="1300" b="0">
+                <a:solidFill>
+                  <a:srgbClr val="6B5850"/>
+                </a:solidFill>
+                <a:latin typeface="微软雅黑"/>
+                <a:ea typeface="微软雅黑"/>
+                <a:cs typeface="微软雅黑"/>
+              </a:rPr>
+              <a:t>  变量换成角色的人格连续性，指标换成关系感知与打扰容忍度；对象是二次元角色，形态是她住在桌面/手机/IM 里</a:t>
+            </a:r>
+          </a:p>
+          <a:p>
+            <a:pPr>
+              <a:spcAft>
+                <a:spcPts val="1400"/>
+              </a:spcAft>
+            </a:pPr>
+            <a:r>
+              <a:rPr sz="1600" b="0">
+                <a:solidFill>
+                  <a:srgbClr val="A03A35"/>
+                </a:solidFill>
+                <a:latin typeface="微软雅黑"/>
+                <a:ea typeface="微软雅黑"/>
+                <a:cs typeface="微软雅黑"/>
+              </a:rPr>
+              <a:t>▪  </a:t>
+            </a:r>
+            <a:r>
+              <a:rPr sz="1600" b="0">
+                <a:solidFill>
+                  <a:srgbClr val="3B2B26"/>
+                </a:solidFill>
+                <a:latin typeface="微软雅黑"/>
+                <a:ea typeface="微软雅黑"/>
+                <a:cs typeface="微软雅黑"/>
+              </a:rPr>
+              <a:t>怎么走</a:t>
+            </a:r>
+            <a:r>
+              <a:rPr sz="1300" b="0">
+                <a:solidFill>
+                  <a:srgbClr val="6B5850"/>
+                </a:solidFill>
+                <a:latin typeface="微软雅黑"/>
+                <a:ea typeface="微软雅黑"/>
+                <a:cs typeface="微软雅黑"/>
+              </a:rPr>
+              <a:t>  课题装置输出标准化参数流 → 先在桌面端驱动她 → 需要时再上手机；先做用户研究，不先堆硬件</a:t>
             </a:r>
           </a:p>
         </p:txBody>

--- a/dev/ppt/out/Deck.pptx
+++ b/dev/ppt/out/Deck.pptx
@@ -884,7 +884,7 @@
           <a:lstStyle/>
           <a:p>
             <a:r>
-              <a:t>记忆是分层的：对话记忆、长期记忆、日记、状态快照各管一段。关系值按真实相处证据抬升，不靠嘴甜。她会自己补课、自己归纳关于我的事。</a:t>
+              <a:t>记忆是分层的：对话记忆、长期记忆、日记、状态快照各管一段。关系值分两套，要说清楚：桌面端按**真实相处证据**（相处天数×对话量）抬高一个下限，不是聊几句好话就涨；QQ 侧另有一套面向群聊的好感玩法，按对话内容结算，还有约会这类玩法。她会自己补课、自己归纳关于我的事。</a:t>
             </a:r>
           </a:p>
         </p:txBody>
@@ -6413,7 +6413,7 @@
                 <a:ea typeface="微软雅黑"/>
                 <a:cs typeface="微软雅黑"/>
               </a:rPr>
-              <a:t>  按真实相处证据（天数×对话量）抬高下限，不靠嘴甜</a:t>
+              <a:t>  桌面端：按真实相处证据（天数×对话量）抬高下限（affinity_floor）；QQ 侧另有一套面向群聊的好感玩法，按对话内容结算</a:t>
             </a:r>
           </a:p>
           <a:p>

--- a/dev/ppt/out/Deck.pptx
+++ b/dev/ppt/out/Deck.pptx
@@ -884,7 +884,7 @@
           <a:lstStyle/>
           <a:p>
             <a:r>
-              <a:t>记忆是分层的：对话记忆、长期记忆、日记、状态快照各管一段。关系值分两套，要说清楚：桌面端按**真实相处证据**（相处天数×对话量）抬高一个下限，不是聊几句好话就涨；QQ 侧另有一套面向群聊的好感玩法，按对话内容结算，还有约会这类玩法。她会自己补课、自己归纳关于我的事。</a:t>
+              <a:t>记忆是分层的：对话记忆、长期记忆、日记、状态快照各管一段。关系值分两套，要说清楚：桌面端按**真实相处证据**（相处天数×对话量）抬高一个下限，不是聊几句好话就涨；QQ 侧另有一套面向群聊的好感玩法，按对话内容结算。她空闲时会自己补课、归纳关于我的事，还会写日记。状态页有五个页签：现在 / 习惯 / 心里 / 提醒 / 记忆。</a:t>
             </a:r>
           </a:p>
         </p:txBody>
@@ -6493,7 +6493,7 @@
                 <a:ea typeface="微软雅黑"/>
                 <a:cs typeface="微软雅黑"/>
               </a:rPr>
-              <a:t>  状态页四个分类：状态 / 习惯 / 记忆 / 提醒</a:t>
+              <a:t>  状态页五个页签：现在 / 习惯 / 心里 / 提醒 / 记忆</a:t>
             </a:r>
           </a:p>
         </p:txBody>

--- a/dev/ppt/out/Deck.pptx
+++ b/dev/ppt/out/Deck.pptx
@@ -28,6 +28,7 @@
     <p:sldId id="276" r:id="rId27"/>
     <p:sldId id="277" r:id="rId28"/>
     <p:sldId id="278" r:id="rId29"/>
+    <p:sldId id="279" r:id="rId30"/>
   </p:sldIdLst>
   <p:sldSz cx="12191695" cy="6858000" type="screen4x3"/>
   <p:notesSz cx="6858000" cy="9144000"/>
@@ -594,17 +595,17 @@
           <a:lstStyle/>
           <a:p>
             <a:r>
-              <a:t>这句话是今天最想留下的一句：大厂在给 AI 装一只宠物，我们做的是一个人。</a:t>
-            </a:r>
-          </a:p>
-          <a:p>
-            <a:r>
-              <a:t>腾讯、Anthropic、OpenAI 都在把宠物放进办公工具——宠物是入口、是身份锚点，但那是一只通用的猫。没有人负责回答“她还是不是她本人”。</a:t>
-            </a:r>
-          </a:p>
-          <a:p>
-            <a:r>
-              <a:t>我们的全部工作都在这个问题上：固定的人格、固定的声线、跨端的长期记忆。</a:t>
+              <a:t>这一页是把同类补齐：展示工具（Live2DViewerEX）、养成与玩具（Shimeji、BongoCat、虚拟桌宠模拟器 VPet）、大厂吉祥物（人工桌面 yoyo 鹿鸣、天选桌宠）、手机端助手（兽耳助手）。</a:t>
+            </a:r>
+          </a:p>
+          <a:p>
+            <a:r>
+              <a:t>它们各有各的强：ViewerEX 把跨平台和面捕做到天花板，VPet 把开源养成的产品化做成了，鹿鸣的形象质量是大厂级。</a:t>
+            </a:r>
+          </a:p>
+          <a:p>
+            <a:r>
+              <a:t>但有一件事它们都没做：**长期记忆 + 主动开口**。都在做「形象」，我们在做「关系」。形象是入口，关系才是留存。</a:t>
             </a:r>
           </a:p>
         </p:txBody>
@@ -674,7 +675,17 @@
           <a:lstStyle/>
           <a:p>
             <a:r>
-              <a:t>下面进第二部分：她具体能做什么，以及这些是怎么实现的。</a:t>
+              <a:t>这句话是今天最想留下的一句：大厂在给 AI 装一只宠物，我们做的是一个人。</a:t>
+            </a:r>
+          </a:p>
+          <a:p>
+            <a:r>
+              <a:t>腾讯、Anthropic、OpenAI 都在把宠物放进办公工具——宠物是入口、是身份锚点，但那是一只通用的猫。没有人负责回答“她还是不是她本人”。</a:t>
+            </a:r>
+          </a:p>
+          <a:p>
+            <a:r>
+              <a:t>我们的全部工作都在这个问题上：固定的人格、固定的声线、跨端的长期记忆。</a:t>
             </a:r>
           </a:p>
         </p:txBody>
@@ -744,7 +755,7 @@
           <a:lstStyle/>
           <a:p>
             <a:r>
-              <a:t>她目前能做的五件事：有形象地陪着、用自己的声音说话、记得住我、能替我干活、还能出桌面去 QQ/微信里继续聊。</a:t>
+              <a:t>下面进第二部分：她具体能做什么，以及这些是怎么实现的。</a:t>
             </a:r>
           </a:p>
         </p:txBody>
@@ -814,7 +825,7 @@
           <a:lstStyle/>
           <a:p>
             <a:r>
-              <a:t>形象这块的核心设计是：**装扮即数据**。衣服、发型、装饰、姿势都是层号，换装就是换层再合成，所以 Live2D 和 2D 立绘能共用同一套装扮。语音是角色专属模型，独立服务常驻。</a:t>
+              <a:t>她目前能做的五件事：有形象地陪着、用自己的声音说话、记得住我、能替我干活、还能出桌面去 QQ/微信里继续聊。</a:t>
             </a:r>
           </a:p>
         </p:txBody>
@@ -884,7 +895,7 @@
           <a:lstStyle/>
           <a:p>
             <a:r>
-              <a:t>记忆是分层的：对话记忆、长期记忆、日记、状态快照各管一段。关系值分两套，要说清楚：桌面端按**真实相处证据**（相处天数×对话量）抬高一个下限，不是聊几句好话就涨；QQ 侧另有一套面向群聊的好感玩法，按对话内容结算。她空闲时会自己补课、归纳关于我的事，还会写日记。状态页有五个页签：现在 / 习惯 / 心里 / 提醒 / 记忆。</a:t>
+              <a:t>形象这块的核心设计是：**装扮即数据**。衣服、发型、装饰、姿势都是层号，换装就是换层再合成，所以 Live2D 和 2D 立绘能共用同一套装扮。语音是角色专属模型，独立服务常驻。</a:t>
             </a:r>
           </a:p>
         </p:txBody>
@@ -954,7 +965,7 @@
           <a:lstStyle/>
           <a:p>
             <a:r>
-              <a:t>出桌面这块：QQ/微信桥接用同一套人设和记忆，连立绘都是同一件衣服。手机端走同一套后端协议。</a:t>
+              <a:t>记忆是分层的：对话记忆、长期记忆、日记、状态快照各管一段。关系值分两套，要说清楚：桌面端按**真实相处证据**（相处天数×对话量）抬高一个下限，不是聊几句好话就涨；QQ 侧另有一套面向群聊的好感玩法，按对话内容结算。她空闲时会自己补课、归纳关于我的事，还会写日记。状态页有五个页签：现在 / 习惯 / 心里 / 提醒 / 记忆。</a:t>
             </a:r>
           </a:p>
         </p:txBody>
@@ -1024,7 +1035,7 @@
           <a:lstStyle/>
           <a:p>
             <a:r>
-              <a:t>工程这块我想强调一句：这不是『我这儿能跑』。仓库自带 386 项自检，一条命令可复现，现在是全绿。换装差异、立绘底色这种观感问题，我们用像素级比对来验收。</a:t>
+              <a:t>出桌面这块：QQ/微信桥接用同一套人设和记忆，连立绘都是同一件衣服。手机端走同一套后端协议。</a:t>
             </a:r>
           </a:p>
         </p:txBody>
@@ -1094,7 +1105,7 @@
           <a:lstStyle/>
           <a:p>
             <a:r>
-              <a:t>第三部分，未来规划。</a:t>
+              <a:t>工程这块我想强调一句：这不是『我这儿能跑』。仓库自带 386 项自检，一条命令可复现，现在是全绿。换装差异、立绘底色这种观感问题，我们用像素级比对来验收。</a:t>
             </a:r>
           </a:p>
         </p:txBody>
@@ -1164,7 +1175,7 @@
           <a:lstStyle/>
           <a:p>
             <a:r>
-              <a:t>近期三件事：手机端的真机验证与调优（功能已经写好了）、3D 模型方案评估（先验证能不能跑起来，再谈建模成本）、多角色支持。</a:t>
+              <a:t>第三部分，未来规划。</a:t>
             </a:r>
           </a:p>
         </p:txBody>
@@ -1234,12 +1245,7 @@
           <a:lstStyle/>
           <a:p>
             <a:r>
-              <a:t>这一页要说得实在：手部互动我已经做出来一半了。手机端接了 21 个关键点的手部检测，链路是通的——她会看着你的手；还做了三个手势：捏合（捏脸）、握拳、挥手，一共 21 个单元测试。</a:t>
-            </a:r>
-          </a:p>
-          <a:p>
-            <a:r>
-              <a:t>但我要说清楚：**这些只到「编译和单测通过」**，真手伸过去她的眼睛是不是真的跟着转，必须真机上确认。所以这一页既是成果，也是下一步的清单。</a:t>
+              <a:t>近期三件事：手机端的真机验证与调优（功能已经写好了）、3D 模型方案评估（先验证能不能跑起来，再谈建模成本）、多角色支持。</a:t>
             </a:r>
           </a:p>
         </p:txBody>
@@ -1379,12 +1385,12 @@
           <a:lstStyle/>
           <a:p>
             <a:r>
-              <a:t>另一条感知路线是毫米波雷达：不依赖光线和镜头、隐私友好、能全天运行。但这里必须诚实——**已经有人做了**：一是 mmHRI，毫米波做隐私友好人机交互，隔着帘子做机器人操作，动作识别 85%；二是「文心守护」，60GHz 雷达 + 大模型，人家明说做『健康分析与情感陪伴』，口号就是『存在即感知』，而且是开源的。</a:t>
-            </a:r>
-          </a:p>
-          <a:p>
-            <a:r>
-              <a:t>所以我们**不主张首创**。我们想做窄的那一块：把变量换成**角色的人格连续性**，把指标换成**关系感知与打扰容忍度**，对象是二次元角色、形态是她住在桌面和手机里。这条路先做用户研究，不先堆硬件。</a:t>
+              <a:t>这一页要说得实在：手部互动我已经做出来一半了。手机端接了 21 个关键点的手部检测，链路是通的——她会看着你的手；还做了三个手势：捏合（捏脸）、握拳、挥手，一共 21 个单元测试。</a:t>
+            </a:r>
+          </a:p>
+          <a:p>
+            <a:r>
+              <a:t>但我要说清楚：**这些只到「编译和单测通过」**，真手伸过去她的眼睛是不是真的跟着转，必须真机上确认。所以这一页既是成果，也是下一步的清单。</a:t>
             </a:r>
           </a:p>
         </p:txBody>
@@ -1454,7 +1460,12 @@
           <a:lstStyle/>
           <a:p>
             <a:r>
-              <a:t>远期是形态自由：AR 呈现（同类多是 iPhone 生态，安卓侧还是空白）、系统级常驻、以及角色与语音都能替换的开放生态。</a:t>
+              <a:t>另一条感知路线是毫米波雷达：不依赖光线和镜头、隐私友好、能全天运行。但这里必须诚实——**已经有人做了**：一是 mmHRI，毫米波做隐私友好人机交互，隔着帘子做机器人操作，动作识别 85%；二是「文心守护」，60GHz 雷达 + 大模型，人家明说做『健康分析与情感陪伴』，口号就是『存在即感知』，而且是开源的。</a:t>
+            </a:r>
+          </a:p>
+          <a:p>
+            <a:r>
+              <a:t>所以我们**不主张首创**。我们想做窄的那一块：把变量换成**角色的人格连续性**，把指标换成**关系感知与打扰容忍度**，对象是二次元角色、形态是她住在桌面和手机里。这条路先做用户研究，不先堆硬件。</a:t>
             </a:r>
           </a:p>
         </p:txBody>
@@ -1524,7 +1535,7 @@
           <a:lstStyle/>
           <a:p>
             <a:r>
-              <a:t>一句话收束路线取舍：先让她真的住在电脑里，再让她走到你身边。</a:t>
+              <a:t>远期是形态自由：AR 呈现（同类多是 iPhone 生态，安卓侧还是空白）、系统级常驻、以及角色与语音都能替换的开放生态。</a:t>
             </a:r>
           </a:p>
         </p:txBody>
@@ -1550,6 +1561,76 @@
 </file>
 
 <file path=ppt/notesSlides/notesSlide23.xml><?xml version="1.0" encoding="utf-8"?>
+<p:notes xmlns:a="http://schemas.openxmlformats.org/drawingml/2006/main" xmlns:p="http://schemas.openxmlformats.org/presentationml/2006/main" xmlns:r="http://schemas.openxmlformats.org/officeDocument/2006/relationships">
+  <p:cSld>
+    <p:spTree>
+      <p:nvGrpSpPr>
+        <p:cNvPr id="1" name=""/>
+        <p:cNvGrpSpPr/>
+        <p:nvPr/>
+      </p:nvGrpSpPr>
+      <p:grpSpPr>
+        <a:xfrm>
+          <a:off x="0" y="0"/>
+          <a:ext cx="0" cy="0"/>
+          <a:chOff x="0" y="0"/>
+          <a:chExt cx="0" cy="0"/>
+        </a:xfrm>
+      </p:grpSpPr>
+      <p:sp>
+        <p:nvSpPr>
+          <p:cNvPr id="2" name="Slide Image Placeholder 1"/>
+          <p:cNvSpPr>
+            <a:spLocks noGrp="1"/>
+          </p:cNvSpPr>
+          <p:nvPr>
+            <p:ph type="sldImg" idx="2"/>
+          </p:nvPr>
+        </p:nvSpPr>
+        <p:spPr/>
+      </p:sp>
+      <p:sp>
+        <p:nvSpPr>
+          <p:cNvPr id="3" name="Notes Placeholder 2"/>
+          <p:cNvSpPr>
+            <a:spLocks noGrp="1"/>
+          </p:cNvSpPr>
+          <p:nvPr>
+            <p:ph type="body" idx="3" sz="quarter"/>
+          </p:nvPr>
+        </p:nvSpPr>
+        <p:spPr/>
+        <p:txBody>
+          <a:bodyPr/>
+          <a:lstStyle/>
+          <a:p>
+            <a:r>
+              <a:t>一句话收束路线取舍：先让她真的住在电脑里，再让她走到你身边。</a:t>
+            </a:r>
+          </a:p>
+        </p:txBody>
+      </p:sp>
+      <p:sp>
+        <p:nvSpPr>
+          <p:cNvPr id="4" name="Slide Number Placeholder 3"/>
+          <p:cNvSpPr>
+            <a:spLocks noGrp="1"/>
+          </p:cNvSpPr>
+          <p:nvPr>
+            <p:ph type="sldNum" idx="5" sz="quarter"/>
+          </p:nvPr>
+        </p:nvSpPr>
+        <p:spPr/>
+      </p:sp>
+    </p:spTree>
+  </p:cSld>
+  <p:clrMapOvr>
+    <a:masterClrMapping/>
+  </p:clrMapOvr>
+</p:notes>
+</file>
+
+<file path=ppt/notesSlides/notesSlide24.xml><?xml version="1.0" encoding="utf-8"?>
 <p:notes xmlns:a="http://schemas.openxmlformats.org/drawingml/2006/main" xmlns:p="http://schemas.openxmlformats.org/presentationml/2006/main" xmlns:r="http://schemas.openxmlformats.org/officeDocument/2006/relationships">
   <p:cSld>
     <p:spTree>
@@ -5291,243 +5372,6 @@
         </p:nvSpPr>
         <p:spPr>
           <a:xfrm>
-            <a:off x="1097280" y="2103120"/>
-            <a:ext cx="9966960" cy="2377440"/>
-          </a:xfrm>
-          <a:prstGeom prst="rect">
-            <a:avLst/>
-          </a:prstGeom>
-          <a:noFill/>
-        </p:spPr>
-        <p:txBody>
-          <a:bodyPr wrap="square" anchor="ctr" lIns="0" rIns="0" tIns="0" bIns="0">
-            <a:spAutoFit/>
-          </a:bodyPr>
-          <a:lstStyle/>
-          <a:p>
-            <a:pPr algn="ctr">
-              <a:lnSpc>
-                <a:spcPct val="120000"/>
-              </a:lnSpc>
-              <a:spcAft>
-                <a:spcPts val="1400"/>
-              </a:spcAft>
-            </a:pPr>
-            <a:r>
-              <a:rPr sz="2600" b="1">
-                <a:solidFill>
-                  <a:srgbClr val="3B2B26"/>
-                </a:solidFill>
-                <a:latin typeface="Arial"/>
-                <a:ea typeface="Arial"/>
-                <a:cs typeface="Arial"/>
-              </a:rPr>
-              <a:t>“大厂在给 AI 装一只宠物；我们做的是一个人”</a:t>
-            </a:r>
-          </a:p>
-          <a:p>
-            <a:pPr algn="ctr">
-              <a:spcAft>
-                <a:spcPts val="0"/>
-              </a:spcAft>
-            </a:pPr>
-            <a:r>
-              <a:rPr sz="1400" b="0">
-                <a:solidFill>
-                  <a:srgbClr val="6B5850"/>
-                </a:solidFill>
-                <a:latin typeface="Arial"/>
-                <a:ea typeface="Arial"/>
-                <a:cs typeface="Arial"/>
-              </a:rPr>
-              <a:t>—— 她在办公线是吉祥物，在我们这儿是角色</a:t>
-            </a:r>
-          </a:p>
-        </p:txBody>
-      </p:sp>
-      <p:sp>
-        <p:nvSpPr>
-          <p:cNvPr id="3" name="TextBox 2"/>
-          <p:cNvSpPr txBox="1"/>
-          <p:nvPr/>
-        </p:nvSpPr>
-        <p:spPr>
-          <a:xfrm>
-            <a:off x="548640" y="6473952"/>
-            <a:ext cx="11064240" cy="274320"/>
-          </a:xfrm>
-          <a:prstGeom prst="rect">
-            <a:avLst/>
-          </a:prstGeom>
-          <a:noFill/>
-        </p:spPr>
-        <p:txBody>
-          <a:bodyPr wrap="square" anchor="t" lIns="0" rIns="0" tIns="0" bIns="0">
-            <a:spAutoFit/>
-          </a:bodyPr>
-          <a:lstStyle/>
-          <a:p>
-            <a:pPr algn="r">
-              <a:spcAft>
-                <a:spcPts val="0"/>
-              </a:spcAft>
-            </a:pPr>
-            <a:r>
-              <a:rPr sz="1000" b="0">
-                <a:solidFill>
-                  <a:srgbClr val="6B5850"/>
-                </a:solidFill>
-                <a:latin typeface="Arial"/>
-                <a:ea typeface="Arial"/>
-                <a:cs typeface="Arial"/>
-              </a:rPr>
-              <a:t>10</a:t>
-            </a:r>
-          </a:p>
-        </p:txBody>
-      </p:sp>
-    </p:spTree>
-  </p:cSld>
-  <p:clrMapOvr>
-    <a:masterClrMapping/>
-  </p:clrMapOvr>
-</p:sld>
-</file>
-
-<file path=ppt/slides/slide11.xml><?xml version="1.0" encoding="utf-8"?>
-<p:sld xmlns:a="http://schemas.openxmlformats.org/drawingml/2006/main" xmlns:p="http://schemas.openxmlformats.org/presentationml/2006/main" xmlns:r="http://schemas.openxmlformats.org/officeDocument/2006/relationships">
-  <p:cSld>
-    <p:bg>
-      <p:bgPr>
-        <a:solidFill>
-          <a:srgbClr val="3B2B26"/>
-        </a:solidFill>
-        <a:effectLst/>
-      </p:bgPr>
-    </p:bg>
-    <p:spTree>
-      <p:nvGrpSpPr>
-        <p:cNvPr id="1" name=""/>
-        <p:cNvGrpSpPr/>
-        <p:nvPr/>
-      </p:nvGrpSpPr>
-      <p:grpSpPr/>
-      <p:sp>
-        <p:nvSpPr>
-          <p:cNvPr id="2" name="TextBox 1"/>
-          <p:cNvSpPr txBox="1"/>
-          <p:nvPr/>
-        </p:nvSpPr>
-        <p:spPr>
-          <a:xfrm>
-            <a:off x="822960" y="2011680"/>
-            <a:ext cx="10058400" cy="1280160"/>
-          </a:xfrm>
-          <a:prstGeom prst="rect">
-            <a:avLst/>
-          </a:prstGeom>
-          <a:noFill/>
-        </p:spPr>
-        <p:txBody>
-          <a:bodyPr wrap="square" anchor="t" lIns="0" rIns="0" tIns="0" bIns="0">
-            <a:spAutoFit/>
-          </a:bodyPr>
-          <a:lstStyle/>
-          <a:p>
-            <a:pPr algn="l">
-              <a:spcAft>
-                <a:spcPts val="0"/>
-              </a:spcAft>
-            </a:pPr>
-            <a:r>
-              <a:rPr sz="6000" b="1">
-                <a:solidFill>
-                  <a:srgbClr val="A03A35"/>
-                </a:solidFill>
-                <a:latin typeface="Arial"/>
-                <a:ea typeface="Arial"/>
-                <a:cs typeface="Arial"/>
-              </a:rPr>
-              <a:t>02</a:t>
-            </a:r>
-          </a:p>
-        </p:txBody>
-      </p:sp>
-      <p:sp>
-        <p:nvSpPr>
-          <p:cNvPr id="3" name="TextBox 2"/>
-          <p:cNvSpPr txBox="1"/>
-          <p:nvPr/>
-        </p:nvSpPr>
-        <p:spPr>
-          <a:xfrm>
-            <a:off x="822960" y="3383280"/>
-            <a:ext cx="10515600" cy="1097280"/>
-          </a:xfrm>
-          <a:prstGeom prst="rect">
-            <a:avLst/>
-          </a:prstGeom>
-          <a:noFill/>
-        </p:spPr>
-        <p:txBody>
-          <a:bodyPr wrap="square" anchor="t" lIns="0" rIns="0" tIns="0" bIns="0">
-            <a:spAutoFit/>
-          </a:bodyPr>
-          <a:lstStyle/>
-          <a:p>
-            <a:pPr algn="l">
-              <a:spcAft>
-                <a:spcPts val="0"/>
-              </a:spcAft>
-            </a:pPr>
-            <a:r>
-              <a:rPr sz="3400" b="1">
-                <a:solidFill>
-                  <a:srgbClr val="F7F1EA"/>
-                </a:solidFill>
-                <a:latin typeface="Arial"/>
-                <a:ea typeface="Arial"/>
-                <a:cs typeface="Arial"/>
-              </a:rPr>
-              <a:t>功能展示与实现方法</a:t>
-            </a:r>
-          </a:p>
-        </p:txBody>
-      </p:sp>
-    </p:spTree>
-  </p:cSld>
-  <p:clrMapOvr>
-    <a:masterClrMapping/>
-  </p:clrMapOvr>
-</p:sld>
-</file>
-
-<file path=ppt/slides/slide12.xml><?xml version="1.0" encoding="utf-8"?>
-<p:sld xmlns:a="http://schemas.openxmlformats.org/drawingml/2006/main" xmlns:p="http://schemas.openxmlformats.org/presentationml/2006/main" xmlns:r="http://schemas.openxmlformats.org/officeDocument/2006/relationships">
-  <p:cSld>
-    <p:bg>
-      <p:bgPr>
-        <a:solidFill>
-          <a:srgbClr val="F7F1EA"/>
-        </a:solidFill>
-        <a:effectLst/>
-      </p:bgPr>
-    </p:bg>
-    <p:spTree>
-      <p:nvGrpSpPr>
-        <p:cNvPr id="1" name=""/>
-        <p:cNvGrpSpPr/>
-        <p:nvPr/>
-      </p:nvGrpSpPr>
-      <p:grpSpPr/>
-      <p:sp>
-        <p:nvSpPr>
-          <p:cNvPr id="2" name="TextBox 1"/>
-          <p:cNvSpPr txBox="1"/>
-          <p:nvPr/>
-        </p:nvSpPr>
-        <p:spPr>
-          <a:xfrm>
             <a:off x="548640" y="502920"/>
             <a:ext cx="11064240" cy="1005840"/>
           </a:xfrm>
@@ -5556,7 +5400,7 @@
                 <a:ea typeface="Arial"/>
                 <a:cs typeface="Arial"/>
               </a:rPr>
-              <a:t>她现在能做的事</a:t>
+              <a:t>更广的同类：都在做「形象」，只有我们在做「关系」</a:t>
             </a:r>
           </a:p>
         </p:txBody>
@@ -5652,7 +5496,7 @@
                 <a:ea typeface="微软雅黑"/>
                 <a:cs typeface="微软雅黑"/>
               </a:rPr>
-              <a:t>有形象地陪着你</a:t>
+              <a:t>展示工具类</a:t>
             </a:r>
             <a:r>
               <a:rPr sz="1300" b="0">
@@ -5663,7 +5507,7 @@
                 <a:ea typeface="微软雅黑"/>
                 <a:cs typeface="微软雅黑"/>
               </a:rPr>
-              <a:t>  透明置顶窗口；点她、拖她、她自己走动</a:t>
+              <a:t>  Live2DViewerEX（Steam ¥26）：跨平台 + 面捕 + 创意工坊，把模型放出来做到了天花板 —— 但它不聊、不记、不主动</a:t>
             </a:r>
           </a:p>
           <a:p>
@@ -5692,7 +5536,7 @@
                 <a:ea typeface="微软雅黑"/>
                 <a:cs typeface="微软雅黑"/>
               </a:rPr>
-              <a:t>用她自己的声音说话</a:t>
+              <a:t>养成 / 玩具类</a:t>
             </a:r>
             <a:r>
               <a:rPr sz="1300" b="0">
@@ -5703,7 +5547,7 @@
                 <a:ea typeface="微软雅黑"/>
                 <a:cs typeface="微软雅黑"/>
               </a:rPr>
-              <a:t>  角色专属语音模型，嘴型与打字机效果同步</a:t>
+              <a:t>  Shimeji 系、BongoCat（C+SDL3，纯开源）、虚拟桌宠模拟器 VPet（开源 + Steam）—— 可爱、轻量，核心是动作与数值</a:t>
             </a:r>
           </a:p>
           <a:p>
@@ -5732,7 +5576,7 @@
                 <a:ea typeface="微软雅黑"/>
                 <a:cs typeface="微软雅黑"/>
               </a:rPr>
-              <a:t>记得住你</a:t>
+              <a:t>大厂 / 厂商吉祥物</a:t>
             </a:r>
             <a:r>
               <a:rPr sz="1300" b="0">
@@ -5743,7 +5587,7 @@
                 <a:ea typeface="微软雅黑"/>
                 <a:cs typeface="微软雅黑"/>
               </a:rPr>
-              <a:t>  长期记忆 + 日记 + 作息/习惯观察</a:t>
+              <a:t>  人工桌面（yoyo 鹿鸣，3D 看板娘）、天选桌宠（华硕随机器）—— 形象质量高，但是内容型、不是会记事的个人角色</a:t>
             </a:r>
           </a:p>
           <a:p>
@@ -5772,7 +5616,7 @@
                 <a:ea typeface="微软雅黑"/>
                 <a:cs typeface="微软雅黑"/>
               </a:rPr>
-              <a:t>能替你干活</a:t>
+              <a:t>手机端助手</a:t>
             </a:r>
             <a:r>
               <a:rPr sz="1300" b="0">
@@ -5783,7 +5627,7 @@
                 <a:ea typeface="微软雅黑"/>
                 <a:cs typeface="微软雅黑"/>
               </a:rPr>
-              <a:t>  键鼠操作、看屏幕、只读查文件</a:t>
+              <a:t>  兽耳助手：助手向 + 角色形象（记忆与主动性待核实，不替它下结论）</a:t>
             </a:r>
           </a:p>
           <a:p>
@@ -5812,7 +5656,7 @@
                 <a:ea typeface="微软雅黑"/>
                 <a:cs typeface="微软雅黑"/>
               </a:rPr>
-              <a:t>出得了桌面</a:t>
+              <a:t>共同点</a:t>
             </a:r>
             <a:r>
               <a:rPr sz="1300" b="0">
@@ -5823,7 +5667,47 @@
                 <a:ea typeface="微软雅黑"/>
                 <a:cs typeface="微软雅黑"/>
               </a:rPr>
-              <a:t>  QQ / 微信里继续聊，装扮与桌宠同步</a:t>
+              <a:t>  这七类都停在「看得见」：有形象、有动作、有养成 —— 没有一类把「长期记忆 + 主动开口」当成核心</a:t>
+            </a:r>
+          </a:p>
+          <a:p>
+            <a:pPr>
+              <a:spcAft>
+                <a:spcPts val="1400"/>
+              </a:spcAft>
+            </a:pPr>
+            <a:r>
+              <a:rPr sz="1600" b="0">
+                <a:solidFill>
+                  <a:srgbClr val="A03A35"/>
+                </a:solidFill>
+                <a:latin typeface="微软雅黑"/>
+                <a:ea typeface="微软雅黑"/>
+                <a:cs typeface="微软雅黑"/>
+              </a:rPr>
+              <a:t>▪  </a:t>
+            </a:r>
+            <a:r>
+              <a:rPr sz="1600" b="0">
+                <a:solidFill>
+                  <a:srgbClr val="3B2B26"/>
+                </a:solidFill>
+                <a:latin typeface="微软雅黑"/>
+                <a:ea typeface="微软雅黑"/>
+                <a:cs typeface="微软雅黑"/>
+              </a:rPr>
+              <a:t>所以我们的位置</a:t>
+            </a:r>
+            <a:r>
+              <a:rPr sz="1300" b="0">
+                <a:solidFill>
+                  <a:srgbClr val="6B5850"/>
+                </a:solidFill>
+                <a:latin typeface="微软雅黑"/>
+                <a:ea typeface="微软雅黑"/>
+                <a:cs typeface="微软雅黑"/>
+              </a:rPr>
+              <a:t>  形象是入口，关系才是留存；我们做的是她记得你、也会主动找你</a:t>
             </a:r>
           </a:p>
         </p:txBody>
@@ -5864,7 +5748,244 @@
                 <a:ea typeface="Arial"/>
                 <a:cs typeface="Arial"/>
               </a:rPr>
-              <a:t>12</a:t>
+              <a:t>10</a:t>
+            </a:r>
+          </a:p>
+        </p:txBody>
+      </p:sp>
+    </p:spTree>
+  </p:cSld>
+  <p:clrMapOvr>
+    <a:masterClrMapping/>
+  </p:clrMapOvr>
+</p:sld>
+</file>
+
+<file path=ppt/slides/slide11.xml><?xml version="1.0" encoding="utf-8"?>
+<p:sld xmlns:a="http://schemas.openxmlformats.org/drawingml/2006/main" xmlns:p="http://schemas.openxmlformats.org/presentationml/2006/main" xmlns:r="http://schemas.openxmlformats.org/officeDocument/2006/relationships">
+  <p:cSld>
+    <p:bg>
+      <p:bgPr>
+        <a:solidFill>
+          <a:srgbClr val="F7F1EA"/>
+        </a:solidFill>
+        <a:effectLst/>
+      </p:bgPr>
+    </p:bg>
+    <p:spTree>
+      <p:nvGrpSpPr>
+        <p:cNvPr id="1" name=""/>
+        <p:cNvGrpSpPr/>
+        <p:nvPr/>
+      </p:nvGrpSpPr>
+      <p:grpSpPr/>
+      <p:sp>
+        <p:nvSpPr>
+          <p:cNvPr id="2" name="TextBox 1"/>
+          <p:cNvSpPr txBox="1"/>
+          <p:nvPr/>
+        </p:nvSpPr>
+        <p:spPr>
+          <a:xfrm>
+            <a:off x="1097280" y="2103120"/>
+            <a:ext cx="9966960" cy="2377440"/>
+          </a:xfrm>
+          <a:prstGeom prst="rect">
+            <a:avLst/>
+          </a:prstGeom>
+          <a:noFill/>
+        </p:spPr>
+        <p:txBody>
+          <a:bodyPr wrap="square" anchor="ctr" lIns="0" rIns="0" tIns="0" bIns="0">
+            <a:spAutoFit/>
+          </a:bodyPr>
+          <a:lstStyle/>
+          <a:p>
+            <a:pPr algn="ctr">
+              <a:lnSpc>
+                <a:spcPct val="120000"/>
+              </a:lnSpc>
+              <a:spcAft>
+                <a:spcPts val="1400"/>
+              </a:spcAft>
+            </a:pPr>
+            <a:r>
+              <a:rPr sz="2600" b="1">
+                <a:solidFill>
+                  <a:srgbClr val="3B2B26"/>
+                </a:solidFill>
+                <a:latin typeface="Arial"/>
+                <a:ea typeface="Arial"/>
+                <a:cs typeface="Arial"/>
+              </a:rPr>
+              <a:t>“大厂在给 AI 装一只宠物；我们做的是一个人”</a:t>
+            </a:r>
+          </a:p>
+          <a:p>
+            <a:pPr algn="ctr">
+              <a:spcAft>
+                <a:spcPts val="0"/>
+              </a:spcAft>
+            </a:pPr>
+            <a:r>
+              <a:rPr sz="1400" b="0">
+                <a:solidFill>
+                  <a:srgbClr val="6B5850"/>
+                </a:solidFill>
+                <a:latin typeface="Arial"/>
+                <a:ea typeface="Arial"/>
+                <a:cs typeface="Arial"/>
+              </a:rPr>
+              <a:t>—— 她在办公线是吉祥物，在我们这儿是角色</a:t>
+            </a:r>
+          </a:p>
+        </p:txBody>
+      </p:sp>
+      <p:sp>
+        <p:nvSpPr>
+          <p:cNvPr id="3" name="TextBox 2"/>
+          <p:cNvSpPr txBox="1"/>
+          <p:nvPr/>
+        </p:nvSpPr>
+        <p:spPr>
+          <a:xfrm>
+            <a:off x="548640" y="6473952"/>
+            <a:ext cx="11064240" cy="274320"/>
+          </a:xfrm>
+          <a:prstGeom prst="rect">
+            <a:avLst/>
+          </a:prstGeom>
+          <a:noFill/>
+        </p:spPr>
+        <p:txBody>
+          <a:bodyPr wrap="square" anchor="t" lIns="0" rIns="0" tIns="0" bIns="0">
+            <a:spAutoFit/>
+          </a:bodyPr>
+          <a:lstStyle/>
+          <a:p>
+            <a:pPr algn="r">
+              <a:spcAft>
+                <a:spcPts val="0"/>
+              </a:spcAft>
+            </a:pPr>
+            <a:r>
+              <a:rPr sz="1000" b="0">
+                <a:solidFill>
+                  <a:srgbClr val="6B5850"/>
+                </a:solidFill>
+                <a:latin typeface="Arial"/>
+                <a:ea typeface="Arial"/>
+                <a:cs typeface="Arial"/>
+              </a:rPr>
+              <a:t>11</a:t>
+            </a:r>
+          </a:p>
+        </p:txBody>
+      </p:sp>
+    </p:spTree>
+  </p:cSld>
+  <p:clrMapOvr>
+    <a:masterClrMapping/>
+  </p:clrMapOvr>
+</p:sld>
+</file>
+
+<file path=ppt/slides/slide12.xml><?xml version="1.0" encoding="utf-8"?>
+<p:sld xmlns:a="http://schemas.openxmlformats.org/drawingml/2006/main" xmlns:p="http://schemas.openxmlformats.org/presentationml/2006/main" xmlns:r="http://schemas.openxmlformats.org/officeDocument/2006/relationships">
+  <p:cSld>
+    <p:bg>
+      <p:bgPr>
+        <a:solidFill>
+          <a:srgbClr val="3B2B26"/>
+        </a:solidFill>
+        <a:effectLst/>
+      </p:bgPr>
+    </p:bg>
+    <p:spTree>
+      <p:nvGrpSpPr>
+        <p:cNvPr id="1" name=""/>
+        <p:cNvGrpSpPr/>
+        <p:nvPr/>
+      </p:nvGrpSpPr>
+      <p:grpSpPr/>
+      <p:sp>
+        <p:nvSpPr>
+          <p:cNvPr id="2" name="TextBox 1"/>
+          <p:cNvSpPr txBox="1"/>
+          <p:nvPr/>
+        </p:nvSpPr>
+        <p:spPr>
+          <a:xfrm>
+            <a:off x="822960" y="2011680"/>
+            <a:ext cx="10058400" cy="1280160"/>
+          </a:xfrm>
+          <a:prstGeom prst="rect">
+            <a:avLst/>
+          </a:prstGeom>
+          <a:noFill/>
+        </p:spPr>
+        <p:txBody>
+          <a:bodyPr wrap="square" anchor="t" lIns="0" rIns="0" tIns="0" bIns="0">
+            <a:spAutoFit/>
+          </a:bodyPr>
+          <a:lstStyle/>
+          <a:p>
+            <a:pPr algn="l">
+              <a:spcAft>
+                <a:spcPts val="0"/>
+              </a:spcAft>
+            </a:pPr>
+            <a:r>
+              <a:rPr sz="6000" b="1">
+                <a:solidFill>
+                  <a:srgbClr val="A03A35"/>
+                </a:solidFill>
+                <a:latin typeface="Arial"/>
+                <a:ea typeface="Arial"/>
+                <a:cs typeface="Arial"/>
+              </a:rPr>
+              <a:t>02</a:t>
+            </a:r>
+          </a:p>
+        </p:txBody>
+      </p:sp>
+      <p:sp>
+        <p:nvSpPr>
+          <p:cNvPr id="3" name="TextBox 2"/>
+          <p:cNvSpPr txBox="1"/>
+          <p:nvPr/>
+        </p:nvSpPr>
+        <p:spPr>
+          <a:xfrm>
+            <a:off x="822960" y="3383280"/>
+            <a:ext cx="10515600" cy="1097280"/>
+          </a:xfrm>
+          <a:prstGeom prst="rect">
+            <a:avLst/>
+          </a:prstGeom>
+          <a:noFill/>
+        </p:spPr>
+        <p:txBody>
+          <a:bodyPr wrap="square" anchor="t" lIns="0" rIns="0" tIns="0" bIns="0">
+            <a:spAutoFit/>
+          </a:bodyPr>
+          <a:lstStyle/>
+          <a:p>
+            <a:pPr algn="l">
+              <a:spcAft>
+                <a:spcPts val="0"/>
+              </a:spcAft>
+            </a:pPr>
+            <a:r>
+              <a:rPr sz="3400" b="1">
+                <a:solidFill>
+                  <a:srgbClr val="F7F1EA"/>
+                </a:solidFill>
+                <a:latin typeface="Arial"/>
+                <a:ea typeface="Arial"/>
+                <a:cs typeface="Arial"/>
+              </a:rPr>
+              <a:t>功能展示与实现方法</a:t>
             </a:r>
           </a:p>
         </p:txBody>
@@ -5931,7 +6052,7 @@
                 <a:ea typeface="Arial"/>
                 <a:cs typeface="Arial"/>
               </a:rPr>
-              <a:t>怎么做到的（一）：形象与语音</a:t>
+              <a:t>她现在能做的事</a:t>
             </a:r>
           </a:p>
         </p:txBody>
@@ -6027,7 +6148,7 @@
                 <a:ea typeface="微软雅黑"/>
                 <a:cs typeface="微软雅黑"/>
               </a:rPr>
-              <a:t>双形态渲染</a:t>
+              <a:t>有形象地陪着你</a:t>
             </a:r>
             <a:r>
               <a:rPr sz="1300" b="0">
@@ -6038,7 +6159,7 @@
                 <a:ea typeface="微软雅黑"/>
                 <a:cs typeface="微软雅黑"/>
               </a:rPr>
-              <a:t>  Live2D（Cubism）与 2D 立绘共用一套“装扮”数据</a:t>
+              <a:t>  透明置顶窗口；点她、拖她、她自己走动</a:t>
             </a:r>
           </a:p>
           <a:p>
@@ -6067,7 +6188,7 @@
                 <a:ea typeface="微软雅黑"/>
                 <a:cs typeface="微软雅黑"/>
               </a:rPr>
-              <a:t>装扮即数据</a:t>
+              <a:t>用她自己的声音说话</a:t>
             </a:r>
             <a:r>
               <a:rPr sz="1300" b="0">
@@ -6078,7 +6199,7 @@
                 <a:ea typeface="微软雅黑"/>
                 <a:cs typeface="微软雅黑"/>
               </a:rPr>
-              <a:t>  衣服/发型/装饰/姿势都是层号，换装=换层再合成</a:t>
+              <a:t>  角色专属语音模型，嘴型与打字机效果同步</a:t>
             </a:r>
           </a:p>
           <a:p>
@@ -6107,7 +6228,7 @@
                 <a:ea typeface="微软雅黑"/>
                 <a:cs typeface="微软雅黑"/>
               </a:rPr>
-              <a:t>语音链路</a:t>
+              <a:t>记得住你</a:t>
             </a:r>
             <a:r>
               <a:rPr sz="1300" b="0">
@@ -6118,7 +6239,7 @@
                 <a:ea typeface="微软雅黑"/>
                 <a:cs typeface="微软雅黑"/>
               </a:rPr>
-              <a:t>  文本 → GPT-SoVITS（角色模型）→ 播放，独立服务常驻</a:t>
+              <a:t>  长期记忆 + 日记 + 作息/习惯观察</a:t>
             </a:r>
           </a:p>
           <a:p>
@@ -6147,7 +6268,7 @@
                 <a:ea typeface="微软雅黑"/>
                 <a:cs typeface="微软雅黑"/>
               </a:rPr>
-              <a:t>不打断体验</a:t>
+              <a:t>能替你干活</a:t>
             </a:r>
             <a:r>
               <a:rPr sz="1300" b="0">
@@ -6158,7 +6279,47 @@
                 <a:ea typeface="微软雅黑"/>
                 <a:cs typeface="微软雅黑"/>
               </a:rPr>
-              <a:t>  点她/切窗口不会掐断正在念的句子（本轮刚修）</a:t>
+              <a:t>  键鼠操作、看屏幕、只读查文件</a:t>
+            </a:r>
+          </a:p>
+          <a:p>
+            <a:pPr>
+              <a:spcAft>
+                <a:spcPts val="1400"/>
+              </a:spcAft>
+            </a:pPr>
+            <a:r>
+              <a:rPr sz="1600" b="0">
+                <a:solidFill>
+                  <a:srgbClr val="A03A35"/>
+                </a:solidFill>
+                <a:latin typeface="微软雅黑"/>
+                <a:ea typeface="微软雅黑"/>
+                <a:cs typeface="微软雅黑"/>
+              </a:rPr>
+              <a:t>▪  </a:t>
+            </a:r>
+            <a:r>
+              <a:rPr sz="1600" b="0">
+                <a:solidFill>
+                  <a:srgbClr val="3B2B26"/>
+                </a:solidFill>
+                <a:latin typeface="微软雅黑"/>
+                <a:ea typeface="微软雅黑"/>
+                <a:cs typeface="微软雅黑"/>
+              </a:rPr>
+              <a:t>出得了桌面</a:t>
+            </a:r>
+            <a:r>
+              <a:rPr sz="1300" b="0">
+                <a:solidFill>
+                  <a:srgbClr val="6B5850"/>
+                </a:solidFill>
+                <a:latin typeface="微软雅黑"/>
+                <a:ea typeface="微软雅黑"/>
+                <a:cs typeface="微软雅黑"/>
+              </a:rPr>
+              <a:t>  QQ / 微信里继续聊，装扮与桌宠同步</a:t>
             </a:r>
           </a:p>
         </p:txBody>
@@ -6266,7 +6427,7 @@
                 <a:ea typeface="Arial"/>
                 <a:cs typeface="Arial"/>
               </a:rPr>
-              <a:t>怎么做到的（二）：记忆与陪伴</a:t>
+              <a:t>怎么做到的（一）：形象与语音</a:t>
             </a:r>
           </a:p>
         </p:txBody>
@@ -6362,7 +6523,7 @@
                 <a:ea typeface="微软雅黑"/>
                 <a:cs typeface="微软雅黑"/>
               </a:rPr>
-              <a:t>分层的记忆</a:t>
+              <a:t>双形态渲染</a:t>
             </a:r>
             <a:r>
               <a:rPr sz="1300" b="0">
@@ -6373,7 +6534,7 @@
                 <a:ea typeface="微软雅黑"/>
                 <a:cs typeface="微软雅黑"/>
               </a:rPr>
-              <a:t>  对话记忆 / 长期记忆 / 日记 / 状态快照，各管一段</a:t>
+              <a:t>  Live2D（Cubism）与 2D 立绘共用一套“装扮”数据</a:t>
             </a:r>
           </a:p>
           <a:p>
@@ -6402,7 +6563,7 @@
                 <a:ea typeface="微软雅黑"/>
                 <a:cs typeface="微软雅黑"/>
               </a:rPr>
-              <a:t>关系会变</a:t>
+              <a:t>装扮即数据</a:t>
             </a:r>
             <a:r>
               <a:rPr sz="1300" b="0">
@@ -6413,7 +6574,7 @@
                 <a:ea typeface="微软雅黑"/>
                 <a:cs typeface="微软雅黑"/>
               </a:rPr>
-              <a:t>  桌面端：按真实相处证据（天数×对话量）抬高下限（affinity_floor）；QQ 侧另有一套面向群聊的好感玩法，按对话内容结算</a:t>
+              <a:t>  衣服/发型/装饰/姿势都是层号，换装=换层再合成</a:t>
             </a:r>
           </a:p>
           <a:p>
@@ -6442,7 +6603,7 @@
                 <a:ea typeface="微软雅黑"/>
                 <a:cs typeface="微软雅黑"/>
               </a:rPr>
-              <a:t>她自己会学</a:t>
+              <a:t>语音链路</a:t>
             </a:r>
             <a:r>
               <a:rPr sz="1300" b="0">
@@ -6453,7 +6614,7 @@
                 <a:ea typeface="微软雅黑"/>
                 <a:cs typeface="微软雅黑"/>
               </a:rPr>
-              <a:t>  空闲时自己补课、归纳“关于主人的事”</a:t>
+              <a:t>  文本 → GPT-SoVITS（角色模型）→ 播放，独立服务常驻</a:t>
             </a:r>
           </a:p>
           <a:p>
@@ -6482,7 +6643,7 @@
                 <a:ea typeface="微软雅黑"/>
                 <a:cs typeface="微软雅黑"/>
               </a:rPr>
-              <a:t>状态看得见</a:t>
+              <a:t>不打断体验</a:t>
             </a:r>
             <a:r>
               <a:rPr sz="1300" b="0">
@@ -6493,7 +6654,7 @@
                 <a:ea typeface="微软雅黑"/>
                 <a:cs typeface="微软雅黑"/>
               </a:rPr>
-              <a:t>  状态页五个页签：现在 / 习惯 / 心里 / 提醒 / 记忆</a:t>
+              <a:t>  点她/切窗口不会掐断正在念的句子（本轮刚修）</a:t>
             </a:r>
           </a:p>
         </p:txBody>
@@ -6601,7 +6762,7 @@
                 <a:ea typeface="Arial"/>
                 <a:cs typeface="Arial"/>
               </a:rPr>
-              <a:t>怎么做到的（三）：出桌面、上手机</a:t>
+              <a:t>怎么做到的（二）：记忆与陪伴</a:t>
             </a:r>
           </a:p>
         </p:txBody>
@@ -6697,7 +6858,7 @@
                 <a:ea typeface="微软雅黑"/>
                 <a:cs typeface="微软雅黑"/>
               </a:rPr>
-              <a:t>QQ / 微信桥接</a:t>
+              <a:t>分层的记忆</a:t>
             </a:r>
             <a:r>
               <a:rPr sz="1300" b="0">
@@ -6708,7 +6869,7 @@
                 <a:ea typeface="微软雅黑"/>
                 <a:cs typeface="微软雅黑"/>
               </a:rPr>
-              <a:t>  同一套人设与记忆，在聊天软件里继续</a:t>
+              <a:t>  对话记忆 / 长期记忆 / 日记 / 状态快照，各管一段</a:t>
             </a:r>
           </a:p>
           <a:p>
@@ -6737,7 +6898,7 @@
                 <a:ea typeface="微软雅黑"/>
                 <a:cs typeface="微软雅黑"/>
               </a:rPr>
-              <a:t>立绘同步</a:t>
+              <a:t>关系会变</a:t>
             </a:r>
             <a:r>
               <a:rPr sz="1300" b="0">
@@ -6748,7 +6909,7 @@
                 <a:ea typeface="微软雅黑"/>
                 <a:cs typeface="微软雅黑"/>
               </a:rPr>
-              <a:t>  QQ 侧发的图与桌宠穿的是同一件衣服</a:t>
+              <a:t>  桌面端：按真实相处证据（天数×对话量）抬高下限（affinity_floor）；QQ 侧另有一套面向群聊的好感玩法，按对话内容结算</a:t>
             </a:r>
           </a:p>
           <a:p>
@@ -6777,7 +6938,7 @@
                 <a:ea typeface="微软雅黑"/>
                 <a:cs typeface="微软雅黑"/>
               </a:rPr>
-              <a:t>安卓端</a:t>
+              <a:t>她自己会学</a:t>
             </a:r>
             <a:r>
               <a:rPr sz="1300" b="0">
@@ -6788,7 +6949,47 @@
                 <a:ea typeface="微软雅黑"/>
                 <a:cs typeface="微软雅黑"/>
               </a:rPr>
-              <a:t>  手机侧走同一套后端协议，形象与记忆互通</a:t>
+              <a:t>  空闲时自己补课、归纳“关于主人的事”</a:t>
+            </a:r>
+          </a:p>
+          <a:p>
+            <a:pPr>
+              <a:spcAft>
+                <a:spcPts val="1400"/>
+              </a:spcAft>
+            </a:pPr>
+            <a:r>
+              <a:rPr sz="1600" b="0">
+                <a:solidFill>
+                  <a:srgbClr val="A03A35"/>
+                </a:solidFill>
+                <a:latin typeface="微软雅黑"/>
+                <a:ea typeface="微软雅黑"/>
+                <a:cs typeface="微软雅黑"/>
+              </a:rPr>
+              <a:t>▪  </a:t>
+            </a:r>
+            <a:r>
+              <a:rPr sz="1600" b="0">
+                <a:solidFill>
+                  <a:srgbClr val="3B2B26"/>
+                </a:solidFill>
+                <a:latin typeface="微软雅黑"/>
+                <a:ea typeface="微软雅黑"/>
+                <a:cs typeface="微软雅黑"/>
+              </a:rPr>
+              <a:t>状态看得见</a:t>
+            </a:r>
+            <a:r>
+              <a:rPr sz="1300" b="0">
+                <a:solidFill>
+                  <a:srgbClr val="6B5850"/>
+                </a:solidFill>
+                <a:latin typeface="微软雅黑"/>
+                <a:ea typeface="微软雅黑"/>
+                <a:cs typeface="微软雅黑"/>
+              </a:rPr>
+              <a:t>  状态页五个页签：现在 / 习惯 / 心里 / 提醒 / 记忆</a:t>
             </a:r>
           </a:p>
         </p:txBody>
@@ -6896,7 +7097,7 @@
                 <a:ea typeface="Arial"/>
                 <a:cs typeface="Arial"/>
               </a:rPr>
-              <a:t>工程质量：这套东西是“验得出来”的</a:t>
+              <a:t>怎么做到的（三）：出桌面、上手机</a:t>
             </a:r>
           </a:p>
         </p:txBody>
@@ -6992,7 +7193,7 @@
                 <a:ea typeface="微软雅黑"/>
                 <a:cs typeface="微软雅黑"/>
               </a:rPr>
-              <a:t>386 项自带自检</a:t>
+              <a:t>QQ / 微信桥接</a:t>
             </a:r>
             <a:r>
               <a:rPr sz="1300" b="0">
@@ -7003,7 +7204,7 @@
                 <a:ea typeface="微软雅黑"/>
                 <a:cs typeface="微软雅黑"/>
               </a:rPr>
-              <a:t>  边界 / 配置契约 / 生命周期 / 前端一致性 / 语音链路</a:t>
+              <a:t>  同一套人设与记忆，在聊天软件里继续</a:t>
             </a:r>
           </a:p>
           <a:p>
@@ -7032,7 +7233,7 @@
                 <a:ea typeface="微软雅黑"/>
                 <a:cs typeface="微软雅黑"/>
               </a:rPr>
-              <a:t>全绿</a:t>
+              <a:t>立绘同步</a:t>
             </a:r>
             <a:r>
               <a:rPr sz="1300" b="0">
@@ -7043,7 +7244,7 @@
                 <a:ea typeface="微软雅黑"/>
                 <a:cs typeface="微软雅黑"/>
               </a:rPr>
-              <a:t>  10 个测试文件全部通过，一条命令可复现</a:t>
+              <a:t>  QQ 侧发的图与桌宠穿的是同一件衣服</a:t>
             </a:r>
           </a:p>
           <a:p>
@@ -7072,7 +7273,7 @@
                 <a:ea typeface="微软雅黑"/>
                 <a:cs typeface="微软雅黑"/>
               </a:rPr>
-              <a:t>看得见的证据</a:t>
+              <a:t>安卓端</a:t>
             </a:r>
             <a:r>
               <a:rPr sz="1300" b="0">
@@ -7083,47 +7284,7 @@
                 <a:ea typeface="微软雅黑"/>
                 <a:cs typeface="微软雅黑"/>
               </a:rPr>
-              <a:t>  像素级验收：立绘底色、换装差异都用图像摘要比对</a:t>
-            </a:r>
-          </a:p>
-          <a:p>
-            <a:pPr>
-              <a:spcAft>
-                <a:spcPts val="1400"/>
-              </a:spcAft>
-            </a:pPr>
-            <a:r>
-              <a:rPr sz="1600" b="0">
-                <a:solidFill>
-                  <a:srgbClr val="A03A35"/>
-                </a:solidFill>
-                <a:latin typeface="微软雅黑"/>
-                <a:ea typeface="微软雅黑"/>
-                <a:cs typeface="微软雅黑"/>
-              </a:rPr>
-              <a:t>▪  </a:t>
-            </a:r>
-            <a:r>
-              <a:rPr sz="1600" b="0">
-                <a:solidFill>
-                  <a:srgbClr val="3B2B26"/>
-                </a:solidFill>
-                <a:latin typeface="微软雅黑"/>
-                <a:ea typeface="微软雅黑"/>
-                <a:cs typeface="微软雅黑"/>
-              </a:rPr>
-              <a:t>可诊断</a:t>
-            </a:r>
-            <a:r>
-              <a:rPr sz="1300" b="0">
-                <a:solidFill>
-                  <a:srgbClr val="6B5850"/>
-                </a:solidFill>
-                <a:latin typeface="微软雅黑"/>
-                <a:ea typeface="微软雅黑"/>
-                <a:cs typeface="微软雅黑"/>
-              </a:rPr>
-              <a:t>  关键路径都有日志，出问题能定位到具体一环</a:t>
+              <a:t>  手机侧走同一套后端协议，形象与记忆互通</a:t>
             </a:r>
           </a:p>
         </p:txBody>
@@ -7178,114 +7339,6 @@
 </file>
 
 <file path=ppt/slides/slide17.xml><?xml version="1.0" encoding="utf-8"?>
-<p:sld xmlns:a="http://schemas.openxmlformats.org/drawingml/2006/main" xmlns:p="http://schemas.openxmlformats.org/presentationml/2006/main" xmlns:r="http://schemas.openxmlformats.org/officeDocument/2006/relationships">
-  <p:cSld>
-    <p:bg>
-      <p:bgPr>
-        <a:solidFill>
-          <a:srgbClr val="3B2B26"/>
-        </a:solidFill>
-        <a:effectLst/>
-      </p:bgPr>
-    </p:bg>
-    <p:spTree>
-      <p:nvGrpSpPr>
-        <p:cNvPr id="1" name=""/>
-        <p:cNvGrpSpPr/>
-        <p:nvPr/>
-      </p:nvGrpSpPr>
-      <p:grpSpPr/>
-      <p:sp>
-        <p:nvSpPr>
-          <p:cNvPr id="2" name="TextBox 1"/>
-          <p:cNvSpPr txBox="1"/>
-          <p:nvPr/>
-        </p:nvSpPr>
-        <p:spPr>
-          <a:xfrm>
-            <a:off x="822960" y="2011680"/>
-            <a:ext cx="10058400" cy="1280160"/>
-          </a:xfrm>
-          <a:prstGeom prst="rect">
-            <a:avLst/>
-          </a:prstGeom>
-          <a:noFill/>
-        </p:spPr>
-        <p:txBody>
-          <a:bodyPr wrap="square" anchor="t" lIns="0" rIns="0" tIns="0" bIns="0">
-            <a:spAutoFit/>
-          </a:bodyPr>
-          <a:lstStyle/>
-          <a:p>
-            <a:pPr algn="l">
-              <a:spcAft>
-                <a:spcPts val="0"/>
-              </a:spcAft>
-            </a:pPr>
-            <a:r>
-              <a:rPr sz="6000" b="1">
-                <a:solidFill>
-                  <a:srgbClr val="A03A35"/>
-                </a:solidFill>
-                <a:latin typeface="Arial"/>
-                <a:ea typeface="Arial"/>
-                <a:cs typeface="Arial"/>
-              </a:rPr>
-              <a:t>03</a:t>
-            </a:r>
-          </a:p>
-        </p:txBody>
-      </p:sp>
-      <p:sp>
-        <p:nvSpPr>
-          <p:cNvPr id="3" name="TextBox 2"/>
-          <p:cNvSpPr txBox="1"/>
-          <p:nvPr/>
-        </p:nvSpPr>
-        <p:spPr>
-          <a:xfrm>
-            <a:off x="822960" y="3383280"/>
-            <a:ext cx="10515600" cy="1097280"/>
-          </a:xfrm>
-          <a:prstGeom prst="rect">
-            <a:avLst/>
-          </a:prstGeom>
-          <a:noFill/>
-        </p:spPr>
-        <p:txBody>
-          <a:bodyPr wrap="square" anchor="t" lIns="0" rIns="0" tIns="0" bIns="0">
-            <a:spAutoFit/>
-          </a:bodyPr>
-          <a:lstStyle/>
-          <a:p>
-            <a:pPr algn="l">
-              <a:spcAft>
-                <a:spcPts val="0"/>
-              </a:spcAft>
-            </a:pPr>
-            <a:r>
-              <a:rPr sz="3400" b="1">
-                <a:solidFill>
-                  <a:srgbClr val="F7F1EA"/>
-                </a:solidFill>
-                <a:latin typeface="Arial"/>
-                <a:ea typeface="Arial"/>
-                <a:cs typeface="Arial"/>
-              </a:rPr>
-              <a:t>未来规划：从“桌面上”走向“在身边”</a:t>
-            </a:r>
-          </a:p>
-        </p:txBody>
-      </p:sp>
-    </p:spTree>
-  </p:cSld>
-  <p:clrMapOvr>
-    <a:masterClrMapping/>
-  </p:clrMapOvr>
-</p:sld>
-</file>
-
-<file path=ppt/slides/slide18.xml><?xml version="1.0" encoding="utf-8"?>
 <p:sld xmlns:a="http://schemas.openxmlformats.org/drawingml/2006/main" xmlns:p="http://schemas.openxmlformats.org/presentationml/2006/main" xmlns:r="http://schemas.openxmlformats.org/officeDocument/2006/relationships">
   <p:cSld>
     <p:bg>
@@ -7339,7 +7392,7 @@
                 <a:ea typeface="Arial"/>
                 <a:cs typeface="Arial"/>
               </a:rPr>
-              <a:t>近期：把体验做扎实</a:t>
+              <a:t>工程质量：这套东西是“验得出来”的</a:t>
             </a:r>
           </a:p>
         </p:txBody>
@@ -7435,7 +7488,7 @@
                 <a:ea typeface="微软雅黑"/>
                 <a:cs typeface="微软雅黑"/>
               </a:rPr>
-              <a:t>手机端：真机验证与调优</a:t>
+              <a:t>386 项自带自检</a:t>
             </a:r>
             <a:r>
               <a:rPr sz="1300" b="0">
@@ -7446,7 +7499,7 @@
                 <a:ea typeface="微软雅黑"/>
                 <a:cs typeface="微软雅黑"/>
               </a:rPr>
-              <a:t>  功能已写好（含手部互动），近期重点是插上真机跑全链路并调准相机参数</a:t>
+              <a:t>  边界 / 配置契约 / 生命周期 / 前端一致性 / 语音链路</a:t>
             </a:r>
           </a:p>
           <a:p>
@@ -7475,7 +7528,7 @@
                 <a:ea typeface="微软雅黑"/>
                 <a:cs typeface="微软雅黑"/>
               </a:rPr>
-              <a:t>形象扩展</a:t>
+              <a:t>全绿</a:t>
             </a:r>
             <a:r>
               <a:rPr sz="1300" b="0">
@@ -7486,7 +7539,7 @@
                 <a:ea typeface="微软雅黑"/>
                 <a:cs typeface="微软雅黑"/>
               </a:rPr>
-              <a:t>  3D 模型方案评估（先验证能不能跑起来，再谈建模成本）</a:t>
+              <a:t>  10 个测试文件全部通过，一条命令可复现</a:t>
             </a:r>
           </a:p>
           <a:p>
@@ -7515,7 +7568,7 @@
                 <a:ea typeface="微软雅黑"/>
                 <a:cs typeface="微软雅黑"/>
               </a:rPr>
-              <a:t>多角色</a:t>
+              <a:t>看得见的证据</a:t>
             </a:r>
             <a:r>
               <a:rPr sz="1300" b="0">
@@ -7526,7 +7579,47 @@
                 <a:ea typeface="微软雅黑"/>
                 <a:cs typeface="微软雅黑"/>
               </a:rPr>
-              <a:t>  一套引擎跑多个角色，各有各的记忆与声音</a:t>
+              <a:t>  像素级验收：立绘底色、换装差异都用图像摘要比对</a:t>
+            </a:r>
+          </a:p>
+          <a:p>
+            <a:pPr>
+              <a:spcAft>
+                <a:spcPts val="1400"/>
+              </a:spcAft>
+            </a:pPr>
+            <a:r>
+              <a:rPr sz="1600" b="0">
+                <a:solidFill>
+                  <a:srgbClr val="A03A35"/>
+                </a:solidFill>
+                <a:latin typeface="微软雅黑"/>
+                <a:ea typeface="微软雅黑"/>
+                <a:cs typeface="微软雅黑"/>
+              </a:rPr>
+              <a:t>▪  </a:t>
+            </a:r>
+            <a:r>
+              <a:rPr sz="1600" b="0">
+                <a:solidFill>
+                  <a:srgbClr val="3B2B26"/>
+                </a:solidFill>
+                <a:latin typeface="微软雅黑"/>
+                <a:ea typeface="微软雅黑"/>
+                <a:cs typeface="微软雅黑"/>
+              </a:rPr>
+              <a:t>可诊断</a:t>
+            </a:r>
+            <a:r>
+              <a:rPr sz="1300" b="0">
+                <a:solidFill>
+                  <a:srgbClr val="6B5850"/>
+                </a:solidFill>
+                <a:latin typeface="微软雅黑"/>
+                <a:ea typeface="微软雅黑"/>
+                <a:cs typeface="微软雅黑"/>
+              </a:rPr>
+              <a:t>  关键路径都有日志，出问题能定位到具体一环</a:t>
             </a:r>
           </a:p>
         </p:txBody>
@@ -7567,7 +7660,115 @@
                 <a:ea typeface="Arial"/>
                 <a:cs typeface="Arial"/>
               </a:rPr>
-              <a:t>18</a:t>
+              <a:t>17</a:t>
+            </a:r>
+          </a:p>
+        </p:txBody>
+      </p:sp>
+    </p:spTree>
+  </p:cSld>
+  <p:clrMapOvr>
+    <a:masterClrMapping/>
+  </p:clrMapOvr>
+</p:sld>
+</file>
+
+<file path=ppt/slides/slide18.xml><?xml version="1.0" encoding="utf-8"?>
+<p:sld xmlns:a="http://schemas.openxmlformats.org/drawingml/2006/main" xmlns:p="http://schemas.openxmlformats.org/presentationml/2006/main" xmlns:r="http://schemas.openxmlformats.org/officeDocument/2006/relationships">
+  <p:cSld>
+    <p:bg>
+      <p:bgPr>
+        <a:solidFill>
+          <a:srgbClr val="3B2B26"/>
+        </a:solidFill>
+        <a:effectLst/>
+      </p:bgPr>
+    </p:bg>
+    <p:spTree>
+      <p:nvGrpSpPr>
+        <p:cNvPr id="1" name=""/>
+        <p:cNvGrpSpPr/>
+        <p:nvPr/>
+      </p:nvGrpSpPr>
+      <p:grpSpPr/>
+      <p:sp>
+        <p:nvSpPr>
+          <p:cNvPr id="2" name="TextBox 1"/>
+          <p:cNvSpPr txBox="1"/>
+          <p:nvPr/>
+        </p:nvSpPr>
+        <p:spPr>
+          <a:xfrm>
+            <a:off x="822960" y="2011680"/>
+            <a:ext cx="10058400" cy="1280160"/>
+          </a:xfrm>
+          <a:prstGeom prst="rect">
+            <a:avLst/>
+          </a:prstGeom>
+          <a:noFill/>
+        </p:spPr>
+        <p:txBody>
+          <a:bodyPr wrap="square" anchor="t" lIns="0" rIns="0" tIns="0" bIns="0">
+            <a:spAutoFit/>
+          </a:bodyPr>
+          <a:lstStyle/>
+          <a:p>
+            <a:pPr algn="l">
+              <a:spcAft>
+                <a:spcPts val="0"/>
+              </a:spcAft>
+            </a:pPr>
+            <a:r>
+              <a:rPr sz="6000" b="1">
+                <a:solidFill>
+                  <a:srgbClr val="A03A35"/>
+                </a:solidFill>
+                <a:latin typeface="Arial"/>
+                <a:ea typeface="Arial"/>
+                <a:cs typeface="Arial"/>
+              </a:rPr>
+              <a:t>03</a:t>
+            </a:r>
+          </a:p>
+        </p:txBody>
+      </p:sp>
+      <p:sp>
+        <p:nvSpPr>
+          <p:cNvPr id="3" name="TextBox 2"/>
+          <p:cNvSpPr txBox="1"/>
+          <p:nvPr/>
+        </p:nvSpPr>
+        <p:spPr>
+          <a:xfrm>
+            <a:off x="822960" y="3383280"/>
+            <a:ext cx="10515600" cy="1097280"/>
+          </a:xfrm>
+          <a:prstGeom prst="rect">
+            <a:avLst/>
+          </a:prstGeom>
+          <a:noFill/>
+        </p:spPr>
+        <p:txBody>
+          <a:bodyPr wrap="square" anchor="t" lIns="0" rIns="0" tIns="0" bIns="0">
+            <a:spAutoFit/>
+          </a:bodyPr>
+          <a:lstStyle/>
+          <a:p>
+            <a:pPr algn="l">
+              <a:spcAft>
+                <a:spcPts val="0"/>
+              </a:spcAft>
+            </a:pPr>
+            <a:r>
+              <a:rPr sz="3400" b="1">
+                <a:solidFill>
+                  <a:srgbClr val="F7F1EA"/>
+                </a:solidFill>
+                <a:latin typeface="Arial"/>
+                <a:ea typeface="Arial"/>
+                <a:cs typeface="Arial"/>
+              </a:rPr>
+              <a:t>未来规划：从“桌面上”走向“在身边”</a:t>
             </a:r>
           </a:p>
         </p:txBody>
@@ -7634,7 +7835,7 @@
                 <a:ea typeface="Arial"/>
                 <a:cs typeface="Arial"/>
               </a:rPr>
-              <a:t>互动：从「看着你」到「看懂你」（已落地一半）</a:t>
+              <a:t>近期：把体验做扎实</a:t>
             </a:r>
           </a:p>
         </p:txBody>
@@ -7730,7 +7931,7 @@
                 <a:ea typeface="微软雅黑"/>
                 <a:cs typeface="微软雅黑"/>
               </a:rPr>
-              <a:t>已实现：手部 21 关键点检测</a:t>
+              <a:t>手机端：真机验证与调优</a:t>
             </a:r>
             <a:r>
               <a:rPr sz="1300" b="0">
@@ -7741,7 +7942,7 @@
                 <a:ea typeface="微软雅黑"/>
                 <a:cs typeface="微软雅黑"/>
               </a:rPr>
-              <a:t>  手机端接入 MediaPipe HandLandmarker；相机帧 → 关键点 → 命中她 → 反应，链路已通</a:t>
+              <a:t>  功能已写好（含手部互动），近期重点是插上真机跑全链路并调准相机参数</a:t>
             </a:r>
           </a:p>
           <a:p>
@@ -7770,7 +7971,7 @@
                 <a:ea typeface="微软雅黑"/>
                 <a:cs typeface="微软雅黑"/>
               </a:rPr>
-              <a:t>已实现：视线跟随</a:t>
+              <a:t>形象扩展</a:t>
             </a:r>
             <a:r>
               <a:rPr sz="1300" b="0">
@@ -7781,7 +7982,7 @@
                 <a:ea typeface="微软雅黑"/>
                 <a:cs typeface="微软雅黑"/>
               </a:rPr>
-              <a:t>  她自己「看着你的手」——关键点换算到屏幕后驱动 3D 角色的视线目标</a:t>
+              <a:t>  3D 模型方案评估（先验证能不能跑起来，再谈建模成本）</a:t>
             </a:r>
           </a:p>
           <a:p>
@@ -7810,7 +8011,7 @@
                 <a:ea typeface="微软雅黑"/>
                 <a:cs typeface="微软雅黑"/>
               </a:rPr>
-              <a:t>已实现：三个手势</a:t>
+              <a:t>多角色</a:t>
             </a:r>
             <a:r>
               <a:rPr sz="1300" b="0">
@@ -7821,87 +8022,7 @@
                 <a:ea typeface="微软雅黑"/>
                 <a:cs typeface="微软雅黑"/>
               </a:rPr>
-              <a:t>  捏合=捏脸、握拳、挥手；各自独立去抖（21 个单测：9+6+6）</a:t>
-            </a:r>
-          </a:p>
-          <a:p>
-            <a:pPr>
-              <a:spcAft>
-                <a:spcPts val="1400"/>
-              </a:spcAft>
-            </a:pPr>
-            <a:r>
-              <a:rPr sz="1600" b="0">
-                <a:solidFill>
-                  <a:srgbClr val="A03A35"/>
-                </a:solidFill>
-                <a:latin typeface="微软雅黑"/>
-                <a:ea typeface="微软雅黑"/>
-                <a:cs typeface="微软雅黑"/>
-              </a:rPr>
-              <a:t>▪  </a:t>
-            </a:r>
-            <a:r>
-              <a:rPr sz="1600" b="0">
-                <a:solidFill>
-                  <a:srgbClr val="3B2B26"/>
-                </a:solidFill>
-                <a:latin typeface="微软雅黑"/>
-                <a:ea typeface="微软雅黑"/>
-                <a:cs typeface="微软雅黑"/>
-              </a:rPr>
-              <a:t>下一步：更多手势 + 接进对话</a:t>
-            </a:r>
-            <a:r>
-              <a:rPr sz="1300" b="0">
-                <a:solidFill>
-                  <a:srgbClr val="6B5850"/>
-                </a:solidFill>
-                <a:latin typeface="微软雅黑"/>
-                <a:ea typeface="微软雅黑"/>
-                <a:cs typeface="微软雅黑"/>
-              </a:rPr>
-              <a:t>  比心 / 指向某处；挥手时顺便触发一句问候，把动作和她的性格连起来</a:t>
-            </a:r>
-          </a:p>
-          <a:p>
-            <a:pPr>
-              <a:spcAft>
-                <a:spcPts val="1400"/>
-              </a:spcAft>
-            </a:pPr>
-            <a:r>
-              <a:rPr sz="1600" b="0">
-                <a:solidFill>
-                  <a:srgbClr val="A03A35"/>
-                </a:solidFill>
-                <a:latin typeface="微软雅黑"/>
-                <a:ea typeface="微软雅黑"/>
-                <a:cs typeface="微软雅黑"/>
-              </a:rPr>
-              <a:t>▪  </a:t>
-            </a:r>
-            <a:r>
-              <a:rPr sz="1600" b="0">
-                <a:solidFill>
-                  <a:srgbClr val="3B2B26"/>
-                </a:solidFill>
-                <a:latin typeface="微软雅黑"/>
-                <a:ea typeface="微软雅黑"/>
-                <a:cs typeface="微软雅黑"/>
-              </a:rPr>
-              <a:t>还没做：真机调优</a:t>
-            </a:r>
-            <a:r>
-              <a:rPr sz="1300" b="0">
-                <a:solidFill>
-                  <a:srgbClr val="6B5850"/>
-                </a:solidFill>
-                <a:latin typeface="微软雅黑"/>
-                <a:ea typeface="微软雅黑"/>
-                <a:cs typeface="微软雅黑"/>
-              </a:rPr>
-              <a:t>  编译与单测都过了，但「手伸过去她眼睛是否跟着转」要真机确认；偏差只调相机</a:t>
+              <a:t>  一套引擎跑多个角色，各有各的记忆与声音</a:t>
             </a:r>
           </a:p>
         </p:txBody>
@@ -8117,7 +8238,7 @@
                 <a:ea typeface="Arial"/>
                 <a:cs typeface="Arial"/>
               </a:rPr>
-              <a:t>中期：另一条感知路线（毫米波）——已有人做，我们做个窄的</a:t>
+              <a:t>互动：从「看着你」到「看懂你」（已落地一半）</a:t>
             </a:r>
           </a:p>
         </p:txBody>
@@ -8213,7 +8334,7 @@
                 <a:ea typeface="微软雅黑"/>
                 <a:cs typeface="微软雅黑"/>
               </a:rPr>
-              <a:t>为什么看这条路</a:t>
+              <a:t>已实现：手部 21 关键点检测</a:t>
             </a:r>
             <a:r>
               <a:rPr sz="1300" b="0">
@@ -8224,7 +8345,7 @@
                 <a:ea typeface="微软雅黑"/>
                 <a:cs typeface="微软雅黑"/>
               </a:rPr>
-              <a:t>  不依赖光线与镜头、隐私友好、可全天运行；作为「她在不在、在做什么」的输入很合适</a:t>
+              <a:t>  手机端接入 MediaPipe HandLandmarker；相机帧 → 关键点 → 命中她 → 反应，链路已通</a:t>
             </a:r>
           </a:p>
           <a:p>
@@ -8253,7 +8374,7 @@
                 <a:ea typeface="微软雅黑"/>
                 <a:cs typeface="微软雅黑"/>
               </a:rPr>
-              <a:t>但已经有人做了（一）</a:t>
+              <a:t>已实现：视线跟随</a:t>
             </a:r>
             <a:r>
               <a:rPr sz="1300" b="0">
@@ -8264,7 +8385,7 @@
                 <a:ea typeface="微软雅黑"/>
                 <a:cs typeface="微软雅黑"/>
               </a:rPr>
-              <a:t>  mmHRI：毫米波做隐私友好人机交互，隔帘做机器人操作、动作识别 85%（2026-09）</a:t>
+              <a:t>  她自己「看着你的手」——关键点换算到屏幕后驱动 3D 角色的视线目标</a:t>
             </a:r>
           </a:p>
           <a:p>
@@ -8293,7 +8414,7 @@
                 <a:ea typeface="微软雅黑"/>
                 <a:cs typeface="微软雅黑"/>
               </a:rPr>
-              <a:t>但已经有人做了（二）</a:t>
+              <a:t>已实现：三个手势</a:t>
             </a:r>
             <a:r>
               <a:rPr sz="1300" b="0">
@@ -8304,7 +8425,7 @@
                 <a:ea typeface="微软雅黑"/>
                 <a:cs typeface="微软雅黑"/>
               </a:rPr>
-              <a:t>  文心守护：60GHz 雷达 + 大模型，明说做「情感陪伴」与「存在即感知」，面向独居老人看护（开源）</a:t>
+              <a:t>  捏合=捏脸、握拳、挥手；各自独立去抖（21 个单测：9+6+6）</a:t>
             </a:r>
           </a:p>
           <a:p>
@@ -8333,7 +8454,7 @@
                 <a:ea typeface="微软雅黑"/>
                 <a:cs typeface="微软雅黑"/>
               </a:rPr>
-              <a:t>所以我们不主张「首创」</a:t>
+              <a:t>下一步：更多手势 + 接进对话</a:t>
             </a:r>
             <a:r>
               <a:rPr sz="1300" b="0">
@@ -8344,7 +8465,7 @@
                 <a:ea typeface="微软雅黑"/>
                 <a:cs typeface="微软雅黑"/>
               </a:rPr>
-              <a:t>  不写「第一次用毫米波做陪伴」——那两处已占，写了会被当场问倒</a:t>
+              <a:t>  比心 / 指向某处；挥手时顺便触发一句问候，把动作和她的性格连起来</a:t>
             </a:r>
           </a:p>
           <a:p>
@@ -8373,7 +8494,7 @@
                 <a:ea typeface="微软雅黑"/>
                 <a:cs typeface="微软雅黑"/>
               </a:rPr>
-              <a:t>我们要做的那一小块</a:t>
+              <a:t>还没做：真机调优</a:t>
             </a:r>
             <a:r>
               <a:rPr sz="1300" b="0">
@@ -8384,47 +8505,7 @@
                 <a:ea typeface="微软雅黑"/>
                 <a:cs typeface="微软雅黑"/>
               </a:rPr>
-              <a:t>  变量换成角色的人格连续性，指标换成关系感知与打扰容忍度；对象是二次元角色，形态是她住在桌面/手机/IM 里</a:t>
-            </a:r>
-          </a:p>
-          <a:p>
-            <a:pPr>
-              <a:spcAft>
-                <a:spcPts val="1400"/>
-              </a:spcAft>
-            </a:pPr>
-            <a:r>
-              <a:rPr sz="1600" b="0">
-                <a:solidFill>
-                  <a:srgbClr val="A03A35"/>
-                </a:solidFill>
-                <a:latin typeface="微软雅黑"/>
-                <a:ea typeface="微软雅黑"/>
-                <a:cs typeface="微软雅黑"/>
-              </a:rPr>
-              <a:t>▪  </a:t>
-            </a:r>
-            <a:r>
-              <a:rPr sz="1600" b="0">
-                <a:solidFill>
-                  <a:srgbClr val="3B2B26"/>
-                </a:solidFill>
-                <a:latin typeface="微软雅黑"/>
-                <a:ea typeface="微软雅黑"/>
-                <a:cs typeface="微软雅黑"/>
-              </a:rPr>
-              <a:t>怎么走</a:t>
-            </a:r>
-            <a:r>
-              <a:rPr sz="1300" b="0">
-                <a:solidFill>
-                  <a:srgbClr val="6B5850"/>
-                </a:solidFill>
-                <a:latin typeface="微软雅黑"/>
-                <a:ea typeface="微软雅黑"/>
-                <a:cs typeface="微软雅黑"/>
-              </a:rPr>
-              <a:t>  课题装置输出标准化参数流 → 先在桌面端驱动她 → 需要时再上手机；先做用户研究，不先堆硬件</a:t>
+              <a:t>  编译与单测都过了，但「手伸过去她眼睛是否跟着转」要真机确认；偏差只调相机</a:t>
             </a:r>
           </a:p>
         </p:txBody>
@@ -8532,7 +8613,7 @@
                 <a:ea typeface="Arial"/>
                 <a:cs typeface="Arial"/>
               </a:rPr>
-              <a:t>远期：形态自由</a:t>
+              <a:t>中期：另一条感知路线（毫米波）——已有人做，我们做个窄的</a:t>
             </a:r>
           </a:p>
         </p:txBody>
@@ -8628,7 +8709,7 @@
                 <a:ea typeface="微软雅黑"/>
                 <a:cs typeface="微软雅黑"/>
               </a:rPr>
-              <a:t>AR 呈现</a:t>
+              <a:t>为什么看这条路</a:t>
             </a:r>
             <a:r>
               <a:rPr sz="1300" b="0">
@@ -8639,7 +8720,7 @@
                 <a:ea typeface="微软雅黑"/>
                 <a:cs typeface="微软雅黑"/>
               </a:rPr>
-              <a:t>  目前同类多为 iPhone 生态，安卓侧仍是空白</a:t>
+              <a:t>  不依赖光线与镜头、隐私友好、可全天运行；作为「她在不在、在做什么」的输入很合适</a:t>
             </a:r>
           </a:p>
           <a:p>
@@ -8668,7 +8749,7 @@
                 <a:ea typeface="微软雅黑"/>
                 <a:cs typeface="微软雅黑"/>
               </a:rPr>
-              <a:t>系统级接入</a:t>
+              <a:t>但已经有人做了（一）</a:t>
             </a:r>
             <a:r>
               <a:rPr sz="1300" b="0">
@@ -8679,7 +8760,7 @@
                 <a:ea typeface="微软雅黑"/>
                 <a:cs typeface="微软雅黑"/>
               </a:rPr>
-              <a:t>  希望她成为系统里的一个“常驻角色”，而非一个 App</a:t>
+              <a:t>  mmHRI：毫米波做隐私友好人机交互，隔帘做机器人操作、动作识别 85%（2026-09）</a:t>
             </a:r>
           </a:p>
           <a:p>
@@ -8708,7 +8789,7 @@
                 <a:ea typeface="微软雅黑"/>
                 <a:cs typeface="微软雅黑"/>
               </a:rPr>
-              <a:t>开放生态</a:t>
+              <a:t>但已经有人做了（二）</a:t>
             </a:r>
             <a:r>
               <a:rPr sz="1300" b="0">
@@ -8719,7 +8800,127 @@
                 <a:ea typeface="微软雅黑"/>
                 <a:cs typeface="微软雅黑"/>
               </a:rPr>
-              <a:t>  角色 / 语音 / 动作都以数据形式可替换</a:t>
+              <a:t>  文心守护：60GHz 雷达 + 大模型，明说做「情感陪伴」与「存在即感知」，面向独居老人看护（开源）</a:t>
+            </a:r>
+          </a:p>
+          <a:p>
+            <a:pPr>
+              <a:spcAft>
+                <a:spcPts val="1400"/>
+              </a:spcAft>
+            </a:pPr>
+            <a:r>
+              <a:rPr sz="1600" b="0">
+                <a:solidFill>
+                  <a:srgbClr val="A03A35"/>
+                </a:solidFill>
+                <a:latin typeface="微软雅黑"/>
+                <a:ea typeface="微软雅黑"/>
+                <a:cs typeface="微软雅黑"/>
+              </a:rPr>
+              <a:t>▪  </a:t>
+            </a:r>
+            <a:r>
+              <a:rPr sz="1600" b="0">
+                <a:solidFill>
+                  <a:srgbClr val="3B2B26"/>
+                </a:solidFill>
+                <a:latin typeface="微软雅黑"/>
+                <a:ea typeface="微软雅黑"/>
+                <a:cs typeface="微软雅黑"/>
+              </a:rPr>
+              <a:t>所以我们不主张「首创」</a:t>
+            </a:r>
+            <a:r>
+              <a:rPr sz="1300" b="0">
+                <a:solidFill>
+                  <a:srgbClr val="6B5850"/>
+                </a:solidFill>
+                <a:latin typeface="微软雅黑"/>
+                <a:ea typeface="微软雅黑"/>
+                <a:cs typeface="微软雅黑"/>
+              </a:rPr>
+              <a:t>  不写「第一次用毫米波做陪伴」——那两处已占，写了会被当场问倒</a:t>
+            </a:r>
+          </a:p>
+          <a:p>
+            <a:pPr>
+              <a:spcAft>
+                <a:spcPts val="1400"/>
+              </a:spcAft>
+            </a:pPr>
+            <a:r>
+              <a:rPr sz="1600" b="0">
+                <a:solidFill>
+                  <a:srgbClr val="A03A35"/>
+                </a:solidFill>
+                <a:latin typeface="微软雅黑"/>
+                <a:ea typeface="微软雅黑"/>
+                <a:cs typeface="微软雅黑"/>
+              </a:rPr>
+              <a:t>▪  </a:t>
+            </a:r>
+            <a:r>
+              <a:rPr sz="1600" b="0">
+                <a:solidFill>
+                  <a:srgbClr val="3B2B26"/>
+                </a:solidFill>
+                <a:latin typeface="微软雅黑"/>
+                <a:ea typeface="微软雅黑"/>
+                <a:cs typeface="微软雅黑"/>
+              </a:rPr>
+              <a:t>我们要做的那一小块</a:t>
+            </a:r>
+            <a:r>
+              <a:rPr sz="1300" b="0">
+                <a:solidFill>
+                  <a:srgbClr val="6B5850"/>
+                </a:solidFill>
+                <a:latin typeface="微软雅黑"/>
+                <a:ea typeface="微软雅黑"/>
+                <a:cs typeface="微软雅黑"/>
+              </a:rPr>
+              <a:t>  变量换成角色的人格连续性，指标换成关系感知与打扰容忍度；对象是二次元角色，形态是她住在桌面/手机/IM 里</a:t>
+            </a:r>
+          </a:p>
+          <a:p>
+            <a:pPr>
+              <a:spcAft>
+                <a:spcPts val="1400"/>
+              </a:spcAft>
+            </a:pPr>
+            <a:r>
+              <a:rPr sz="1600" b="0">
+                <a:solidFill>
+                  <a:srgbClr val="A03A35"/>
+                </a:solidFill>
+                <a:latin typeface="微软雅黑"/>
+                <a:ea typeface="微软雅黑"/>
+                <a:cs typeface="微软雅黑"/>
+              </a:rPr>
+              <a:t>▪  </a:t>
+            </a:r>
+            <a:r>
+              <a:rPr sz="1600" b="0">
+                <a:solidFill>
+                  <a:srgbClr val="3B2B26"/>
+                </a:solidFill>
+                <a:latin typeface="微软雅黑"/>
+                <a:ea typeface="微软雅黑"/>
+                <a:cs typeface="微软雅黑"/>
+              </a:rPr>
+              <a:t>怎么走</a:t>
+            </a:r>
+            <a:r>
+              <a:rPr sz="1300" b="0">
+                <a:solidFill>
+                  <a:srgbClr val="6B5850"/>
+                </a:solidFill>
+                <a:latin typeface="微软雅黑"/>
+                <a:ea typeface="微软雅黑"/>
+                <a:cs typeface="微软雅黑"/>
+              </a:rPr>
+              <a:t>  课题装置输出标准化参数流 → 先在桌面端驱动她 → 需要时再上手机；先做用户研究，不先堆硬件</a:t>
             </a:r>
           </a:p>
         </p:txBody>
@@ -8799,8 +9000,8 @@
         </p:nvSpPr>
         <p:spPr>
           <a:xfrm>
-            <a:off x="1097280" y="2103120"/>
-            <a:ext cx="9966960" cy="2377440"/>
+            <a:off x="548640" y="502920"/>
+            <a:ext cx="11064240" cy="1005840"/>
           </a:xfrm>
           <a:prstGeom prst="rect">
             <a:avLst/>
@@ -8808,21 +9009,18 @@
           <a:noFill/>
         </p:spPr>
         <p:txBody>
-          <a:bodyPr wrap="square" anchor="ctr" lIns="0" rIns="0" tIns="0" bIns="0">
+          <a:bodyPr wrap="square" anchor="t" lIns="0" rIns="0" tIns="0" bIns="0">
             <a:spAutoFit/>
           </a:bodyPr>
           <a:lstStyle/>
           <a:p>
-            <a:pPr algn="ctr">
-              <a:lnSpc>
-                <a:spcPct val="120000"/>
-              </a:lnSpc>
-              <a:spcAft>
-                <a:spcPts val="1400"/>
-              </a:spcAft>
-            </a:pPr>
-            <a:r>
-              <a:rPr sz="2600" b="1">
+            <a:pPr algn="l">
+              <a:spcAft>
+                <a:spcPts val="0"/>
+              </a:spcAft>
+            </a:pPr>
+            <a:r>
+              <a:rPr sz="3000" b="1">
                 <a:solidFill>
                   <a:srgbClr val="3B2B26"/>
                 </a:solidFill>
@@ -8830,32 +9028,201 @@
                 <a:ea typeface="Arial"/>
                 <a:cs typeface="Arial"/>
               </a:rPr>
-              <a:t>“先让她真的住进电脑里，再让她走到你身边”</a:t>
-            </a:r>
-          </a:p>
-          <a:p>
-            <a:pPr algn="ctr">
-              <a:spcAft>
-                <a:spcPts val="0"/>
-              </a:spcAft>
-            </a:pPr>
-            <a:r>
-              <a:rPr sz="1400" b="0">
+              <a:t>远期：形态自由</a:t>
+            </a:r>
+          </a:p>
+        </p:txBody>
+      </p:sp>
+      <p:sp>
+        <p:nvSpPr>
+          <p:cNvPr id="3" name="Rectangle 2"/>
+          <p:cNvSpPr/>
+          <p:nvPr/>
+        </p:nvSpPr>
+        <p:spPr>
+          <a:xfrm>
+            <a:off x="548640" y="1069848"/>
+            <a:ext cx="1005840" cy="53340"/>
+          </a:xfrm>
+          <a:prstGeom prst="rect">
+            <a:avLst/>
+          </a:prstGeom>
+          <a:solidFill>
+            <a:srgbClr val="A03A35"/>
+          </a:solidFill>
+          <a:ln>
+            <a:noFill/>
+          </a:ln>
+          <a:effectLst/>
+        </p:spPr>
+        <p:style>
+          <a:lnRef idx="1">
+            <a:schemeClr val="accent1"/>
+          </a:lnRef>
+          <a:fillRef idx="3">
+            <a:schemeClr val="accent1"/>
+          </a:fillRef>
+          <a:effectRef idx="2">
+            <a:schemeClr val="accent1"/>
+          </a:effectRef>
+          <a:fontRef idx="minor">
+            <a:schemeClr val="lt1"/>
+          </a:fontRef>
+        </p:style>
+        <p:txBody>
+          <a:bodyPr rtlCol="0" anchor="ctr"/>
+          <a:lstStyle/>
+          <a:p>
+            <a:pPr algn="ctr"/>
+          </a:p>
+        </p:txBody>
+      </p:sp>
+      <p:sp>
+        <p:nvSpPr>
+          <p:cNvPr id="4" name="TextBox 3"/>
+          <p:cNvSpPr txBox="1"/>
+          <p:nvPr/>
+        </p:nvSpPr>
+        <p:spPr>
+          <a:xfrm>
+            <a:off x="548640" y="1600200"/>
+            <a:ext cx="11064240" cy="4480560"/>
+          </a:xfrm>
+          <a:prstGeom prst="rect">
+            <a:avLst/>
+          </a:prstGeom>
+          <a:noFill/>
+        </p:spPr>
+        <p:txBody>
+          <a:bodyPr wrap="square" anchor="t" lIns="0" rIns="0" tIns="0" bIns="0">
+            <a:spAutoFit/>
+          </a:bodyPr>
+          <a:lstStyle/>
+          <a:p>
+            <a:pPr>
+              <a:spcAft>
+                <a:spcPts val="1400"/>
+              </a:spcAft>
+            </a:pPr>
+            <a:r>
+              <a:rPr sz="1600" b="0">
+                <a:solidFill>
+                  <a:srgbClr val="A03A35"/>
+                </a:solidFill>
+                <a:latin typeface="微软雅黑"/>
+                <a:ea typeface="微软雅黑"/>
+                <a:cs typeface="微软雅黑"/>
+              </a:rPr>
+              <a:t>▪  </a:t>
+            </a:r>
+            <a:r>
+              <a:rPr sz="1600" b="0">
+                <a:solidFill>
+                  <a:srgbClr val="3B2B26"/>
+                </a:solidFill>
+                <a:latin typeface="微软雅黑"/>
+                <a:ea typeface="微软雅黑"/>
+                <a:cs typeface="微软雅黑"/>
+              </a:rPr>
+              <a:t>AR 呈现</a:t>
+            </a:r>
+            <a:r>
+              <a:rPr sz="1300" b="0">
                 <a:solidFill>
                   <a:srgbClr val="6B5850"/>
                 </a:solidFill>
-                <a:latin typeface="Arial"/>
-                <a:ea typeface="Arial"/>
-                <a:cs typeface="Arial"/>
-              </a:rPr>
-              <a:t>—— 路线取舍：先做深关系，再谈形态自由</a:t>
-            </a:r>
-          </a:p>
-        </p:txBody>
-      </p:sp>
-      <p:sp>
-        <p:nvSpPr>
-          <p:cNvPr id="3" name="TextBox 2"/>
+                <a:latin typeface="微软雅黑"/>
+                <a:ea typeface="微软雅黑"/>
+                <a:cs typeface="微软雅黑"/>
+              </a:rPr>
+              <a:t>  目前同类多为 iPhone 生态，安卓侧仍是空白</a:t>
+            </a:r>
+          </a:p>
+          <a:p>
+            <a:pPr>
+              <a:spcAft>
+                <a:spcPts val="1400"/>
+              </a:spcAft>
+            </a:pPr>
+            <a:r>
+              <a:rPr sz="1600" b="0">
+                <a:solidFill>
+                  <a:srgbClr val="A03A35"/>
+                </a:solidFill>
+                <a:latin typeface="微软雅黑"/>
+                <a:ea typeface="微软雅黑"/>
+                <a:cs typeface="微软雅黑"/>
+              </a:rPr>
+              <a:t>▪  </a:t>
+            </a:r>
+            <a:r>
+              <a:rPr sz="1600" b="0">
+                <a:solidFill>
+                  <a:srgbClr val="3B2B26"/>
+                </a:solidFill>
+                <a:latin typeface="微软雅黑"/>
+                <a:ea typeface="微软雅黑"/>
+                <a:cs typeface="微软雅黑"/>
+              </a:rPr>
+              <a:t>系统级接入</a:t>
+            </a:r>
+            <a:r>
+              <a:rPr sz="1300" b="0">
+                <a:solidFill>
+                  <a:srgbClr val="6B5850"/>
+                </a:solidFill>
+                <a:latin typeface="微软雅黑"/>
+                <a:ea typeface="微软雅黑"/>
+                <a:cs typeface="微软雅黑"/>
+              </a:rPr>
+              <a:t>  希望她成为系统里的一个“常驻角色”，而非一个 App</a:t>
+            </a:r>
+          </a:p>
+          <a:p>
+            <a:pPr>
+              <a:spcAft>
+                <a:spcPts val="1400"/>
+              </a:spcAft>
+            </a:pPr>
+            <a:r>
+              <a:rPr sz="1600" b="0">
+                <a:solidFill>
+                  <a:srgbClr val="A03A35"/>
+                </a:solidFill>
+                <a:latin typeface="微软雅黑"/>
+                <a:ea typeface="微软雅黑"/>
+                <a:cs typeface="微软雅黑"/>
+              </a:rPr>
+              <a:t>▪  </a:t>
+            </a:r>
+            <a:r>
+              <a:rPr sz="1600" b="0">
+                <a:solidFill>
+                  <a:srgbClr val="3B2B26"/>
+                </a:solidFill>
+                <a:latin typeface="微软雅黑"/>
+                <a:ea typeface="微软雅黑"/>
+                <a:cs typeface="微软雅黑"/>
+              </a:rPr>
+              <a:t>开放生态</a:t>
+            </a:r>
+            <a:r>
+              <a:rPr sz="1300" b="0">
+                <a:solidFill>
+                  <a:srgbClr val="6B5850"/>
+                </a:solidFill>
+                <a:latin typeface="微软雅黑"/>
+                <a:ea typeface="微软雅黑"/>
+                <a:cs typeface="微软雅黑"/>
+              </a:rPr>
+              <a:t>  角色 / 语音 / 动作都以数据形式可替换</a:t>
+            </a:r>
+          </a:p>
+        </p:txBody>
+      </p:sp>
+      <p:sp>
+        <p:nvSpPr>
+          <p:cNvPr id="5" name="TextBox 4"/>
           <p:cNvSpPr txBox="1"/>
           <p:nvPr/>
         </p:nvSpPr>
@@ -8903,6 +9270,135 @@
 </file>
 
 <file path=ppt/slides/slide23.xml><?xml version="1.0" encoding="utf-8"?>
+<p:sld xmlns:a="http://schemas.openxmlformats.org/drawingml/2006/main" xmlns:p="http://schemas.openxmlformats.org/presentationml/2006/main" xmlns:r="http://schemas.openxmlformats.org/officeDocument/2006/relationships">
+  <p:cSld>
+    <p:bg>
+      <p:bgPr>
+        <a:solidFill>
+          <a:srgbClr val="F7F1EA"/>
+        </a:solidFill>
+        <a:effectLst/>
+      </p:bgPr>
+    </p:bg>
+    <p:spTree>
+      <p:nvGrpSpPr>
+        <p:cNvPr id="1" name=""/>
+        <p:cNvGrpSpPr/>
+        <p:nvPr/>
+      </p:nvGrpSpPr>
+      <p:grpSpPr/>
+      <p:sp>
+        <p:nvSpPr>
+          <p:cNvPr id="2" name="TextBox 1"/>
+          <p:cNvSpPr txBox="1"/>
+          <p:nvPr/>
+        </p:nvSpPr>
+        <p:spPr>
+          <a:xfrm>
+            <a:off x="1097280" y="2103120"/>
+            <a:ext cx="9966960" cy="2377440"/>
+          </a:xfrm>
+          <a:prstGeom prst="rect">
+            <a:avLst/>
+          </a:prstGeom>
+          <a:noFill/>
+        </p:spPr>
+        <p:txBody>
+          <a:bodyPr wrap="square" anchor="ctr" lIns="0" rIns="0" tIns="0" bIns="0">
+            <a:spAutoFit/>
+          </a:bodyPr>
+          <a:lstStyle/>
+          <a:p>
+            <a:pPr algn="ctr">
+              <a:lnSpc>
+                <a:spcPct val="120000"/>
+              </a:lnSpc>
+              <a:spcAft>
+                <a:spcPts val="1400"/>
+              </a:spcAft>
+            </a:pPr>
+            <a:r>
+              <a:rPr sz="2600" b="1">
+                <a:solidFill>
+                  <a:srgbClr val="3B2B26"/>
+                </a:solidFill>
+                <a:latin typeface="Arial"/>
+                <a:ea typeface="Arial"/>
+                <a:cs typeface="Arial"/>
+              </a:rPr>
+              <a:t>“先让她真的住进电脑里，再让她走到你身边”</a:t>
+            </a:r>
+          </a:p>
+          <a:p>
+            <a:pPr algn="ctr">
+              <a:spcAft>
+                <a:spcPts val="0"/>
+              </a:spcAft>
+            </a:pPr>
+            <a:r>
+              <a:rPr sz="1400" b="0">
+                <a:solidFill>
+                  <a:srgbClr val="6B5850"/>
+                </a:solidFill>
+                <a:latin typeface="Arial"/>
+                <a:ea typeface="Arial"/>
+                <a:cs typeface="Arial"/>
+              </a:rPr>
+              <a:t>—— 路线取舍：先做深关系，再谈形态自由</a:t>
+            </a:r>
+          </a:p>
+        </p:txBody>
+      </p:sp>
+      <p:sp>
+        <p:nvSpPr>
+          <p:cNvPr id="3" name="TextBox 2"/>
+          <p:cNvSpPr txBox="1"/>
+          <p:nvPr/>
+        </p:nvSpPr>
+        <p:spPr>
+          <a:xfrm>
+            <a:off x="548640" y="6473952"/>
+            <a:ext cx="11064240" cy="274320"/>
+          </a:xfrm>
+          <a:prstGeom prst="rect">
+            <a:avLst/>
+          </a:prstGeom>
+          <a:noFill/>
+        </p:spPr>
+        <p:txBody>
+          <a:bodyPr wrap="square" anchor="t" lIns="0" rIns="0" tIns="0" bIns="0">
+            <a:spAutoFit/>
+          </a:bodyPr>
+          <a:lstStyle/>
+          <a:p>
+            <a:pPr algn="r">
+              <a:spcAft>
+                <a:spcPts val="0"/>
+              </a:spcAft>
+            </a:pPr>
+            <a:r>
+              <a:rPr sz="1000" b="0">
+                <a:solidFill>
+                  <a:srgbClr val="6B5850"/>
+                </a:solidFill>
+                <a:latin typeface="Arial"/>
+                <a:ea typeface="Arial"/>
+                <a:cs typeface="Arial"/>
+              </a:rPr>
+              <a:t>23</a:t>
+            </a:r>
+          </a:p>
+        </p:txBody>
+      </p:sp>
+    </p:spTree>
+  </p:cSld>
+  <p:clrMapOvr>
+    <a:masterClrMapping/>
+  </p:clrMapOvr>
+</p:sld>
+</file>
+
+<file path=ppt/slides/slide24.xml><?xml version="1.0" encoding="utf-8"?>
 <p:sld xmlns:a="http://schemas.openxmlformats.org/drawingml/2006/main" xmlns:p="http://schemas.openxmlformats.org/presentationml/2006/main" xmlns:r="http://schemas.openxmlformats.org/officeDocument/2006/relationships">
   <p:cSld>
     <p:bg>

--- a/dev/ppt/out/Deck.pptx
+++ b/dev/ppt/out/Deck.pptx
@@ -1105,7 +1105,7 @@
           <a:lstStyle/>
           <a:p>
             <a:r>
-              <a:t>工程这块我想强调一句：这不是『我这儿能跑』。仓库自带 386 项自检，一条命令可复现，现在是全绿。换装差异、立绘底色这种观感问题，我们用像素级比对来验收。</a:t>
+              <a:t>工程这块我想强调一句：这不是『我这儿能跑』。仓库自带 389 项自检，一条命令可复现，现在是全绿。换装差异、立绘底色这种观感问题，我们用像素级比对来验收。</a:t>
             </a:r>
           </a:p>
         </p:txBody>
@@ -5333,7 +5333,7 @@
                 <a:ea typeface="Arial"/>
                 <a:cs typeface="Arial"/>
               </a:rPr>
-              <a:t>2026-10-13</a:t>
+              <a:t>2026-10-14</a:t>
             </a:r>
           </a:p>
         </p:txBody>
@@ -7488,7 +7488,7 @@
                 <a:ea typeface="微软雅黑"/>
                 <a:cs typeface="微软雅黑"/>
               </a:rPr>
-              <a:t>386 项自带自检</a:t>
+              <a:t>389 项自带自检</a:t>
             </a:r>
             <a:r>
               <a:rPr sz="1300" b="0">

--- a/dev/ppt/out/Deck.pptx
+++ b/dev/ppt/out/Deck.pptx
@@ -5338,6 +5338,30 @@
           </a:p>
         </p:txBody>
       </p:sp>
+      <p:pic>
+        <p:nvPicPr>
+          <p:cNvPr id="5" name="Picture 4" descr="cover.png"/>
+          <p:cNvPicPr>
+            <a:picLocks noChangeAspect="1"/>
+          </p:cNvPicPr>
+          <p:nvPr/>
+        </p:nvPicPr>
+        <p:blipFill>
+          <a:blip r:embed="rId3"/>
+          <a:stretch>
+            <a:fillRect/>
+          </a:stretch>
+        </p:blipFill>
+        <p:spPr>
+          <a:xfrm>
+            <a:off x="9066095" y="1325880"/>
+            <a:ext cx="2576959" cy="4663440"/>
+          </a:xfrm>
+          <a:prstGeom prst="rect">
+            <a:avLst/>
+          </a:prstGeom>
+        </p:spPr>
+      </p:pic>
     </p:spTree>
   </p:cSld>
   <p:clrMapOvr>
@@ -6365,6 +6389,54 @@
           </a:p>
         </p:txBody>
       </p:sp>
+      <p:pic>
+        <p:nvPicPr>
+          <p:cNvPr id="6" name="Picture 5" descr="S2-menu.png"/>
+          <p:cNvPicPr>
+            <a:picLocks noChangeAspect="1"/>
+          </p:cNvPicPr>
+          <p:nvPr/>
+        </p:nvPicPr>
+        <p:blipFill>
+          <a:blip r:embed="rId3"/>
+          <a:stretch>
+            <a:fillRect/>
+          </a:stretch>
+        </p:blipFill>
+        <p:spPr>
+          <a:xfrm>
+            <a:off x="4022463" y="3931920"/>
+            <a:ext cx="2792194" cy="2697480"/>
+          </a:xfrm>
+          <a:prstGeom prst="rect">
+            <a:avLst/>
+          </a:prstGeom>
+        </p:spPr>
+      </p:pic>
+      <p:pic>
+        <p:nvPicPr>
+          <p:cNvPr id="7" name="Picture 6" descr="S4b-chat.png"/>
+          <p:cNvPicPr>
+            <a:picLocks noChangeAspect="1"/>
+          </p:cNvPicPr>
+          <p:nvPr/>
+        </p:nvPicPr>
+        <p:blipFill>
+          <a:blip r:embed="rId4"/>
+          <a:stretch>
+            <a:fillRect/>
+          </a:stretch>
+        </p:blipFill>
+        <p:spPr>
+          <a:xfrm>
+            <a:off x="6979250" y="3931920"/>
+            <a:ext cx="1189982" cy="2697480"/>
+          </a:xfrm>
+          <a:prstGeom prst="rect">
+            <a:avLst/>
+          </a:prstGeom>
+        </p:spPr>
+      </p:pic>
     </p:spTree>
   </p:cSld>
   <p:clrMapOvr>
@@ -6700,6 +6772,54 @@
           </a:p>
         </p:txBody>
       </p:sp>
+      <p:pic>
+        <p:nvPicPr>
+          <p:cNvPr id="6" name="Picture 5" descr="S3a-outfit.png"/>
+          <p:cNvPicPr>
+            <a:picLocks noChangeAspect="1"/>
+          </p:cNvPicPr>
+          <p:nvPr/>
+        </p:nvPicPr>
+        <p:blipFill>
+          <a:blip r:embed="rId3"/>
+          <a:stretch>
+            <a:fillRect/>
+          </a:stretch>
+        </p:blipFill>
+        <p:spPr>
+          <a:xfrm>
+            <a:off x="4138499" y="3931920"/>
+            <a:ext cx="1941664" cy="2697480"/>
+          </a:xfrm>
+          <a:prstGeom prst="rect">
+            <a:avLst/>
+          </a:prstGeom>
+        </p:spPr>
+      </p:pic>
+      <p:pic>
+        <p:nvPicPr>
+          <p:cNvPr id="7" name="Picture 6" descr="S3b-outfit.png"/>
+          <p:cNvPicPr>
+            <a:picLocks noChangeAspect="1"/>
+          </p:cNvPicPr>
+          <p:nvPr/>
+        </p:nvPicPr>
+        <p:blipFill>
+          <a:blip r:embed="rId4"/>
+          <a:stretch>
+            <a:fillRect/>
+          </a:stretch>
+        </p:blipFill>
+        <p:spPr>
+          <a:xfrm>
+            <a:off x="6244756" y="3931920"/>
+            <a:ext cx="1808439" cy="2697480"/>
+          </a:xfrm>
+          <a:prstGeom prst="rect">
+            <a:avLst/>
+          </a:prstGeom>
+        </p:spPr>
+      </p:pic>
     </p:spTree>
   </p:cSld>
   <p:clrMapOvr>
@@ -7035,6 +7155,54 @@
           </a:p>
         </p:txBody>
       </p:sp>
+      <p:pic>
+        <p:nvPicPr>
+          <p:cNvPr id="6" name="Picture 5" descr="S5-status.png"/>
+          <p:cNvPicPr>
+            <a:picLocks noChangeAspect="1"/>
+          </p:cNvPicPr>
+          <p:nvPr/>
+        </p:nvPicPr>
+        <p:blipFill>
+          <a:blip r:embed="rId3"/>
+          <a:stretch>
+            <a:fillRect/>
+          </a:stretch>
+        </p:blipFill>
+        <p:spPr>
+          <a:xfrm>
+            <a:off x="1802326" y="3931920"/>
+            <a:ext cx="4254270" cy="2697480"/>
+          </a:xfrm>
+          <a:prstGeom prst="rect">
+            <a:avLst/>
+          </a:prstGeom>
+        </p:spPr>
+      </p:pic>
+      <p:pic>
+        <p:nvPicPr>
+          <p:cNvPr id="7" name="Picture 6" descr="S5b-memory.png"/>
+          <p:cNvPicPr>
+            <a:picLocks noChangeAspect="1"/>
+          </p:cNvPicPr>
+          <p:nvPr/>
+        </p:nvPicPr>
+        <p:blipFill>
+          <a:blip r:embed="rId4"/>
+          <a:stretch>
+            <a:fillRect/>
+          </a:stretch>
+        </p:blipFill>
+        <p:spPr>
+          <a:xfrm>
+            <a:off x="6221188" y="3931920"/>
+            <a:ext cx="4168180" cy="2697480"/>
+          </a:xfrm>
+          <a:prstGeom prst="rect">
+            <a:avLst/>
+          </a:prstGeom>
+        </p:spPr>
+      </p:pic>
     </p:spTree>
   </p:cSld>
   <p:clrMapOvr>
@@ -7330,6 +7498,78 @@
           </a:p>
         </p:txBody>
       </p:sp>
+      <p:pic>
+        <p:nvPicPr>
+          <p:cNvPr id="6" name="Picture 5" descr="S6-launcher.png"/>
+          <p:cNvPicPr>
+            <a:picLocks noChangeAspect="1"/>
+          </p:cNvPicPr>
+          <p:nvPr/>
+        </p:nvPicPr>
+        <p:blipFill>
+          <a:blip r:embed="rId3"/>
+          <a:stretch>
+            <a:fillRect/>
+          </a:stretch>
+        </p:blipFill>
+        <p:spPr>
+          <a:xfrm>
+            <a:off x="2617498" y="3931920"/>
+            <a:ext cx="4247551" cy="2697480"/>
+          </a:xfrm>
+          <a:prstGeom prst="rect">
+            <a:avLst/>
+          </a:prstGeom>
+        </p:spPr>
+      </p:pic>
+      <p:pic>
+        <p:nvPicPr>
+          <p:cNvPr id="7" name="Picture 6" descr="S9-phone-home.jpg"/>
+          <p:cNvPicPr>
+            <a:picLocks noChangeAspect="1"/>
+          </p:cNvPicPr>
+          <p:nvPr/>
+        </p:nvPicPr>
+        <p:blipFill>
+          <a:blip r:embed="rId4"/>
+          <a:stretch>
+            <a:fillRect/>
+          </a:stretch>
+        </p:blipFill>
+        <p:spPr>
+          <a:xfrm>
+            <a:off x="7029641" y="3931920"/>
+            <a:ext cx="1189982" cy="2697480"/>
+          </a:xfrm>
+          <a:prstGeom prst="rect">
+            <a:avLst/>
+          </a:prstGeom>
+        </p:spPr>
+      </p:pic>
+      <p:pic>
+        <p:nvPicPr>
+          <p:cNvPr id="8" name="Picture 7" descr="S10b-im-list.jpg"/>
+          <p:cNvPicPr>
+            <a:picLocks noChangeAspect="1"/>
+          </p:cNvPicPr>
+          <p:nvPr/>
+        </p:nvPicPr>
+        <p:blipFill>
+          <a:blip r:embed="rId5"/>
+          <a:stretch>
+            <a:fillRect/>
+          </a:stretch>
+        </p:blipFill>
+        <p:spPr>
+          <a:xfrm>
+            <a:off x="8384215" y="3931920"/>
+            <a:ext cx="1189982" cy="2697480"/>
+          </a:xfrm>
+          <a:prstGeom prst="rect">
+            <a:avLst/>
+          </a:prstGeom>
+        </p:spPr>
+      </p:pic>
     </p:spTree>
   </p:cSld>
   <p:clrMapOvr>
@@ -7665,6 +7905,30 @@
           </a:p>
         </p:txBody>
       </p:sp>
+      <p:pic>
+        <p:nvPicPr>
+          <p:cNvPr id="6" name="Picture 5" descr="S8-tests.png"/>
+          <p:cNvPicPr>
+            <a:picLocks noChangeAspect="1"/>
+          </p:cNvPicPr>
+          <p:nvPr/>
+        </p:nvPicPr>
+        <p:blipFill>
+          <a:blip r:embed="rId3"/>
+          <a:stretch>
+            <a:fillRect/>
+          </a:stretch>
+        </p:blipFill>
+        <p:spPr>
+          <a:xfrm>
+            <a:off x="2723997" y="3931920"/>
+            <a:ext cx="6743700" cy="2697480"/>
+          </a:xfrm>
+          <a:prstGeom prst="rect">
+            <a:avLst/>
+          </a:prstGeom>
+        </p:spPr>
+      </p:pic>
     </p:spTree>
   </p:cSld>
   <p:clrMapOvr>
@@ -8068,6 +8332,54 @@
           </a:p>
         </p:txBody>
       </p:sp>
+      <p:pic>
+        <p:nvPicPr>
+          <p:cNvPr id="6" name="Picture 5" descr="S9-phone-home.jpg"/>
+          <p:cNvPicPr>
+            <a:picLocks noChangeAspect="1"/>
+          </p:cNvPicPr>
+          <p:nvPr/>
+        </p:nvPicPr>
+        <p:blipFill>
+          <a:blip r:embed="rId3"/>
+          <a:stretch>
+            <a:fillRect/>
+          </a:stretch>
+        </p:blipFill>
+        <p:spPr>
+          <a:xfrm>
+            <a:off x="4759644" y="3931920"/>
+            <a:ext cx="1189982" cy="2697480"/>
+          </a:xfrm>
+          <a:prstGeom prst="rect">
+            <a:avLst/>
+          </a:prstGeom>
+        </p:spPr>
+      </p:pic>
+      <p:pic>
+        <p:nvPicPr>
+          <p:cNvPr id="7" name="Picture 6" descr="S11-ar1.jpg"/>
+          <p:cNvPicPr>
+            <a:picLocks noChangeAspect="1"/>
+          </p:cNvPicPr>
+          <p:nvPr/>
+        </p:nvPicPr>
+        <p:blipFill>
+          <a:blip r:embed="rId4"/>
+          <a:stretch>
+            <a:fillRect/>
+          </a:stretch>
+        </p:blipFill>
+        <p:spPr>
+          <a:xfrm>
+            <a:off x="6114218" y="3931920"/>
+            <a:ext cx="1317831" cy="2697480"/>
+          </a:xfrm>
+          <a:prstGeom prst="rect">
+            <a:avLst/>
+          </a:prstGeom>
+        </p:spPr>
+      </p:pic>
     </p:spTree>
   </p:cSld>
   <p:clrMapOvr>
@@ -8551,6 +8863,30 @@
           </a:p>
         </p:txBody>
       </p:sp>
+      <p:pic>
+        <p:nvPicPr>
+          <p:cNvPr id="6" name="Picture 5" descr="S11-ar2.jpg"/>
+          <p:cNvPicPr>
+            <a:picLocks noChangeAspect="1"/>
+          </p:cNvPicPr>
+          <p:nvPr/>
+        </p:nvPicPr>
+        <p:blipFill>
+          <a:blip r:embed="rId3"/>
+          <a:stretch>
+            <a:fillRect/>
+          </a:stretch>
+        </p:blipFill>
+        <p:spPr>
+          <a:xfrm>
+            <a:off x="5500856" y="3931920"/>
+            <a:ext cx="1189982" cy="2697480"/>
+          </a:xfrm>
+          <a:prstGeom prst="rect">
+            <a:avLst/>
+          </a:prstGeom>
+        </p:spPr>
+      </p:pic>
     </p:spTree>
   </p:cSld>
   <p:clrMapOvr>
@@ -9261,6 +9597,30 @@
           </a:p>
         </p:txBody>
       </p:sp>
+      <p:pic>
+        <p:nvPicPr>
+          <p:cNvPr id="6" name="Picture 5" descr="S11-ar1.jpg"/>
+          <p:cNvPicPr>
+            <a:picLocks noChangeAspect="1"/>
+          </p:cNvPicPr>
+          <p:nvPr/>
+        </p:nvPicPr>
+        <p:blipFill>
+          <a:blip r:embed="rId3"/>
+          <a:stretch>
+            <a:fillRect/>
+          </a:stretch>
+        </p:blipFill>
+        <p:spPr>
+          <a:xfrm>
+            <a:off x="5436931" y="3931920"/>
+            <a:ext cx="1317831" cy="2697480"/>
+          </a:xfrm>
+          <a:prstGeom prst="rect">
+            <a:avLst/>
+          </a:prstGeom>
+        </p:spPr>
+      </p:pic>
     </p:spTree>
   </p:cSld>
   <p:clrMapOvr>

--- a/dev/ppt/out/Deck.pptx
+++ b/dev/ppt/out/Deck.pptx
@@ -1,36 +1,39 @@
 
 <file path=ppt/presentation.xml><?xml version="1.0" encoding="utf-8"?>
-<p:presentation xmlns:a="http://schemas.openxmlformats.org/drawingml/2006/main" xmlns:r="http://schemas.openxmlformats.org/officeDocument/2006/relationships" xmlns:p="http://schemas.openxmlformats.org/presentationml/2006/main" saveSubsetFonts="1" autoCompressPictures="0">
+<p:presentation xmlns:a="http://schemas.openxmlformats.org/drawingml/2006/main" xmlns:r="http://schemas.openxmlformats.org/officeDocument/2006/relationships" xmlns:p="http://schemas.openxmlformats.org/presentationml/2006/main" autoCompressPictures="0">
   <p:sldMasterIdLst>
     <p:sldMasterId id="2147483648" r:id="rId1"/>
   </p:sldMasterIdLst>
+  <p:notesMasterIdLst>
+    <p:notesMasterId r:id="rId4"/>
+  </p:notesMasterIdLst>
   <p:sldIdLst>
-    <p:sldId id="256" r:id="rId7"/>
-    <p:sldId id="257" r:id="rId8"/>
-    <p:sldId id="258" r:id="rId9"/>
-    <p:sldId id="259" r:id="rId10"/>
-    <p:sldId id="260" r:id="rId11"/>
-    <p:sldId id="261" r:id="rId12"/>
-    <p:sldId id="262" r:id="rId13"/>
-    <p:sldId id="263" r:id="rId14"/>
-    <p:sldId id="264" r:id="rId15"/>
-    <p:sldId id="265" r:id="rId16"/>
-    <p:sldId id="266" r:id="rId17"/>
-    <p:sldId id="267" r:id="rId18"/>
-    <p:sldId id="268" r:id="rId19"/>
-    <p:sldId id="269" r:id="rId20"/>
-    <p:sldId id="270" r:id="rId21"/>
-    <p:sldId id="271" r:id="rId22"/>
-    <p:sldId id="272" r:id="rId23"/>
-    <p:sldId id="273" r:id="rId24"/>
-    <p:sldId id="274" r:id="rId25"/>
-    <p:sldId id="275" r:id="rId26"/>
-    <p:sldId id="276" r:id="rId27"/>
-    <p:sldId id="277" r:id="rId28"/>
-    <p:sldId id="278" r:id="rId29"/>
-    <p:sldId id="279" r:id="rId30"/>
+    <p:sldId id="256" r:id="rId3"/>
+    <p:sldId id="257" r:id="rId5"/>
+    <p:sldId id="258" r:id="rId6"/>
+    <p:sldId id="259" r:id="rId7"/>
+    <p:sldId id="260" r:id="rId8"/>
+    <p:sldId id="261" r:id="rId9"/>
+    <p:sldId id="262" r:id="rId10"/>
+    <p:sldId id="263" r:id="rId11"/>
+    <p:sldId id="264" r:id="rId12"/>
+    <p:sldId id="265" r:id="rId13"/>
+    <p:sldId id="266" r:id="rId14"/>
+    <p:sldId id="267" r:id="rId15"/>
+    <p:sldId id="268" r:id="rId16"/>
+    <p:sldId id="269" r:id="rId17"/>
+    <p:sldId id="270" r:id="rId18"/>
+    <p:sldId id="271" r:id="rId19"/>
+    <p:sldId id="272" r:id="rId20"/>
+    <p:sldId id="273" r:id="rId21"/>
+    <p:sldId id="274" r:id="rId22"/>
+    <p:sldId id="276" r:id="rId23"/>
+    <p:sldId id="275" r:id="rId24"/>
+    <p:sldId id="277" r:id="rId25"/>
+    <p:sldId id="278" r:id="rId26"/>
+    <p:sldId id="279" r:id="rId27"/>
   </p:sldIdLst>
-  <p:sldSz cx="12191695" cy="6858000" type="screen4x3"/>
+  <p:sldSz cx="12191365" cy="6858000" type="screen4x3"/>
   <p:notesSz cx="6858000" cy="9144000"/>
   <p:defaultTextStyle>
     <a:defPPr>
@@ -127,11 +130,27 @@
       </a:defRPr>
     </a:lvl9pPr>
   </p:defaultTextStyle>
+  <p:extLst>
+    <p:ext uri="{EFAFB233-063F-42B5-8137-9DF3F51BA10A}">
+      <p15:sldGuideLst xmlns:p15="http://schemas.microsoft.com/office/powerpoint/2012/main">
+        <p15:guide id="1" orient="horz" pos="2160" userDrawn="1">
+          <p15:clr>
+            <a:srgbClr val="A4A3A4"/>
+          </p15:clr>
+        </p15:guide>
+        <p15:guide id="2" pos="2880" userDrawn="1">
+          <p15:clr>
+            <a:srgbClr val="A4A3A4"/>
+          </p15:clr>
+        </p15:guide>
+      </p15:sldGuideLst>
+    </p:ext>
+  </p:extLst>
 </p:presentation>
 </file>
 
 <file path=ppt/notesMasters/notesMaster1.xml><?xml version="1.0" encoding="utf-8"?>
-<p:notesMaster xmlns:a="http://schemas.openxmlformats.org/drawingml/2006/main" xmlns:p="http://schemas.openxmlformats.org/presentationml/2006/main" xmlns:r="http://schemas.openxmlformats.org/officeDocument/2006/relationships">
+<p:notesMaster xmlns:a="http://schemas.openxmlformats.org/drawingml/2006/main" xmlns:r="http://schemas.openxmlformats.org/officeDocument/2006/relationships" xmlns:p="http://schemas.openxmlformats.org/presentationml/2006/main">
   <p:cSld>
     <p:bg>
       <p:bgRef idx="1001">
@@ -212,7 +231,6 @@
           <a:p>
             <a:fld id="{0F89C1C7-3DCD-1040-A9CF-14679D8B5DDD}" type="datetimeFigureOut">
               <a:rPr lang="en-US" smtClean="0"/>
-              <a:t>10/17/16</a:t>
             </a:fld>
             <a:endParaRPr lang="en-US"/>
           </a:p>
@@ -279,6 +297,7 @@
               <a:rPr lang="en-US" smtClean="0"/>
               <a:t>Click to edit Master text styles</a:t>
             </a:r>
+            <a:endParaRPr lang="en-US" smtClean="0"/>
           </a:p>
           <a:p>
             <a:pPr lvl="1"/>
@@ -286,6 +305,7 @@
               <a:rPr lang="en-US" smtClean="0"/>
               <a:t>Second level</a:t>
             </a:r>
+            <a:endParaRPr lang="en-US" smtClean="0"/>
           </a:p>
           <a:p>
             <a:pPr lvl="2"/>
@@ -293,6 +313,7 @@
               <a:rPr lang="en-US" smtClean="0"/>
               <a:t>Third level</a:t>
             </a:r>
+            <a:endParaRPr lang="en-US" smtClean="0"/>
           </a:p>
           <a:p>
             <a:pPr lvl="3"/>
@@ -300,6 +321,7 @@
               <a:rPr lang="en-US" smtClean="0"/>
               <a:t>Fourth level</a:t>
             </a:r>
+            <a:endParaRPr lang="en-US" smtClean="0"/>
           </a:p>
           <a:p>
             <a:pPr lvl="4"/>
@@ -371,18 +393,12 @@
           <a:p>
             <a:fld id="{BB5E49A5-4136-284D-997B-48E1D791AD67}" type="slidenum">
               <a:rPr lang="en-US" smtClean="0"/>
-              <a:t>‹#›</a:t>
             </a:fld>
             <a:endParaRPr lang="en-US"/>
           </a:p>
         </p:txBody>
       </p:sp>
     </p:spTree>
-    <p:extLst>
-      <p:ext uri="{BB962C8B-B14F-4D97-AF65-F5344CB8AC3E}">
-        <p14:creationId xmlns:p14="http://schemas.microsoft.com/office/powerpoint/2010/main" val="2623252185"/>
-      </p:ext>
-    </p:extLst>
   </p:cSld>
   <p:clrMap bg1="lt1" tx1="dk1" bg2="lt2" tx2="dk2" accent1="accent1" accent2="accent2" accent3="accent3" accent4="accent4" accent5="accent5" accent6="accent6" hlink="hlink" folHlink="folHlink"/>
   <p:notesStyle>
@@ -481,7 +497,7 @@
 </file>
 
 <file path=ppt/notesSlides/notesSlide1.xml><?xml version="1.0" encoding="utf-8"?>
-<p:notes xmlns:a="http://schemas.openxmlformats.org/drawingml/2006/main" xmlns:p="http://schemas.openxmlformats.org/presentationml/2006/main" xmlns:r="http://schemas.openxmlformats.org/officeDocument/2006/relationships">
+<p:notes xmlns:a="http://schemas.openxmlformats.org/drawingml/2006/main" xmlns:r="http://schemas.openxmlformats.org/officeDocument/2006/relationships" xmlns:p="http://schemas.openxmlformats.org/presentationml/2006/main">
   <p:cSld>
     <p:spTree>
       <p:nvGrpSpPr>
@@ -516,7 +532,7 @@
             <a:spLocks noGrp="1"/>
           </p:cNvSpPr>
           <p:nvPr>
-            <p:ph type="body" idx="3" sz="quarter"/>
+            <p:ph type="body" sz="quarter" idx="3"/>
           </p:nvPr>
         </p:nvSpPr>
         <p:spPr/>
@@ -537,7 +553,7 @@
             <a:spLocks noGrp="1"/>
           </p:cNvSpPr>
           <p:nvPr>
-            <p:ph type="sldNum" idx="5" sz="quarter"/>
+            <p:ph type="sldNum" sz="quarter" idx="5"/>
           </p:nvPr>
         </p:nvSpPr>
         <p:spPr/>
@@ -551,7 +567,7 @@
 </file>
 
 <file path=ppt/notesSlides/notesSlide10.xml><?xml version="1.0" encoding="utf-8"?>
-<p:notes xmlns:a="http://schemas.openxmlformats.org/drawingml/2006/main" xmlns:p="http://schemas.openxmlformats.org/presentationml/2006/main" xmlns:r="http://schemas.openxmlformats.org/officeDocument/2006/relationships">
+<p:notes xmlns:a="http://schemas.openxmlformats.org/drawingml/2006/main" xmlns:r="http://schemas.openxmlformats.org/officeDocument/2006/relationships" xmlns:p="http://schemas.openxmlformats.org/presentationml/2006/main">
   <p:cSld>
     <p:spTree>
       <p:nvGrpSpPr>
@@ -586,7 +602,7 @@
             <a:spLocks noGrp="1"/>
           </p:cNvSpPr>
           <p:nvPr>
-            <p:ph type="body" idx="3" sz="quarter"/>
+            <p:ph type="body" sz="quarter" idx="3"/>
           </p:nvPr>
         </p:nvSpPr>
         <p:spPr/>
@@ -617,7 +633,7 @@
             <a:spLocks noGrp="1"/>
           </p:cNvSpPr>
           <p:nvPr>
-            <p:ph type="sldNum" idx="5" sz="quarter"/>
+            <p:ph type="sldNum" sz="quarter" idx="5"/>
           </p:nvPr>
         </p:nvSpPr>
         <p:spPr/>
@@ -631,7 +647,7 @@
 </file>
 
 <file path=ppt/notesSlides/notesSlide11.xml><?xml version="1.0" encoding="utf-8"?>
-<p:notes xmlns:a="http://schemas.openxmlformats.org/drawingml/2006/main" xmlns:p="http://schemas.openxmlformats.org/presentationml/2006/main" xmlns:r="http://schemas.openxmlformats.org/officeDocument/2006/relationships">
+<p:notes xmlns:a="http://schemas.openxmlformats.org/drawingml/2006/main" xmlns:r="http://schemas.openxmlformats.org/officeDocument/2006/relationships" xmlns:p="http://schemas.openxmlformats.org/presentationml/2006/main">
   <p:cSld>
     <p:spTree>
       <p:nvGrpSpPr>
@@ -666,7 +682,7 @@
             <a:spLocks noGrp="1"/>
           </p:cNvSpPr>
           <p:nvPr>
-            <p:ph type="body" idx="3" sz="quarter"/>
+            <p:ph type="body" sz="quarter" idx="3"/>
           </p:nvPr>
         </p:nvSpPr>
         <p:spPr/>
@@ -697,7 +713,7 @@
             <a:spLocks noGrp="1"/>
           </p:cNvSpPr>
           <p:nvPr>
-            <p:ph type="sldNum" idx="5" sz="quarter"/>
+            <p:ph type="sldNum" sz="quarter" idx="5"/>
           </p:nvPr>
         </p:nvSpPr>
         <p:spPr/>
@@ -711,7 +727,7 @@
 </file>
 
 <file path=ppt/notesSlides/notesSlide12.xml><?xml version="1.0" encoding="utf-8"?>
-<p:notes xmlns:a="http://schemas.openxmlformats.org/drawingml/2006/main" xmlns:p="http://schemas.openxmlformats.org/presentationml/2006/main" xmlns:r="http://schemas.openxmlformats.org/officeDocument/2006/relationships">
+<p:notes xmlns:a="http://schemas.openxmlformats.org/drawingml/2006/main" xmlns:r="http://schemas.openxmlformats.org/officeDocument/2006/relationships" xmlns:p="http://schemas.openxmlformats.org/presentationml/2006/main">
   <p:cSld>
     <p:spTree>
       <p:nvGrpSpPr>
@@ -746,7 +762,7 @@
             <a:spLocks noGrp="1"/>
           </p:cNvSpPr>
           <p:nvPr>
-            <p:ph type="body" idx="3" sz="quarter"/>
+            <p:ph type="body" sz="quarter" idx="3"/>
           </p:nvPr>
         </p:nvSpPr>
         <p:spPr/>
@@ -767,7 +783,7 @@
             <a:spLocks noGrp="1"/>
           </p:cNvSpPr>
           <p:nvPr>
-            <p:ph type="sldNum" idx="5" sz="quarter"/>
+            <p:ph type="sldNum" sz="quarter" idx="5"/>
           </p:nvPr>
         </p:nvSpPr>
         <p:spPr/>
@@ -781,7 +797,7 @@
 </file>
 
 <file path=ppt/notesSlides/notesSlide13.xml><?xml version="1.0" encoding="utf-8"?>
-<p:notes xmlns:a="http://schemas.openxmlformats.org/drawingml/2006/main" xmlns:p="http://schemas.openxmlformats.org/presentationml/2006/main" xmlns:r="http://schemas.openxmlformats.org/officeDocument/2006/relationships">
+<p:notes xmlns:a="http://schemas.openxmlformats.org/drawingml/2006/main" xmlns:r="http://schemas.openxmlformats.org/officeDocument/2006/relationships" xmlns:p="http://schemas.openxmlformats.org/presentationml/2006/main">
   <p:cSld>
     <p:spTree>
       <p:nvGrpSpPr>
@@ -816,7 +832,7 @@
             <a:spLocks noGrp="1"/>
           </p:cNvSpPr>
           <p:nvPr>
-            <p:ph type="body" idx="3" sz="quarter"/>
+            <p:ph type="body" sz="quarter" idx="3"/>
           </p:nvPr>
         </p:nvSpPr>
         <p:spPr/>
@@ -837,7 +853,7 @@
             <a:spLocks noGrp="1"/>
           </p:cNvSpPr>
           <p:nvPr>
-            <p:ph type="sldNum" idx="5" sz="quarter"/>
+            <p:ph type="sldNum" sz="quarter" idx="5"/>
           </p:nvPr>
         </p:nvSpPr>
         <p:spPr/>
@@ -851,7 +867,7 @@
 </file>
 
 <file path=ppt/notesSlides/notesSlide14.xml><?xml version="1.0" encoding="utf-8"?>
-<p:notes xmlns:a="http://schemas.openxmlformats.org/drawingml/2006/main" xmlns:p="http://schemas.openxmlformats.org/presentationml/2006/main" xmlns:r="http://schemas.openxmlformats.org/officeDocument/2006/relationships">
+<p:notes xmlns:a="http://schemas.openxmlformats.org/drawingml/2006/main" xmlns:r="http://schemas.openxmlformats.org/officeDocument/2006/relationships" xmlns:p="http://schemas.openxmlformats.org/presentationml/2006/main">
   <p:cSld>
     <p:spTree>
       <p:nvGrpSpPr>
@@ -886,7 +902,7 @@
             <a:spLocks noGrp="1"/>
           </p:cNvSpPr>
           <p:nvPr>
-            <p:ph type="body" idx="3" sz="quarter"/>
+            <p:ph type="body" sz="quarter" idx="3"/>
           </p:nvPr>
         </p:nvSpPr>
         <p:spPr/>
@@ -907,7 +923,7 @@
             <a:spLocks noGrp="1"/>
           </p:cNvSpPr>
           <p:nvPr>
-            <p:ph type="sldNum" idx="5" sz="quarter"/>
+            <p:ph type="sldNum" sz="quarter" idx="5"/>
           </p:nvPr>
         </p:nvSpPr>
         <p:spPr/>
@@ -921,7 +937,7 @@
 </file>
 
 <file path=ppt/notesSlides/notesSlide15.xml><?xml version="1.0" encoding="utf-8"?>
-<p:notes xmlns:a="http://schemas.openxmlformats.org/drawingml/2006/main" xmlns:p="http://schemas.openxmlformats.org/presentationml/2006/main" xmlns:r="http://schemas.openxmlformats.org/officeDocument/2006/relationships">
+<p:notes xmlns:a="http://schemas.openxmlformats.org/drawingml/2006/main" xmlns:r="http://schemas.openxmlformats.org/officeDocument/2006/relationships" xmlns:p="http://schemas.openxmlformats.org/presentationml/2006/main">
   <p:cSld>
     <p:spTree>
       <p:nvGrpSpPr>
@@ -956,7 +972,7 @@
             <a:spLocks noGrp="1"/>
           </p:cNvSpPr>
           <p:nvPr>
-            <p:ph type="body" idx="3" sz="quarter"/>
+            <p:ph type="body" sz="quarter" idx="3"/>
           </p:nvPr>
         </p:nvSpPr>
         <p:spPr/>
@@ -977,7 +993,7 @@
             <a:spLocks noGrp="1"/>
           </p:cNvSpPr>
           <p:nvPr>
-            <p:ph type="sldNum" idx="5" sz="quarter"/>
+            <p:ph type="sldNum" sz="quarter" idx="5"/>
           </p:nvPr>
         </p:nvSpPr>
         <p:spPr/>
@@ -991,7 +1007,7 @@
 </file>
 
 <file path=ppt/notesSlides/notesSlide16.xml><?xml version="1.0" encoding="utf-8"?>
-<p:notes xmlns:a="http://schemas.openxmlformats.org/drawingml/2006/main" xmlns:p="http://schemas.openxmlformats.org/presentationml/2006/main" xmlns:r="http://schemas.openxmlformats.org/officeDocument/2006/relationships">
+<p:notes xmlns:a="http://schemas.openxmlformats.org/drawingml/2006/main" xmlns:r="http://schemas.openxmlformats.org/officeDocument/2006/relationships" xmlns:p="http://schemas.openxmlformats.org/presentationml/2006/main">
   <p:cSld>
     <p:spTree>
       <p:nvGrpSpPr>
@@ -1026,7 +1042,7 @@
             <a:spLocks noGrp="1"/>
           </p:cNvSpPr>
           <p:nvPr>
-            <p:ph type="body" idx="3" sz="quarter"/>
+            <p:ph type="body" sz="quarter" idx="3"/>
           </p:nvPr>
         </p:nvSpPr>
         <p:spPr/>
@@ -1047,7 +1063,7 @@
             <a:spLocks noGrp="1"/>
           </p:cNvSpPr>
           <p:nvPr>
-            <p:ph type="sldNum" idx="5" sz="quarter"/>
+            <p:ph type="sldNum" sz="quarter" idx="5"/>
           </p:nvPr>
         </p:nvSpPr>
         <p:spPr/>
@@ -1061,7 +1077,7 @@
 </file>
 
 <file path=ppt/notesSlides/notesSlide17.xml><?xml version="1.0" encoding="utf-8"?>
-<p:notes xmlns:a="http://schemas.openxmlformats.org/drawingml/2006/main" xmlns:p="http://schemas.openxmlformats.org/presentationml/2006/main" xmlns:r="http://schemas.openxmlformats.org/officeDocument/2006/relationships">
+<p:notes xmlns:a="http://schemas.openxmlformats.org/drawingml/2006/main" xmlns:r="http://schemas.openxmlformats.org/officeDocument/2006/relationships" xmlns:p="http://schemas.openxmlformats.org/presentationml/2006/main">
   <p:cSld>
     <p:spTree>
       <p:nvGrpSpPr>
@@ -1096,7 +1112,7 @@
             <a:spLocks noGrp="1"/>
           </p:cNvSpPr>
           <p:nvPr>
-            <p:ph type="body" idx="3" sz="quarter"/>
+            <p:ph type="body" sz="quarter" idx="3"/>
           </p:nvPr>
         </p:nvSpPr>
         <p:spPr/>
@@ -1117,7 +1133,7 @@
             <a:spLocks noGrp="1"/>
           </p:cNvSpPr>
           <p:nvPr>
-            <p:ph type="sldNum" idx="5" sz="quarter"/>
+            <p:ph type="sldNum" sz="quarter" idx="5"/>
           </p:nvPr>
         </p:nvSpPr>
         <p:spPr/>
@@ -1131,7 +1147,7 @@
 </file>
 
 <file path=ppt/notesSlides/notesSlide18.xml><?xml version="1.0" encoding="utf-8"?>
-<p:notes xmlns:a="http://schemas.openxmlformats.org/drawingml/2006/main" xmlns:p="http://schemas.openxmlformats.org/presentationml/2006/main" xmlns:r="http://schemas.openxmlformats.org/officeDocument/2006/relationships">
+<p:notes xmlns:a="http://schemas.openxmlformats.org/drawingml/2006/main" xmlns:r="http://schemas.openxmlformats.org/officeDocument/2006/relationships" xmlns:p="http://schemas.openxmlformats.org/presentationml/2006/main">
   <p:cSld>
     <p:spTree>
       <p:nvGrpSpPr>
@@ -1166,7 +1182,7 @@
             <a:spLocks noGrp="1"/>
           </p:cNvSpPr>
           <p:nvPr>
-            <p:ph type="body" idx="3" sz="quarter"/>
+            <p:ph type="body" sz="quarter" idx="3"/>
           </p:nvPr>
         </p:nvSpPr>
         <p:spPr/>
@@ -1187,7 +1203,7 @@
             <a:spLocks noGrp="1"/>
           </p:cNvSpPr>
           <p:nvPr>
-            <p:ph type="sldNum" idx="5" sz="quarter"/>
+            <p:ph type="sldNum" sz="quarter" idx="5"/>
           </p:nvPr>
         </p:nvSpPr>
         <p:spPr/>
@@ -1201,7 +1217,7 @@
 </file>
 
 <file path=ppt/notesSlides/notesSlide19.xml><?xml version="1.0" encoding="utf-8"?>
-<p:notes xmlns:a="http://schemas.openxmlformats.org/drawingml/2006/main" xmlns:p="http://schemas.openxmlformats.org/presentationml/2006/main" xmlns:r="http://schemas.openxmlformats.org/officeDocument/2006/relationships">
+<p:notes xmlns:a="http://schemas.openxmlformats.org/drawingml/2006/main" xmlns:r="http://schemas.openxmlformats.org/officeDocument/2006/relationships" xmlns:p="http://schemas.openxmlformats.org/presentationml/2006/main">
   <p:cSld>
     <p:spTree>
       <p:nvGrpSpPr>
@@ -1236,7 +1252,7 @@
             <a:spLocks noGrp="1"/>
           </p:cNvSpPr>
           <p:nvPr>
-            <p:ph type="body" idx="3" sz="quarter"/>
+            <p:ph type="body" sz="quarter" idx="3"/>
           </p:nvPr>
         </p:nvSpPr>
         <p:spPr/>
@@ -1257,7 +1273,7 @@
             <a:spLocks noGrp="1"/>
           </p:cNvSpPr>
           <p:nvPr>
-            <p:ph type="sldNum" idx="5" sz="quarter"/>
+            <p:ph type="sldNum" sz="quarter" idx="5"/>
           </p:nvPr>
         </p:nvSpPr>
         <p:spPr/>
@@ -1271,7 +1287,7 @@
 </file>
 
 <file path=ppt/notesSlides/notesSlide2.xml><?xml version="1.0" encoding="utf-8"?>
-<p:notes xmlns:a="http://schemas.openxmlformats.org/drawingml/2006/main" xmlns:p="http://schemas.openxmlformats.org/presentationml/2006/main" xmlns:r="http://schemas.openxmlformats.org/officeDocument/2006/relationships">
+<p:notes xmlns:a="http://schemas.openxmlformats.org/drawingml/2006/main" xmlns:r="http://schemas.openxmlformats.org/officeDocument/2006/relationships" xmlns:p="http://schemas.openxmlformats.org/presentationml/2006/main">
   <p:cSld>
     <p:spTree>
       <p:nvGrpSpPr>
@@ -1306,7 +1322,7 @@
             <a:spLocks noGrp="1"/>
           </p:cNvSpPr>
           <p:nvPr>
-            <p:ph type="body" idx="3" sz="quarter"/>
+            <p:ph type="body" sz="quarter" idx="3"/>
           </p:nvPr>
         </p:nvSpPr>
         <p:spPr/>
@@ -1327,7 +1343,7 @@
             <a:spLocks noGrp="1"/>
           </p:cNvSpPr>
           <p:nvPr>
-            <p:ph type="sldNum" idx="5" sz="quarter"/>
+            <p:ph type="sldNum" sz="quarter" idx="5"/>
           </p:nvPr>
         </p:nvSpPr>
         <p:spPr/>
@@ -1341,7 +1357,7 @@
 </file>
 
 <file path=ppt/notesSlides/notesSlide20.xml><?xml version="1.0" encoding="utf-8"?>
-<p:notes xmlns:a="http://schemas.openxmlformats.org/drawingml/2006/main" xmlns:p="http://schemas.openxmlformats.org/presentationml/2006/main" xmlns:r="http://schemas.openxmlformats.org/officeDocument/2006/relationships">
+<p:notes xmlns:a="http://schemas.openxmlformats.org/drawingml/2006/main" xmlns:r="http://schemas.openxmlformats.org/officeDocument/2006/relationships" xmlns:p="http://schemas.openxmlformats.org/presentationml/2006/main">
   <p:cSld>
     <p:spTree>
       <p:nvGrpSpPr>
@@ -1376,7 +1392,7 @@
             <a:spLocks noGrp="1"/>
           </p:cNvSpPr>
           <p:nvPr>
-            <p:ph type="body" idx="3" sz="quarter"/>
+            <p:ph type="body" sz="quarter" idx="3"/>
           </p:nvPr>
         </p:nvSpPr>
         <p:spPr/>
@@ -1385,12 +1401,12 @@
           <a:lstStyle/>
           <a:p>
             <a:r>
-              <a:t>这一页要说得实在：手部互动我已经做出来一半了。手机端接了 21 个关键点的手部检测，链路是通的——她会看着你的手；还做了三个手势：捏合（捏脸）、握拳、挥手，一共 21 个单元测试。</a:t>
-            </a:r>
-          </a:p>
-          <a:p>
-            <a:r>
-              <a:t>但我要说清楚：**这些只到「编译和单测通过」**，真手伸过去她的眼睛是不是真的跟着转，必须真机上确认。所以这一页既是成果，也是下一步的清单。</a:t>
+              <a:t>另一条感知路线是毫米波雷达：不依赖光线和镜头、隐私友好、能全天运行。但这里必须诚实——**已经有人做了**：一是 mmHRI，毫米波做隐私友好人机交互，隔着帘子做机器人操作，动作识别 85%；二是「文心守护」，60GHz 雷达 + 大模型，人家明说做『健康分析与情感陪伴』，口号就是『存在即感知』，而且是开源的。</a:t>
+            </a:r>
+          </a:p>
+          <a:p>
+            <a:r>
+              <a:t>所以我们**不主张首创**。我们想做窄的那一块：把变量换成**角色的人格连续性**，把指标换成**关系感知与打扰容忍度**，对象是二次元角色、形态是她住在桌面和手机里。这条路先做用户研究，不先堆硬件。</a:t>
             </a:r>
           </a:p>
         </p:txBody>
@@ -1402,7 +1418,7 @@
             <a:spLocks noGrp="1"/>
           </p:cNvSpPr>
           <p:nvPr>
-            <p:ph type="sldNum" idx="5" sz="quarter"/>
+            <p:ph type="sldNum" sz="quarter" idx="5"/>
           </p:nvPr>
         </p:nvSpPr>
         <p:spPr/>
@@ -1416,7 +1432,7 @@
 </file>
 
 <file path=ppt/notesSlides/notesSlide21.xml><?xml version="1.0" encoding="utf-8"?>
-<p:notes xmlns:a="http://schemas.openxmlformats.org/drawingml/2006/main" xmlns:p="http://schemas.openxmlformats.org/presentationml/2006/main" xmlns:r="http://schemas.openxmlformats.org/officeDocument/2006/relationships">
+<p:notes xmlns:a="http://schemas.openxmlformats.org/drawingml/2006/main" xmlns:r="http://schemas.openxmlformats.org/officeDocument/2006/relationships" xmlns:p="http://schemas.openxmlformats.org/presentationml/2006/main">
   <p:cSld>
     <p:spTree>
       <p:nvGrpSpPr>
@@ -1451,7 +1467,7 @@
             <a:spLocks noGrp="1"/>
           </p:cNvSpPr>
           <p:nvPr>
-            <p:ph type="body" idx="3" sz="quarter"/>
+            <p:ph type="body" sz="quarter" idx="3"/>
           </p:nvPr>
         </p:nvSpPr>
         <p:spPr/>
@@ -1460,12 +1476,12 @@
           <a:lstStyle/>
           <a:p>
             <a:r>
-              <a:t>另一条感知路线是毫米波雷达：不依赖光线和镜头、隐私友好、能全天运行。但这里必须诚实——**已经有人做了**：一是 mmHRI，毫米波做隐私友好人机交互，隔着帘子做机器人操作，动作识别 85%；二是「文心守护」，60GHz 雷达 + 大模型，人家明说做『健康分析与情感陪伴』，口号就是『存在即感知』，而且是开源的。</a:t>
-            </a:r>
-          </a:p>
-          <a:p>
-            <a:r>
-              <a:t>所以我们**不主张首创**。我们想做窄的那一块：把变量换成**角色的人格连续性**，把指标换成**关系感知与打扰容忍度**，对象是二次元角色、形态是她住在桌面和手机里。这条路先做用户研究，不先堆硬件。</a:t>
+              <a:t>这一页要说得实在：手部互动我已经做出来一半了。手机端接了 21 个关键点的手部检测，链路是通的——她会看着你的手；还做了三个手势：捏合（捏脸）、握拳、挥手，一共 21 个单元测试。</a:t>
+            </a:r>
+          </a:p>
+          <a:p>
+            <a:r>
+              <a:t>但我要说清楚：**这些只到「编译和单测通过」**，真手伸过去她的眼睛是不是真的跟着转，必须真机上确认。所以这一页既是成果，也是下一步的清单。</a:t>
             </a:r>
           </a:p>
         </p:txBody>
@@ -1477,7 +1493,7 @@
             <a:spLocks noGrp="1"/>
           </p:cNvSpPr>
           <p:nvPr>
-            <p:ph type="sldNum" idx="5" sz="quarter"/>
+            <p:ph type="sldNum" sz="quarter" idx="5"/>
           </p:nvPr>
         </p:nvSpPr>
         <p:spPr/>
@@ -1491,7 +1507,7 @@
 </file>
 
 <file path=ppt/notesSlides/notesSlide22.xml><?xml version="1.0" encoding="utf-8"?>
-<p:notes xmlns:a="http://schemas.openxmlformats.org/drawingml/2006/main" xmlns:p="http://schemas.openxmlformats.org/presentationml/2006/main" xmlns:r="http://schemas.openxmlformats.org/officeDocument/2006/relationships">
+<p:notes xmlns:a="http://schemas.openxmlformats.org/drawingml/2006/main" xmlns:r="http://schemas.openxmlformats.org/officeDocument/2006/relationships" xmlns:p="http://schemas.openxmlformats.org/presentationml/2006/main">
   <p:cSld>
     <p:spTree>
       <p:nvGrpSpPr>
@@ -1526,7 +1542,7 @@
             <a:spLocks noGrp="1"/>
           </p:cNvSpPr>
           <p:nvPr>
-            <p:ph type="body" idx="3" sz="quarter"/>
+            <p:ph type="body" sz="quarter" idx="3"/>
           </p:nvPr>
         </p:nvSpPr>
         <p:spPr/>
@@ -1547,7 +1563,7 @@
             <a:spLocks noGrp="1"/>
           </p:cNvSpPr>
           <p:nvPr>
-            <p:ph type="sldNum" idx="5" sz="quarter"/>
+            <p:ph type="sldNum" sz="quarter" idx="5"/>
           </p:nvPr>
         </p:nvSpPr>
         <p:spPr/>
@@ -1561,7 +1577,7 @@
 </file>
 
 <file path=ppt/notesSlides/notesSlide23.xml><?xml version="1.0" encoding="utf-8"?>
-<p:notes xmlns:a="http://schemas.openxmlformats.org/drawingml/2006/main" xmlns:p="http://schemas.openxmlformats.org/presentationml/2006/main" xmlns:r="http://schemas.openxmlformats.org/officeDocument/2006/relationships">
+<p:notes xmlns:a="http://schemas.openxmlformats.org/drawingml/2006/main" xmlns:r="http://schemas.openxmlformats.org/officeDocument/2006/relationships" xmlns:p="http://schemas.openxmlformats.org/presentationml/2006/main">
   <p:cSld>
     <p:spTree>
       <p:nvGrpSpPr>
@@ -1596,7 +1612,7 @@
             <a:spLocks noGrp="1"/>
           </p:cNvSpPr>
           <p:nvPr>
-            <p:ph type="body" idx="3" sz="quarter"/>
+            <p:ph type="body" sz="quarter" idx="3"/>
           </p:nvPr>
         </p:nvSpPr>
         <p:spPr/>
@@ -1617,7 +1633,7 @@
             <a:spLocks noGrp="1"/>
           </p:cNvSpPr>
           <p:nvPr>
-            <p:ph type="sldNum" idx="5" sz="quarter"/>
+            <p:ph type="sldNum" sz="quarter" idx="5"/>
           </p:nvPr>
         </p:nvSpPr>
         <p:spPr/>
@@ -1631,7 +1647,7 @@
 </file>
 
 <file path=ppt/notesSlides/notesSlide24.xml><?xml version="1.0" encoding="utf-8"?>
-<p:notes xmlns:a="http://schemas.openxmlformats.org/drawingml/2006/main" xmlns:p="http://schemas.openxmlformats.org/presentationml/2006/main" xmlns:r="http://schemas.openxmlformats.org/officeDocument/2006/relationships">
+<p:notes xmlns:a="http://schemas.openxmlformats.org/drawingml/2006/main" xmlns:r="http://schemas.openxmlformats.org/officeDocument/2006/relationships" xmlns:p="http://schemas.openxmlformats.org/presentationml/2006/main">
   <p:cSld>
     <p:spTree>
       <p:nvGrpSpPr>
@@ -1666,7 +1682,7 @@
             <a:spLocks noGrp="1"/>
           </p:cNvSpPr>
           <p:nvPr>
-            <p:ph type="body" idx="3" sz="quarter"/>
+            <p:ph type="body" sz="quarter" idx="3"/>
           </p:nvPr>
         </p:nvSpPr>
         <p:spPr/>
@@ -1687,7 +1703,7 @@
             <a:spLocks noGrp="1"/>
           </p:cNvSpPr>
           <p:nvPr>
-            <p:ph type="sldNum" idx="5" sz="quarter"/>
+            <p:ph type="sldNum" sz="quarter" idx="5"/>
           </p:nvPr>
         </p:nvSpPr>
         <p:spPr/>
@@ -1701,7 +1717,7 @@
 </file>
 
 <file path=ppt/notesSlides/notesSlide3.xml><?xml version="1.0" encoding="utf-8"?>
-<p:notes xmlns:a="http://schemas.openxmlformats.org/drawingml/2006/main" xmlns:p="http://schemas.openxmlformats.org/presentationml/2006/main" xmlns:r="http://schemas.openxmlformats.org/officeDocument/2006/relationships">
+<p:notes xmlns:a="http://schemas.openxmlformats.org/drawingml/2006/main" xmlns:r="http://schemas.openxmlformats.org/officeDocument/2006/relationships" xmlns:p="http://schemas.openxmlformats.org/presentationml/2006/main">
   <p:cSld>
     <p:spTree>
       <p:nvGrpSpPr>
@@ -1736,7 +1752,7 @@
             <a:spLocks noGrp="1"/>
           </p:cNvSpPr>
           <p:nvPr>
-            <p:ph type="body" idx="3" sz="quarter"/>
+            <p:ph type="body" sz="quarter" idx="3"/>
           </p:nvPr>
         </p:nvSpPr>
         <p:spPr/>
@@ -1757,7 +1773,7 @@
             <a:spLocks noGrp="1"/>
           </p:cNvSpPr>
           <p:nvPr>
-            <p:ph type="sldNum" idx="5" sz="quarter"/>
+            <p:ph type="sldNum" sz="quarter" idx="5"/>
           </p:nvPr>
         </p:nvSpPr>
         <p:spPr/>
@@ -1771,7 +1787,7 @@
 </file>
 
 <file path=ppt/notesSlides/notesSlide4.xml><?xml version="1.0" encoding="utf-8"?>
-<p:notes xmlns:a="http://schemas.openxmlformats.org/drawingml/2006/main" xmlns:p="http://schemas.openxmlformats.org/presentationml/2006/main" xmlns:r="http://schemas.openxmlformats.org/officeDocument/2006/relationships">
+<p:notes xmlns:a="http://schemas.openxmlformats.org/drawingml/2006/main" xmlns:r="http://schemas.openxmlformats.org/officeDocument/2006/relationships" xmlns:p="http://schemas.openxmlformats.org/presentationml/2006/main">
   <p:cSld>
     <p:spTree>
       <p:nvGrpSpPr>
@@ -1806,7 +1822,7 @@
             <a:spLocks noGrp="1"/>
           </p:cNvSpPr>
           <p:nvPr>
-            <p:ph type="body" idx="3" sz="quarter"/>
+            <p:ph type="body" sz="quarter" idx="3"/>
           </p:nvPr>
         </p:nvSpPr>
         <p:spPr/>
@@ -1827,7 +1843,7 @@
             <a:spLocks noGrp="1"/>
           </p:cNvSpPr>
           <p:nvPr>
-            <p:ph type="sldNum" idx="5" sz="quarter"/>
+            <p:ph type="sldNum" sz="quarter" idx="5"/>
           </p:nvPr>
         </p:nvSpPr>
         <p:spPr/>
@@ -1841,7 +1857,7 @@
 </file>
 
 <file path=ppt/notesSlides/notesSlide5.xml><?xml version="1.0" encoding="utf-8"?>
-<p:notes xmlns:a="http://schemas.openxmlformats.org/drawingml/2006/main" xmlns:p="http://schemas.openxmlformats.org/presentationml/2006/main" xmlns:r="http://schemas.openxmlformats.org/officeDocument/2006/relationships">
+<p:notes xmlns:a="http://schemas.openxmlformats.org/drawingml/2006/main" xmlns:r="http://schemas.openxmlformats.org/officeDocument/2006/relationships" xmlns:p="http://schemas.openxmlformats.org/presentationml/2006/main">
   <p:cSld>
     <p:spTree>
       <p:nvGrpSpPr>
@@ -1876,7 +1892,7 @@
             <a:spLocks noGrp="1"/>
           </p:cNvSpPr>
           <p:nvPr>
-            <p:ph type="body" idx="3" sz="quarter"/>
+            <p:ph type="body" sz="quarter" idx="3"/>
           </p:nvPr>
         </p:nvSpPr>
         <p:spPr/>
@@ -1897,7 +1913,7 @@
             <a:spLocks noGrp="1"/>
           </p:cNvSpPr>
           <p:nvPr>
-            <p:ph type="sldNum" idx="5" sz="quarter"/>
+            <p:ph type="sldNum" sz="quarter" idx="5"/>
           </p:nvPr>
         </p:nvSpPr>
         <p:spPr/>
@@ -1911,7 +1927,7 @@
 </file>
 
 <file path=ppt/notesSlides/notesSlide6.xml><?xml version="1.0" encoding="utf-8"?>
-<p:notes xmlns:a="http://schemas.openxmlformats.org/drawingml/2006/main" xmlns:p="http://schemas.openxmlformats.org/presentationml/2006/main" xmlns:r="http://schemas.openxmlformats.org/officeDocument/2006/relationships">
+<p:notes xmlns:a="http://schemas.openxmlformats.org/drawingml/2006/main" xmlns:r="http://schemas.openxmlformats.org/officeDocument/2006/relationships" xmlns:p="http://schemas.openxmlformats.org/presentationml/2006/main">
   <p:cSld>
     <p:spTree>
       <p:nvGrpSpPr>
@@ -1946,7 +1962,7 @@
             <a:spLocks noGrp="1"/>
           </p:cNvSpPr>
           <p:nvPr>
-            <p:ph type="body" idx="3" sz="quarter"/>
+            <p:ph type="body" sz="quarter" idx="3"/>
           </p:nvPr>
         </p:nvSpPr>
         <p:spPr/>
@@ -1967,7 +1983,7 @@
             <a:spLocks noGrp="1"/>
           </p:cNvSpPr>
           <p:nvPr>
-            <p:ph type="sldNum" idx="5" sz="quarter"/>
+            <p:ph type="sldNum" sz="quarter" idx="5"/>
           </p:nvPr>
         </p:nvSpPr>
         <p:spPr/>
@@ -1981,7 +1997,7 @@
 </file>
 
 <file path=ppt/notesSlides/notesSlide7.xml><?xml version="1.0" encoding="utf-8"?>
-<p:notes xmlns:a="http://schemas.openxmlformats.org/drawingml/2006/main" xmlns:p="http://schemas.openxmlformats.org/presentationml/2006/main" xmlns:r="http://schemas.openxmlformats.org/officeDocument/2006/relationships">
+<p:notes xmlns:a="http://schemas.openxmlformats.org/drawingml/2006/main" xmlns:r="http://schemas.openxmlformats.org/officeDocument/2006/relationships" xmlns:p="http://schemas.openxmlformats.org/presentationml/2006/main">
   <p:cSld>
     <p:spTree>
       <p:nvGrpSpPr>
@@ -2016,7 +2032,7 @@
             <a:spLocks noGrp="1"/>
           </p:cNvSpPr>
           <p:nvPr>
-            <p:ph type="body" idx="3" sz="quarter"/>
+            <p:ph type="body" sz="quarter" idx="3"/>
           </p:nvPr>
         </p:nvSpPr>
         <p:spPr/>
@@ -2037,7 +2053,7 @@
             <a:spLocks noGrp="1"/>
           </p:cNvSpPr>
           <p:nvPr>
-            <p:ph type="sldNum" idx="5" sz="quarter"/>
+            <p:ph type="sldNum" sz="quarter" idx="5"/>
           </p:nvPr>
         </p:nvSpPr>
         <p:spPr/>
@@ -2051,7 +2067,7 @@
 </file>
 
 <file path=ppt/notesSlides/notesSlide8.xml><?xml version="1.0" encoding="utf-8"?>
-<p:notes xmlns:a="http://schemas.openxmlformats.org/drawingml/2006/main" xmlns:p="http://schemas.openxmlformats.org/presentationml/2006/main" xmlns:r="http://schemas.openxmlformats.org/officeDocument/2006/relationships">
+<p:notes xmlns:a="http://schemas.openxmlformats.org/drawingml/2006/main" xmlns:r="http://schemas.openxmlformats.org/officeDocument/2006/relationships" xmlns:p="http://schemas.openxmlformats.org/presentationml/2006/main">
   <p:cSld>
     <p:spTree>
       <p:nvGrpSpPr>
@@ -2086,7 +2102,7 @@
             <a:spLocks noGrp="1"/>
           </p:cNvSpPr>
           <p:nvPr>
-            <p:ph type="body" idx="3" sz="quarter"/>
+            <p:ph type="body" sz="quarter" idx="3"/>
           </p:nvPr>
         </p:nvSpPr>
         <p:spPr/>
@@ -2112,7 +2128,7 @@
             <a:spLocks noGrp="1"/>
           </p:cNvSpPr>
           <p:nvPr>
-            <p:ph type="sldNum" idx="5" sz="quarter"/>
+            <p:ph type="sldNum" sz="quarter" idx="5"/>
           </p:nvPr>
         </p:nvSpPr>
         <p:spPr/>
@@ -2126,7 +2142,7 @@
 </file>
 
 <file path=ppt/notesSlides/notesSlide9.xml><?xml version="1.0" encoding="utf-8"?>
-<p:notes xmlns:a="http://schemas.openxmlformats.org/drawingml/2006/main" xmlns:p="http://schemas.openxmlformats.org/presentationml/2006/main" xmlns:r="http://schemas.openxmlformats.org/officeDocument/2006/relationships">
+<p:notes xmlns:a="http://schemas.openxmlformats.org/drawingml/2006/main" xmlns:r="http://schemas.openxmlformats.org/officeDocument/2006/relationships" xmlns:p="http://schemas.openxmlformats.org/presentationml/2006/main">
   <p:cSld>
     <p:spTree>
       <p:nvGrpSpPr>
@@ -2161,7 +2177,7 @@
             <a:spLocks noGrp="1"/>
           </p:cNvSpPr>
           <p:nvPr>
-            <p:ph type="body" idx="3" sz="quarter"/>
+            <p:ph type="body" sz="quarter" idx="3"/>
           </p:nvPr>
         </p:nvSpPr>
         <p:spPr/>
@@ -2192,7 +2208,7 @@
             <a:spLocks noGrp="1"/>
           </p:cNvSpPr>
           <p:nvPr>
-            <p:ph type="sldNum" idx="5" sz="quarter"/>
+            <p:ph type="sldNum" sz="quarter" idx="5"/>
           </p:nvPr>
         </p:nvSpPr>
         <p:spPr/>
@@ -2386,7 +2402,6 @@
           <a:p>
             <a:fld id="{5BCAD085-E8A6-8845-BD4E-CB4CCA059FC4}" type="datetimeFigureOut">
               <a:rPr lang="en-US" smtClean="0"/>
-              <a:t>1/27/13</a:t>
             </a:fld>
             <a:endParaRPr lang="en-US"/>
           </a:p>
@@ -2428,18 +2443,12 @@
           <a:p>
             <a:fld id="{C1FF6DA9-008F-8B48-92A6-B652298478BF}" type="slidenum">
               <a:rPr lang="en-US" smtClean="0"/>
-              <a:t>‹#›</a:t>
             </a:fld>
             <a:endParaRPr lang="en-US"/>
           </a:p>
         </p:txBody>
       </p:sp>
     </p:spTree>
-    <p:extLst>
-      <p:ext uri="{BB962C8B-B14F-4D97-AF65-F5344CB8AC3E}">
-        <p14:creationId xmlns:p14="http://schemas.microsoft.com/office/powerpoint/2010/main" val="3168075583"/>
-      </p:ext>
-    </p:extLst>
   </p:cSld>
   <p:clrMapOvr>
     <a:masterClrMapping/>
@@ -2507,6 +2516,7 @@
               <a:rPr lang="en-US" smtClean="0"/>
               <a:t>Click to edit Master text styles</a:t>
             </a:r>
+            <a:endParaRPr lang="en-US" smtClean="0"/>
           </a:p>
           <a:p>
             <a:pPr lvl="1"/>
@@ -2514,6 +2524,7 @@
               <a:rPr lang="en-US" smtClean="0"/>
               <a:t>Second level</a:t>
             </a:r>
+            <a:endParaRPr lang="en-US" smtClean="0"/>
           </a:p>
           <a:p>
             <a:pPr lvl="2"/>
@@ -2521,6 +2532,7 @@
               <a:rPr lang="en-US" smtClean="0"/>
               <a:t>Third level</a:t>
             </a:r>
+            <a:endParaRPr lang="en-US" smtClean="0"/>
           </a:p>
           <a:p>
             <a:pPr lvl="3"/>
@@ -2528,6 +2540,7 @@
               <a:rPr lang="en-US" smtClean="0"/>
               <a:t>Fourth level</a:t>
             </a:r>
+            <a:endParaRPr lang="en-US" smtClean="0"/>
           </a:p>
           <a:p>
             <a:pPr lvl="4"/>
@@ -2556,7 +2569,6 @@
           <a:p>
             <a:fld id="{5BCAD085-E8A6-8845-BD4E-CB4CCA059FC4}" type="datetimeFigureOut">
               <a:rPr lang="en-US" smtClean="0"/>
-              <a:t>1/27/13</a:t>
             </a:fld>
             <a:endParaRPr lang="en-US"/>
           </a:p>
@@ -2598,18 +2610,12 @@
           <a:p>
             <a:fld id="{C1FF6DA9-008F-8B48-92A6-B652298478BF}" type="slidenum">
               <a:rPr lang="en-US" smtClean="0"/>
-              <a:t>‹#›</a:t>
             </a:fld>
             <a:endParaRPr lang="en-US"/>
           </a:p>
         </p:txBody>
       </p:sp>
     </p:spTree>
-    <p:extLst>
-      <p:ext uri="{BB962C8B-B14F-4D97-AF65-F5344CB8AC3E}">
-        <p14:creationId xmlns:p14="http://schemas.microsoft.com/office/powerpoint/2010/main" val="2910927964"/>
-      </p:ext>
-    </p:extLst>
   </p:cSld>
   <p:clrMapOvr>
     <a:masterClrMapping/>
@@ -2687,6 +2693,7 @@
               <a:rPr lang="en-US" smtClean="0"/>
               <a:t>Click to edit Master text styles</a:t>
             </a:r>
+            <a:endParaRPr lang="en-US" smtClean="0"/>
           </a:p>
           <a:p>
             <a:pPr lvl="1"/>
@@ -2694,6 +2701,7 @@
               <a:rPr lang="en-US" smtClean="0"/>
               <a:t>Second level</a:t>
             </a:r>
+            <a:endParaRPr lang="en-US" smtClean="0"/>
           </a:p>
           <a:p>
             <a:pPr lvl="2"/>
@@ -2701,6 +2709,7 @@
               <a:rPr lang="en-US" smtClean="0"/>
               <a:t>Third level</a:t>
             </a:r>
+            <a:endParaRPr lang="en-US" smtClean="0"/>
           </a:p>
           <a:p>
             <a:pPr lvl="3"/>
@@ -2708,6 +2717,7 @@
               <a:rPr lang="en-US" smtClean="0"/>
               <a:t>Fourth level</a:t>
             </a:r>
+            <a:endParaRPr lang="en-US" smtClean="0"/>
           </a:p>
           <a:p>
             <a:pPr lvl="4"/>
@@ -2736,7 +2746,6 @@
           <a:p>
             <a:fld id="{5BCAD085-E8A6-8845-BD4E-CB4CCA059FC4}" type="datetimeFigureOut">
               <a:rPr lang="en-US" smtClean="0"/>
-              <a:t>1/27/13</a:t>
             </a:fld>
             <a:endParaRPr lang="en-US"/>
           </a:p>
@@ -2778,18 +2787,12 @@
           <a:p>
             <a:fld id="{C1FF6DA9-008F-8B48-92A6-B652298478BF}" type="slidenum">
               <a:rPr lang="en-US" smtClean="0"/>
-              <a:t>‹#›</a:t>
             </a:fld>
             <a:endParaRPr lang="en-US"/>
           </a:p>
         </p:txBody>
       </p:sp>
     </p:spTree>
-    <p:extLst>
-      <p:ext uri="{BB962C8B-B14F-4D97-AF65-F5344CB8AC3E}">
-        <p14:creationId xmlns:p14="http://schemas.microsoft.com/office/powerpoint/2010/main" val="3612223792"/>
-      </p:ext>
-    </p:extLst>
   </p:cSld>
   <p:clrMapOvr>
     <a:masterClrMapping/>
@@ -2857,6 +2860,7 @@
               <a:rPr lang="en-US" smtClean="0"/>
               <a:t>Click to edit Master text styles</a:t>
             </a:r>
+            <a:endParaRPr lang="en-US" smtClean="0"/>
           </a:p>
           <a:p>
             <a:pPr lvl="1"/>
@@ -2864,6 +2868,7 @@
               <a:rPr lang="en-US" smtClean="0"/>
               <a:t>Second level</a:t>
             </a:r>
+            <a:endParaRPr lang="en-US" smtClean="0"/>
           </a:p>
           <a:p>
             <a:pPr lvl="2"/>
@@ -2871,6 +2876,7 @@
               <a:rPr lang="en-US" smtClean="0"/>
               <a:t>Third level</a:t>
             </a:r>
+            <a:endParaRPr lang="en-US" smtClean="0"/>
           </a:p>
           <a:p>
             <a:pPr lvl="3"/>
@@ -2878,6 +2884,7 @@
               <a:rPr lang="en-US" smtClean="0"/>
               <a:t>Fourth level</a:t>
             </a:r>
+            <a:endParaRPr lang="en-US" smtClean="0"/>
           </a:p>
           <a:p>
             <a:pPr lvl="4"/>
@@ -2906,7 +2913,6 @@
           <a:p>
             <a:fld id="{5BCAD085-E8A6-8845-BD4E-CB4CCA059FC4}" type="datetimeFigureOut">
               <a:rPr lang="en-US" smtClean="0"/>
-              <a:t>1/27/13</a:t>
             </a:fld>
             <a:endParaRPr lang="en-US"/>
           </a:p>
@@ -2948,18 +2954,12 @@
           <a:p>
             <a:fld id="{C1FF6DA9-008F-8B48-92A6-B652298478BF}" type="slidenum">
               <a:rPr lang="en-US" smtClean="0"/>
-              <a:t>‹#›</a:t>
             </a:fld>
             <a:endParaRPr lang="en-US"/>
           </a:p>
         </p:txBody>
       </p:sp>
     </p:spTree>
-    <p:extLst>
-      <p:ext uri="{BB962C8B-B14F-4D97-AF65-F5344CB8AC3E}">
-        <p14:creationId xmlns:p14="http://schemas.microsoft.com/office/powerpoint/2010/main" val="2614314258"/>
-      </p:ext>
-    </p:extLst>
   </p:cSld>
   <p:clrMapOvr>
     <a:masterClrMapping/>
@@ -3132,6 +3132,7 @@
               <a:rPr lang="en-US" smtClean="0"/>
               <a:t>Click to edit Master text styles</a:t>
             </a:r>
+            <a:endParaRPr lang="en-US" smtClean="0"/>
           </a:p>
         </p:txBody>
       </p:sp>
@@ -3152,7 +3153,6 @@
           <a:p>
             <a:fld id="{5BCAD085-E8A6-8845-BD4E-CB4CCA059FC4}" type="datetimeFigureOut">
               <a:rPr lang="en-US" smtClean="0"/>
-              <a:t>1/27/13</a:t>
             </a:fld>
             <a:endParaRPr lang="en-US"/>
           </a:p>
@@ -3194,18 +3194,12 @@
           <a:p>
             <a:fld id="{C1FF6DA9-008F-8B48-92A6-B652298478BF}" type="slidenum">
               <a:rPr lang="en-US" smtClean="0"/>
-              <a:t>‹#›</a:t>
             </a:fld>
             <a:endParaRPr lang="en-US"/>
           </a:p>
         </p:txBody>
       </p:sp>
     </p:spTree>
-    <p:extLst>
-      <p:ext uri="{BB962C8B-B14F-4D97-AF65-F5344CB8AC3E}">
-        <p14:creationId xmlns:p14="http://schemas.microsoft.com/office/powerpoint/2010/main" val="960648375"/>
-      </p:ext>
-    </p:extLst>
   </p:cSld>
   <p:clrMapOvr>
     <a:masterClrMapping/>
@@ -3306,6 +3300,7 @@
               <a:rPr lang="en-US" smtClean="0"/>
               <a:t>Click to edit Master text styles</a:t>
             </a:r>
+            <a:endParaRPr lang="en-US" smtClean="0"/>
           </a:p>
           <a:p>
             <a:pPr lvl="1"/>
@@ -3313,6 +3308,7 @@
               <a:rPr lang="en-US" smtClean="0"/>
               <a:t>Second level</a:t>
             </a:r>
+            <a:endParaRPr lang="en-US" smtClean="0"/>
           </a:p>
           <a:p>
             <a:pPr lvl="2"/>
@@ -3320,6 +3316,7 @@
               <a:rPr lang="en-US" smtClean="0"/>
               <a:t>Third level</a:t>
             </a:r>
+            <a:endParaRPr lang="en-US" smtClean="0"/>
           </a:p>
           <a:p>
             <a:pPr lvl="3"/>
@@ -3327,6 +3324,7 @@
               <a:rPr lang="en-US" smtClean="0"/>
               <a:t>Fourth level</a:t>
             </a:r>
+            <a:endParaRPr lang="en-US" smtClean="0"/>
           </a:p>
           <a:p>
             <a:pPr lvl="4"/>
@@ -3391,6 +3389,7 @@
               <a:rPr lang="en-US" smtClean="0"/>
               <a:t>Click to edit Master text styles</a:t>
             </a:r>
+            <a:endParaRPr lang="en-US" smtClean="0"/>
           </a:p>
           <a:p>
             <a:pPr lvl="1"/>
@@ -3398,6 +3397,7 @@
               <a:rPr lang="en-US" smtClean="0"/>
               <a:t>Second level</a:t>
             </a:r>
+            <a:endParaRPr lang="en-US" smtClean="0"/>
           </a:p>
           <a:p>
             <a:pPr lvl="2"/>
@@ -3405,6 +3405,7 @@
               <a:rPr lang="en-US" smtClean="0"/>
               <a:t>Third level</a:t>
             </a:r>
+            <a:endParaRPr lang="en-US" smtClean="0"/>
           </a:p>
           <a:p>
             <a:pPr lvl="3"/>
@@ -3412,6 +3413,7 @@
               <a:rPr lang="en-US" smtClean="0"/>
               <a:t>Fourth level</a:t>
             </a:r>
+            <a:endParaRPr lang="en-US" smtClean="0"/>
           </a:p>
           <a:p>
             <a:pPr lvl="4"/>
@@ -3440,7 +3442,6 @@
           <a:p>
             <a:fld id="{5BCAD085-E8A6-8845-BD4E-CB4CCA059FC4}" type="datetimeFigureOut">
               <a:rPr lang="en-US" smtClean="0"/>
-              <a:t>1/27/13</a:t>
             </a:fld>
             <a:endParaRPr lang="en-US"/>
           </a:p>
@@ -3482,18 +3483,12 @@
           <a:p>
             <a:fld id="{C1FF6DA9-008F-8B48-92A6-B652298478BF}" type="slidenum">
               <a:rPr lang="en-US" smtClean="0"/>
-              <a:t>‹#›</a:t>
             </a:fld>
             <a:endParaRPr lang="en-US"/>
           </a:p>
         </p:txBody>
       </p:sp>
     </p:spTree>
-    <p:extLst>
-      <p:ext uri="{BB962C8B-B14F-4D97-AF65-F5344CB8AC3E}">
-        <p14:creationId xmlns:p14="http://schemas.microsoft.com/office/powerpoint/2010/main" val="2782244947"/>
-      </p:ext>
-    </p:extLst>
   </p:cSld>
   <p:clrMapOvr>
     <a:masterClrMapping/>
@@ -3607,6 +3602,7 @@
               <a:rPr lang="en-US" smtClean="0"/>
               <a:t>Click to edit Master text styles</a:t>
             </a:r>
+            <a:endParaRPr lang="en-US" smtClean="0"/>
           </a:p>
         </p:txBody>
       </p:sp>
@@ -3663,6 +3659,7 @@
               <a:rPr lang="en-US" smtClean="0"/>
               <a:t>Click to edit Master text styles</a:t>
             </a:r>
+            <a:endParaRPr lang="en-US" smtClean="0"/>
           </a:p>
           <a:p>
             <a:pPr lvl="1"/>
@@ -3670,6 +3667,7 @@
               <a:rPr lang="en-US" smtClean="0"/>
               <a:t>Second level</a:t>
             </a:r>
+            <a:endParaRPr lang="en-US" smtClean="0"/>
           </a:p>
           <a:p>
             <a:pPr lvl="2"/>
@@ -3677,6 +3675,7 @@
               <a:rPr lang="en-US" smtClean="0"/>
               <a:t>Third level</a:t>
             </a:r>
+            <a:endParaRPr lang="en-US" smtClean="0"/>
           </a:p>
           <a:p>
             <a:pPr lvl="3"/>
@@ -3684,6 +3683,7 @@
               <a:rPr lang="en-US" smtClean="0"/>
               <a:t>Fourth level</a:t>
             </a:r>
+            <a:endParaRPr lang="en-US" smtClean="0"/>
           </a:p>
           <a:p>
             <a:pPr lvl="4"/>
@@ -3757,6 +3757,7 @@
               <a:rPr lang="en-US" smtClean="0"/>
               <a:t>Click to edit Master text styles</a:t>
             </a:r>
+            <a:endParaRPr lang="en-US" smtClean="0"/>
           </a:p>
         </p:txBody>
       </p:sp>
@@ -3813,6 +3814,7 @@
               <a:rPr lang="en-US" smtClean="0"/>
               <a:t>Click to edit Master text styles</a:t>
             </a:r>
+            <a:endParaRPr lang="en-US" smtClean="0"/>
           </a:p>
           <a:p>
             <a:pPr lvl="1"/>
@@ -3820,6 +3822,7 @@
               <a:rPr lang="en-US" smtClean="0"/>
               <a:t>Second level</a:t>
             </a:r>
+            <a:endParaRPr lang="en-US" smtClean="0"/>
           </a:p>
           <a:p>
             <a:pPr lvl="2"/>
@@ -3827,6 +3830,7 @@
               <a:rPr lang="en-US" smtClean="0"/>
               <a:t>Third level</a:t>
             </a:r>
+            <a:endParaRPr lang="en-US" smtClean="0"/>
           </a:p>
           <a:p>
             <a:pPr lvl="3"/>
@@ -3834,6 +3838,7 @@
               <a:rPr lang="en-US" smtClean="0"/>
               <a:t>Fourth level</a:t>
             </a:r>
+            <a:endParaRPr lang="en-US" smtClean="0"/>
           </a:p>
           <a:p>
             <a:pPr lvl="4"/>
@@ -3862,7 +3867,6 @@
           <a:p>
             <a:fld id="{5BCAD085-E8A6-8845-BD4E-CB4CCA059FC4}" type="datetimeFigureOut">
               <a:rPr lang="en-US" smtClean="0"/>
-              <a:t>1/27/13</a:t>
             </a:fld>
             <a:endParaRPr lang="en-US"/>
           </a:p>
@@ -3904,18 +3908,12 @@
           <a:p>
             <a:fld id="{C1FF6DA9-008F-8B48-92A6-B652298478BF}" type="slidenum">
               <a:rPr lang="en-US" smtClean="0"/>
-              <a:t>‹#›</a:t>
             </a:fld>
             <a:endParaRPr lang="en-US"/>
           </a:p>
         </p:txBody>
       </p:sp>
     </p:spTree>
-    <p:extLst>
-      <p:ext uri="{BB962C8B-B14F-4D97-AF65-F5344CB8AC3E}">
-        <p14:creationId xmlns:p14="http://schemas.microsoft.com/office/powerpoint/2010/main" val="990158736"/>
-      </p:ext>
-    </p:extLst>
   </p:cSld>
   <p:clrMapOvr>
     <a:masterClrMapping/>
@@ -3980,7 +3978,6 @@
           <a:p>
             <a:fld id="{5BCAD085-E8A6-8845-BD4E-CB4CCA059FC4}" type="datetimeFigureOut">
               <a:rPr lang="en-US" smtClean="0"/>
-              <a:t>1/27/13</a:t>
             </a:fld>
             <a:endParaRPr lang="en-US"/>
           </a:p>
@@ -4022,18 +4019,12 @@
           <a:p>
             <a:fld id="{C1FF6DA9-008F-8B48-92A6-B652298478BF}" type="slidenum">
               <a:rPr lang="en-US" smtClean="0"/>
-              <a:t>‹#›</a:t>
             </a:fld>
             <a:endParaRPr lang="en-US"/>
           </a:p>
         </p:txBody>
       </p:sp>
     </p:spTree>
-    <p:extLst>
-      <p:ext uri="{BB962C8B-B14F-4D97-AF65-F5344CB8AC3E}">
-        <p14:creationId xmlns:p14="http://schemas.microsoft.com/office/powerpoint/2010/main" val="727027711"/>
-      </p:ext>
-    </p:extLst>
   </p:cSld>
   <p:clrMapOvr>
     <a:masterClrMapping/>
@@ -4075,7 +4066,6 @@
           <a:p>
             <a:fld id="{5BCAD085-E8A6-8845-BD4E-CB4CCA059FC4}" type="datetimeFigureOut">
               <a:rPr lang="en-US" smtClean="0"/>
-              <a:t>1/27/13</a:t>
             </a:fld>
             <a:endParaRPr lang="en-US"/>
           </a:p>
@@ -4117,18 +4107,12 @@
           <a:p>
             <a:fld id="{C1FF6DA9-008F-8B48-92A6-B652298478BF}" type="slidenum">
               <a:rPr lang="en-US" smtClean="0"/>
-              <a:t>‹#›</a:t>
             </a:fld>
             <a:endParaRPr lang="en-US"/>
           </a:p>
         </p:txBody>
       </p:sp>
     </p:spTree>
-    <p:extLst>
-      <p:ext uri="{BB962C8B-B14F-4D97-AF65-F5344CB8AC3E}">
-        <p14:creationId xmlns:p14="http://schemas.microsoft.com/office/powerpoint/2010/main" val="1212999818"/>
-      </p:ext>
-    </p:extLst>
   </p:cSld>
   <p:clrMapOvr>
     <a:masterClrMapping/>
@@ -4238,6 +4222,7 @@
               <a:rPr lang="en-US" smtClean="0"/>
               <a:t>Click to edit Master text styles</a:t>
             </a:r>
+            <a:endParaRPr lang="en-US" smtClean="0"/>
           </a:p>
           <a:p>
             <a:pPr lvl="1"/>
@@ -4245,6 +4230,7 @@
               <a:rPr lang="en-US" smtClean="0"/>
               <a:t>Second level</a:t>
             </a:r>
+            <a:endParaRPr lang="en-US" smtClean="0"/>
           </a:p>
           <a:p>
             <a:pPr lvl="2"/>
@@ -4252,6 +4238,7 @@
               <a:rPr lang="en-US" smtClean="0"/>
               <a:t>Third level</a:t>
             </a:r>
+            <a:endParaRPr lang="en-US" smtClean="0"/>
           </a:p>
           <a:p>
             <a:pPr lvl="3"/>
@@ -4259,6 +4246,7 @@
               <a:rPr lang="en-US" smtClean="0"/>
               <a:t>Fourth level</a:t>
             </a:r>
+            <a:endParaRPr lang="en-US" smtClean="0"/>
           </a:p>
           <a:p>
             <a:pPr lvl="4"/>
@@ -4332,6 +4320,7 @@
               <a:rPr lang="en-US" smtClean="0"/>
               <a:t>Click to edit Master text styles</a:t>
             </a:r>
+            <a:endParaRPr lang="en-US" smtClean="0"/>
           </a:p>
         </p:txBody>
       </p:sp>
@@ -4352,7 +4341,6 @@
           <a:p>
             <a:fld id="{5BCAD085-E8A6-8845-BD4E-CB4CCA059FC4}" type="datetimeFigureOut">
               <a:rPr lang="en-US" smtClean="0"/>
-              <a:t>1/27/13</a:t>
             </a:fld>
             <a:endParaRPr lang="en-US"/>
           </a:p>
@@ -4394,18 +4382,12 @@
           <a:p>
             <a:fld id="{C1FF6DA9-008F-8B48-92A6-B652298478BF}" type="slidenum">
               <a:rPr lang="en-US" smtClean="0"/>
-              <a:t>‹#›</a:t>
             </a:fld>
             <a:endParaRPr lang="en-US"/>
           </a:p>
         </p:txBody>
       </p:sp>
     </p:spTree>
-    <p:extLst>
-      <p:ext uri="{BB962C8B-B14F-4D97-AF65-F5344CB8AC3E}">
-        <p14:creationId xmlns:p14="http://schemas.microsoft.com/office/powerpoint/2010/main" val="1840726560"/>
-      </p:ext>
-    </p:extLst>
   </p:cSld>
   <p:clrMapOvr>
     <a:masterClrMapping/>
@@ -4585,6 +4567,7 @@
               <a:rPr lang="en-US" smtClean="0"/>
               <a:t>Click to edit Master text styles</a:t>
             </a:r>
+            <a:endParaRPr lang="en-US" smtClean="0"/>
           </a:p>
         </p:txBody>
       </p:sp>
@@ -4605,7 +4588,6 @@
           <a:p>
             <a:fld id="{5BCAD085-E8A6-8845-BD4E-CB4CCA059FC4}" type="datetimeFigureOut">
               <a:rPr lang="en-US" smtClean="0"/>
-              <a:t>1/27/13</a:t>
             </a:fld>
             <a:endParaRPr lang="en-US"/>
           </a:p>
@@ -4647,18 +4629,12 @@
           <a:p>
             <a:fld id="{C1FF6DA9-008F-8B48-92A6-B652298478BF}" type="slidenum">
               <a:rPr lang="en-US" smtClean="0"/>
-              <a:t>‹#›</a:t>
             </a:fld>
             <a:endParaRPr lang="en-US"/>
           </a:p>
         </p:txBody>
       </p:sp>
     </p:spTree>
-    <p:extLst>
-      <p:ext uri="{BB962C8B-B14F-4D97-AF65-F5344CB8AC3E}">
-        <p14:creationId xmlns:p14="http://schemas.microsoft.com/office/powerpoint/2010/main" val="3889236939"/>
-      </p:ext>
-    </p:extLst>
   </p:cSld>
   <p:clrMapOvr>
     <a:masterClrMapping/>
@@ -4751,6 +4727,7 @@
               <a:rPr lang="en-US" smtClean="0"/>
               <a:t>Click to edit Master text styles</a:t>
             </a:r>
+            <a:endParaRPr lang="en-US" smtClean="0"/>
           </a:p>
           <a:p>
             <a:pPr lvl="1"/>
@@ -4758,6 +4735,7 @@
               <a:rPr lang="en-US" smtClean="0"/>
               <a:t>Second level</a:t>
             </a:r>
+            <a:endParaRPr lang="en-US" smtClean="0"/>
           </a:p>
           <a:p>
             <a:pPr lvl="2"/>
@@ -4765,6 +4743,7 @@
               <a:rPr lang="en-US" smtClean="0"/>
               <a:t>Third level</a:t>
             </a:r>
+            <a:endParaRPr lang="en-US" smtClean="0"/>
           </a:p>
           <a:p>
             <a:pPr lvl="3"/>
@@ -4772,6 +4751,7 @@
               <a:rPr lang="en-US" smtClean="0"/>
               <a:t>Fourth level</a:t>
             </a:r>
+            <a:endParaRPr lang="en-US" smtClean="0"/>
           </a:p>
           <a:p>
             <a:pPr lvl="4"/>
@@ -4818,7 +4798,6 @@
           <a:p>
             <a:fld id="{5BCAD085-E8A6-8845-BD4E-CB4CCA059FC4}" type="datetimeFigureOut">
               <a:rPr lang="en-US" smtClean="0"/>
-              <a:t>1/27/13</a:t>
             </a:fld>
             <a:endParaRPr lang="en-US"/>
           </a:p>
@@ -4896,18 +4875,12 @@
           <a:p>
             <a:fld id="{C1FF6DA9-008F-8B48-92A6-B652298478BF}" type="slidenum">
               <a:rPr lang="en-US" smtClean="0"/>
-              <a:t>‹#›</a:t>
             </a:fld>
             <a:endParaRPr lang="en-US"/>
           </a:p>
         </p:txBody>
       </p:sp>
     </p:spTree>
-    <p:extLst>
-      <p:ext uri="{BB962C8B-B14F-4D97-AF65-F5344CB8AC3E}">
-        <p14:creationId xmlns:p14="http://schemas.microsoft.com/office/powerpoint/2010/main" val="2209977519"/>
-      </p:ext>
-    </p:extLst>
   </p:cSld>
   <p:clrMap bg1="lt1" tx1="dk1" bg2="lt2" tx2="dk2" accent1="accent1" accent2="accent2" accent3="accent3" accent4="accent4" accent5="accent5" accent6="accent6" hlink="hlink" folHlink="folHlink"/>
   <p:sldLayoutIdLst>
@@ -4945,7 +4918,7 @@
         <a:spcBef>
           <a:spcPct val="20000"/>
         </a:spcBef>
-        <a:buFont typeface="Arial"/>
+        <a:buFont typeface="Arial" panose="020B0604020202020204"/>
         <a:buChar char="•"/>
         <a:defRPr sz="3200" kern="1200">
           <a:solidFill>
@@ -4960,7 +4933,7 @@
         <a:spcBef>
           <a:spcPct val="20000"/>
         </a:spcBef>
-        <a:buFont typeface="Arial"/>
+        <a:buFont typeface="Arial" panose="020B0604020202020204"/>
         <a:buChar char="–"/>
         <a:defRPr sz="2800" kern="1200">
           <a:solidFill>
@@ -4975,7 +4948,7 @@
         <a:spcBef>
           <a:spcPct val="20000"/>
         </a:spcBef>
-        <a:buFont typeface="Arial"/>
+        <a:buFont typeface="Arial" panose="020B0604020202020204"/>
         <a:buChar char="•"/>
         <a:defRPr sz="2400" kern="1200">
           <a:solidFill>
@@ -4990,7 +4963,7 @@
         <a:spcBef>
           <a:spcPct val="20000"/>
         </a:spcBef>
-        <a:buFont typeface="Arial"/>
+        <a:buFont typeface="Arial" panose="020B0604020202020204"/>
         <a:buChar char="–"/>
         <a:defRPr sz="2000" kern="1200">
           <a:solidFill>
@@ -5005,7 +4978,7 @@
         <a:spcBef>
           <a:spcPct val="20000"/>
         </a:spcBef>
-        <a:buFont typeface="Arial"/>
+        <a:buFont typeface="Arial" panose="020B0604020202020204"/>
         <a:buChar char="»"/>
         <a:defRPr sz="2000" kern="1200">
           <a:solidFill>
@@ -5020,7 +4993,7 @@
         <a:spcBef>
           <a:spcPct val="20000"/>
         </a:spcBef>
-        <a:buFont typeface="Arial"/>
+        <a:buFont typeface="Arial" panose="020B0604020202020204"/>
         <a:buChar char="•"/>
         <a:defRPr sz="2000" kern="1200">
           <a:solidFill>
@@ -5035,7 +5008,7 @@
         <a:spcBef>
           <a:spcPct val="20000"/>
         </a:spcBef>
-        <a:buFont typeface="Arial"/>
+        <a:buFont typeface="Arial" panose="020B0604020202020204"/>
         <a:buChar char="•"/>
         <a:defRPr sz="2000" kern="1200">
           <a:solidFill>
@@ -5050,7 +5023,7 @@
         <a:spcBef>
           <a:spcPct val="20000"/>
         </a:spcBef>
-        <a:buFont typeface="Arial"/>
+        <a:buFont typeface="Arial" panose="020B0604020202020204"/>
         <a:buChar char="•"/>
         <a:defRPr sz="2000" kern="1200">
           <a:solidFill>
@@ -5065,7 +5038,7 @@
         <a:spcBef>
           <a:spcPct val="20000"/>
         </a:spcBef>
-        <a:buFont typeface="Arial"/>
+        <a:buFont typeface="Arial" panose="020B0604020202020204"/>
         <a:buChar char="•"/>
         <a:defRPr sz="2000" kern="1200">
           <a:solidFill>
@@ -5177,7 +5150,7 @@
 </file>
 
 <file path=ppt/slides/slide1.xml><?xml version="1.0" encoding="utf-8"?>
-<p:sld xmlns:a="http://schemas.openxmlformats.org/drawingml/2006/main" xmlns:p="http://schemas.openxmlformats.org/presentationml/2006/main" xmlns:r="http://schemas.openxmlformats.org/officeDocument/2006/relationships">
+<p:sld xmlns:a="http://schemas.openxmlformats.org/drawingml/2006/main" xmlns:r="http://schemas.openxmlformats.org/officeDocument/2006/relationships" xmlns:p="http://schemas.openxmlformats.org/presentationml/2006/main">
   <p:cSld>
     <p:bg>
       <p:bgPr>
@@ -5255,7 +5228,7 @@
           <a:noFill/>
         </p:spPr>
         <p:txBody>
-          <a:bodyPr wrap="square" anchor="t" lIns="0" rIns="0" tIns="0" bIns="0">
+          <a:bodyPr wrap="square" lIns="0" tIns="0" rIns="0" bIns="0" anchor="t">
             <a:spAutoFit/>
           </a:bodyPr>
           <a:lstStyle/>
@@ -5270,12 +5243,20 @@
                 <a:solidFill>
                   <a:srgbClr val="F7F1EA"/>
                 </a:solidFill>
-                <a:latin typeface="Arial"/>
-                <a:ea typeface="Arial"/>
-                <a:cs typeface="Arial"/>
+                <a:latin typeface="Arial" panose="020B0604020202020204"/>
+                <a:ea typeface="Arial" panose="020B0604020202020204"/>
+                <a:cs typeface="Arial" panose="020B0604020202020204"/>
               </a:rPr>
               <a:t>AIpet · 丛雨</a:t>
             </a:r>
+            <a:endParaRPr sz="4400" b="1">
+              <a:solidFill>
+                <a:srgbClr val="F7F1EA"/>
+              </a:solidFill>
+              <a:latin typeface="Arial" panose="020B0604020202020204"/>
+              <a:ea typeface="Arial" panose="020B0604020202020204"/>
+              <a:cs typeface="Arial" panose="020B0604020202020204"/>
+            </a:endParaRPr>
           </a:p>
           <a:p>
             <a:pPr algn="l">
@@ -5288,12 +5269,20 @@
                 <a:solidFill>
                   <a:srgbClr val="C9A35F"/>
                 </a:solidFill>
-                <a:latin typeface="Arial"/>
-                <a:ea typeface="Arial"/>
-                <a:cs typeface="Arial"/>
+                <a:latin typeface="Arial" panose="020B0604020202020204"/>
+                <a:ea typeface="Arial" panose="020B0604020202020204"/>
+                <a:cs typeface="Arial" panose="020B0604020202020204"/>
               </a:rPr>
               <a:t>会长期陪伴的桌面智能体：有形象 · 会记事 · 能干活 · 还能上手机</a:t>
             </a:r>
+            <a:endParaRPr sz="1800" b="0">
+              <a:solidFill>
+                <a:srgbClr val="C9A35F"/>
+              </a:solidFill>
+              <a:latin typeface="Arial" panose="020B0604020202020204"/>
+              <a:ea typeface="Arial" panose="020B0604020202020204"/>
+              <a:cs typeface="Arial" panose="020B0604020202020204"/>
+            </a:endParaRPr>
           </a:p>
         </p:txBody>
       </p:sp>
@@ -5314,7 +5303,7 @@
           <a:noFill/>
         </p:spPr>
         <p:txBody>
-          <a:bodyPr wrap="square" anchor="t" lIns="0" rIns="0" tIns="0" bIns="0">
+          <a:bodyPr wrap="square" lIns="0" tIns="0" rIns="0" bIns="0" anchor="t">
             <a:spAutoFit/>
           </a:bodyPr>
           <a:lstStyle/>
@@ -5329,12 +5318,20 @@
                 <a:solidFill>
                   <a:srgbClr val="F7F1EA"/>
                 </a:solidFill>
-                <a:latin typeface="Arial"/>
-                <a:ea typeface="Arial"/>
-                <a:cs typeface="Arial"/>
+                <a:latin typeface="Arial" panose="020B0604020202020204"/>
+                <a:ea typeface="Arial" panose="020B0604020202020204"/>
+                <a:cs typeface="Arial" panose="020B0604020202020204"/>
               </a:rPr>
               <a:t>2026-10-14</a:t>
             </a:r>
+            <a:endParaRPr sz="1200" b="0">
+              <a:solidFill>
+                <a:srgbClr val="F7F1EA"/>
+              </a:solidFill>
+              <a:latin typeface="Arial" panose="020B0604020202020204"/>
+              <a:ea typeface="Arial" panose="020B0604020202020204"/>
+              <a:cs typeface="Arial" panose="020B0604020202020204"/>
+            </a:endParaRPr>
           </a:p>
         </p:txBody>
       </p:sp>
@@ -5347,7 +5344,7 @@
           <p:nvPr/>
         </p:nvPicPr>
         <p:blipFill>
-          <a:blip r:embed="rId3"/>
+          <a:blip r:embed="rId1"/>
           <a:stretch>
             <a:fillRect/>
           </a:stretch>
@@ -5371,7 +5368,7 @@
 </file>
 
 <file path=ppt/slides/slide10.xml><?xml version="1.0" encoding="utf-8"?>
-<p:sld xmlns:a="http://schemas.openxmlformats.org/drawingml/2006/main" xmlns:p="http://schemas.openxmlformats.org/presentationml/2006/main" xmlns:r="http://schemas.openxmlformats.org/officeDocument/2006/relationships">
+<p:sld xmlns:a="http://schemas.openxmlformats.org/drawingml/2006/main" xmlns:r="http://schemas.openxmlformats.org/officeDocument/2006/relationships" xmlns:p="http://schemas.openxmlformats.org/presentationml/2006/main">
   <p:cSld>
     <p:bg>
       <p:bgPr>
@@ -5405,7 +5402,7 @@
           <a:noFill/>
         </p:spPr>
         <p:txBody>
-          <a:bodyPr wrap="square" anchor="t" lIns="0" rIns="0" tIns="0" bIns="0">
+          <a:bodyPr wrap="square" lIns="0" tIns="0" rIns="0" bIns="0" anchor="t">
             <a:spAutoFit/>
           </a:bodyPr>
           <a:lstStyle/>
@@ -5420,12 +5417,20 @@
                 <a:solidFill>
                   <a:srgbClr val="3B2B26"/>
                 </a:solidFill>
-                <a:latin typeface="Arial"/>
-                <a:ea typeface="Arial"/>
-                <a:cs typeface="Arial"/>
+                <a:latin typeface="Arial" panose="020B0604020202020204"/>
+                <a:ea typeface="Arial" panose="020B0604020202020204"/>
+                <a:cs typeface="Arial" panose="020B0604020202020204"/>
               </a:rPr>
               <a:t>更广的同类：都在做「形象」，只有我们在做「关系」</a:t>
             </a:r>
+            <a:endParaRPr sz="3000" b="1">
+              <a:solidFill>
+                <a:srgbClr val="3B2B26"/>
+              </a:solidFill>
+              <a:latin typeface="Arial" panose="020B0604020202020204"/>
+              <a:ea typeface="Arial" panose="020B0604020202020204"/>
+              <a:cs typeface="Arial" panose="020B0604020202020204"/>
+            </a:endParaRPr>
           </a:p>
         </p:txBody>
       </p:sp>
@@ -5490,7 +5495,7 @@
           <a:noFill/>
         </p:spPr>
         <p:txBody>
-          <a:bodyPr wrap="square" anchor="t" lIns="0" rIns="0" tIns="0" bIns="0">
+          <a:bodyPr wrap="square" lIns="0" tIns="0" rIns="0" bIns="0" anchor="t">
             <a:spAutoFit/>
           </a:bodyPr>
           <a:lstStyle/>
@@ -5505,9 +5510,9 @@
                 <a:solidFill>
                   <a:srgbClr val="A03A35"/>
                 </a:solidFill>
-                <a:latin typeface="微软雅黑"/>
-                <a:ea typeface="微软雅黑"/>
-                <a:cs typeface="微软雅黑"/>
+                <a:latin typeface="微软雅黑" panose="020B0503020204020204" charset="-122"/>
+                <a:ea typeface="微软雅黑" panose="020B0503020204020204" charset="-122"/>
+                <a:cs typeface="微软雅黑" panose="020B0503020204020204" charset="-122"/>
               </a:rPr>
               <a:t>▪  </a:t>
             </a:r>
@@ -5516,9 +5521,9 @@
                 <a:solidFill>
                   <a:srgbClr val="3B2B26"/>
                 </a:solidFill>
-                <a:latin typeface="微软雅黑"/>
-                <a:ea typeface="微软雅黑"/>
-                <a:cs typeface="微软雅黑"/>
+                <a:latin typeface="微软雅黑" panose="020B0503020204020204" charset="-122"/>
+                <a:ea typeface="微软雅黑" panose="020B0503020204020204" charset="-122"/>
+                <a:cs typeface="微软雅黑" panose="020B0503020204020204" charset="-122"/>
               </a:rPr>
               <a:t>展示工具类</a:t>
             </a:r>
@@ -5527,12 +5532,20 @@
                 <a:solidFill>
                   <a:srgbClr val="6B5850"/>
                 </a:solidFill>
-                <a:latin typeface="微软雅黑"/>
-                <a:ea typeface="微软雅黑"/>
-                <a:cs typeface="微软雅黑"/>
+                <a:latin typeface="微软雅黑" panose="020B0503020204020204" charset="-122"/>
+                <a:ea typeface="微软雅黑" panose="020B0503020204020204" charset="-122"/>
+                <a:cs typeface="微软雅黑" panose="020B0503020204020204" charset="-122"/>
               </a:rPr>
               <a:t>  Live2DViewerEX（Steam ¥26）：跨平台 + 面捕 + 创意工坊，把模型放出来做到了天花板 —— 但它不聊、不记、不主动</a:t>
             </a:r>
+            <a:endParaRPr sz="1300" b="0">
+              <a:solidFill>
+                <a:srgbClr val="6B5850"/>
+              </a:solidFill>
+              <a:latin typeface="微软雅黑" panose="020B0503020204020204" charset="-122"/>
+              <a:ea typeface="微软雅黑" panose="020B0503020204020204" charset="-122"/>
+              <a:cs typeface="微软雅黑" panose="020B0503020204020204" charset="-122"/>
+            </a:endParaRPr>
           </a:p>
           <a:p>
             <a:pPr>
@@ -5545,9 +5558,9 @@
                 <a:solidFill>
                   <a:srgbClr val="A03A35"/>
                 </a:solidFill>
-                <a:latin typeface="微软雅黑"/>
-                <a:ea typeface="微软雅黑"/>
-                <a:cs typeface="微软雅黑"/>
+                <a:latin typeface="微软雅黑" panose="020B0503020204020204" charset="-122"/>
+                <a:ea typeface="微软雅黑" panose="020B0503020204020204" charset="-122"/>
+                <a:cs typeface="微软雅黑" panose="020B0503020204020204" charset="-122"/>
               </a:rPr>
               <a:t>▪  </a:t>
             </a:r>
@@ -5556,9 +5569,9 @@
                 <a:solidFill>
                   <a:srgbClr val="3B2B26"/>
                 </a:solidFill>
-                <a:latin typeface="微软雅黑"/>
-                <a:ea typeface="微软雅黑"/>
-                <a:cs typeface="微软雅黑"/>
+                <a:latin typeface="微软雅黑" panose="020B0503020204020204" charset="-122"/>
+                <a:ea typeface="微软雅黑" panose="020B0503020204020204" charset="-122"/>
+                <a:cs typeface="微软雅黑" panose="020B0503020204020204" charset="-122"/>
               </a:rPr>
               <a:t>养成 / 玩具类</a:t>
             </a:r>
@@ -5567,12 +5580,20 @@
                 <a:solidFill>
                   <a:srgbClr val="6B5850"/>
                 </a:solidFill>
-                <a:latin typeface="微软雅黑"/>
-                <a:ea typeface="微软雅黑"/>
-                <a:cs typeface="微软雅黑"/>
+                <a:latin typeface="微软雅黑" panose="020B0503020204020204" charset="-122"/>
+                <a:ea typeface="微软雅黑" panose="020B0503020204020204" charset="-122"/>
+                <a:cs typeface="微软雅黑" panose="020B0503020204020204" charset="-122"/>
               </a:rPr>
               <a:t>  Shimeji 系、BongoCat（C+SDL3，纯开源）、虚拟桌宠模拟器 VPet（开源 + Steam）—— 可爱、轻量，核心是动作与数值</a:t>
             </a:r>
+            <a:endParaRPr sz="1300" b="0">
+              <a:solidFill>
+                <a:srgbClr val="6B5850"/>
+              </a:solidFill>
+              <a:latin typeface="微软雅黑" panose="020B0503020204020204" charset="-122"/>
+              <a:ea typeface="微软雅黑" panose="020B0503020204020204" charset="-122"/>
+              <a:cs typeface="微软雅黑" panose="020B0503020204020204" charset="-122"/>
+            </a:endParaRPr>
           </a:p>
           <a:p>
             <a:pPr>
@@ -5585,9 +5606,9 @@
                 <a:solidFill>
                   <a:srgbClr val="A03A35"/>
                 </a:solidFill>
-                <a:latin typeface="微软雅黑"/>
-                <a:ea typeface="微软雅黑"/>
-                <a:cs typeface="微软雅黑"/>
+                <a:latin typeface="微软雅黑" panose="020B0503020204020204" charset="-122"/>
+                <a:ea typeface="微软雅黑" panose="020B0503020204020204" charset="-122"/>
+                <a:cs typeface="微软雅黑" panose="020B0503020204020204" charset="-122"/>
               </a:rPr>
               <a:t>▪  </a:t>
             </a:r>
@@ -5596,9 +5617,9 @@
                 <a:solidFill>
                   <a:srgbClr val="3B2B26"/>
                 </a:solidFill>
-                <a:latin typeface="微软雅黑"/>
-                <a:ea typeface="微软雅黑"/>
-                <a:cs typeface="微软雅黑"/>
+                <a:latin typeface="微软雅黑" panose="020B0503020204020204" charset="-122"/>
+                <a:ea typeface="微软雅黑" panose="020B0503020204020204" charset="-122"/>
+                <a:cs typeface="微软雅黑" panose="020B0503020204020204" charset="-122"/>
               </a:rPr>
               <a:t>大厂 / 厂商吉祥物</a:t>
             </a:r>
@@ -5607,12 +5628,20 @@
                 <a:solidFill>
                   <a:srgbClr val="6B5850"/>
                 </a:solidFill>
-                <a:latin typeface="微软雅黑"/>
-                <a:ea typeface="微软雅黑"/>
-                <a:cs typeface="微软雅黑"/>
+                <a:latin typeface="微软雅黑" panose="020B0503020204020204" charset="-122"/>
+                <a:ea typeface="微软雅黑" panose="020B0503020204020204" charset="-122"/>
+                <a:cs typeface="微软雅黑" panose="020B0503020204020204" charset="-122"/>
               </a:rPr>
               <a:t>  人工桌面（yoyo 鹿鸣，3D 看板娘）、天选桌宠（华硕随机器）—— 形象质量高，但是内容型、不是会记事的个人角色</a:t>
             </a:r>
+            <a:endParaRPr sz="1300" b="0">
+              <a:solidFill>
+                <a:srgbClr val="6B5850"/>
+              </a:solidFill>
+              <a:latin typeface="微软雅黑" panose="020B0503020204020204" charset="-122"/>
+              <a:ea typeface="微软雅黑" panose="020B0503020204020204" charset="-122"/>
+              <a:cs typeface="微软雅黑" panose="020B0503020204020204" charset="-122"/>
+            </a:endParaRPr>
           </a:p>
           <a:p>
             <a:pPr>
@@ -5625,9 +5654,9 @@
                 <a:solidFill>
                   <a:srgbClr val="A03A35"/>
                 </a:solidFill>
-                <a:latin typeface="微软雅黑"/>
-                <a:ea typeface="微软雅黑"/>
-                <a:cs typeface="微软雅黑"/>
+                <a:latin typeface="微软雅黑" panose="020B0503020204020204" charset="-122"/>
+                <a:ea typeface="微软雅黑" panose="020B0503020204020204" charset="-122"/>
+                <a:cs typeface="微软雅黑" panose="020B0503020204020204" charset="-122"/>
               </a:rPr>
               <a:t>▪  </a:t>
             </a:r>
@@ -5636,9 +5665,9 @@
                 <a:solidFill>
                   <a:srgbClr val="3B2B26"/>
                 </a:solidFill>
-                <a:latin typeface="微软雅黑"/>
-                <a:ea typeface="微软雅黑"/>
-                <a:cs typeface="微软雅黑"/>
+                <a:latin typeface="微软雅黑" panose="020B0503020204020204" charset="-122"/>
+                <a:ea typeface="微软雅黑" panose="020B0503020204020204" charset="-122"/>
+                <a:cs typeface="微软雅黑" panose="020B0503020204020204" charset="-122"/>
               </a:rPr>
               <a:t>手机端助手</a:t>
             </a:r>
@@ -5647,12 +5676,20 @@
                 <a:solidFill>
                   <a:srgbClr val="6B5850"/>
                 </a:solidFill>
-                <a:latin typeface="微软雅黑"/>
-                <a:ea typeface="微软雅黑"/>
-                <a:cs typeface="微软雅黑"/>
+                <a:latin typeface="微软雅黑" panose="020B0503020204020204" charset="-122"/>
+                <a:ea typeface="微软雅黑" panose="020B0503020204020204" charset="-122"/>
+                <a:cs typeface="微软雅黑" panose="020B0503020204020204" charset="-122"/>
               </a:rPr>
               <a:t>  兽耳助手：助手向 + 角色形象（记忆与主动性待核实，不替它下结论）</a:t>
             </a:r>
+            <a:endParaRPr sz="1300" b="0">
+              <a:solidFill>
+                <a:srgbClr val="6B5850"/>
+              </a:solidFill>
+              <a:latin typeface="微软雅黑" panose="020B0503020204020204" charset="-122"/>
+              <a:ea typeface="微软雅黑" panose="020B0503020204020204" charset="-122"/>
+              <a:cs typeface="微软雅黑" panose="020B0503020204020204" charset="-122"/>
+            </a:endParaRPr>
           </a:p>
           <a:p>
             <a:pPr>
@@ -5665,9 +5702,9 @@
                 <a:solidFill>
                   <a:srgbClr val="A03A35"/>
                 </a:solidFill>
-                <a:latin typeface="微软雅黑"/>
-                <a:ea typeface="微软雅黑"/>
-                <a:cs typeface="微软雅黑"/>
+                <a:latin typeface="微软雅黑" panose="020B0503020204020204" charset="-122"/>
+                <a:ea typeface="微软雅黑" panose="020B0503020204020204" charset="-122"/>
+                <a:cs typeface="微软雅黑" panose="020B0503020204020204" charset="-122"/>
               </a:rPr>
               <a:t>▪  </a:t>
             </a:r>
@@ -5676,9 +5713,9 @@
                 <a:solidFill>
                   <a:srgbClr val="3B2B26"/>
                 </a:solidFill>
-                <a:latin typeface="微软雅黑"/>
-                <a:ea typeface="微软雅黑"/>
-                <a:cs typeface="微软雅黑"/>
+                <a:latin typeface="微软雅黑" panose="020B0503020204020204" charset="-122"/>
+                <a:ea typeface="微软雅黑" panose="020B0503020204020204" charset="-122"/>
+                <a:cs typeface="微软雅黑" panose="020B0503020204020204" charset="-122"/>
               </a:rPr>
               <a:t>共同点</a:t>
             </a:r>
@@ -5687,12 +5724,20 @@
                 <a:solidFill>
                   <a:srgbClr val="6B5850"/>
                 </a:solidFill>
-                <a:latin typeface="微软雅黑"/>
-                <a:ea typeface="微软雅黑"/>
-                <a:cs typeface="微软雅黑"/>
+                <a:latin typeface="微软雅黑" panose="020B0503020204020204" charset="-122"/>
+                <a:ea typeface="微软雅黑" panose="020B0503020204020204" charset="-122"/>
+                <a:cs typeface="微软雅黑" panose="020B0503020204020204" charset="-122"/>
               </a:rPr>
               <a:t>  这七类都停在「看得见」：有形象、有动作、有养成 —— 没有一类把「长期记忆 + 主动开口」当成核心</a:t>
             </a:r>
+            <a:endParaRPr sz="1300" b="0">
+              <a:solidFill>
+                <a:srgbClr val="6B5850"/>
+              </a:solidFill>
+              <a:latin typeface="微软雅黑" panose="020B0503020204020204" charset="-122"/>
+              <a:ea typeface="微软雅黑" panose="020B0503020204020204" charset="-122"/>
+              <a:cs typeface="微软雅黑" panose="020B0503020204020204" charset="-122"/>
+            </a:endParaRPr>
           </a:p>
           <a:p>
             <a:pPr>
@@ -5705,9 +5750,9 @@
                 <a:solidFill>
                   <a:srgbClr val="A03A35"/>
                 </a:solidFill>
-                <a:latin typeface="微软雅黑"/>
-                <a:ea typeface="微软雅黑"/>
-                <a:cs typeface="微软雅黑"/>
+                <a:latin typeface="微软雅黑" panose="020B0503020204020204" charset="-122"/>
+                <a:ea typeface="微软雅黑" panose="020B0503020204020204" charset="-122"/>
+                <a:cs typeface="微软雅黑" panose="020B0503020204020204" charset="-122"/>
               </a:rPr>
               <a:t>▪  </a:t>
             </a:r>
@@ -5716,9 +5761,9 @@
                 <a:solidFill>
                   <a:srgbClr val="3B2B26"/>
                 </a:solidFill>
-                <a:latin typeface="微软雅黑"/>
-                <a:ea typeface="微软雅黑"/>
-                <a:cs typeface="微软雅黑"/>
+                <a:latin typeface="微软雅黑" panose="020B0503020204020204" charset="-122"/>
+                <a:ea typeface="微软雅黑" panose="020B0503020204020204" charset="-122"/>
+                <a:cs typeface="微软雅黑" panose="020B0503020204020204" charset="-122"/>
               </a:rPr>
               <a:t>所以我们的位置</a:t>
             </a:r>
@@ -5727,12 +5772,20 @@
                 <a:solidFill>
                   <a:srgbClr val="6B5850"/>
                 </a:solidFill>
-                <a:latin typeface="微软雅黑"/>
-                <a:ea typeface="微软雅黑"/>
-                <a:cs typeface="微软雅黑"/>
+                <a:latin typeface="微软雅黑" panose="020B0503020204020204" charset="-122"/>
+                <a:ea typeface="微软雅黑" panose="020B0503020204020204" charset="-122"/>
+                <a:cs typeface="微软雅黑" panose="020B0503020204020204" charset="-122"/>
               </a:rPr>
               <a:t>  形象是入口，关系才是留存；我们做的是她记得你、也会主动找你</a:t>
             </a:r>
+            <a:endParaRPr sz="1300" b="0">
+              <a:solidFill>
+                <a:srgbClr val="6B5850"/>
+              </a:solidFill>
+              <a:latin typeface="微软雅黑" panose="020B0503020204020204" charset="-122"/>
+              <a:ea typeface="微软雅黑" panose="020B0503020204020204" charset="-122"/>
+              <a:cs typeface="微软雅黑" panose="020B0503020204020204" charset="-122"/>
+            </a:endParaRPr>
           </a:p>
         </p:txBody>
       </p:sp>
@@ -5753,7 +5806,7 @@
           <a:noFill/>
         </p:spPr>
         <p:txBody>
-          <a:bodyPr wrap="square" anchor="t" lIns="0" rIns="0" tIns="0" bIns="0">
+          <a:bodyPr wrap="square" lIns="0" tIns="0" rIns="0" bIns="0" anchor="t">
             <a:spAutoFit/>
           </a:bodyPr>
           <a:lstStyle/>
@@ -5768,12 +5821,20 @@
                 <a:solidFill>
                   <a:srgbClr val="6B5850"/>
                 </a:solidFill>
-                <a:latin typeface="Arial"/>
-                <a:ea typeface="Arial"/>
-                <a:cs typeface="Arial"/>
+                <a:latin typeface="Arial" panose="020B0604020202020204"/>
+                <a:ea typeface="Arial" panose="020B0604020202020204"/>
+                <a:cs typeface="Arial" panose="020B0604020202020204"/>
               </a:rPr>
               <a:t>10</a:t>
             </a:r>
+            <a:endParaRPr sz="1000" b="0">
+              <a:solidFill>
+                <a:srgbClr val="6B5850"/>
+              </a:solidFill>
+              <a:latin typeface="Arial" panose="020B0604020202020204"/>
+              <a:ea typeface="Arial" panose="020B0604020202020204"/>
+              <a:cs typeface="Arial" panose="020B0604020202020204"/>
+            </a:endParaRPr>
           </a:p>
         </p:txBody>
       </p:sp>
@@ -5786,7 +5847,7 @@
 </file>
 
 <file path=ppt/slides/slide11.xml><?xml version="1.0" encoding="utf-8"?>
-<p:sld xmlns:a="http://schemas.openxmlformats.org/drawingml/2006/main" xmlns:p="http://schemas.openxmlformats.org/presentationml/2006/main" xmlns:r="http://schemas.openxmlformats.org/officeDocument/2006/relationships">
+<p:sld xmlns:a="http://schemas.openxmlformats.org/drawingml/2006/main" xmlns:r="http://schemas.openxmlformats.org/officeDocument/2006/relationships" xmlns:p="http://schemas.openxmlformats.org/presentationml/2006/main">
   <p:cSld>
     <p:bg>
       <p:bgPr>
@@ -5820,7 +5881,7 @@
           <a:noFill/>
         </p:spPr>
         <p:txBody>
-          <a:bodyPr wrap="square" anchor="ctr" lIns="0" rIns="0" tIns="0" bIns="0">
+          <a:bodyPr wrap="square" lIns="0" tIns="0" rIns="0" bIns="0" anchor="ctr">
             <a:spAutoFit/>
           </a:bodyPr>
           <a:lstStyle/>
@@ -5838,12 +5899,20 @@
                 <a:solidFill>
                   <a:srgbClr val="3B2B26"/>
                 </a:solidFill>
-                <a:latin typeface="Arial"/>
-                <a:ea typeface="Arial"/>
-                <a:cs typeface="Arial"/>
+                <a:latin typeface="Arial" panose="020B0604020202020204"/>
+                <a:ea typeface="Arial" panose="020B0604020202020204"/>
+                <a:cs typeface="Arial" panose="020B0604020202020204"/>
               </a:rPr>
               <a:t>“大厂在给 AI 装一只宠物；我们做的是一个人”</a:t>
             </a:r>
+            <a:endParaRPr sz="2600" b="1">
+              <a:solidFill>
+                <a:srgbClr val="3B2B26"/>
+              </a:solidFill>
+              <a:latin typeface="Arial" panose="020B0604020202020204"/>
+              <a:ea typeface="Arial" panose="020B0604020202020204"/>
+              <a:cs typeface="Arial" panose="020B0604020202020204"/>
+            </a:endParaRPr>
           </a:p>
           <a:p>
             <a:pPr algn="ctr">
@@ -5856,12 +5925,20 @@
                 <a:solidFill>
                   <a:srgbClr val="6B5850"/>
                 </a:solidFill>
-                <a:latin typeface="Arial"/>
-                <a:ea typeface="Arial"/>
-                <a:cs typeface="Arial"/>
+                <a:latin typeface="Arial" panose="020B0604020202020204"/>
+                <a:ea typeface="Arial" panose="020B0604020202020204"/>
+                <a:cs typeface="Arial" panose="020B0604020202020204"/>
               </a:rPr>
               <a:t>—— 她在办公线是吉祥物，在我们这儿是角色</a:t>
             </a:r>
+            <a:endParaRPr sz="1400" b="0">
+              <a:solidFill>
+                <a:srgbClr val="6B5850"/>
+              </a:solidFill>
+              <a:latin typeface="Arial" panose="020B0604020202020204"/>
+              <a:ea typeface="Arial" panose="020B0604020202020204"/>
+              <a:cs typeface="Arial" panose="020B0604020202020204"/>
+            </a:endParaRPr>
           </a:p>
         </p:txBody>
       </p:sp>
@@ -5882,7 +5959,7 @@
           <a:noFill/>
         </p:spPr>
         <p:txBody>
-          <a:bodyPr wrap="square" anchor="t" lIns="0" rIns="0" tIns="0" bIns="0">
+          <a:bodyPr wrap="square" lIns="0" tIns="0" rIns="0" bIns="0" anchor="t">
             <a:spAutoFit/>
           </a:bodyPr>
           <a:lstStyle/>
@@ -5897,12 +5974,20 @@
                 <a:solidFill>
                   <a:srgbClr val="6B5850"/>
                 </a:solidFill>
-                <a:latin typeface="Arial"/>
-                <a:ea typeface="Arial"/>
-                <a:cs typeface="Arial"/>
+                <a:latin typeface="Arial" panose="020B0604020202020204"/>
+                <a:ea typeface="Arial" panose="020B0604020202020204"/>
+                <a:cs typeface="Arial" panose="020B0604020202020204"/>
               </a:rPr>
               <a:t>11</a:t>
             </a:r>
+            <a:endParaRPr sz="1000" b="0">
+              <a:solidFill>
+                <a:srgbClr val="6B5850"/>
+              </a:solidFill>
+              <a:latin typeface="Arial" panose="020B0604020202020204"/>
+              <a:ea typeface="Arial" panose="020B0604020202020204"/>
+              <a:cs typeface="Arial" panose="020B0604020202020204"/>
+            </a:endParaRPr>
           </a:p>
         </p:txBody>
       </p:sp>
@@ -5915,7 +6000,7 @@
 </file>
 
 <file path=ppt/slides/slide12.xml><?xml version="1.0" encoding="utf-8"?>
-<p:sld xmlns:a="http://schemas.openxmlformats.org/drawingml/2006/main" xmlns:p="http://schemas.openxmlformats.org/presentationml/2006/main" xmlns:r="http://schemas.openxmlformats.org/officeDocument/2006/relationships">
+<p:sld xmlns:a="http://schemas.openxmlformats.org/drawingml/2006/main" xmlns:r="http://schemas.openxmlformats.org/officeDocument/2006/relationships" xmlns:p="http://schemas.openxmlformats.org/presentationml/2006/main">
   <p:cSld>
     <p:bg>
       <p:bgPr>
@@ -5949,7 +6034,7 @@
           <a:noFill/>
         </p:spPr>
         <p:txBody>
-          <a:bodyPr wrap="square" anchor="t" lIns="0" rIns="0" tIns="0" bIns="0">
+          <a:bodyPr wrap="square" lIns="0" tIns="0" rIns="0" bIns="0" anchor="t">
             <a:spAutoFit/>
           </a:bodyPr>
           <a:lstStyle/>
@@ -5964,12 +6049,20 @@
                 <a:solidFill>
                   <a:srgbClr val="A03A35"/>
                 </a:solidFill>
-                <a:latin typeface="Arial"/>
-                <a:ea typeface="Arial"/>
-                <a:cs typeface="Arial"/>
+                <a:latin typeface="Arial" panose="020B0604020202020204"/>
+                <a:ea typeface="Arial" panose="020B0604020202020204"/>
+                <a:cs typeface="Arial" panose="020B0604020202020204"/>
               </a:rPr>
               <a:t>02</a:t>
             </a:r>
+            <a:endParaRPr sz="6000" b="1">
+              <a:solidFill>
+                <a:srgbClr val="A03A35"/>
+              </a:solidFill>
+              <a:latin typeface="Arial" panose="020B0604020202020204"/>
+              <a:ea typeface="Arial" panose="020B0604020202020204"/>
+              <a:cs typeface="Arial" panose="020B0604020202020204"/>
+            </a:endParaRPr>
           </a:p>
         </p:txBody>
       </p:sp>
@@ -5990,7 +6083,7 @@
           <a:noFill/>
         </p:spPr>
         <p:txBody>
-          <a:bodyPr wrap="square" anchor="t" lIns="0" rIns="0" tIns="0" bIns="0">
+          <a:bodyPr wrap="square" lIns="0" tIns="0" rIns="0" bIns="0" anchor="t">
             <a:spAutoFit/>
           </a:bodyPr>
           <a:lstStyle/>
@@ -6005,12 +6098,20 @@
                 <a:solidFill>
                   <a:srgbClr val="F7F1EA"/>
                 </a:solidFill>
-                <a:latin typeface="Arial"/>
-                <a:ea typeface="Arial"/>
-                <a:cs typeface="Arial"/>
+                <a:latin typeface="Arial" panose="020B0604020202020204"/>
+                <a:ea typeface="Arial" panose="020B0604020202020204"/>
+                <a:cs typeface="Arial" panose="020B0604020202020204"/>
               </a:rPr>
               <a:t>功能展示与实现方法</a:t>
             </a:r>
+            <a:endParaRPr sz="3400" b="1">
+              <a:solidFill>
+                <a:srgbClr val="F7F1EA"/>
+              </a:solidFill>
+              <a:latin typeface="Arial" panose="020B0604020202020204"/>
+              <a:ea typeface="Arial" panose="020B0604020202020204"/>
+              <a:cs typeface="Arial" panose="020B0604020202020204"/>
+            </a:endParaRPr>
           </a:p>
         </p:txBody>
       </p:sp>
@@ -6023,7 +6124,7 @@
 </file>
 
 <file path=ppt/slides/slide13.xml><?xml version="1.0" encoding="utf-8"?>
-<p:sld xmlns:a="http://schemas.openxmlformats.org/drawingml/2006/main" xmlns:p="http://schemas.openxmlformats.org/presentationml/2006/main" xmlns:r="http://schemas.openxmlformats.org/officeDocument/2006/relationships">
+<p:sld xmlns:a="http://schemas.openxmlformats.org/drawingml/2006/main" xmlns:r="http://schemas.openxmlformats.org/officeDocument/2006/relationships" xmlns:p="http://schemas.openxmlformats.org/presentationml/2006/main">
   <p:cSld>
     <p:bg>
       <p:bgPr>
@@ -6057,7 +6158,7 @@
           <a:noFill/>
         </p:spPr>
         <p:txBody>
-          <a:bodyPr wrap="square" anchor="t" lIns="0" rIns="0" tIns="0" bIns="0">
+          <a:bodyPr wrap="square" lIns="0" tIns="0" rIns="0" bIns="0" anchor="t">
             <a:spAutoFit/>
           </a:bodyPr>
           <a:lstStyle/>
@@ -6072,12 +6173,20 @@
                 <a:solidFill>
                   <a:srgbClr val="3B2B26"/>
                 </a:solidFill>
-                <a:latin typeface="Arial"/>
-                <a:ea typeface="Arial"/>
-                <a:cs typeface="Arial"/>
+                <a:latin typeface="Arial" panose="020B0604020202020204"/>
+                <a:ea typeface="Arial" panose="020B0604020202020204"/>
+                <a:cs typeface="Arial" panose="020B0604020202020204"/>
               </a:rPr>
               <a:t>她现在能做的事</a:t>
             </a:r>
+            <a:endParaRPr sz="3000" b="1">
+              <a:solidFill>
+                <a:srgbClr val="3B2B26"/>
+              </a:solidFill>
+              <a:latin typeface="Arial" panose="020B0604020202020204"/>
+              <a:ea typeface="Arial" panose="020B0604020202020204"/>
+              <a:cs typeface="Arial" panose="020B0604020202020204"/>
+            </a:endParaRPr>
           </a:p>
         </p:txBody>
       </p:sp>
@@ -6142,7 +6251,7 @@
           <a:noFill/>
         </p:spPr>
         <p:txBody>
-          <a:bodyPr wrap="square" anchor="t" lIns="0" rIns="0" tIns="0" bIns="0">
+          <a:bodyPr wrap="square" lIns="0" tIns="0" rIns="0" bIns="0" anchor="t">
             <a:spAutoFit/>
           </a:bodyPr>
           <a:lstStyle/>
@@ -6157,9 +6266,9 @@
                 <a:solidFill>
                   <a:srgbClr val="A03A35"/>
                 </a:solidFill>
-                <a:latin typeface="微软雅黑"/>
-                <a:ea typeface="微软雅黑"/>
-                <a:cs typeface="微软雅黑"/>
+                <a:latin typeface="微软雅黑" panose="020B0503020204020204" charset="-122"/>
+                <a:ea typeface="微软雅黑" panose="020B0503020204020204" charset="-122"/>
+                <a:cs typeface="微软雅黑" panose="020B0503020204020204" charset="-122"/>
               </a:rPr>
               <a:t>▪  </a:t>
             </a:r>
@@ -6168,9 +6277,9 @@
                 <a:solidFill>
                   <a:srgbClr val="3B2B26"/>
                 </a:solidFill>
-                <a:latin typeface="微软雅黑"/>
-                <a:ea typeface="微软雅黑"/>
-                <a:cs typeface="微软雅黑"/>
+                <a:latin typeface="微软雅黑" panose="020B0503020204020204" charset="-122"/>
+                <a:ea typeface="微软雅黑" panose="020B0503020204020204" charset="-122"/>
+                <a:cs typeface="微软雅黑" panose="020B0503020204020204" charset="-122"/>
               </a:rPr>
               <a:t>有形象地陪着你</a:t>
             </a:r>
@@ -6179,12 +6288,20 @@
                 <a:solidFill>
                   <a:srgbClr val="6B5850"/>
                 </a:solidFill>
-                <a:latin typeface="微软雅黑"/>
-                <a:ea typeface="微软雅黑"/>
-                <a:cs typeface="微软雅黑"/>
+                <a:latin typeface="微软雅黑" panose="020B0503020204020204" charset="-122"/>
+                <a:ea typeface="微软雅黑" panose="020B0503020204020204" charset="-122"/>
+                <a:cs typeface="微软雅黑" panose="020B0503020204020204" charset="-122"/>
               </a:rPr>
               <a:t>  透明置顶窗口；点她、拖她、她自己走动</a:t>
             </a:r>
+            <a:endParaRPr sz="1300" b="0">
+              <a:solidFill>
+                <a:srgbClr val="6B5850"/>
+              </a:solidFill>
+              <a:latin typeface="微软雅黑" panose="020B0503020204020204" charset="-122"/>
+              <a:ea typeface="微软雅黑" panose="020B0503020204020204" charset="-122"/>
+              <a:cs typeface="微软雅黑" panose="020B0503020204020204" charset="-122"/>
+            </a:endParaRPr>
           </a:p>
           <a:p>
             <a:pPr>
@@ -6197,9 +6314,9 @@
                 <a:solidFill>
                   <a:srgbClr val="A03A35"/>
                 </a:solidFill>
-                <a:latin typeface="微软雅黑"/>
-                <a:ea typeface="微软雅黑"/>
-                <a:cs typeface="微软雅黑"/>
+                <a:latin typeface="微软雅黑" panose="020B0503020204020204" charset="-122"/>
+                <a:ea typeface="微软雅黑" panose="020B0503020204020204" charset="-122"/>
+                <a:cs typeface="微软雅黑" panose="020B0503020204020204" charset="-122"/>
               </a:rPr>
               <a:t>▪  </a:t>
             </a:r>
@@ -6208,9 +6325,9 @@
                 <a:solidFill>
                   <a:srgbClr val="3B2B26"/>
                 </a:solidFill>
-                <a:latin typeface="微软雅黑"/>
-                <a:ea typeface="微软雅黑"/>
-                <a:cs typeface="微软雅黑"/>
+                <a:latin typeface="微软雅黑" panose="020B0503020204020204" charset="-122"/>
+                <a:ea typeface="微软雅黑" panose="020B0503020204020204" charset="-122"/>
+                <a:cs typeface="微软雅黑" panose="020B0503020204020204" charset="-122"/>
               </a:rPr>
               <a:t>用她自己的声音说话</a:t>
             </a:r>
@@ -6219,12 +6336,20 @@
                 <a:solidFill>
                   <a:srgbClr val="6B5850"/>
                 </a:solidFill>
-                <a:latin typeface="微软雅黑"/>
-                <a:ea typeface="微软雅黑"/>
-                <a:cs typeface="微软雅黑"/>
+                <a:latin typeface="微软雅黑" panose="020B0503020204020204" charset="-122"/>
+                <a:ea typeface="微软雅黑" panose="020B0503020204020204" charset="-122"/>
+                <a:cs typeface="微软雅黑" panose="020B0503020204020204" charset="-122"/>
               </a:rPr>
               <a:t>  角色专属语音模型，嘴型与打字机效果同步</a:t>
             </a:r>
+            <a:endParaRPr sz="1300" b="0">
+              <a:solidFill>
+                <a:srgbClr val="6B5850"/>
+              </a:solidFill>
+              <a:latin typeface="微软雅黑" panose="020B0503020204020204" charset="-122"/>
+              <a:ea typeface="微软雅黑" panose="020B0503020204020204" charset="-122"/>
+              <a:cs typeface="微软雅黑" panose="020B0503020204020204" charset="-122"/>
+            </a:endParaRPr>
           </a:p>
           <a:p>
             <a:pPr>
@@ -6237,9 +6362,9 @@
                 <a:solidFill>
                   <a:srgbClr val="A03A35"/>
                 </a:solidFill>
-                <a:latin typeface="微软雅黑"/>
-                <a:ea typeface="微软雅黑"/>
-                <a:cs typeface="微软雅黑"/>
+                <a:latin typeface="微软雅黑" panose="020B0503020204020204" charset="-122"/>
+                <a:ea typeface="微软雅黑" panose="020B0503020204020204" charset="-122"/>
+                <a:cs typeface="微软雅黑" panose="020B0503020204020204" charset="-122"/>
               </a:rPr>
               <a:t>▪  </a:t>
             </a:r>
@@ -6248,9 +6373,9 @@
                 <a:solidFill>
                   <a:srgbClr val="3B2B26"/>
                 </a:solidFill>
-                <a:latin typeface="微软雅黑"/>
-                <a:ea typeface="微软雅黑"/>
-                <a:cs typeface="微软雅黑"/>
+                <a:latin typeface="微软雅黑" panose="020B0503020204020204" charset="-122"/>
+                <a:ea typeface="微软雅黑" panose="020B0503020204020204" charset="-122"/>
+                <a:cs typeface="微软雅黑" panose="020B0503020204020204" charset="-122"/>
               </a:rPr>
               <a:t>记得住你</a:t>
             </a:r>
@@ -6259,12 +6384,20 @@
                 <a:solidFill>
                   <a:srgbClr val="6B5850"/>
                 </a:solidFill>
-                <a:latin typeface="微软雅黑"/>
-                <a:ea typeface="微软雅黑"/>
-                <a:cs typeface="微软雅黑"/>
+                <a:latin typeface="微软雅黑" panose="020B0503020204020204" charset="-122"/>
+                <a:ea typeface="微软雅黑" panose="020B0503020204020204" charset="-122"/>
+                <a:cs typeface="微软雅黑" panose="020B0503020204020204" charset="-122"/>
               </a:rPr>
               <a:t>  长期记忆 + 日记 + 作息/习惯观察</a:t>
             </a:r>
+            <a:endParaRPr sz="1300" b="0">
+              <a:solidFill>
+                <a:srgbClr val="6B5850"/>
+              </a:solidFill>
+              <a:latin typeface="微软雅黑" panose="020B0503020204020204" charset="-122"/>
+              <a:ea typeface="微软雅黑" panose="020B0503020204020204" charset="-122"/>
+              <a:cs typeface="微软雅黑" panose="020B0503020204020204" charset="-122"/>
+            </a:endParaRPr>
           </a:p>
           <a:p>
             <a:pPr>
@@ -6277,9 +6410,9 @@
                 <a:solidFill>
                   <a:srgbClr val="A03A35"/>
                 </a:solidFill>
-                <a:latin typeface="微软雅黑"/>
-                <a:ea typeface="微软雅黑"/>
-                <a:cs typeface="微软雅黑"/>
+                <a:latin typeface="微软雅黑" panose="020B0503020204020204" charset="-122"/>
+                <a:ea typeface="微软雅黑" panose="020B0503020204020204" charset="-122"/>
+                <a:cs typeface="微软雅黑" panose="020B0503020204020204" charset="-122"/>
               </a:rPr>
               <a:t>▪  </a:t>
             </a:r>
@@ -6288,9 +6421,9 @@
                 <a:solidFill>
                   <a:srgbClr val="3B2B26"/>
                 </a:solidFill>
-                <a:latin typeface="微软雅黑"/>
-                <a:ea typeface="微软雅黑"/>
-                <a:cs typeface="微软雅黑"/>
+                <a:latin typeface="微软雅黑" panose="020B0503020204020204" charset="-122"/>
+                <a:ea typeface="微软雅黑" panose="020B0503020204020204" charset="-122"/>
+                <a:cs typeface="微软雅黑" panose="020B0503020204020204" charset="-122"/>
               </a:rPr>
               <a:t>能替你干活</a:t>
             </a:r>
@@ -6299,12 +6432,20 @@
                 <a:solidFill>
                   <a:srgbClr val="6B5850"/>
                 </a:solidFill>
-                <a:latin typeface="微软雅黑"/>
-                <a:ea typeface="微软雅黑"/>
-                <a:cs typeface="微软雅黑"/>
+                <a:latin typeface="微软雅黑" panose="020B0503020204020204" charset="-122"/>
+                <a:ea typeface="微软雅黑" panose="020B0503020204020204" charset="-122"/>
+                <a:cs typeface="微软雅黑" panose="020B0503020204020204" charset="-122"/>
               </a:rPr>
               <a:t>  键鼠操作、看屏幕、只读查文件</a:t>
             </a:r>
+            <a:endParaRPr sz="1300" b="0">
+              <a:solidFill>
+                <a:srgbClr val="6B5850"/>
+              </a:solidFill>
+              <a:latin typeface="微软雅黑" panose="020B0503020204020204" charset="-122"/>
+              <a:ea typeface="微软雅黑" panose="020B0503020204020204" charset="-122"/>
+              <a:cs typeface="微软雅黑" panose="020B0503020204020204" charset="-122"/>
+            </a:endParaRPr>
           </a:p>
           <a:p>
             <a:pPr>
@@ -6317,9 +6458,9 @@
                 <a:solidFill>
                   <a:srgbClr val="A03A35"/>
                 </a:solidFill>
-                <a:latin typeface="微软雅黑"/>
-                <a:ea typeface="微软雅黑"/>
-                <a:cs typeface="微软雅黑"/>
+                <a:latin typeface="微软雅黑" panose="020B0503020204020204" charset="-122"/>
+                <a:ea typeface="微软雅黑" panose="020B0503020204020204" charset="-122"/>
+                <a:cs typeface="微软雅黑" panose="020B0503020204020204" charset="-122"/>
               </a:rPr>
               <a:t>▪  </a:t>
             </a:r>
@@ -6328,9 +6469,9 @@
                 <a:solidFill>
                   <a:srgbClr val="3B2B26"/>
                 </a:solidFill>
-                <a:latin typeface="微软雅黑"/>
-                <a:ea typeface="微软雅黑"/>
-                <a:cs typeface="微软雅黑"/>
+                <a:latin typeface="微软雅黑" panose="020B0503020204020204" charset="-122"/>
+                <a:ea typeface="微软雅黑" panose="020B0503020204020204" charset="-122"/>
+                <a:cs typeface="微软雅黑" panose="020B0503020204020204" charset="-122"/>
               </a:rPr>
               <a:t>出得了桌面</a:t>
             </a:r>
@@ -6339,12 +6480,20 @@
                 <a:solidFill>
                   <a:srgbClr val="6B5850"/>
                 </a:solidFill>
-                <a:latin typeface="微软雅黑"/>
-                <a:ea typeface="微软雅黑"/>
-                <a:cs typeface="微软雅黑"/>
+                <a:latin typeface="微软雅黑" panose="020B0503020204020204" charset="-122"/>
+                <a:ea typeface="微软雅黑" panose="020B0503020204020204" charset="-122"/>
+                <a:cs typeface="微软雅黑" panose="020B0503020204020204" charset="-122"/>
               </a:rPr>
               <a:t>  QQ / 微信里继续聊，装扮与桌宠同步</a:t>
             </a:r>
+            <a:endParaRPr sz="1300" b="0">
+              <a:solidFill>
+                <a:srgbClr val="6B5850"/>
+              </a:solidFill>
+              <a:latin typeface="微软雅黑" panose="020B0503020204020204" charset="-122"/>
+              <a:ea typeface="微软雅黑" panose="020B0503020204020204" charset="-122"/>
+              <a:cs typeface="微软雅黑" panose="020B0503020204020204" charset="-122"/>
+            </a:endParaRPr>
           </a:p>
         </p:txBody>
       </p:sp>
@@ -6365,7 +6514,7 @@
           <a:noFill/>
         </p:spPr>
         <p:txBody>
-          <a:bodyPr wrap="square" anchor="t" lIns="0" rIns="0" tIns="0" bIns="0">
+          <a:bodyPr wrap="square" lIns="0" tIns="0" rIns="0" bIns="0" anchor="t">
             <a:spAutoFit/>
           </a:bodyPr>
           <a:lstStyle/>
@@ -6380,12 +6529,20 @@
                 <a:solidFill>
                   <a:srgbClr val="6B5850"/>
                 </a:solidFill>
-                <a:latin typeface="Arial"/>
-                <a:ea typeface="Arial"/>
-                <a:cs typeface="Arial"/>
+                <a:latin typeface="Arial" panose="020B0604020202020204"/>
+                <a:ea typeface="Arial" panose="020B0604020202020204"/>
+                <a:cs typeface="Arial" panose="020B0604020202020204"/>
               </a:rPr>
               <a:t>13</a:t>
             </a:r>
+            <a:endParaRPr sz="1000" b="0">
+              <a:solidFill>
+                <a:srgbClr val="6B5850"/>
+              </a:solidFill>
+              <a:latin typeface="Arial" panose="020B0604020202020204"/>
+              <a:ea typeface="Arial" panose="020B0604020202020204"/>
+              <a:cs typeface="Arial" panose="020B0604020202020204"/>
+            </a:endParaRPr>
           </a:p>
         </p:txBody>
       </p:sp>
@@ -6398,15 +6555,15 @@
           <p:nvPr/>
         </p:nvPicPr>
         <p:blipFill>
-          <a:blip r:embed="rId3"/>
+          <a:blip r:embed="rId1"/>
           <a:stretch>
             <a:fillRect/>
           </a:stretch>
         </p:blipFill>
         <p:spPr>
           <a:xfrm>
-            <a:off x="4022463" y="3931920"/>
-            <a:ext cx="2792194" cy="2697480"/>
+            <a:off x="5076190" y="2329815"/>
+            <a:ext cx="4189730" cy="4047490"/>
           </a:xfrm>
           <a:prstGeom prst="rect">
             <a:avLst/>
@@ -6422,15 +6579,15 @@
           <p:nvPr/>
         </p:nvPicPr>
         <p:blipFill>
-          <a:blip r:embed="rId4"/>
+          <a:blip r:embed="rId2"/>
           <a:stretch>
             <a:fillRect/>
           </a:stretch>
         </p:blipFill>
         <p:spPr>
           <a:xfrm>
-            <a:off x="6979250" y="3931920"/>
-            <a:ext cx="1189982" cy="2697480"/>
+            <a:off x="9394825" y="351790"/>
+            <a:ext cx="2658110" cy="6025515"/>
           </a:xfrm>
           <a:prstGeom prst="rect">
             <a:avLst/>
@@ -6446,7 +6603,7 @@
 </file>
 
 <file path=ppt/slides/slide14.xml><?xml version="1.0" encoding="utf-8"?>
-<p:sld xmlns:a="http://schemas.openxmlformats.org/drawingml/2006/main" xmlns:p="http://schemas.openxmlformats.org/presentationml/2006/main" xmlns:r="http://schemas.openxmlformats.org/officeDocument/2006/relationships">
+<p:sld xmlns:a="http://schemas.openxmlformats.org/drawingml/2006/main" xmlns:r="http://schemas.openxmlformats.org/officeDocument/2006/relationships" xmlns:p="http://schemas.openxmlformats.org/presentationml/2006/main">
   <p:cSld>
     <p:bg>
       <p:bgPr>
@@ -6480,7 +6637,7 @@
           <a:noFill/>
         </p:spPr>
         <p:txBody>
-          <a:bodyPr wrap="square" anchor="t" lIns="0" rIns="0" tIns="0" bIns="0">
+          <a:bodyPr wrap="square" lIns="0" tIns="0" rIns="0" bIns="0" anchor="t">
             <a:spAutoFit/>
           </a:bodyPr>
           <a:lstStyle/>
@@ -6495,12 +6652,20 @@
                 <a:solidFill>
                   <a:srgbClr val="3B2B26"/>
                 </a:solidFill>
-                <a:latin typeface="Arial"/>
-                <a:ea typeface="Arial"/>
-                <a:cs typeface="Arial"/>
+                <a:latin typeface="Arial" panose="020B0604020202020204"/>
+                <a:ea typeface="Arial" panose="020B0604020202020204"/>
+                <a:cs typeface="Arial" panose="020B0604020202020204"/>
               </a:rPr>
               <a:t>怎么做到的（一）：形象与语音</a:t>
             </a:r>
+            <a:endParaRPr sz="3000" b="1">
+              <a:solidFill>
+                <a:srgbClr val="3B2B26"/>
+              </a:solidFill>
+              <a:latin typeface="Arial" panose="020B0604020202020204"/>
+              <a:ea typeface="Arial" panose="020B0604020202020204"/>
+              <a:cs typeface="Arial" panose="020B0604020202020204"/>
+            </a:endParaRPr>
           </a:p>
         </p:txBody>
       </p:sp>
@@ -6565,7 +6730,7 @@
           <a:noFill/>
         </p:spPr>
         <p:txBody>
-          <a:bodyPr wrap="square" anchor="t" lIns="0" rIns="0" tIns="0" bIns="0">
+          <a:bodyPr wrap="square" lIns="0" tIns="0" rIns="0" bIns="0" anchor="t">
             <a:spAutoFit/>
           </a:bodyPr>
           <a:lstStyle/>
@@ -6580,9 +6745,9 @@
                 <a:solidFill>
                   <a:srgbClr val="A03A35"/>
                 </a:solidFill>
-                <a:latin typeface="微软雅黑"/>
-                <a:ea typeface="微软雅黑"/>
-                <a:cs typeface="微软雅黑"/>
+                <a:latin typeface="微软雅黑" panose="020B0503020204020204" charset="-122"/>
+                <a:ea typeface="微软雅黑" panose="020B0503020204020204" charset="-122"/>
+                <a:cs typeface="微软雅黑" panose="020B0503020204020204" charset="-122"/>
               </a:rPr>
               <a:t>▪  </a:t>
             </a:r>
@@ -6591,9 +6756,9 @@
                 <a:solidFill>
                   <a:srgbClr val="3B2B26"/>
                 </a:solidFill>
-                <a:latin typeface="微软雅黑"/>
-                <a:ea typeface="微软雅黑"/>
-                <a:cs typeface="微软雅黑"/>
+                <a:latin typeface="微软雅黑" panose="020B0503020204020204" charset="-122"/>
+                <a:ea typeface="微软雅黑" panose="020B0503020204020204" charset="-122"/>
+                <a:cs typeface="微软雅黑" panose="020B0503020204020204" charset="-122"/>
               </a:rPr>
               <a:t>双形态渲染</a:t>
             </a:r>
@@ -6602,12 +6767,20 @@
                 <a:solidFill>
                   <a:srgbClr val="6B5850"/>
                 </a:solidFill>
-                <a:latin typeface="微软雅黑"/>
-                <a:ea typeface="微软雅黑"/>
-                <a:cs typeface="微软雅黑"/>
+                <a:latin typeface="微软雅黑" panose="020B0503020204020204" charset="-122"/>
+                <a:ea typeface="微软雅黑" panose="020B0503020204020204" charset="-122"/>
+                <a:cs typeface="微软雅黑" panose="020B0503020204020204" charset="-122"/>
               </a:rPr>
               <a:t>  Live2D（Cubism）与 2D 立绘共用一套“装扮”数据</a:t>
             </a:r>
+            <a:endParaRPr sz="1300" b="0">
+              <a:solidFill>
+                <a:srgbClr val="6B5850"/>
+              </a:solidFill>
+              <a:latin typeface="微软雅黑" panose="020B0503020204020204" charset="-122"/>
+              <a:ea typeface="微软雅黑" panose="020B0503020204020204" charset="-122"/>
+              <a:cs typeface="微软雅黑" panose="020B0503020204020204" charset="-122"/>
+            </a:endParaRPr>
           </a:p>
           <a:p>
             <a:pPr>
@@ -6620,9 +6793,9 @@
                 <a:solidFill>
                   <a:srgbClr val="A03A35"/>
                 </a:solidFill>
-                <a:latin typeface="微软雅黑"/>
-                <a:ea typeface="微软雅黑"/>
-                <a:cs typeface="微软雅黑"/>
+                <a:latin typeface="微软雅黑" panose="020B0503020204020204" charset="-122"/>
+                <a:ea typeface="微软雅黑" panose="020B0503020204020204" charset="-122"/>
+                <a:cs typeface="微软雅黑" panose="020B0503020204020204" charset="-122"/>
               </a:rPr>
               <a:t>▪  </a:t>
             </a:r>
@@ -6631,9 +6804,9 @@
                 <a:solidFill>
                   <a:srgbClr val="3B2B26"/>
                 </a:solidFill>
-                <a:latin typeface="微软雅黑"/>
-                <a:ea typeface="微软雅黑"/>
-                <a:cs typeface="微软雅黑"/>
+                <a:latin typeface="微软雅黑" panose="020B0503020204020204" charset="-122"/>
+                <a:ea typeface="微软雅黑" panose="020B0503020204020204" charset="-122"/>
+                <a:cs typeface="微软雅黑" panose="020B0503020204020204" charset="-122"/>
               </a:rPr>
               <a:t>装扮即数据</a:t>
             </a:r>
@@ -6642,12 +6815,20 @@
                 <a:solidFill>
                   <a:srgbClr val="6B5850"/>
                 </a:solidFill>
-                <a:latin typeface="微软雅黑"/>
-                <a:ea typeface="微软雅黑"/>
-                <a:cs typeface="微软雅黑"/>
+                <a:latin typeface="微软雅黑" panose="020B0503020204020204" charset="-122"/>
+                <a:ea typeface="微软雅黑" panose="020B0503020204020204" charset="-122"/>
+                <a:cs typeface="微软雅黑" panose="020B0503020204020204" charset="-122"/>
               </a:rPr>
               <a:t>  衣服/发型/装饰/姿势都是层号，换装=换层再合成</a:t>
             </a:r>
+            <a:endParaRPr sz="1300" b="0">
+              <a:solidFill>
+                <a:srgbClr val="6B5850"/>
+              </a:solidFill>
+              <a:latin typeface="微软雅黑" panose="020B0503020204020204" charset="-122"/>
+              <a:ea typeface="微软雅黑" panose="020B0503020204020204" charset="-122"/>
+              <a:cs typeface="微软雅黑" panose="020B0503020204020204" charset="-122"/>
+            </a:endParaRPr>
           </a:p>
           <a:p>
             <a:pPr>
@@ -6660,9 +6841,9 @@
                 <a:solidFill>
                   <a:srgbClr val="A03A35"/>
                 </a:solidFill>
-                <a:latin typeface="微软雅黑"/>
-                <a:ea typeface="微软雅黑"/>
-                <a:cs typeface="微软雅黑"/>
+                <a:latin typeface="微软雅黑" panose="020B0503020204020204" charset="-122"/>
+                <a:ea typeface="微软雅黑" panose="020B0503020204020204" charset="-122"/>
+                <a:cs typeface="微软雅黑" panose="020B0503020204020204" charset="-122"/>
               </a:rPr>
               <a:t>▪  </a:t>
             </a:r>
@@ -6671,9 +6852,9 @@
                 <a:solidFill>
                   <a:srgbClr val="3B2B26"/>
                 </a:solidFill>
-                <a:latin typeface="微软雅黑"/>
-                <a:ea typeface="微软雅黑"/>
-                <a:cs typeface="微软雅黑"/>
+                <a:latin typeface="微软雅黑" panose="020B0503020204020204" charset="-122"/>
+                <a:ea typeface="微软雅黑" panose="020B0503020204020204" charset="-122"/>
+                <a:cs typeface="微软雅黑" panose="020B0503020204020204" charset="-122"/>
               </a:rPr>
               <a:t>语音链路</a:t>
             </a:r>
@@ -6682,12 +6863,20 @@
                 <a:solidFill>
                   <a:srgbClr val="6B5850"/>
                 </a:solidFill>
-                <a:latin typeface="微软雅黑"/>
-                <a:ea typeface="微软雅黑"/>
-                <a:cs typeface="微软雅黑"/>
+                <a:latin typeface="微软雅黑" panose="020B0503020204020204" charset="-122"/>
+                <a:ea typeface="微软雅黑" panose="020B0503020204020204" charset="-122"/>
+                <a:cs typeface="微软雅黑" panose="020B0503020204020204" charset="-122"/>
               </a:rPr>
               <a:t>  文本 → GPT-SoVITS（角色模型）→ 播放，独立服务常驻</a:t>
             </a:r>
+            <a:endParaRPr sz="1300" b="0">
+              <a:solidFill>
+                <a:srgbClr val="6B5850"/>
+              </a:solidFill>
+              <a:latin typeface="微软雅黑" panose="020B0503020204020204" charset="-122"/>
+              <a:ea typeface="微软雅黑" panose="020B0503020204020204" charset="-122"/>
+              <a:cs typeface="微软雅黑" panose="020B0503020204020204" charset="-122"/>
+            </a:endParaRPr>
           </a:p>
           <a:p>
             <a:pPr>
@@ -6700,9 +6889,9 @@
                 <a:solidFill>
                   <a:srgbClr val="A03A35"/>
                 </a:solidFill>
-                <a:latin typeface="微软雅黑"/>
-                <a:ea typeface="微软雅黑"/>
-                <a:cs typeface="微软雅黑"/>
+                <a:latin typeface="微软雅黑" panose="020B0503020204020204" charset="-122"/>
+                <a:ea typeface="微软雅黑" panose="020B0503020204020204" charset="-122"/>
+                <a:cs typeface="微软雅黑" panose="020B0503020204020204" charset="-122"/>
               </a:rPr>
               <a:t>▪  </a:t>
             </a:r>
@@ -6711,9 +6900,9 @@
                 <a:solidFill>
                   <a:srgbClr val="3B2B26"/>
                 </a:solidFill>
-                <a:latin typeface="微软雅黑"/>
-                <a:ea typeface="微软雅黑"/>
-                <a:cs typeface="微软雅黑"/>
+                <a:latin typeface="微软雅黑" panose="020B0503020204020204" charset="-122"/>
+                <a:ea typeface="微软雅黑" panose="020B0503020204020204" charset="-122"/>
+                <a:cs typeface="微软雅黑" panose="020B0503020204020204" charset="-122"/>
               </a:rPr>
               <a:t>不打断体验</a:t>
             </a:r>
@@ -6722,12 +6911,20 @@
                 <a:solidFill>
                   <a:srgbClr val="6B5850"/>
                 </a:solidFill>
-                <a:latin typeface="微软雅黑"/>
-                <a:ea typeface="微软雅黑"/>
-                <a:cs typeface="微软雅黑"/>
+                <a:latin typeface="微软雅黑" panose="020B0503020204020204" charset="-122"/>
+                <a:ea typeface="微软雅黑" panose="020B0503020204020204" charset="-122"/>
+                <a:cs typeface="微软雅黑" panose="020B0503020204020204" charset="-122"/>
               </a:rPr>
               <a:t>  点她/切窗口不会掐断正在念的句子（本轮刚修）</a:t>
             </a:r>
+            <a:endParaRPr sz="1300" b="0">
+              <a:solidFill>
+                <a:srgbClr val="6B5850"/>
+              </a:solidFill>
+              <a:latin typeface="微软雅黑" panose="020B0503020204020204" charset="-122"/>
+              <a:ea typeface="微软雅黑" panose="020B0503020204020204" charset="-122"/>
+              <a:cs typeface="微软雅黑" panose="020B0503020204020204" charset="-122"/>
+            </a:endParaRPr>
           </a:p>
         </p:txBody>
       </p:sp>
@@ -6748,7 +6945,7 @@
           <a:noFill/>
         </p:spPr>
         <p:txBody>
-          <a:bodyPr wrap="square" anchor="t" lIns="0" rIns="0" tIns="0" bIns="0">
+          <a:bodyPr wrap="square" lIns="0" tIns="0" rIns="0" bIns="0" anchor="t">
             <a:spAutoFit/>
           </a:bodyPr>
           <a:lstStyle/>
@@ -6763,33 +6960,41 @@
                 <a:solidFill>
                   <a:srgbClr val="6B5850"/>
                 </a:solidFill>
-                <a:latin typeface="Arial"/>
-                <a:ea typeface="Arial"/>
-                <a:cs typeface="Arial"/>
+                <a:latin typeface="Arial" panose="020B0604020202020204"/>
+                <a:ea typeface="Arial" panose="020B0604020202020204"/>
+                <a:cs typeface="Arial" panose="020B0604020202020204"/>
               </a:rPr>
               <a:t>14</a:t>
             </a:r>
+            <a:endParaRPr sz="1000" b="0">
+              <a:solidFill>
+                <a:srgbClr val="6B5850"/>
+              </a:solidFill>
+              <a:latin typeface="Arial" panose="020B0604020202020204"/>
+              <a:ea typeface="Arial" panose="020B0604020202020204"/>
+              <a:cs typeface="Arial" panose="020B0604020202020204"/>
+            </a:endParaRPr>
           </a:p>
         </p:txBody>
       </p:sp>
       <p:pic>
         <p:nvPicPr>
-          <p:cNvPr id="6" name="Picture 5" descr="S3a-outfit.png"/>
+          <p:cNvPr id="8" name="Picture 6" descr="S3b-outfit.png"/>
           <p:cNvPicPr>
             <a:picLocks noChangeAspect="1"/>
           </p:cNvPicPr>
           <p:nvPr/>
         </p:nvPicPr>
         <p:blipFill>
-          <a:blip r:embed="rId3"/>
+          <a:blip r:embed="rId1"/>
           <a:stretch>
             <a:fillRect/>
           </a:stretch>
         </p:blipFill>
         <p:spPr>
           <a:xfrm>
-            <a:off x="4138499" y="3931920"/>
-            <a:ext cx="1941664" cy="2697480"/>
+            <a:off x="9194165" y="1140460"/>
+            <a:ext cx="2937510" cy="4382770"/>
           </a:xfrm>
           <a:prstGeom prst="rect">
             <a:avLst/>
@@ -6798,22 +7003,22 @@
       </p:pic>
       <p:pic>
         <p:nvPicPr>
-          <p:cNvPr id="7" name="Picture 6" descr="S3b-outfit.png"/>
+          <p:cNvPr id="9" name="图片 8" descr="屏幕截图 2026-10-14 162127"/>
           <p:cNvPicPr>
             <a:picLocks noChangeAspect="1"/>
           </p:cNvPicPr>
           <p:nvPr/>
         </p:nvPicPr>
         <p:blipFill>
-          <a:blip r:embed="rId4"/>
+          <a:blip r:embed="rId2"/>
           <a:stretch>
             <a:fillRect/>
           </a:stretch>
         </p:blipFill>
         <p:spPr>
           <a:xfrm>
-            <a:off x="6244756" y="3931920"/>
-            <a:ext cx="1808439" cy="2697480"/>
+            <a:off x="5953125" y="1123315"/>
+            <a:ext cx="3241040" cy="4399915"/>
           </a:xfrm>
           <a:prstGeom prst="rect">
             <a:avLst/>
@@ -6829,7 +7034,7 @@
 </file>
 
 <file path=ppt/slides/slide15.xml><?xml version="1.0" encoding="utf-8"?>
-<p:sld xmlns:a="http://schemas.openxmlformats.org/drawingml/2006/main" xmlns:p="http://schemas.openxmlformats.org/presentationml/2006/main" xmlns:r="http://schemas.openxmlformats.org/officeDocument/2006/relationships">
+<p:sld xmlns:a="http://schemas.openxmlformats.org/drawingml/2006/main" xmlns:r="http://schemas.openxmlformats.org/officeDocument/2006/relationships" xmlns:p="http://schemas.openxmlformats.org/presentationml/2006/main">
   <p:cSld>
     <p:bg>
       <p:bgPr>
@@ -6863,7 +7068,7 @@
           <a:noFill/>
         </p:spPr>
         <p:txBody>
-          <a:bodyPr wrap="square" anchor="t" lIns="0" rIns="0" tIns="0" bIns="0">
+          <a:bodyPr wrap="square" lIns="0" tIns="0" rIns="0" bIns="0" anchor="t">
             <a:spAutoFit/>
           </a:bodyPr>
           <a:lstStyle/>
@@ -6878,12 +7083,20 @@
                 <a:solidFill>
                   <a:srgbClr val="3B2B26"/>
                 </a:solidFill>
-                <a:latin typeface="Arial"/>
-                <a:ea typeface="Arial"/>
-                <a:cs typeface="Arial"/>
+                <a:latin typeface="Arial" panose="020B0604020202020204"/>
+                <a:ea typeface="Arial" panose="020B0604020202020204"/>
+                <a:cs typeface="Arial" panose="020B0604020202020204"/>
               </a:rPr>
               <a:t>怎么做到的（二）：记忆与陪伴</a:t>
             </a:r>
+            <a:endParaRPr sz="3000" b="1">
+              <a:solidFill>
+                <a:srgbClr val="3B2B26"/>
+              </a:solidFill>
+              <a:latin typeface="Arial" panose="020B0604020202020204"/>
+              <a:ea typeface="Arial" panose="020B0604020202020204"/>
+              <a:cs typeface="Arial" panose="020B0604020202020204"/>
+            </a:endParaRPr>
           </a:p>
         </p:txBody>
       </p:sp>
@@ -6948,7 +7161,7 @@
           <a:noFill/>
         </p:spPr>
         <p:txBody>
-          <a:bodyPr wrap="square" anchor="t" lIns="0" rIns="0" tIns="0" bIns="0">
+          <a:bodyPr wrap="square" lIns="0" tIns="0" rIns="0" bIns="0" anchor="t">
             <a:spAutoFit/>
           </a:bodyPr>
           <a:lstStyle/>
@@ -6963,9 +7176,9 @@
                 <a:solidFill>
                   <a:srgbClr val="A03A35"/>
                 </a:solidFill>
-                <a:latin typeface="微软雅黑"/>
-                <a:ea typeface="微软雅黑"/>
-                <a:cs typeface="微软雅黑"/>
+                <a:latin typeface="微软雅黑" panose="020B0503020204020204" charset="-122"/>
+                <a:ea typeface="微软雅黑" panose="020B0503020204020204" charset="-122"/>
+                <a:cs typeface="微软雅黑" panose="020B0503020204020204" charset="-122"/>
               </a:rPr>
               <a:t>▪  </a:t>
             </a:r>
@@ -6974,9 +7187,9 @@
                 <a:solidFill>
                   <a:srgbClr val="3B2B26"/>
                 </a:solidFill>
-                <a:latin typeface="微软雅黑"/>
-                <a:ea typeface="微软雅黑"/>
-                <a:cs typeface="微软雅黑"/>
+                <a:latin typeface="微软雅黑" panose="020B0503020204020204" charset="-122"/>
+                <a:ea typeface="微软雅黑" panose="020B0503020204020204" charset="-122"/>
+                <a:cs typeface="微软雅黑" panose="020B0503020204020204" charset="-122"/>
               </a:rPr>
               <a:t>分层的记忆</a:t>
             </a:r>
@@ -6985,12 +7198,20 @@
                 <a:solidFill>
                   <a:srgbClr val="6B5850"/>
                 </a:solidFill>
-                <a:latin typeface="微软雅黑"/>
-                <a:ea typeface="微软雅黑"/>
-                <a:cs typeface="微软雅黑"/>
+                <a:latin typeface="微软雅黑" panose="020B0503020204020204" charset="-122"/>
+                <a:ea typeface="微软雅黑" panose="020B0503020204020204" charset="-122"/>
+                <a:cs typeface="微软雅黑" panose="020B0503020204020204" charset="-122"/>
               </a:rPr>
               <a:t>  对话记忆 / 长期记忆 / 日记 / 状态快照，各管一段</a:t>
             </a:r>
+            <a:endParaRPr sz="1300" b="0">
+              <a:solidFill>
+                <a:srgbClr val="6B5850"/>
+              </a:solidFill>
+              <a:latin typeface="微软雅黑" panose="020B0503020204020204" charset="-122"/>
+              <a:ea typeface="微软雅黑" panose="020B0503020204020204" charset="-122"/>
+              <a:cs typeface="微软雅黑" panose="020B0503020204020204" charset="-122"/>
+            </a:endParaRPr>
           </a:p>
           <a:p>
             <a:pPr>
@@ -7003,9 +7224,9 @@
                 <a:solidFill>
                   <a:srgbClr val="A03A35"/>
                 </a:solidFill>
-                <a:latin typeface="微软雅黑"/>
-                <a:ea typeface="微软雅黑"/>
-                <a:cs typeface="微软雅黑"/>
+                <a:latin typeface="微软雅黑" panose="020B0503020204020204" charset="-122"/>
+                <a:ea typeface="微软雅黑" panose="020B0503020204020204" charset="-122"/>
+                <a:cs typeface="微软雅黑" panose="020B0503020204020204" charset="-122"/>
               </a:rPr>
               <a:t>▪  </a:t>
             </a:r>
@@ -7014,9 +7235,9 @@
                 <a:solidFill>
                   <a:srgbClr val="3B2B26"/>
                 </a:solidFill>
-                <a:latin typeface="微软雅黑"/>
-                <a:ea typeface="微软雅黑"/>
-                <a:cs typeface="微软雅黑"/>
+                <a:latin typeface="微软雅黑" panose="020B0503020204020204" charset="-122"/>
+                <a:ea typeface="微软雅黑" panose="020B0503020204020204" charset="-122"/>
+                <a:cs typeface="微软雅黑" panose="020B0503020204020204" charset="-122"/>
               </a:rPr>
               <a:t>关系会变</a:t>
             </a:r>
@@ -7025,12 +7246,20 @@
                 <a:solidFill>
                   <a:srgbClr val="6B5850"/>
                 </a:solidFill>
-                <a:latin typeface="微软雅黑"/>
-                <a:ea typeface="微软雅黑"/>
-                <a:cs typeface="微软雅黑"/>
+                <a:latin typeface="微软雅黑" panose="020B0503020204020204" charset="-122"/>
+                <a:ea typeface="微软雅黑" panose="020B0503020204020204" charset="-122"/>
+                <a:cs typeface="微软雅黑" panose="020B0503020204020204" charset="-122"/>
               </a:rPr>
               <a:t>  桌面端：按真实相处证据（天数×对话量）抬高下限（affinity_floor）；QQ 侧另有一套面向群聊的好感玩法，按对话内容结算</a:t>
             </a:r>
+            <a:endParaRPr sz="1300" b="0">
+              <a:solidFill>
+                <a:srgbClr val="6B5850"/>
+              </a:solidFill>
+              <a:latin typeface="微软雅黑" panose="020B0503020204020204" charset="-122"/>
+              <a:ea typeface="微软雅黑" panose="020B0503020204020204" charset="-122"/>
+              <a:cs typeface="微软雅黑" panose="020B0503020204020204" charset="-122"/>
+            </a:endParaRPr>
           </a:p>
           <a:p>
             <a:pPr>
@@ -7043,9 +7272,9 @@
                 <a:solidFill>
                   <a:srgbClr val="A03A35"/>
                 </a:solidFill>
-                <a:latin typeface="微软雅黑"/>
-                <a:ea typeface="微软雅黑"/>
-                <a:cs typeface="微软雅黑"/>
+                <a:latin typeface="微软雅黑" panose="020B0503020204020204" charset="-122"/>
+                <a:ea typeface="微软雅黑" panose="020B0503020204020204" charset="-122"/>
+                <a:cs typeface="微软雅黑" panose="020B0503020204020204" charset="-122"/>
               </a:rPr>
               <a:t>▪  </a:t>
             </a:r>
@@ -7054,9 +7283,9 @@
                 <a:solidFill>
                   <a:srgbClr val="3B2B26"/>
                 </a:solidFill>
-                <a:latin typeface="微软雅黑"/>
-                <a:ea typeface="微软雅黑"/>
-                <a:cs typeface="微软雅黑"/>
+                <a:latin typeface="微软雅黑" panose="020B0503020204020204" charset="-122"/>
+                <a:ea typeface="微软雅黑" panose="020B0503020204020204" charset="-122"/>
+                <a:cs typeface="微软雅黑" panose="020B0503020204020204" charset="-122"/>
               </a:rPr>
               <a:t>她自己会学</a:t>
             </a:r>
@@ -7065,12 +7294,20 @@
                 <a:solidFill>
                   <a:srgbClr val="6B5850"/>
                 </a:solidFill>
-                <a:latin typeface="微软雅黑"/>
-                <a:ea typeface="微软雅黑"/>
-                <a:cs typeface="微软雅黑"/>
+                <a:latin typeface="微软雅黑" panose="020B0503020204020204" charset="-122"/>
+                <a:ea typeface="微软雅黑" panose="020B0503020204020204" charset="-122"/>
+                <a:cs typeface="微软雅黑" panose="020B0503020204020204" charset="-122"/>
               </a:rPr>
               <a:t>  空闲时自己补课、归纳“关于主人的事”</a:t>
             </a:r>
+            <a:endParaRPr sz="1300" b="0">
+              <a:solidFill>
+                <a:srgbClr val="6B5850"/>
+              </a:solidFill>
+              <a:latin typeface="微软雅黑" panose="020B0503020204020204" charset="-122"/>
+              <a:ea typeface="微软雅黑" panose="020B0503020204020204" charset="-122"/>
+              <a:cs typeface="微软雅黑" panose="020B0503020204020204" charset="-122"/>
+            </a:endParaRPr>
           </a:p>
           <a:p>
             <a:pPr>
@@ -7083,9 +7320,9 @@
                 <a:solidFill>
                   <a:srgbClr val="A03A35"/>
                 </a:solidFill>
-                <a:latin typeface="微软雅黑"/>
-                <a:ea typeface="微软雅黑"/>
-                <a:cs typeface="微软雅黑"/>
+                <a:latin typeface="微软雅黑" panose="020B0503020204020204" charset="-122"/>
+                <a:ea typeface="微软雅黑" panose="020B0503020204020204" charset="-122"/>
+                <a:cs typeface="微软雅黑" panose="020B0503020204020204" charset="-122"/>
               </a:rPr>
               <a:t>▪  </a:t>
             </a:r>
@@ -7094,9 +7331,9 @@
                 <a:solidFill>
                   <a:srgbClr val="3B2B26"/>
                 </a:solidFill>
-                <a:latin typeface="微软雅黑"/>
-                <a:ea typeface="微软雅黑"/>
-                <a:cs typeface="微软雅黑"/>
+                <a:latin typeface="微软雅黑" panose="020B0503020204020204" charset="-122"/>
+                <a:ea typeface="微软雅黑" panose="020B0503020204020204" charset="-122"/>
+                <a:cs typeface="微软雅黑" panose="020B0503020204020204" charset="-122"/>
               </a:rPr>
               <a:t>状态看得见</a:t>
             </a:r>
@@ -7105,12 +7342,20 @@
                 <a:solidFill>
                   <a:srgbClr val="6B5850"/>
                 </a:solidFill>
-                <a:latin typeface="微软雅黑"/>
-                <a:ea typeface="微软雅黑"/>
-                <a:cs typeface="微软雅黑"/>
+                <a:latin typeface="微软雅黑" panose="020B0503020204020204" charset="-122"/>
+                <a:ea typeface="微软雅黑" panose="020B0503020204020204" charset="-122"/>
+                <a:cs typeface="微软雅黑" panose="020B0503020204020204" charset="-122"/>
               </a:rPr>
               <a:t>  状态页五个页签：现在 / 习惯 / 心里 / 提醒 / 记忆</a:t>
             </a:r>
+            <a:endParaRPr sz="1300" b="0">
+              <a:solidFill>
+                <a:srgbClr val="6B5850"/>
+              </a:solidFill>
+              <a:latin typeface="微软雅黑" panose="020B0503020204020204" charset="-122"/>
+              <a:ea typeface="微软雅黑" panose="020B0503020204020204" charset="-122"/>
+              <a:cs typeface="微软雅黑" panose="020B0503020204020204" charset="-122"/>
+            </a:endParaRPr>
           </a:p>
         </p:txBody>
       </p:sp>
@@ -7131,7 +7376,7 @@
           <a:noFill/>
         </p:spPr>
         <p:txBody>
-          <a:bodyPr wrap="square" anchor="t" lIns="0" rIns="0" tIns="0" bIns="0">
+          <a:bodyPr wrap="square" lIns="0" tIns="0" rIns="0" bIns="0" anchor="t">
             <a:spAutoFit/>
           </a:bodyPr>
           <a:lstStyle/>
@@ -7146,12 +7391,20 @@
                 <a:solidFill>
                   <a:srgbClr val="6B5850"/>
                 </a:solidFill>
-                <a:latin typeface="Arial"/>
-                <a:ea typeface="Arial"/>
-                <a:cs typeface="Arial"/>
+                <a:latin typeface="Arial" panose="020B0604020202020204"/>
+                <a:ea typeface="Arial" panose="020B0604020202020204"/>
+                <a:cs typeface="Arial" panose="020B0604020202020204"/>
               </a:rPr>
               <a:t>15</a:t>
             </a:r>
+            <a:endParaRPr sz="1000" b="0">
+              <a:solidFill>
+                <a:srgbClr val="6B5850"/>
+              </a:solidFill>
+              <a:latin typeface="Arial" panose="020B0604020202020204"/>
+              <a:ea typeface="Arial" panose="020B0604020202020204"/>
+              <a:cs typeface="Arial" panose="020B0604020202020204"/>
+            </a:endParaRPr>
           </a:p>
         </p:txBody>
       </p:sp>
@@ -7164,15 +7417,15 @@
           <p:nvPr/>
         </p:nvPicPr>
         <p:blipFill>
-          <a:blip r:embed="rId3"/>
+          <a:blip r:embed="rId1"/>
           <a:stretch>
             <a:fillRect/>
           </a:stretch>
         </p:blipFill>
         <p:spPr>
           <a:xfrm>
-            <a:off x="1802326" y="3931920"/>
-            <a:ext cx="4254270" cy="2697480"/>
+            <a:off x="306705" y="3325495"/>
+            <a:ext cx="5369560" cy="3404870"/>
           </a:xfrm>
           <a:prstGeom prst="rect">
             <a:avLst/>
@@ -7188,15 +7441,15 @@
           <p:nvPr/>
         </p:nvPicPr>
         <p:blipFill>
-          <a:blip r:embed="rId4"/>
+          <a:blip r:embed="rId2"/>
           <a:stretch>
             <a:fillRect/>
           </a:stretch>
         </p:blipFill>
         <p:spPr>
           <a:xfrm>
-            <a:off x="6221188" y="3931920"/>
-            <a:ext cx="4168180" cy="2697480"/>
+            <a:off x="5676265" y="3325495"/>
+            <a:ext cx="5327015" cy="3448050"/>
           </a:xfrm>
           <a:prstGeom prst="rect">
             <a:avLst/>
@@ -7212,7 +7465,7 @@
 </file>
 
 <file path=ppt/slides/slide16.xml><?xml version="1.0" encoding="utf-8"?>
-<p:sld xmlns:a="http://schemas.openxmlformats.org/drawingml/2006/main" xmlns:p="http://schemas.openxmlformats.org/presentationml/2006/main" xmlns:r="http://schemas.openxmlformats.org/officeDocument/2006/relationships">
+<p:sld xmlns:a="http://schemas.openxmlformats.org/drawingml/2006/main" xmlns:r="http://schemas.openxmlformats.org/officeDocument/2006/relationships" xmlns:p="http://schemas.openxmlformats.org/presentationml/2006/main">
   <p:cSld>
     <p:bg>
       <p:bgPr>
@@ -7246,7 +7499,7 @@
           <a:noFill/>
         </p:spPr>
         <p:txBody>
-          <a:bodyPr wrap="square" anchor="t" lIns="0" rIns="0" tIns="0" bIns="0">
+          <a:bodyPr wrap="square" lIns="0" tIns="0" rIns="0" bIns="0" anchor="t">
             <a:spAutoFit/>
           </a:bodyPr>
           <a:lstStyle/>
@@ -7261,12 +7514,20 @@
                 <a:solidFill>
                   <a:srgbClr val="3B2B26"/>
                 </a:solidFill>
-                <a:latin typeface="Arial"/>
-                <a:ea typeface="Arial"/>
-                <a:cs typeface="Arial"/>
+                <a:latin typeface="Arial" panose="020B0604020202020204"/>
+                <a:ea typeface="Arial" panose="020B0604020202020204"/>
+                <a:cs typeface="Arial" panose="020B0604020202020204"/>
               </a:rPr>
               <a:t>怎么做到的（三）：出桌面、上手机</a:t>
             </a:r>
+            <a:endParaRPr sz="3000" b="1">
+              <a:solidFill>
+                <a:srgbClr val="3B2B26"/>
+              </a:solidFill>
+              <a:latin typeface="Arial" panose="020B0604020202020204"/>
+              <a:ea typeface="Arial" panose="020B0604020202020204"/>
+              <a:cs typeface="Arial" panose="020B0604020202020204"/>
+            </a:endParaRPr>
           </a:p>
         </p:txBody>
       </p:sp>
@@ -7331,7 +7592,7 @@
           <a:noFill/>
         </p:spPr>
         <p:txBody>
-          <a:bodyPr wrap="square" anchor="t" lIns="0" rIns="0" tIns="0" bIns="0">
+          <a:bodyPr wrap="square" lIns="0" tIns="0" rIns="0" bIns="0" anchor="t">
             <a:spAutoFit/>
           </a:bodyPr>
           <a:lstStyle/>
@@ -7346,9 +7607,9 @@
                 <a:solidFill>
                   <a:srgbClr val="A03A35"/>
                 </a:solidFill>
-                <a:latin typeface="微软雅黑"/>
-                <a:ea typeface="微软雅黑"/>
-                <a:cs typeface="微软雅黑"/>
+                <a:latin typeface="微软雅黑" panose="020B0503020204020204" charset="-122"/>
+                <a:ea typeface="微软雅黑" panose="020B0503020204020204" charset="-122"/>
+                <a:cs typeface="微软雅黑" panose="020B0503020204020204" charset="-122"/>
               </a:rPr>
               <a:t>▪  </a:t>
             </a:r>
@@ -7357,9 +7618,9 @@
                 <a:solidFill>
                   <a:srgbClr val="3B2B26"/>
                 </a:solidFill>
-                <a:latin typeface="微软雅黑"/>
-                <a:ea typeface="微软雅黑"/>
-                <a:cs typeface="微软雅黑"/>
+                <a:latin typeface="微软雅黑" panose="020B0503020204020204" charset="-122"/>
+                <a:ea typeface="微软雅黑" panose="020B0503020204020204" charset="-122"/>
+                <a:cs typeface="微软雅黑" panose="020B0503020204020204" charset="-122"/>
               </a:rPr>
               <a:t>QQ / 微信桥接</a:t>
             </a:r>
@@ -7368,12 +7629,20 @@
                 <a:solidFill>
                   <a:srgbClr val="6B5850"/>
                 </a:solidFill>
-                <a:latin typeface="微软雅黑"/>
-                <a:ea typeface="微软雅黑"/>
-                <a:cs typeface="微软雅黑"/>
+                <a:latin typeface="微软雅黑" panose="020B0503020204020204" charset="-122"/>
+                <a:ea typeface="微软雅黑" panose="020B0503020204020204" charset="-122"/>
+                <a:cs typeface="微软雅黑" panose="020B0503020204020204" charset="-122"/>
               </a:rPr>
               <a:t>  同一套人设与记忆，在聊天软件里继续</a:t>
             </a:r>
+            <a:endParaRPr sz="1300" b="0">
+              <a:solidFill>
+                <a:srgbClr val="6B5850"/>
+              </a:solidFill>
+              <a:latin typeface="微软雅黑" panose="020B0503020204020204" charset="-122"/>
+              <a:ea typeface="微软雅黑" panose="020B0503020204020204" charset="-122"/>
+              <a:cs typeface="微软雅黑" panose="020B0503020204020204" charset="-122"/>
+            </a:endParaRPr>
           </a:p>
           <a:p>
             <a:pPr>
@@ -7386,9 +7655,9 @@
                 <a:solidFill>
                   <a:srgbClr val="A03A35"/>
                 </a:solidFill>
-                <a:latin typeface="微软雅黑"/>
-                <a:ea typeface="微软雅黑"/>
-                <a:cs typeface="微软雅黑"/>
+                <a:latin typeface="微软雅黑" panose="020B0503020204020204" charset="-122"/>
+                <a:ea typeface="微软雅黑" panose="020B0503020204020204" charset="-122"/>
+                <a:cs typeface="微软雅黑" panose="020B0503020204020204" charset="-122"/>
               </a:rPr>
               <a:t>▪  </a:t>
             </a:r>
@@ -7397,9 +7666,9 @@
                 <a:solidFill>
                   <a:srgbClr val="3B2B26"/>
                 </a:solidFill>
-                <a:latin typeface="微软雅黑"/>
-                <a:ea typeface="微软雅黑"/>
-                <a:cs typeface="微软雅黑"/>
+                <a:latin typeface="微软雅黑" panose="020B0503020204020204" charset="-122"/>
+                <a:ea typeface="微软雅黑" panose="020B0503020204020204" charset="-122"/>
+                <a:cs typeface="微软雅黑" panose="020B0503020204020204" charset="-122"/>
               </a:rPr>
               <a:t>立绘同步</a:t>
             </a:r>
@@ -7408,12 +7677,20 @@
                 <a:solidFill>
                   <a:srgbClr val="6B5850"/>
                 </a:solidFill>
-                <a:latin typeface="微软雅黑"/>
-                <a:ea typeface="微软雅黑"/>
-                <a:cs typeface="微软雅黑"/>
+                <a:latin typeface="微软雅黑" panose="020B0503020204020204" charset="-122"/>
+                <a:ea typeface="微软雅黑" panose="020B0503020204020204" charset="-122"/>
+                <a:cs typeface="微软雅黑" panose="020B0503020204020204" charset="-122"/>
               </a:rPr>
               <a:t>  QQ 侧发的图与桌宠穿的是同一件衣服</a:t>
             </a:r>
+            <a:endParaRPr sz="1300" b="0">
+              <a:solidFill>
+                <a:srgbClr val="6B5850"/>
+              </a:solidFill>
+              <a:latin typeface="微软雅黑" panose="020B0503020204020204" charset="-122"/>
+              <a:ea typeface="微软雅黑" panose="020B0503020204020204" charset="-122"/>
+              <a:cs typeface="微软雅黑" panose="020B0503020204020204" charset="-122"/>
+            </a:endParaRPr>
           </a:p>
           <a:p>
             <a:pPr>
@@ -7426,9 +7703,9 @@
                 <a:solidFill>
                   <a:srgbClr val="A03A35"/>
                 </a:solidFill>
-                <a:latin typeface="微软雅黑"/>
-                <a:ea typeface="微软雅黑"/>
-                <a:cs typeface="微软雅黑"/>
+                <a:latin typeface="微软雅黑" panose="020B0503020204020204" charset="-122"/>
+                <a:ea typeface="微软雅黑" panose="020B0503020204020204" charset="-122"/>
+                <a:cs typeface="微软雅黑" panose="020B0503020204020204" charset="-122"/>
               </a:rPr>
               <a:t>▪  </a:t>
             </a:r>
@@ -7437,9 +7714,9 @@
                 <a:solidFill>
                   <a:srgbClr val="3B2B26"/>
                 </a:solidFill>
-                <a:latin typeface="微软雅黑"/>
-                <a:ea typeface="微软雅黑"/>
-                <a:cs typeface="微软雅黑"/>
+                <a:latin typeface="微软雅黑" panose="020B0503020204020204" charset="-122"/>
+                <a:ea typeface="微软雅黑" panose="020B0503020204020204" charset="-122"/>
+                <a:cs typeface="微软雅黑" panose="020B0503020204020204" charset="-122"/>
               </a:rPr>
               <a:t>安卓端</a:t>
             </a:r>
@@ -7448,12 +7725,20 @@
                 <a:solidFill>
                   <a:srgbClr val="6B5850"/>
                 </a:solidFill>
-                <a:latin typeface="微软雅黑"/>
-                <a:ea typeface="微软雅黑"/>
-                <a:cs typeface="微软雅黑"/>
+                <a:latin typeface="微软雅黑" panose="020B0503020204020204" charset="-122"/>
+                <a:ea typeface="微软雅黑" panose="020B0503020204020204" charset="-122"/>
+                <a:cs typeface="微软雅黑" panose="020B0503020204020204" charset="-122"/>
               </a:rPr>
               <a:t>  手机侧走同一套后端协议，形象与记忆互通</a:t>
             </a:r>
+            <a:endParaRPr sz="1300" b="0">
+              <a:solidFill>
+                <a:srgbClr val="6B5850"/>
+              </a:solidFill>
+              <a:latin typeface="微软雅黑" panose="020B0503020204020204" charset="-122"/>
+              <a:ea typeface="微软雅黑" panose="020B0503020204020204" charset="-122"/>
+              <a:cs typeface="微软雅黑" panose="020B0503020204020204" charset="-122"/>
+            </a:endParaRPr>
           </a:p>
         </p:txBody>
       </p:sp>
@@ -7474,7 +7759,7 @@
           <a:noFill/>
         </p:spPr>
         <p:txBody>
-          <a:bodyPr wrap="square" anchor="t" lIns="0" rIns="0" tIns="0" bIns="0">
+          <a:bodyPr wrap="square" lIns="0" tIns="0" rIns="0" bIns="0" anchor="t">
             <a:spAutoFit/>
           </a:bodyPr>
           <a:lstStyle/>
@@ -7489,12 +7774,20 @@
                 <a:solidFill>
                   <a:srgbClr val="6B5850"/>
                 </a:solidFill>
-                <a:latin typeface="Arial"/>
-                <a:ea typeface="Arial"/>
-                <a:cs typeface="Arial"/>
+                <a:latin typeface="Arial" panose="020B0604020202020204"/>
+                <a:ea typeface="Arial" panose="020B0604020202020204"/>
+                <a:cs typeface="Arial" panose="020B0604020202020204"/>
               </a:rPr>
               <a:t>16</a:t>
             </a:r>
+            <a:endParaRPr sz="1000" b="0">
+              <a:solidFill>
+                <a:srgbClr val="6B5850"/>
+              </a:solidFill>
+              <a:latin typeface="Arial" panose="020B0604020202020204"/>
+              <a:ea typeface="Arial" panose="020B0604020202020204"/>
+              <a:cs typeface="Arial" panose="020B0604020202020204"/>
+            </a:endParaRPr>
           </a:p>
         </p:txBody>
       </p:sp>
@@ -7507,15 +7800,15 @@
           <p:nvPr/>
         </p:nvPicPr>
         <p:blipFill>
-          <a:blip r:embed="rId3"/>
+          <a:blip r:embed="rId1"/>
           <a:stretch>
             <a:fillRect/>
           </a:stretch>
         </p:blipFill>
         <p:spPr>
           <a:xfrm>
-            <a:off x="2617498" y="3931920"/>
-            <a:ext cx="4247551" cy="2697480"/>
+            <a:off x="824865" y="2865120"/>
+            <a:ext cx="5880100" cy="3734435"/>
           </a:xfrm>
           <a:prstGeom prst="rect">
             <a:avLst/>
@@ -7531,15 +7824,15 @@
           <p:nvPr/>
         </p:nvPicPr>
         <p:blipFill>
-          <a:blip r:embed="rId4"/>
+          <a:blip r:embed="rId2"/>
           <a:stretch>
             <a:fillRect/>
           </a:stretch>
         </p:blipFill>
         <p:spPr>
           <a:xfrm>
-            <a:off x="7029641" y="3931920"/>
-            <a:ext cx="1189982" cy="2697480"/>
+            <a:off x="6983095" y="838835"/>
+            <a:ext cx="2413635" cy="5473700"/>
           </a:xfrm>
           <a:prstGeom prst="rect">
             <a:avLst/>
@@ -7555,15 +7848,15 @@
           <p:nvPr/>
         </p:nvPicPr>
         <p:blipFill>
-          <a:blip r:embed="rId5"/>
+          <a:blip r:embed="rId3"/>
           <a:stretch>
             <a:fillRect/>
           </a:stretch>
         </p:blipFill>
         <p:spPr>
           <a:xfrm>
-            <a:off x="8384215" y="3931920"/>
-            <a:ext cx="1189982" cy="2697480"/>
+            <a:off x="9585960" y="803910"/>
+            <a:ext cx="2429510" cy="5508625"/>
           </a:xfrm>
           <a:prstGeom prst="rect">
             <a:avLst/>
@@ -7579,7 +7872,7 @@
 </file>
 
 <file path=ppt/slides/slide17.xml><?xml version="1.0" encoding="utf-8"?>
-<p:sld xmlns:a="http://schemas.openxmlformats.org/drawingml/2006/main" xmlns:p="http://schemas.openxmlformats.org/presentationml/2006/main" xmlns:r="http://schemas.openxmlformats.org/officeDocument/2006/relationships">
+<p:sld xmlns:a="http://schemas.openxmlformats.org/drawingml/2006/main" xmlns:r="http://schemas.openxmlformats.org/officeDocument/2006/relationships" xmlns:p="http://schemas.openxmlformats.org/presentationml/2006/main">
   <p:cSld>
     <p:bg>
       <p:bgPr>
@@ -7613,7 +7906,7 @@
           <a:noFill/>
         </p:spPr>
         <p:txBody>
-          <a:bodyPr wrap="square" anchor="t" lIns="0" rIns="0" tIns="0" bIns="0">
+          <a:bodyPr wrap="square" lIns="0" tIns="0" rIns="0" bIns="0" anchor="t">
             <a:spAutoFit/>
           </a:bodyPr>
           <a:lstStyle/>
@@ -7628,12 +7921,20 @@
                 <a:solidFill>
                   <a:srgbClr val="3B2B26"/>
                 </a:solidFill>
-                <a:latin typeface="Arial"/>
-                <a:ea typeface="Arial"/>
-                <a:cs typeface="Arial"/>
+                <a:latin typeface="Arial" panose="020B0604020202020204"/>
+                <a:ea typeface="Arial" panose="020B0604020202020204"/>
+                <a:cs typeface="Arial" panose="020B0604020202020204"/>
               </a:rPr>
               <a:t>工程质量：这套东西是“验得出来”的</a:t>
             </a:r>
+            <a:endParaRPr sz="3000" b="1">
+              <a:solidFill>
+                <a:srgbClr val="3B2B26"/>
+              </a:solidFill>
+              <a:latin typeface="Arial" panose="020B0604020202020204"/>
+              <a:ea typeface="Arial" panose="020B0604020202020204"/>
+              <a:cs typeface="Arial" panose="020B0604020202020204"/>
+            </a:endParaRPr>
           </a:p>
         </p:txBody>
       </p:sp>
@@ -7698,7 +7999,7 @@
           <a:noFill/>
         </p:spPr>
         <p:txBody>
-          <a:bodyPr wrap="square" anchor="t" lIns="0" rIns="0" tIns="0" bIns="0">
+          <a:bodyPr wrap="square" lIns="0" tIns="0" rIns="0" bIns="0" anchor="t">
             <a:spAutoFit/>
           </a:bodyPr>
           <a:lstStyle/>
@@ -7713,9 +8014,9 @@
                 <a:solidFill>
                   <a:srgbClr val="A03A35"/>
                 </a:solidFill>
-                <a:latin typeface="微软雅黑"/>
-                <a:ea typeface="微软雅黑"/>
-                <a:cs typeface="微软雅黑"/>
+                <a:latin typeface="微软雅黑" panose="020B0503020204020204" charset="-122"/>
+                <a:ea typeface="微软雅黑" panose="020B0503020204020204" charset="-122"/>
+                <a:cs typeface="微软雅黑" panose="020B0503020204020204" charset="-122"/>
               </a:rPr>
               <a:t>▪  </a:t>
             </a:r>
@@ -7724,9 +8025,9 @@
                 <a:solidFill>
                   <a:srgbClr val="3B2B26"/>
                 </a:solidFill>
-                <a:latin typeface="微软雅黑"/>
-                <a:ea typeface="微软雅黑"/>
-                <a:cs typeface="微软雅黑"/>
+                <a:latin typeface="微软雅黑" panose="020B0503020204020204" charset="-122"/>
+                <a:ea typeface="微软雅黑" panose="020B0503020204020204" charset="-122"/>
+                <a:cs typeface="微软雅黑" panose="020B0503020204020204" charset="-122"/>
               </a:rPr>
               <a:t>389 项自带自检</a:t>
             </a:r>
@@ -7735,12 +8036,20 @@
                 <a:solidFill>
                   <a:srgbClr val="6B5850"/>
                 </a:solidFill>
-                <a:latin typeface="微软雅黑"/>
-                <a:ea typeface="微软雅黑"/>
-                <a:cs typeface="微软雅黑"/>
+                <a:latin typeface="微软雅黑" panose="020B0503020204020204" charset="-122"/>
+                <a:ea typeface="微软雅黑" panose="020B0503020204020204" charset="-122"/>
+                <a:cs typeface="微软雅黑" panose="020B0503020204020204" charset="-122"/>
               </a:rPr>
               <a:t>  边界 / 配置契约 / 生命周期 / 前端一致性 / 语音链路</a:t>
             </a:r>
+            <a:endParaRPr sz="1300" b="0">
+              <a:solidFill>
+                <a:srgbClr val="6B5850"/>
+              </a:solidFill>
+              <a:latin typeface="微软雅黑" panose="020B0503020204020204" charset="-122"/>
+              <a:ea typeface="微软雅黑" panose="020B0503020204020204" charset="-122"/>
+              <a:cs typeface="微软雅黑" panose="020B0503020204020204" charset="-122"/>
+            </a:endParaRPr>
           </a:p>
           <a:p>
             <a:pPr>
@@ -7753,9 +8062,9 @@
                 <a:solidFill>
                   <a:srgbClr val="A03A35"/>
                 </a:solidFill>
-                <a:latin typeface="微软雅黑"/>
-                <a:ea typeface="微软雅黑"/>
-                <a:cs typeface="微软雅黑"/>
+                <a:latin typeface="微软雅黑" panose="020B0503020204020204" charset="-122"/>
+                <a:ea typeface="微软雅黑" panose="020B0503020204020204" charset="-122"/>
+                <a:cs typeface="微软雅黑" panose="020B0503020204020204" charset="-122"/>
               </a:rPr>
               <a:t>▪  </a:t>
             </a:r>
@@ -7764,9 +8073,9 @@
                 <a:solidFill>
                   <a:srgbClr val="3B2B26"/>
                 </a:solidFill>
-                <a:latin typeface="微软雅黑"/>
-                <a:ea typeface="微软雅黑"/>
-                <a:cs typeface="微软雅黑"/>
+                <a:latin typeface="微软雅黑" panose="020B0503020204020204" charset="-122"/>
+                <a:ea typeface="微软雅黑" panose="020B0503020204020204" charset="-122"/>
+                <a:cs typeface="微软雅黑" panose="020B0503020204020204" charset="-122"/>
               </a:rPr>
               <a:t>全绿</a:t>
             </a:r>
@@ -7775,12 +8084,20 @@
                 <a:solidFill>
                   <a:srgbClr val="6B5850"/>
                 </a:solidFill>
-                <a:latin typeface="微软雅黑"/>
-                <a:ea typeface="微软雅黑"/>
-                <a:cs typeface="微软雅黑"/>
+                <a:latin typeface="微软雅黑" panose="020B0503020204020204" charset="-122"/>
+                <a:ea typeface="微软雅黑" panose="020B0503020204020204" charset="-122"/>
+                <a:cs typeface="微软雅黑" panose="020B0503020204020204" charset="-122"/>
               </a:rPr>
               <a:t>  10 个测试文件全部通过，一条命令可复现</a:t>
             </a:r>
+            <a:endParaRPr sz="1300" b="0">
+              <a:solidFill>
+                <a:srgbClr val="6B5850"/>
+              </a:solidFill>
+              <a:latin typeface="微软雅黑" panose="020B0503020204020204" charset="-122"/>
+              <a:ea typeface="微软雅黑" panose="020B0503020204020204" charset="-122"/>
+              <a:cs typeface="微软雅黑" panose="020B0503020204020204" charset="-122"/>
+            </a:endParaRPr>
           </a:p>
           <a:p>
             <a:pPr>
@@ -7793,9 +8110,9 @@
                 <a:solidFill>
                   <a:srgbClr val="A03A35"/>
                 </a:solidFill>
-                <a:latin typeface="微软雅黑"/>
-                <a:ea typeface="微软雅黑"/>
-                <a:cs typeface="微软雅黑"/>
+                <a:latin typeface="微软雅黑" panose="020B0503020204020204" charset="-122"/>
+                <a:ea typeface="微软雅黑" panose="020B0503020204020204" charset="-122"/>
+                <a:cs typeface="微软雅黑" panose="020B0503020204020204" charset="-122"/>
               </a:rPr>
               <a:t>▪  </a:t>
             </a:r>
@@ -7804,9 +8121,9 @@
                 <a:solidFill>
                   <a:srgbClr val="3B2B26"/>
                 </a:solidFill>
-                <a:latin typeface="微软雅黑"/>
-                <a:ea typeface="微软雅黑"/>
-                <a:cs typeface="微软雅黑"/>
+                <a:latin typeface="微软雅黑" panose="020B0503020204020204" charset="-122"/>
+                <a:ea typeface="微软雅黑" panose="020B0503020204020204" charset="-122"/>
+                <a:cs typeface="微软雅黑" panose="020B0503020204020204" charset="-122"/>
               </a:rPr>
               <a:t>看得见的证据</a:t>
             </a:r>
@@ -7815,12 +8132,20 @@
                 <a:solidFill>
                   <a:srgbClr val="6B5850"/>
                 </a:solidFill>
-                <a:latin typeface="微软雅黑"/>
-                <a:ea typeface="微软雅黑"/>
-                <a:cs typeface="微软雅黑"/>
+                <a:latin typeface="微软雅黑" panose="020B0503020204020204" charset="-122"/>
+                <a:ea typeface="微软雅黑" panose="020B0503020204020204" charset="-122"/>
+                <a:cs typeface="微软雅黑" panose="020B0503020204020204" charset="-122"/>
               </a:rPr>
               <a:t>  像素级验收：立绘底色、换装差异都用图像摘要比对</a:t>
             </a:r>
+            <a:endParaRPr sz="1300" b="0">
+              <a:solidFill>
+                <a:srgbClr val="6B5850"/>
+              </a:solidFill>
+              <a:latin typeface="微软雅黑" panose="020B0503020204020204" charset="-122"/>
+              <a:ea typeface="微软雅黑" panose="020B0503020204020204" charset="-122"/>
+              <a:cs typeface="微软雅黑" panose="020B0503020204020204" charset="-122"/>
+            </a:endParaRPr>
           </a:p>
           <a:p>
             <a:pPr>
@@ -7833,9 +8158,9 @@
                 <a:solidFill>
                   <a:srgbClr val="A03A35"/>
                 </a:solidFill>
-                <a:latin typeface="微软雅黑"/>
-                <a:ea typeface="微软雅黑"/>
-                <a:cs typeface="微软雅黑"/>
+                <a:latin typeface="微软雅黑" panose="020B0503020204020204" charset="-122"/>
+                <a:ea typeface="微软雅黑" panose="020B0503020204020204" charset="-122"/>
+                <a:cs typeface="微软雅黑" panose="020B0503020204020204" charset="-122"/>
               </a:rPr>
               <a:t>▪  </a:t>
             </a:r>
@@ -7844,9 +8169,9 @@
                 <a:solidFill>
                   <a:srgbClr val="3B2B26"/>
                 </a:solidFill>
-                <a:latin typeface="微软雅黑"/>
-                <a:ea typeface="微软雅黑"/>
-                <a:cs typeface="微软雅黑"/>
+                <a:latin typeface="微软雅黑" panose="020B0503020204020204" charset="-122"/>
+                <a:ea typeface="微软雅黑" panose="020B0503020204020204" charset="-122"/>
+                <a:cs typeface="微软雅黑" panose="020B0503020204020204" charset="-122"/>
               </a:rPr>
               <a:t>可诊断</a:t>
             </a:r>
@@ -7855,12 +8180,20 @@
                 <a:solidFill>
                   <a:srgbClr val="6B5850"/>
                 </a:solidFill>
-                <a:latin typeface="微软雅黑"/>
-                <a:ea typeface="微软雅黑"/>
-                <a:cs typeface="微软雅黑"/>
+                <a:latin typeface="微软雅黑" panose="020B0503020204020204" charset="-122"/>
+                <a:ea typeface="微软雅黑" panose="020B0503020204020204" charset="-122"/>
+                <a:cs typeface="微软雅黑" panose="020B0503020204020204" charset="-122"/>
               </a:rPr>
               <a:t>  关键路径都有日志，出问题能定位到具体一环</a:t>
             </a:r>
+            <a:endParaRPr sz="1300" b="0">
+              <a:solidFill>
+                <a:srgbClr val="6B5850"/>
+              </a:solidFill>
+              <a:latin typeface="微软雅黑" panose="020B0503020204020204" charset="-122"/>
+              <a:ea typeface="微软雅黑" panose="020B0503020204020204" charset="-122"/>
+              <a:cs typeface="微软雅黑" panose="020B0503020204020204" charset="-122"/>
+            </a:endParaRPr>
           </a:p>
         </p:txBody>
       </p:sp>
@@ -7881,7 +8214,7 @@
           <a:noFill/>
         </p:spPr>
         <p:txBody>
-          <a:bodyPr wrap="square" anchor="t" lIns="0" rIns="0" tIns="0" bIns="0">
+          <a:bodyPr wrap="square" lIns="0" tIns="0" rIns="0" bIns="0" anchor="t">
             <a:spAutoFit/>
           </a:bodyPr>
           <a:lstStyle/>
@@ -7896,12 +8229,20 @@
                 <a:solidFill>
                   <a:srgbClr val="6B5850"/>
                 </a:solidFill>
-                <a:latin typeface="Arial"/>
-                <a:ea typeface="Arial"/>
-                <a:cs typeface="Arial"/>
+                <a:latin typeface="Arial" panose="020B0604020202020204"/>
+                <a:ea typeface="Arial" panose="020B0604020202020204"/>
+                <a:cs typeface="Arial" panose="020B0604020202020204"/>
               </a:rPr>
               <a:t>17</a:t>
             </a:r>
+            <a:endParaRPr sz="1000" b="0">
+              <a:solidFill>
+                <a:srgbClr val="6B5850"/>
+              </a:solidFill>
+              <a:latin typeface="Arial" panose="020B0604020202020204"/>
+              <a:ea typeface="Arial" panose="020B0604020202020204"/>
+              <a:cs typeface="Arial" panose="020B0604020202020204"/>
+            </a:endParaRPr>
           </a:p>
         </p:txBody>
       </p:sp>
@@ -7914,14 +8255,14 @@
           <p:nvPr/>
         </p:nvPicPr>
         <p:blipFill>
-          <a:blip r:embed="rId3"/>
+          <a:blip r:embed="rId1"/>
           <a:stretch>
             <a:fillRect/>
           </a:stretch>
         </p:blipFill>
         <p:spPr>
           <a:xfrm>
-            <a:off x="2723997" y="3931920"/>
+            <a:off x="2245842" y="3776345"/>
             <a:ext cx="6743700" cy="2697480"/>
           </a:xfrm>
           <a:prstGeom prst="rect">
@@ -7938,7 +8279,7 @@
 </file>
 
 <file path=ppt/slides/slide18.xml><?xml version="1.0" encoding="utf-8"?>
-<p:sld xmlns:a="http://schemas.openxmlformats.org/drawingml/2006/main" xmlns:p="http://schemas.openxmlformats.org/presentationml/2006/main" xmlns:r="http://schemas.openxmlformats.org/officeDocument/2006/relationships">
+<p:sld xmlns:a="http://schemas.openxmlformats.org/drawingml/2006/main" xmlns:r="http://schemas.openxmlformats.org/officeDocument/2006/relationships" xmlns:p="http://schemas.openxmlformats.org/presentationml/2006/main">
   <p:cSld>
     <p:bg>
       <p:bgPr>
@@ -7972,7 +8313,7 @@
           <a:noFill/>
         </p:spPr>
         <p:txBody>
-          <a:bodyPr wrap="square" anchor="t" lIns="0" rIns="0" tIns="0" bIns="0">
+          <a:bodyPr wrap="square" lIns="0" tIns="0" rIns="0" bIns="0" anchor="t">
             <a:spAutoFit/>
           </a:bodyPr>
           <a:lstStyle/>
@@ -7987,12 +8328,20 @@
                 <a:solidFill>
                   <a:srgbClr val="A03A35"/>
                 </a:solidFill>
-                <a:latin typeface="Arial"/>
-                <a:ea typeface="Arial"/>
-                <a:cs typeface="Arial"/>
+                <a:latin typeface="Arial" panose="020B0604020202020204"/>
+                <a:ea typeface="Arial" panose="020B0604020202020204"/>
+                <a:cs typeface="Arial" panose="020B0604020202020204"/>
               </a:rPr>
               <a:t>03</a:t>
             </a:r>
+            <a:endParaRPr sz="6000" b="1">
+              <a:solidFill>
+                <a:srgbClr val="A03A35"/>
+              </a:solidFill>
+              <a:latin typeface="Arial" panose="020B0604020202020204"/>
+              <a:ea typeface="Arial" panose="020B0604020202020204"/>
+              <a:cs typeface="Arial" panose="020B0604020202020204"/>
+            </a:endParaRPr>
           </a:p>
         </p:txBody>
       </p:sp>
@@ -8013,7 +8362,7 @@
           <a:noFill/>
         </p:spPr>
         <p:txBody>
-          <a:bodyPr wrap="square" anchor="t" lIns="0" rIns="0" tIns="0" bIns="0">
+          <a:bodyPr wrap="square" lIns="0" tIns="0" rIns="0" bIns="0" anchor="t">
             <a:spAutoFit/>
           </a:bodyPr>
           <a:lstStyle/>
@@ -8028,12 +8377,20 @@
                 <a:solidFill>
                   <a:srgbClr val="F7F1EA"/>
                 </a:solidFill>
-                <a:latin typeface="Arial"/>
-                <a:ea typeface="Arial"/>
-                <a:cs typeface="Arial"/>
+                <a:latin typeface="Arial" panose="020B0604020202020204"/>
+                <a:ea typeface="Arial" panose="020B0604020202020204"/>
+                <a:cs typeface="Arial" panose="020B0604020202020204"/>
               </a:rPr>
               <a:t>未来规划：从“桌面上”走向“在身边”</a:t>
             </a:r>
+            <a:endParaRPr sz="3400" b="1">
+              <a:solidFill>
+                <a:srgbClr val="F7F1EA"/>
+              </a:solidFill>
+              <a:latin typeface="Arial" panose="020B0604020202020204"/>
+              <a:ea typeface="Arial" panose="020B0604020202020204"/>
+              <a:cs typeface="Arial" panose="020B0604020202020204"/>
+            </a:endParaRPr>
           </a:p>
         </p:txBody>
       </p:sp>
@@ -8046,7 +8403,7 @@
 </file>
 
 <file path=ppt/slides/slide19.xml><?xml version="1.0" encoding="utf-8"?>
-<p:sld xmlns:a="http://schemas.openxmlformats.org/drawingml/2006/main" xmlns:p="http://schemas.openxmlformats.org/presentationml/2006/main" xmlns:r="http://schemas.openxmlformats.org/officeDocument/2006/relationships">
+<p:sld xmlns:a="http://schemas.openxmlformats.org/drawingml/2006/main" xmlns:r="http://schemas.openxmlformats.org/officeDocument/2006/relationships" xmlns:p="http://schemas.openxmlformats.org/presentationml/2006/main">
   <p:cSld>
     <p:bg>
       <p:bgPr>
@@ -8080,7 +8437,7 @@
           <a:noFill/>
         </p:spPr>
         <p:txBody>
-          <a:bodyPr wrap="square" anchor="t" lIns="0" rIns="0" tIns="0" bIns="0">
+          <a:bodyPr wrap="square" lIns="0" tIns="0" rIns="0" bIns="0" anchor="t">
             <a:spAutoFit/>
           </a:bodyPr>
           <a:lstStyle/>
@@ -8095,12 +8452,20 @@
                 <a:solidFill>
                   <a:srgbClr val="3B2B26"/>
                 </a:solidFill>
-                <a:latin typeface="Arial"/>
-                <a:ea typeface="Arial"/>
-                <a:cs typeface="Arial"/>
+                <a:latin typeface="Arial" panose="020B0604020202020204"/>
+                <a:ea typeface="Arial" panose="020B0604020202020204"/>
+                <a:cs typeface="Arial" panose="020B0604020202020204"/>
               </a:rPr>
               <a:t>近期：把体验做扎实</a:t>
             </a:r>
+            <a:endParaRPr sz="3000" b="1">
+              <a:solidFill>
+                <a:srgbClr val="3B2B26"/>
+              </a:solidFill>
+              <a:latin typeface="Arial" panose="020B0604020202020204"/>
+              <a:ea typeface="Arial" panose="020B0604020202020204"/>
+              <a:cs typeface="Arial" panose="020B0604020202020204"/>
+            </a:endParaRPr>
           </a:p>
         </p:txBody>
       </p:sp>
@@ -8165,7 +8530,7 @@
           <a:noFill/>
         </p:spPr>
         <p:txBody>
-          <a:bodyPr wrap="square" anchor="t" lIns="0" rIns="0" tIns="0" bIns="0">
+          <a:bodyPr wrap="square" lIns="0" tIns="0" rIns="0" bIns="0" anchor="t">
             <a:spAutoFit/>
           </a:bodyPr>
           <a:lstStyle/>
@@ -8180,9 +8545,9 @@
                 <a:solidFill>
                   <a:srgbClr val="A03A35"/>
                 </a:solidFill>
-                <a:latin typeface="微软雅黑"/>
-                <a:ea typeface="微软雅黑"/>
-                <a:cs typeface="微软雅黑"/>
+                <a:latin typeface="微软雅黑" panose="020B0503020204020204" charset="-122"/>
+                <a:ea typeface="微软雅黑" panose="020B0503020204020204" charset="-122"/>
+                <a:cs typeface="微软雅黑" panose="020B0503020204020204" charset="-122"/>
               </a:rPr>
               <a:t>▪  </a:t>
             </a:r>
@@ -8191,9 +8556,9 @@
                 <a:solidFill>
                   <a:srgbClr val="3B2B26"/>
                 </a:solidFill>
-                <a:latin typeface="微软雅黑"/>
-                <a:ea typeface="微软雅黑"/>
-                <a:cs typeface="微软雅黑"/>
+                <a:latin typeface="微软雅黑" panose="020B0503020204020204" charset="-122"/>
+                <a:ea typeface="微软雅黑" panose="020B0503020204020204" charset="-122"/>
+                <a:cs typeface="微软雅黑" panose="020B0503020204020204" charset="-122"/>
               </a:rPr>
               <a:t>手机端：真机验证与调优</a:t>
             </a:r>
@@ -8202,12 +8567,20 @@
                 <a:solidFill>
                   <a:srgbClr val="6B5850"/>
                 </a:solidFill>
-                <a:latin typeface="微软雅黑"/>
-                <a:ea typeface="微软雅黑"/>
-                <a:cs typeface="微软雅黑"/>
+                <a:latin typeface="微软雅黑" panose="020B0503020204020204" charset="-122"/>
+                <a:ea typeface="微软雅黑" panose="020B0503020204020204" charset="-122"/>
+                <a:cs typeface="微软雅黑" panose="020B0503020204020204" charset="-122"/>
               </a:rPr>
               <a:t>  功能已写好（含手部互动），近期重点是插上真机跑全链路并调准相机参数</a:t>
             </a:r>
+            <a:endParaRPr sz="1300" b="0">
+              <a:solidFill>
+                <a:srgbClr val="6B5850"/>
+              </a:solidFill>
+              <a:latin typeface="微软雅黑" panose="020B0503020204020204" charset="-122"/>
+              <a:ea typeface="微软雅黑" panose="020B0503020204020204" charset="-122"/>
+              <a:cs typeface="微软雅黑" panose="020B0503020204020204" charset="-122"/>
+            </a:endParaRPr>
           </a:p>
           <a:p>
             <a:pPr>
@@ -8220,9 +8593,9 @@
                 <a:solidFill>
                   <a:srgbClr val="A03A35"/>
                 </a:solidFill>
-                <a:latin typeface="微软雅黑"/>
-                <a:ea typeface="微软雅黑"/>
-                <a:cs typeface="微软雅黑"/>
+                <a:latin typeface="微软雅黑" panose="020B0503020204020204" charset="-122"/>
+                <a:ea typeface="微软雅黑" panose="020B0503020204020204" charset="-122"/>
+                <a:cs typeface="微软雅黑" panose="020B0503020204020204" charset="-122"/>
               </a:rPr>
               <a:t>▪  </a:t>
             </a:r>
@@ -8231,9 +8604,9 @@
                 <a:solidFill>
                   <a:srgbClr val="3B2B26"/>
                 </a:solidFill>
-                <a:latin typeface="微软雅黑"/>
-                <a:ea typeface="微软雅黑"/>
-                <a:cs typeface="微软雅黑"/>
+                <a:latin typeface="微软雅黑" panose="020B0503020204020204" charset="-122"/>
+                <a:ea typeface="微软雅黑" panose="020B0503020204020204" charset="-122"/>
+                <a:cs typeface="微软雅黑" panose="020B0503020204020204" charset="-122"/>
               </a:rPr>
               <a:t>形象扩展</a:t>
             </a:r>
@@ -8242,12 +8615,20 @@
                 <a:solidFill>
                   <a:srgbClr val="6B5850"/>
                 </a:solidFill>
-                <a:latin typeface="微软雅黑"/>
-                <a:ea typeface="微软雅黑"/>
-                <a:cs typeface="微软雅黑"/>
+                <a:latin typeface="微软雅黑" panose="020B0503020204020204" charset="-122"/>
+                <a:ea typeface="微软雅黑" panose="020B0503020204020204" charset="-122"/>
+                <a:cs typeface="微软雅黑" panose="020B0503020204020204" charset="-122"/>
               </a:rPr>
               <a:t>  3D 模型方案评估（先验证能不能跑起来，再谈建模成本）</a:t>
             </a:r>
+            <a:endParaRPr sz="1300" b="0">
+              <a:solidFill>
+                <a:srgbClr val="6B5850"/>
+              </a:solidFill>
+              <a:latin typeface="微软雅黑" panose="020B0503020204020204" charset="-122"/>
+              <a:ea typeface="微软雅黑" panose="020B0503020204020204" charset="-122"/>
+              <a:cs typeface="微软雅黑" panose="020B0503020204020204" charset="-122"/>
+            </a:endParaRPr>
           </a:p>
           <a:p>
             <a:pPr>
@@ -8260,9 +8641,9 @@
                 <a:solidFill>
                   <a:srgbClr val="A03A35"/>
                 </a:solidFill>
-                <a:latin typeface="微软雅黑"/>
-                <a:ea typeface="微软雅黑"/>
-                <a:cs typeface="微软雅黑"/>
+                <a:latin typeface="微软雅黑" panose="020B0503020204020204" charset="-122"/>
+                <a:ea typeface="微软雅黑" panose="020B0503020204020204" charset="-122"/>
+                <a:cs typeface="微软雅黑" panose="020B0503020204020204" charset="-122"/>
               </a:rPr>
               <a:t>▪  </a:t>
             </a:r>
@@ -8271,9 +8652,9 @@
                 <a:solidFill>
                   <a:srgbClr val="3B2B26"/>
                 </a:solidFill>
-                <a:latin typeface="微软雅黑"/>
-                <a:ea typeface="微软雅黑"/>
-                <a:cs typeface="微软雅黑"/>
+                <a:latin typeface="微软雅黑" panose="020B0503020204020204" charset="-122"/>
+                <a:ea typeface="微软雅黑" panose="020B0503020204020204" charset="-122"/>
+                <a:cs typeface="微软雅黑" panose="020B0503020204020204" charset="-122"/>
               </a:rPr>
               <a:t>多角色</a:t>
             </a:r>
@@ -8282,12 +8663,20 @@
                 <a:solidFill>
                   <a:srgbClr val="6B5850"/>
                 </a:solidFill>
-                <a:latin typeface="微软雅黑"/>
-                <a:ea typeface="微软雅黑"/>
-                <a:cs typeface="微软雅黑"/>
+                <a:latin typeface="微软雅黑" panose="020B0503020204020204" charset="-122"/>
+                <a:ea typeface="微软雅黑" panose="020B0503020204020204" charset="-122"/>
+                <a:cs typeface="微软雅黑" panose="020B0503020204020204" charset="-122"/>
               </a:rPr>
               <a:t>  一套引擎跑多个角色，各有各的记忆与声音</a:t>
             </a:r>
+            <a:endParaRPr sz="1300" b="0">
+              <a:solidFill>
+                <a:srgbClr val="6B5850"/>
+              </a:solidFill>
+              <a:latin typeface="微软雅黑" panose="020B0503020204020204" charset="-122"/>
+              <a:ea typeface="微软雅黑" panose="020B0503020204020204" charset="-122"/>
+              <a:cs typeface="微软雅黑" panose="020B0503020204020204" charset="-122"/>
+            </a:endParaRPr>
           </a:p>
         </p:txBody>
       </p:sp>
@@ -8308,7 +8697,7 @@
           <a:noFill/>
         </p:spPr>
         <p:txBody>
-          <a:bodyPr wrap="square" anchor="t" lIns="0" rIns="0" tIns="0" bIns="0">
+          <a:bodyPr wrap="square" lIns="0" tIns="0" rIns="0" bIns="0" anchor="t">
             <a:spAutoFit/>
           </a:bodyPr>
           <a:lstStyle/>
@@ -8323,33 +8712,41 @@
                 <a:solidFill>
                   <a:srgbClr val="6B5850"/>
                 </a:solidFill>
-                <a:latin typeface="Arial"/>
-                <a:ea typeface="Arial"/>
-                <a:cs typeface="Arial"/>
+                <a:latin typeface="Arial" panose="020B0604020202020204"/>
+                <a:ea typeface="Arial" panose="020B0604020202020204"/>
+                <a:cs typeface="Arial" panose="020B0604020202020204"/>
               </a:rPr>
               <a:t>19</a:t>
             </a:r>
+            <a:endParaRPr sz="1000" b="0">
+              <a:solidFill>
+                <a:srgbClr val="6B5850"/>
+              </a:solidFill>
+              <a:latin typeface="Arial" panose="020B0604020202020204"/>
+              <a:ea typeface="Arial" panose="020B0604020202020204"/>
+              <a:cs typeface="Arial" panose="020B0604020202020204"/>
+            </a:endParaRPr>
           </a:p>
         </p:txBody>
       </p:sp>
       <p:pic>
         <p:nvPicPr>
-          <p:cNvPr id="6" name="Picture 5" descr="S9-phone-home.jpg"/>
+          <p:cNvPr id="8" name="图片 7" descr="6e224a6525a33a0e4e1e26b7bd6dff9f"/>
           <p:cNvPicPr>
             <a:picLocks noChangeAspect="1"/>
           </p:cNvPicPr>
           <p:nvPr/>
         </p:nvPicPr>
         <p:blipFill>
-          <a:blip r:embed="rId3"/>
+          <a:blip r:embed="rId1"/>
           <a:stretch>
             <a:fillRect/>
           </a:stretch>
         </p:blipFill>
         <p:spPr>
           <a:xfrm>
-            <a:off x="4759644" y="3931920"/>
-            <a:ext cx="1189982" cy="2697480"/>
+            <a:off x="9195435" y="309245"/>
+            <a:ext cx="2668270" cy="6052820"/>
           </a:xfrm>
           <a:prstGeom prst="rect">
             <a:avLst/>
@@ -8358,22 +8755,22 @@
       </p:pic>
       <p:pic>
         <p:nvPicPr>
-          <p:cNvPr id="7" name="Picture 6" descr="S11-ar1.jpg"/>
+          <p:cNvPr id="9" name="图片 8" descr="5a77983141cfa0853f6b25b793bb712b"/>
           <p:cNvPicPr>
             <a:picLocks noChangeAspect="1"/>
           </p:cNvPicPr>
           <p:nvPr/>
         </p:nvPicPr>
         <p:blipFill>
-          <a:blip r:embed="rId4"/>
+          <a:blip r:embed="rId2"/>
           <a:stretch>
             <a:fillRect/>
           </a:stretch>
         </p:blipFill>
         <p:spPr>
           <a:xfrm>
-            <a:off x="6114218" y="3931920"/>
-            <a:ext cx="1317831" cy="2697480"/>
+            <a:off x="6572885" y="1913890"/>
+            <a:ext cx="2010410" cy="4559935"/>
           </a:xfrm>
           <a:prstGeom prst="rect">
             <a:avLst/>
@@ -8389,7 +8786,7 @@
 </file>
 
 <file path=ppt/slides/slide2.xml><?xml version="1.0" encoding="utf-8"?>
-<p:sld xmlns:a="http://schemas.openxmlformats.org/drawingml/2006/main" xmlns:p="http://schemas.openxmlformats.org/presentationml/2006/main" xmlns:r="http://schemas.openxmlformats.org/officeDocument/2006/relationships">
+<p:sld xmlns:a="http://schemas.openxmlformats.org/drawingml/2006/main" xmlns:r="http://schemas.openxmlformats.org/officeDocument/2006/relationships" xmlns:p="http://schemas.openxmlformats.org/presentationml/2006/main">
   <p:cSld>
     <p:bg>
       <p:bgPr>
@@ -8423,7 +8820,7 @@
           <a:noFill/>
         </p:spPr>
         <p:txBody>
-          <a:bodyPr wrap="square" anchor="t" lIns="0" rIns="0" tIns="0" bIns="0">
+          <a:bodyPr wrap="square" lIns="0" tIns="0" rIns="0" bIns="0" anchor="t">
             <a:spAutoFit/>
           </a:bodyPr>
           <a:lstStyle/>
@@ -8438,12 +8835,20 @@
                 <a:solidFill>
                   <a:srgbClr val="A03A35"/>
                 </a:solidFill>
-                <a:latin typeface="Arial"/>
-                <a:ea typeface="Arial"/>
-                <a:cs typeface="Arial"/>
+                <a:latin typeface="Arial" panose="020B0604020202020204"/>
+                <a:ea typeface="Arial" panose="020B0604020202020204"/>
+                <a:cs typeface="Arial" panose="020B0604020202020204"/>
               </a:rPr>
               <a:t>01</a:t>
             </a:r>
+            <a:endParaRPr sz="6000" b="1">
+              <a:solidFill>
+                <a:srgbClr val="A03A35"/>
+              </a:solidFill>
+              <a:latin typeface="Arial" panose="020B0604020202020204"/>
+              <a:ea typeface="Arial" panose="020B0604020202020204"/>
+              <a:cs typeface="Arial" panose="020B0604020202020204"/>
+            </a:endParaRPr>
           </a:p>
         </p:txBody>
       </p:sp>
@@ -8464,7 +8869,7 @@
           <a:noFill/>
         </p:spPr>
         <p:txBody>
-          <a:bodyPr wrap="square" anchor="t" lIns="0" rIns="0" tIns="0" bIns="0">
+          <a:bodyPr wrap="square" lIns="0" tIns="0" rIns="0" bIns="0" anchor="t">
             <a:spAutoFit/>
           </a:bodyPr>
           <a:lstStyle/>
@@ -8479,12 +8884,20 @@
                 <a:solidFill>
                   <a:srgbClr val="F7F1EA"/>
                 </a:solidFill>
-                <a:latin typeface="Arial"/>
-                <a:ea typeface="Arial"/>
-                <a:cs typeface="Arial"/>
+                <a:latin typeface="Arial" panose="020B0604020202020204"/>
+                <a:ea typeface="Arial" panose="020B0604020202020204"/>
+                <a:cs typeface="Arial" panose="020B0604020202020204"/>
               </a:rPr>
               <a:t>桌宠市场：现在都做到了哪一步</a:t>
             </a:r>
+            <a:endParaRPr sz="3400" b="1">
+              <a:solidFill>
+                <a:srgbClr val="F7F1EA"/>
+              </a:solidFill>
+              <a:latin typeface="Arial" panose="020B0604020202020204"/>
+              <a:ea typeface="Arial" panose="020B0604020202020204"/>
+              <a:cs typeface="Arial" panose="020B0604020202020204"/>
+            </a:endParaRPr>
           </a:p>
         </p:txBody>
       </p:sp>
@@ -8497,7 +8910,7 @@
 </file>
 
 <file path=ppt/slides/slide20.xml><?xml version="1.0" encoding="utf-8"?>
-<p:sld xmlns:a="http://schemas.openxmlformats.org/drawingml/2006/main" xmlns:p="http://schemas.openxmlformats.org/presentationml/2006/main" xmlns:r="http://schemas.openxmlformats.org/officeDocument/2006/relationships">
+<p:sld xmlns:a="http://schemas.openxmlformats.org/drawingml/2006/main" xmlns:r="http://schemas.openxmlformats.org/officeDocument/2006/relationships" xmlns:p="http://schemas.openxmlformats.org/presentationml/2006/main">
   <p:cSld>
     <p:bg>
       <p:bgPr>
@@ -8523,7 +8936,7 @@
         <p:spPr>
           <a:xfrm>
             <a:off x="548640" y="502920"/>
-            <a:ext cx="11064240" cy="1005840"/>
+            <a:ext cx="11064240" cy="461645"/>
           </a:xfrm>
           <a:prstGeom prst="rect">
             <a:avLst/>
@@ -8531,7 +8944,7 @@
           <a:noFill/>
         </p:spPr>
         <p:txBody>
-          <a:bodyPr wrap="square" anchor="t" lIns="0" rIns="0" tIns="0" bIns="0">
+          <a:bodyPr wrap="square" lIns="0" tIns="0" rIns="0" bIns="0" anchor="t">
             <a:spAutoFit/>
           </a:bodyPr>
           <a:lstStyle/>
@@ -8546,12 +8959,20 @@
                 <a:solidFill>
                   <a:srgbClr val="3B2B26"/>
                 </a:solidFill>
-                <a:latin typeface="Arial"/>
-                <a:ea typeface="Arial"/>
-                <a:cs typeface="Arial"/>
-              </a:rPr>
-              <a:t>互动：从「看着你」到「看懂你」（已落地一半）</a:t>
-            </a:r>
+                <a:latin typeface="Arial" panose="020B0604020202020204"/>
+                <a:ea typeface="Arial" panose="020B0604020202020204"/>
+                <a:cs typeface="Arial" panose="020B0604020202020204"/>
+              </a:rPr>
+              <a:t>中期：另一条感知路线（毫米波）</a:t>
+            </a:r>
+            <a:endParaRPr sz="3000" b="1">
+              <a:solidFill>
+                <a:srgbClr val="3B2B26"/>
+              </a:solidFill>
+              <a:latin typeface="Arial" panose="020B0604020202020204"/>
+              <a:ea typeface="Arial" panose="020B0604020202020204"/>
+              <a:cs typeface="Arial" panose="020B0604020202020204"/>
+            </a:endParaRPr>
           </a:p>
         </p:txBody>
       </p:sp>
@@ -8608,7 +9029,7 @@
         <p:spPr>
           <a:xfrm>
             <a:off x="548640" y="1600200"/>
-            <a:ext cx="11064240" cy="4480560"/>
+            <a:ext cx="11064240" cy="1948815"/>
           </a:xfrm>
           <a:prstGeom prst="rect">
             <a:avLst/>
@@ -8616,7 +9037,7 @@
           <a:noFill/>
         </p:spPr>
         <p:txBody>
-          <a:bodyPr wrap="square" anchor="t" lIns="0" rIns="0" tIns="0" bIns="0">
+          <a:bodyPr wrap="square" lIns="0" tIns="0" rIns="0" bIns="0" anchor="t">
             <a:spAutoFit/>
           </a:bodyPr>
           <a:lstStyle/>
@@ -8631,9 +9052,9 @@
                 <a:solidFill>
                   <a:srgbClr val="A03A35"/>
                 </a:solidFill>
-                <a:latin typeface="微软雅黑"/>
-                <a:ea typeface="微软雅黑"/>
-                <a:cs typeface="微软雅黑"/>
+                <a:latin typeface="微软雅黑" panose="020B0503020204020204" charset="-122"/>
+                <a:ea typeface="微软雅黑" panose="020B0503020204020204" charset="-122"/>
+                <a:cs typeface="微软雅黑" panose="020B0503020204020204" charset="-122"/>
               </a:rPr>
               <a:t>▪  </a:t>
             </a:r>
@@ -8642,23 +9063,31 @@
                 <a:solidFill>
                   <a:srgbClr val="3B2B26"/>
                 </a:solidFill>
-                <a:latin typeface="微软雅黑"/>
-                <a:ea typeface="微软雅黑"/>
-                <a:cs typeface="微软雅黑"/>
-              </a:rPr>
-              <a:t>已实现：手部 21 关键点检测</a:t>
+                <a:latin typeface="微软雅黑" panose="020B0503020204020204" charset="-122"/>
+                <a:ea typeface="微软雅黑" panose="020B0503020204020204" charset="-122"/>
+                <a:cs typeface="微软雅黑" panose="020B0503020204020204" charset="-122"/>
+              </a:rPr>
+              <a:t>为什么看这条路</a:t>
             </a:r>
             <a:r>
               <a:rPr sz="1300" b="0">
                 <a:solidFill>
                   <a:srgbClr val="6B5850"/>
                 </a:solidFill>
-                <a:latin typeface="微软雅黑"/>
-                <a:ea typeface="微软雅黑"/>
-                <a:cs typeface="微软雅黑"/>
-              </a:rPr>
-              <a:t>  手机端接入 MediaPipe HandLandmarker；相机帧 → 关键点 → 命中她 → 反应，链路已通</a:t>
-            </a:r>
+                <a:latin typeface="微软雅黑" panose="020B0503020204020204" charset="-122"/>
+                <a:ea typeface="微软雅黑" panose="020B0503020204020204" charset="-122"/>
+                <a:cs typeface="微软雅黑" panose="020B0503020204020204" charset="-122"/>
+              </a:rPr>
+              <a:t>  不依赖光线与镜头、隐私友好、可全天运行；作为「她在不在、在做什么」的输入很合适</a:t>
+            </a:r>
+            <a:endParaRPr sz="1300" b="0">
+              <a:solidFill>
+                <a:srgbClr val="6B5850"/>
+              </a:solidFill>
+              <a:latin typeface="微软雅黑" panose="020B0503020204020204" charset="-122"/>
+              <a:ea typeface="微软雅黑" panose="020B0503020204020204" charset="-122"/>
+              <a:cs typeface="微软雅黑" panose="020B0503020204020204" charset="-122"/>
+            </a:endParaRPr>
           </a:p>
           <a:p>
             <a:pPr>
@@ -8671,9 +9100,9 @@
                 <a:solidFill>
                   <a:srgbClr val="A03A35"/>
                 </a:solidFill>
-                <a:latin typeface="微软雅黑"/>
-                <a:ea typeface="微软雅黑"/>
-                <a:cs typeface="微软雅黑"/>
+                <a:latin typeface="微软雅黑" panose="020B0503020204020204" charset="-122"/>
+                <a:ea typeface="微软雅黑" panose="020B0503020204020204" charset="-122"/>
+                <a:cs typeface="微软雅黑" panose="020B0503020204020204" charset="-122"/>
               </a:rPr>
               <a:t>▪  </a:t>
             </a:r>
@@ -8682,23 +9111,31 @@
                 <a:solidFill>
                   <a:srgbClr val="3B2B26"/>
                 </a:solidFill>
-                <a:latin typeface="微软雅黑"/>
-                <a:ea typeface="微软雅黑"/>
-                <a:cs typeface="微软雅黑"/>
-              </a:rPr>
-              <a:t>已实现：视线跟随</a:t>
+                <a:latin typeface="微软雅黑" panose="020B0503020204020204" charset="-122"/>
+                <a:ea typeface="微软雅黑" panose="020B0503020204020204" charset="-122"/>
+                <a:cs typeface="微软雅黑" panose="020B0503020204020204" charset="-122"/>
+              </a:rPr>
+              <a:t>但已经有人做了（一）</a:t>
             </a:r>
             <a:r>
               <a:rPr sz="1300" b="0">
                 <a:solidFill>
                   <a:srgbClr val="6B5850"/>
                 </a:solidFill>
-                <a:latin typeface="微软雅黑"/>
-                <a:ea typeface="微软雅黑"/>
-                <a:cs typeface="微软雅黑"/>
-              </a:rPr>
-              <a:t>  她自己「看着你的手」——关键点换算到屏幕后驱动 3D 角色的视线目标</a:t>
-            </a:r>
+                <a:latin typeface="微软雅黑" panose="020B0503020204020204" charset="-122"/>
+                <a:ea typeface="微软雅黑" panose="020B0503020204020204" charset="-122"/>
+                <a:cs typeface="微软雅黑" panose="020B0503020204020204" charset="-122"/>
+              </a:rPr>
+              <a:t>  mmHRI：毫米波做隐私友好人机交互，隔帘做机器人操作、动作识别 85%（2026-09）</a:t>
+            </a:r>
+            <a:endParaRPr sz="1300" b="0">
+              <a:solidFill>
+                <a:srgbClr val="6B5850"/>
+              </a:solidFill>
+              <a:latin typeface="微软雅黑" panose="020B0503020204020204" charset="-122"/>
+              <a:ea typeface="微软雅黑" panose="020B0503020204020204" charset="-122"/>
+              <a:cs typeface="微软雅黑" panose="020B0503020204020204" charset="-122"/>
+            </a:endParaRPr>
           </a:p>
           <a:p>
             <a:pPr>
@@ -8711,9 +9148,9 @@
                 <a:solidFill>
                   <a:srgbClr val="A03A35"/>
                 </a:solidFill>
-                <a:latin typeface="微软雅黑"/>
-                <a:ea typeface="微软雅黑"/>
-                <a:cs typeface="微软雅黑"/>
+                <a:latin typeface="微软雅黑" panose="020B0503020204020204" charset="-122"/>
+                <a:ea typeface="微软雅黑" panose="020B0503020204020204" charset="-122"/>
+                <a:cs typeface="微软雅黑" panose="020B0503020204020204" charset="-122"/>
               </a:rPr>
               <a:t>▪  </a:t>
             </a:r>
@@ -8722,23 +9159,31 @@
                 <a:solidFill>
                   <a:srgbClr val="3B2B26"/>
                 </a:solidFill>
-                <a:latin typeface="微软雅黑"/>
-                <a:ea typeface="微软雅黑"/>
-                <a:cs typeface="微软雅黑"/>
-              </a:rPr>
-              <a:t>已实现：三个手势</a:t>
+                <a:latin typeface="微软雅黑" panose="020B0503020204020204" charset="-122"/>
+                <a:ea typeface="微软雅黑" panose="020B0503020204020204" charset="-122"/>
+                <a:cs typeface="微软雅黑" panose="020B0503020204020204" charset="-122"/>
+              </a:rPr>
+              <a:t>但已经有人做了（二）</a:t>
             </a:r>
             <a:r>
               <a:rPr sz="1300" b="0">
                 <a:solidFill>
                   <a:srgbClr val="6B5850"/>
                 </a:solidFill>
-                <a:latin typeface="微软雅黑"/>
-                <a:ea typeface="微软雅黑"/>
-                <a:cs typeface="微软雅黑"/>
-              </a:rPr>
-              <a:t>  捏合=捏脸、握拳、挥手；各自独立去抖（21 个单测：9+6+6）</a:t>
-            </a:r>
+                <a:latin typeface="微软雅黑" panose="020B0503020204020204" charset="-122"/>
+                <a:ea typeface="微软雅黑" panose="020B0503020204020204" charset="-122"/>
+                <a:cs typeface="微软雅黑" panose="020B0503020204020204" charset="-122"/>
+              </a:rPr>
+              <a:t>  文心守护：60GHz 雷达 + 大模型，明说做「情感陪伴」与「存在即感知」，面向独居老人看护（开源）</a:t>
+            </a:r>
+            <a:endParaRPr sz="1300" b="0">
+              <a:solidFill>
+                <a:srgbClr val="6B5850"/>
+              </a:solidFill>
+              <a:latin typeface="微软雅黑" panose="020B0503020204020204" charset="-122"/>
+              <a:ea typeface="微软雅黑" panose="020B0503020204020204" charset="-122"/>
+              <a:cs typeface="微软雅黑" panose="020B0503020204020204" charset="-122"/>
+            </a:endParaRPr>
           </a:p>
           <a:p>
             <a:pPr>
@@ -8751,9 +9196,9 @@
                 <a:solidFill>
                   <a:srgbClr val="A03A35"/>
                 </a:solidFill>
-                <a:latin typeface="微软雅黑"/>
-                <a:ea typeface="微软雅黑"/>
-                <a:cs typeface="微软雅黑"/>
+                <a:latin typeface="微软雅黑" panose="020B0503020204020204" charset="-122"/>
+                <a:ea typeface="微软雅黑" panose="020B0503020204020204" charset="-122"/>
+                <a:cs typeface="微软雅黑" panose="020B0503020204020204" charset="-122"/>
               </a:rPr>
               <a:t>▪  </a:t>
             </a:r>
@@ -8762,23 +9207,31 @@
                 <a:solidFill>
                   <a:srgbClr val="3B2B26"/>
                 </a:solidFill>
-                <a:latin typeface="微软雅黑"/>
-                <a:ea typeface="微软雅黑"/>
-                <a:cs typeface="微软雅黑"/>
-              </a:rPr>
-              <a:t>下一步：更多手势 + 接进对话</a:t>
+                <a:latin typeface="微软雅黑" panose="020B0503020204020204" charset="-122"/>
+                <a:ea typeface="微软雅黑" panose="020B0503020204020204" charset="-122"/>
+                <a:cs typeface="微软雅黑" panose="020B0503020204020204" charset="-122"/>
+              </a:rPr>
+              <a:t>我们要做的那一小块</a:t>
             </a:r>
             <a:r>
               <a:rPr sz="1300" b="0">
                 <a:solidFill>
                   <a:srgbClr val="6B5850"/>
                 </a:solidFill>
-                <a:latin typeface="微软雅黑"/>
-                <a:ea typeface="微软雅黑"/>
-                <a:cs typeface="微软雅黑"/>
-              </a:rPr>
-              <a:t>  比心 / 指向某处；挥手时顺便触发一句问候，把动作和她的性格连起来</a:t>
-            </a:r>
+                <a:latin typeface="微软雅黑" panose="020B0503020204020204" charset="-122"/>
+                <a:ea typeface="微软雅黑" panose="020B0503020204020204" charset="-122"/>
+                <a:cs typeface="微软雅黑" panose="020B0503020204020204" charset="-122"/>
+              </a:rPr>
+              <a:t>  变量换成角色的人格连续性，指标换成关系感知与打扰容忍度；对象是二次元角色，形态是她住在桌面/手机/IM 里</a:t>
+            </a:r>
+            <a:endParaRPr sz="1300" b="0">
+              <a:solidFill>
+                <a:srgbClr val="6B5850"/>
+              </a:solidFill>
+              <a:latin typeface="微软雅黑" panose="020B0503020204020204" charset="-122"/>
+              <a:ea typeface="微软雅黑" panose="020B0503020204020204" charset="-122"/>
+              <a:cs typeface="微软雅黑" panose="020B0503020204020204" charset="-122"/>
+            </a:endParaRPr>
           </a:p>
           <a:p>
             <a:pPr>
@@ -8791,9 +9244,9 @@
                 <a:solidFill>
                   <a:srgbClr val="A03A35"/>
                 </a:solidFill>
-                <a:latin typeface="微软雅黑"/>
-                <a:ea typeface="微软雅黑"/>
-                <a:cs typeface="微软雅黑"/>
+                <a:latin typeface="微软雅黑" panose="020B0503020204020204" charset="-122"/>
+                <a:ea typeface="微软雅黑" panose="020B0503020204020204" charset="-122"/>
+                <a:cs typeface="微软雅黑" panose="020B0503020204020204" charset="-122"/>
               </a:rPr>
               <a:t>▪  </a:t>
             </a:r>
@@ -8802,23 +9255,31 @@
                 <a:solidFill>
                   <a:srgbClr val="3B2B26"/>
                 </a:solidFill>
-                <a:latin typeface="微软雅黑"/>
-                <a:ea typeface="微软雅黑"/>
-                <a:cs typeface="微软雅黑"/>
-              </a:rPr>
-              <a:t>还没做：真机调优</a:t>
+                <a:latin typeface="微软雅黑" panose="020B0503020204020204" charset="-122"/>
+                <a:ea typeface="微软雅黑" panose="020B0503020204020204" charset="-122"/>
+                <a:cs typeface="微软雅黑" panose="020B0503020204020204" charset="-122"/>
+              </a:rPr>
+              <a:t>怎么走</a:t>
             </a:r>
             <a:r>
               <a:rPr sz="1300" b="0">
                 <a:solidFill>
                   <a:srgbClr val="6B5850"/>
                 </a:solidFill>
-                <a:latin typeface="微软雅黑"/>
-                <a:ea typeface="微软雅黑"/>
-                <a:cs typeface="微软雅黑"/>
-              </a:rPr>
-              <a:t>  编译与单测都过了，但「手伸过去她眼睛是否跟着转」要真机确认；偏差只调相机</a:t>
-            </a:r>
+                <a:latin typeface="微软雅黑" panose="020B0503020204020204" charset="-122"/>
+                <a:ea typeface="微软雅黑" panose="020B0503020204020204" charset="-122"/>
+                <a:cs typeface="微软雅黑" panose="020B0503020204020204" charset="-122"/>
+              </a:rPr>
+              <a:t>  课题装置输出标准化参数流 → 先在桌面端驱动她 → 需要时再上手机；先做用户研究，不先堆硬件</a:t>
+            </a:r>
+            <a:endParaRPr sz="1300" b="0">
+              <a:solidFill>
+                <a:srgbClr val="6B5850"/>
+              </a:solidFill>
+              <a:latin typeface="微软雅黑" panose="020B0503020204020204" charset="-122"/>
+              <a:ea typeface="微软雅黑" panose="020B0503020204020204" charset="-122"/>
+              <a:cs typeface="微软雅黑" panose="020B0503020204020204" charset="-122"/>
+            </a:endParaRPr>
           </a:p>
         </p:txBody>
       </p:sp>
@@ -8839,7 +9300,7 @@
           <a:noFill/>
         </p:spPr>
         <p:txBody>
-          <a:bodyPr wrap="square" anchor="t" lIns="0" rIns="0" tIns="0" bIns="0">
+          <a:bodyPr wrap="square" lIns="0" tIns="0" rIns="0" bIns="0" anchor="t">
             <a:spAutoFit/>
           </a:bodyPr>
           <a:lstStyle/>
@@ -8854,39 +9315,23 @@
                 <a:solidFill>
                   <a:srgbClr val="6B5850"/>
                 </a:solidFill>
-                <a:latin typeface="Arial"/>
-                <a:ea typeface="Arial"/>
-                <a:cs typeface="Arial"/>
+                <a:latin typeface="Arial" panose="020B0604020202020204"/>
+                <a:ea typeface="Arial" panose="020B0604020202020204"/>
+                <a:cs typeface="Arial" panose="020B0604020202020204"/>
               </a:rPr>
               <a:t>20</a:t>
             </a:r>
-          </a:p>
-        </p:txBody>
-      </p:sp>
-      <p:pic>
-        <p:nvPicPr>
-          <p:cNvPr id="6" name="Picture 5" descr="S11-ar2.jpg"/>
-          <p:cNvPicPr>
-            <a:picLocks noChangeAspect="1"/>
-          </p:cNvPicPr>
-          <p:nvPr/>
-        </p:nvPicPr>
-        <p:blipFill>
-          <a:blip r:embed="rId3"/>
-          <a:stretch>
-            <a:fillRect/>
-          </a:stretch>
-        </p:blipFill>
-        <p:spPr>
-          <a:xfrm>
-            <a:off x="5500856" y="3931920"/>
-            <a:ext cx="1189982" cy="2697480"/>
-          </a:xfrm>
-          <a:prstGeom prst="rect">
-            <a:avLst/>
-          </a:prstGeom>
-        </p:spPr>
-      </p:pic>
+            <a:endParaRPr sz="1000" b="0">
+              <a:solidFill>
+                <a:srgbClr val="6B5850"/>
+              </a:solidFill>
+              <a:latin typeface="Arial" panose="020B0604020202020204"/>
+              <a:ea typeface="Arial" panose="020B0604020202020204"/>
+              <a:cs typeface="Arial" panose="020B0604020202020204"/>
+            </a:endParaRPr>
+          </a:p>
+        </p:txBody>
+      </p:sp>
     </p:spTree>
   </p:cSld>
   <p:clrMapOvr>
@@ -8896,7 +9341,7 @@
 </file>
 
 <file path=ppt/slides/slide21.xml><?xml version="1.0" encoding="utf-8"?>
-<p:sld xmlns:a="http://schemas.openxmlformats.org/drawingml/2006/main" xmlns:p="http://schemas.openxmlformats.org/presentationml/2006/main" xmlns:r="http://schemas.openxmlformats.org/officeDocument/2006/relationships">
+<p:sld xmlns:a="http://schemas.openxmlformats.org/drawingml/2006/main" xmlns:r="http://schemas.openxmlformats.org/officeDocument/2006/relationships" xmlns:p="http://schemas.openxmlformats.org/presentationml/2006/main">
   <p:cSld>
     <p:bg>
       <p:bgPr>
@@ -8930,7 +9375,7 @@
           <a:noFill/>
         </p:spPr>
         <p:txBody>
-          <a:bodyPr wrap="square" anchor="t" lIns="0" rIns="0" tIns="0" bIns="0">
+          <a:bodyPr wrap="square" lIns="0" tIns="0" rIns="0" bIns="0" anchor="t">
             <a:spAutoFit/>
           </a:bodyPr>
           <a:lstStyle/>
@@ -8945,12 +9390,20 @@
                 <a:solidFill>
                   <a:srgbClr val="3B2B26"/>
                 </a:solidFill>
-                <a:latin typeface="Arial"/>
-                <a:ea typeface="Arial"/>
-                <a:cs typeface="Arial"/>
-              </a:rPr>
-              <a:t>中期：另一条感知路线（毫米波）——已有人做，我们做个窄的</a:t>
-            </a:r>
+                <a:latin typeface="Arial" panose="020B0604020202020204"/>
+                <a:ea typeface="Arial" panose="020B0604020202020204"/>
+                <a:cs typeface="Arial" panose="020B0604020202020204"/>
+              </a:rPr>
+              <a:t>互动：从「看着你」到「看懂你」（已落地一半）</a:t>
+            </a:r>
+            <a:endParaRPr sz="3000" b="1">
+              <a:solidFill>
+                <a:srgbClr val="3B2B26"/>
+              </a:solidFill>
+              <a:latin typeface="Arial" panose="020B0604020202020204"/>
+              <a:ea typeface="Arial" panose="020B0604020202020204"/>
+              <a:cs typeface="Arial" panose="020B0604020202020204"/>
+            </a:endParaRPr>
           </a:p>
         </p:txBody>
       </p:sp>
@@ -9015,7 +9468,7 @@
           <a:noFill/>
         </p:spPr>
         <p:txBody>
-          <a:bodyPr wrap="square" anchor="t" lIns="0" rIns="0" tIns="0" bIns="0">
+          <a:bodyPr wrap="square" lIns="0" tIns="0" rIns="0" bIns="0" anchor="t">
             <a:spAutoFit/>
           </a:bodyPr>
           <a:lstStyle/>
@@ -9030,9 +9483,9 @@
                 <a:solidFill>
                   <a:srgbClr val="A03A35"/>
                 </a:solidFill>
-                <a:latin typeface="微软雅黑"/>
-                <a:ea typeface="微软雅黑"/>
-                <a:cs typeface="微软雅黑"/>
+                <a:latin typeface="微软雅黑" panose="020B0503020204020204" charset="-122"/>
+                <a:ea typeface="微软雅黑" panose="020B0503020204020204" charset="-122"/>
+                <a:cs typeface="微软雅黑" panose="020B0503020204020204" charset="-122"/>
               </a:rPr>
               <a:t>▪  </a:t>
             </a:r>
@@ -9041,23 +9494,31 @@
                 <a:solidFill>
                   <a:srgbClr val="3B2B26"/>
                 </a:solidFill>
-                <a:latin typeface="微软雅黑"/>
-                <a:ea typeface="微软雅黑"/>
-                <a:cs typeface="微软雅黑"/>
-              </a:rPr>
-              <a:t>为什么看这条路</a:t>
+                <a:latin typeface="微软雅黑" panose="020B0503020204020204" charset="-122"/>
+                <a:ea typeface="微软雅黑" panose="020B0503020204020204" charset="-122"/>
+                <a:cs typeface="微软雅黑" panose="020B0503020204020204" charset="-122"/>
+              </a:rPr>
+              <a:t>已实现：手部 21 关键点检测</a:t>
             </a:r>
             <a:r>
               <a:rPr sz="1300" b="0">
                 <a:solidFill>
                   <a:srgbClr val="6B5850"/>
                 </a:solidFill>
-                <a:latin typeface="微软雅黑"/>
-                <a:ea typeface="微软雅黑"/>
-                <a:cs typeface="微软雅黑"/>
-              </a:rPr>
-              <a:t>  不依赖光线与镜头、隐私友好、可全天运行；作为「她在不在、在做什么」的输入很合适</a:t>
-            </a:r>
+                <a:latin typeface="微软雅黑" panose="020B0503020204020204" charset="-122"/>
+                <a:ea typeface="微软雅黑" panose="020B0503020204020204" charset="-122"/>
+                <a:cs typeface="微软雅黑" panose="020B0503020204020204" charset="-122"/>
+              </a:rPr>
+              <a:t>  手机端接入 MediaPipe HandLandmarker；相机帧 → 关键点 → 命中她 → 反应，链路已通</a:t>
+            </a:r>
+            <a:endParaRPr sz="1300" b="0">
+              <a:solidFill>
+                <a:srgbClr val="6B5850"/>
+              </a:solidFill>
+              <a:latin typeface="微软雅黑" panose="020B0503020204020204" charset="-122"/>
+              <a:ea typeface="微软雅黑" panose="020B0503020204020204" charset="-122"/>
+              <a:cs typeface="微软雅黑" panose="020B0503020204020204" charset="-122"/>
+            </a:endParaRPr>
           </a:p>
           <a:p>
             <a:pPr>
@@ -9070,9 +9531,9 @@
                 <a:solidFill>
                   <a:srgbClr val="A03A35"/>
                 </a:solidFill>
-                <a:latin typeface="微软雅黑"/>
-                <a:ea typeface="微软雅黑"/>
-                <a:cs typeface="微软雅黑"/>
+                <a:latin typeface="微软雅黑" panose="020B0503020204020204" charset="-122"/>
+                <a:ea typeface="微软雅黑" panose="020B0503020204020204" charset="-122"/>
+                <a:cs typeface="微软雅黑" panose="020B0503020204020204" charset="-122"/>
               </a:rPr>
               <a:t>▪  </a:t>
             </a:r>
@@ -9081,23 +9542,31 @@
                 <a:solidFill>
                   <a:srgbClr val="3B2B26"/>
                 </a:solidFill>
-                <a:latin typeface="微软雅黑"/>
-                <a:ea typeface="微软雅黑"/>
-                <a:cs typeface="微软雅黑"/>
-              </a:rPr>
-              <a:t>但已经有人做了（一）</a:t>
+                <a:latin typeface="微软雅黑" panose="020B0503020204020204" charset="-122"/>
+                <a:ea typeface="微软雅黑" panose="020B0503020204020204" charset="-122"/>
+                <a:cs typeface="微软雅黑" panose="020B0503020204020204" charset="-122"/>
+              </a:rPr>
+              <a:t>已实现：视线跟随</a:t>
             </a:r>
             <a:r>
               <a:rPr sz="1300" b="0">
                 <a:solidFill>
                   <a:srgbClr val="6B5850"/>
                 </a:solidFill>
-                <a:latin typeface="微软雅黑"/>
-                <a:ea typeface="微软雅黑"/>
-                <a:cs typeface="微软雅黑"/>
-              </a:rPr>
-              <a:t>  mmHRI：毫米波做隐私友好人机交互，隔帘做机器人操作、动作识别 85%（2026-09）</a:t>
-            </a:r>
+                <a:latin typeface="微软雅黑" panose="020B0503020204020204" charset="-122"/>
+                <a:ea typeface="微软雅黑" panose="020B0503020204020204" charset="-122"/>
+                <a:cs typeface="微软雅黑" panose="020B0503020204020204" charset="-122"/>
+              </a:rPr>
+              <a:t>  她自己「看着你的手」——关键点换算到屏幕后驱动 3D 角色的视线目标</a:t>
+            </a:r>
+            <a:endParaRPr sz="1300" b="0">
+              <a:solidFill>
+                <a:srgbClr val="6B5850"/>
+              </a:solidFill>
+              <a:latin typeface="微软雅黑" panose="020B0503020204020204" charset="-122"/>
+              <a:ea typeface="微软雅黑" panose="020B0503020204020204" charset="-122"/>
+              <a:cs typeface="微软雅黑" panose="020B0503020204020204" charset="-122"/>
+            </a:endParaRPr>
           </a:p>
           <a:p>
             <a:pPr>
@@ -9110,9 +9579,9 @@
                 <a:solidFill>
                   <a:srgbClr val="A03A35"/>
                 </a:solidFill>
-                <a:latin typeface="微软雅黑"/>
-                <a:ea typeface="微软雅黑"/>
-                <a:cs typeface="微软雅黑"/>
+                <a:latin typeface="微软雅黑" panose="020B0503020204020204" charset="-122"/>
+                <a:ea typeface="微软雅黑" panose="020B0503020204020204" charset="-122"/>
+                <a:cs typeface="微软雅黑" panose="020B0503020204020204" charset="-122"/>
               </a:rPr>
               <a:t>▪  </a:t>
             </a:r>
@@ -9121,23 +9590,31 @@
                 <a:solidFill>
                   <a:srgbClr val="3B2B26"/>
                 </a:solidFill>
-                <a:latin typeface="微软雅黑"/>
-                <a:ea typeface="微软雅黑"/>
-                <a:cs typeface="微软雅黑"/>
-              </a:rPr>
-              <a:t>但已经有人做了（二）</a:t>
+                <a:latin typeface="微软雅黑" panose="020B0503020204020204" charset="-122"/>
+                <a:ea typeface="微软雅黑" panose="020B0503020204020204" charset="-122"/>
+                <a:cs typeface="微软雅黑" panose="020B0503020204020204" charset="-122"/>
+              </a:rPr>
+              <a:t>已实现：三个手势</a:t>
             </a:r>
             <a:r>
               <a:rPr sz="1300" b="0">
                 <a:solidFill>
                   <a:srgbClr val="6B5850"/>
                 </a:solidFill>
-                <a:latin typeface="微软雅黑"/>
-                <a:ea typeface="微软雅黑"/>
-                <a:cs typeface="微软雅黑"/>
-              </a:rPr>
-              <a:t>  文心守护：60GHz 雷达 + 大模型，明说做「情感陪伴」与「存在即感知」，面向独居老人看护（开源）</a:t>
-            </a:r>
+                <a:latin typeface="微软雅黑" panose="020B0503020204020204" charset="-122"/>
+                <a:ea typeface="微软雅黑" panose="020B0503020204020204" charset="-122"/>
+                <a:cs typeface="微软雅黑" panose="020B0503020204020204" charset="-122"/>
+              </a:rPr>
+              <a:t>  捏合=捏脸、握拳、挥手；各自独立去抖（21 个单测：9+6+6）</a:t>
+            </a:r>
+            <a:endParaRPr sz="1300" b="0">
+              <a:solidFill>
+                <a:srgbClr val="6B5850"/>
+              </a:solidFill>
+              <a:latin typeface="微软雅黑" panose="020B0503020204020204" charset="-122"/>
+              <a:ea typeface="微软雅黑" panose="020B0503020204020204" charset="-122"/>
+              <a:cs typeface="微软雅黑" panose="020B0503020204020204" charset="-122"/>
+            </a:endParaRPr>
           </a:p>
           <a:p>
             <a:pPr>
@@ -9150,9 +9627,9 @@
                 <a:solidFill>
                   <a:srgbClr val="A03A35"/>
                 </a:solidFill>
-                <a:latin typeface="微软雅黑"/>
-                <a:ea typeface="微软雅黑"/>
-                <a:cs typeface="微软雅黑"/>
+                <a:latin typeface="微软雅黑" panose="020B0503020204020204" charset="-122"/>
+                <a:ea typeface="微软雅黑" panose="020B0503020204020204" charset="-122"/>
+                <a:cs typeface="微软雅黑" panose="020B0503020204020204" charset="-122"/>
               </a:rPr>
               <a:t>▪  </a:t>
             </a:r>
@@ -9161,23 +9638,31 @@
                 <a:solidFill>
                   <a:srgbClr val="3B2B26"/>
                 </a:solidFill>
-                <a:latin typeface="微软雅黑"/>
-                <a:ea typeface="微软雅黑"/>
-                <a:cs typeface="微软雅黑"/>
-              </a:rPr>
-              <a:t>所以我们不主张「首创」</a:t>
+                <a:latin typeface="微软雅黑" panose="020B0503020204020204" charset="-122"/>
+                <a:ea typeface="微软雅黑" panose="020B0503020204020204" charset="-122"/>
+                <a:cs typeface="微软雅黑" panose="020B0503020204020204" charset="-122"/>
+              </a:rPr>
+              <a:t>下一步：更多手势 + 接进对话</a:t>
             </a:r>
             <a:r>
               <a:rPr sz="1300" b="0">
                 <a:solidFill>
                   <a:srgbClr val="6B5850"/>
                 </a:solidFill>
-                <a:latin typeface="微软雅黑"/>
-                <a:ea typeface="微软雅黑"/>
-                <a:cs typeface="微软雅黑"/>
-              </a:rPr>
-              <a:t>  不写「第一次用毫米波做陪伴」——那两处已占，写了会被当场问倒</a:t>
-            </a:r>
+                <a:latin typeface="微软雅黑" panose="020B0503020204020204" charset="-122"/>
+                <a:ea typeface="微软雅黑" panose="020B0503020204020204" charset="-122"/>
+                <a:cs typeface="微软雅黑" panose="020B0503020204020204" charset="-122"/>
+              </a:rPr>
+              <a:t>  比心 / 指向某处；挥手时顺便触发一句问候，把动作和她的性格连起来</a:t>
+            </a:r>
+            <a:endParaRPr sz="1300" b="0">
+              <a:solidFill>
+                <a:srgbClr val="6B5850"/>
+              </a:solidFill>
+              <a:latin typeface="微软雅黑" panose="020B0503020204020204" charset="-122"/>
+              <a:ea typeface="微软雅黑" panose="020B0503020204020204" charset="-122"/>
+              <a:cs typeface="微软雅黑" panose="020B0503020204020204" charset="-122"/>
+            </a:endParaRPr>
           </a:p>
           <a:p>
             <a:pPr>
@@ -9190,9 +9675,9 @@
                 <a:solidFill>
                   <a:srgbClr val="A03A35"/>
                 </a:solidFill>
-                <a:latin typeface="微软雅黑"/>
-                <a:ea typeface="微软雅黑"/>
-                <a:cs typeface="微软雅黑"/>
+                <a:latin typeface="微软雅黑" panose="020B0503020204020204" charset="-122"/>
+                <a:ea typeface="微软雅黑" panose="020B0503020204020204" charset="-122"/>
+                <a:cs typeface="微软雅黑" panose="020B0503020204020204" charset="-122"/>
               </a:rPr>
               <a:t>▪  </a:t>
             </a:r>
@@ -9201,63 +9686,31 @@
                 <a:solidFill>
                   <a:srgbClr val="3B2B26"/>
                 </a:solidFill>
-                <a:latin typeface="微软雅黑"/>
-                <a:ea typeface="微软雅黑"/>
-                <a:cs typeface="微软雅黑"/>
-              </a:rPr>
-              <a:t>我们要做的那一小块</a:t>
+                <a:latin typeface="微软雅黑" panose="020B0503020204020204" charset="-122"/>
+                <a:ea typeface="微软雅黑" panose="020B0503020204020204" charset="-122"/>
+                <a:cs typeface="微软雅黑" panose="020B0503020204020204" charset="-122"/>
+              </a:rPr>
+              <a:t>还没做：真机调优</a:t>
             </a:r>
             <a:r>
               <a:rPr sz="1300" b="0">
                 <a:solidFill>
                   <a:srgbClr val="6B5850"/>
                 </a:solidFill>
-                <a:latin typeface="微软雅黑"/>
-                <a:ea typeface="微软雅黑"/>
-                <a:cs typeface="微软雅黑"/>
-              </a:rPr>
-              <a:t>  变量换成角色的人格连续性，指标换成关系感知与打扰容忍度；对象是二次元角色，形态是她住在桌面/手机/IM 里</a:t>
-            </a:r>
-          </a:p>
-          <a:p>
-            <a:pPr>
-              <a:spcAft>
-                <a:spcPts val="1400"/>
-              </a:spcAft>
-            </a:pPr>
-            <a:r>
-              <a:rPr sz="1600" b="0">
-                <a:solidFill>
-                  <a:srgbClr val="A03A35"/>
-                </a:solidFill>
-                <a:latin typeface="微软雅黑"/>
-                <a:ea typeface="微软雅黑"/>
-                <a:cs typeface="微软雅黑"/>
-              </a:rPr>
-              <a:t>▪  </a:t>
-            </a:r>
-            <a:r>
-              <a:rPr sz="1600" b="0">
-                <a:solidFill>
-                  <a:srgbClr val="3B2B26"/>
-                </a:solidFill>
-                <a:latin typeface="微软雅黑"/>
-                <a:ea typeface="微软雅黑"/>
-                <a:cs typeface="微软雅黑"/>
-              </a:rPr>
-              <a:t>怎么走</a:t>
-            </a:r>
-            <a:r>
-              <a:rPr sz="1300" b="0">
-                <a:solidFill>
-                  <a:srgbClr val="6B5850"/>
-                </a:solidFill>
-                <a:latin typeface="微软雅黑"/>
-                <a:ea typeface="微软雅黑"/>
-                <a:cs typeface="微软雅黑"/>
-              </a:rPr>
-              <a:t>  课题装置输出标准化参数流 → 先在桌面端驱动她 → 需要时再上手机；先做用户研究，不先堆硬件</a:t>
-            </a:r>
+                <a:latin typeface="微软雅黑" panose="020B0503020204020204" charset="-122"/>
+                <a:ea typeface="微软雅黑" panose="020B0503020204020204" charset="-122"/>
+                <a:cs typeface="微软雅黑" panose="020B0503020204020204" charset="-122"/>
+              </a:rPr>
+              <a:t>  编译与单测都过了，但「手伸过去她眼睛是否跟着转」要真机确认；偏差只调相机</a:t>
+            </a:r>
+            <a:endParaRPr sz="1300" b="0">
+              <a:solidFill>
+                <a:srgbClr val="6B5850"/>
+              </a:solidFill>
+              <a:latin typeface="微软雅黑" panose="020B0503020204020204" charset="-122"/>
+              <a:ea typeface="微软雅黑" panose="020B0503020204020204" charset="-122"/>
+              <a:cs typeface="微软雅黑" panose="020B0503020204020204" charset="-122"/>
+            </a:endParaRPr>
           </a:p>
         </p:txBody>
       </p:sp>
@@ -9278,7 +9731,7 @@
           <a:noFill/>
         </p:spPr>
         <p:txBody>
-          <a:bodyPr wrap="square" anchor="t" lIns="0" rIns="0" tIns="0" bIns="0">
+          <a:bodyPr wrap="square" lIns="0" tIns="0" rIns="0" bIns="0" anchor="t">
             <a:spAutoFit/>
           </a:bodyPr>
           <a:lstStyle/>
@@ -9293,15 +9746,71 @@
                 <a:solidFill>
                   <a:srgbClr val="6B5850"/>
                 </a:solidFill>
-                <a:latin typeface="Arial"/>
-                <a:ea typeface="Arial"/>
-                <a:cs typeface="Arial"/>
+                <a:latin typeface="Arial" panose="020B0604020202020204"/>
+                <a:ea typeface="Arial" panose="020B0604020202020204"/>
+                <a:cs typeface="Arial" panose="020B0604020202020204"/>
               </a:rPr>
               <a:t>21</a:t>
             </a:r>
-          </a:p>
-        </p:txBody>
-      </p:sp>
+            <a:endParaRPr sz="1000" b="0">
+              <a:solidFill>
+                <a:srgbClr val="6B5850"/>
+              </a:solidFill>
+              <a:latin typeface="Arial" panose="020B0604020202020204"/>
+              <a:ea typeface="Arial" panose="020B0604020202020204"/>
+              <a:cs typeface="Arial" panose="020B0604020202020204"/>
+            </a:endParaRPr>
+          </a:p>
+        </p:txBody>
+      </p:sp>
+      <p:pic>
+        <p:nvPicPr>
+          <p:cNvPr id="6" name="Picture 5" descr="S11-ar2.jpg"/>
+          <p:cNvPicPr>
+            <a:picLocks noChangeAspect="1"/>
+          </p:cNvPicPr>
+          <p:nvPr/>
+        </p:nvPicPr>
+        <p:blipFill>
+          <a:blip r:embed="rId1"/>
+          <a:stretch>
+            <a:fillRect/>
+          </a:stretch>
+        </p:blipFill>
+        <p:spPr>
+          <a:xfrm>
+            <a:off x="7438876" y="3599815"/>
+            <a:ext cx="1189982" cy="2697480"/>
+          </a:xfrm>
+          <a:prstGeom prst="rect">
+            <a:avLst/>
+          </a:prstGeom>
+        </p:spPr>
+      </p:pic>
+      <p:pic>
+        <p:nvPicPr>
+          <p:cNvPr id="7" name="Picture 6" descr="S11-ar1.jpg"/>
+          <p:cNvPicPr>
+            <a:picLocks noChangeAspect="1"/>
+          </p:cNvPicPr>
+          <p:nvPr/>
+        </p:nvPicPr>
+        <p:blipFill>
+          <a:blip r:embed="rId2"/>
+          <a:stretch>
+            <a:fillRect/>
+          </a:stretch>
+        </p:blipFill>
+        <p:spPr>
+          <a:xfrm>
+            <a:off x="9010015" y="1959610"/>
+            <a:ext cx="2118360" cy="4337685"/>
+          </a:xfrm>
+          <a:prstGeom prst="rect">
+            <a:avLst/>
+          </a:prstGeom>
+        </p:spPr>
+      </p:pic>
     </p:spTree>
   </p:cSld>
   <p:clrMapOvr>
@@ -9311,7 +9820,7 @@
 </file>
 
 <file path=ppt/slides/slide22.xml><?xml version="1.0" encoding="utf-8"?>
-<p:sld xmlns:a="http://schemas.openxmlformats.org/drawingml/2006/main" xmlns:p="http://schemas.openxmlformats.org/presentationml/2006/main" xmlns:r="http://schemas.openxmlformats.org/officeDocument/2006/relationships">
+<p:sld xmlns:a="http://schemas.openxmlformats.org/drawingml/2006/main" xmlns:r="http://schemas.openxmlformats.org/officeDocument/2006/relationships" xmlns:p="http://schemas.openxmlformats.org/presentationml/2006/main">
   <p:cSld>
     <p:bg>
       <p:bgPr>
@@ -9345,7 +9854,7 @@
           <a:noFill/>
         </p:spPr>
         <p:txBody>
-          <a:bodyPr wrap="square" anchor="t" lIns="0" rIns="0" tIns="0" bIns="0">
+          <a:bodyPr wrap="square" lIns="0" tIns="0" rIns="0" bIns="0" anchor="t">
             <a:spAutoFit/>
           </a:bodyPr>
           <a:lstStyle/>
@@ -9360,12 +9869,20 @@
                 <a:solidFill>
                   <a:srgbClr val="3B2B26"/>
                 </a:solidFill>
-                <a:latin typeface="Arial"/>
-                <a:ea typeface="Arial"/>
-                <a:cs typeface="Arial"/>
+                <a:latin typeface="Arial" panose="020B0604020202020204"/>
+                <a:ea typeface="Arial" panose="020B0604020202020204"/>
+                <a:cs typeface="Arial" panose="020B0604020202020204"/>
               </a:rPr>
               <a:t>远期：形态自由</a:t>
             </a:r>
+            <a:endParaRPr sz="3000" b="1">
+              <a:solidFill>
+                <a:srgbClr val="3B2B26"/>
+              </a:solidFill>
+              <a:latin typeface="Arial" panose="020B0604020202020204"/>
+              <a:ea typeface="Arial" panose="020B0604020202020204"/>
+              <a:cs typeface="Arial" panose="020B0604020202020204"/>
+            </a:endParaRPr>
           </a:p>
         </p:txBody>
       </p:sp>
@@ -9430,7 +9947,7 @@
           <a:noFill/>
         </p:spPr>
         <p:txBody>
-          <a:bodyPr wrap="square" anchor="t" lIns="0" rIns="0" tIns="0" bIns="0">
+          <a:bodyPr wrap="square" lIns="0" tIns="0" rIns="0" bIns="0" anchor="t">
             <a:spAutoFit/>
           </a:bodyPr>
           <a:lstStyle/>
@@ -9445,9 +9962,9 @@
                 <a:solidFill>
                   <a:srgbClr val="A03A35"/>
                 </a:solidFill>
-                <a:latin typeface="微软雅黑"/>
-                <a:ea typeface="微软雅黑"/>
-                <a:cs typeface="微软雅黑"/>
+                <a:latin typeface="微软雅黑" panose="020B0503020204020204" charset="-122"/>
+                <a:ea typeface="微软雅黑" panose="020B0503020204020204" charset="-122"/>
+                <a:cs typeface="微软雅黑" panose="020B0503020204020204" charset="-122"/>
               </a:rPr>
               <a:t>▪  </a:t>
             </a:r>
@@ -9456,9 +9973,9 @@
                 <a:solidFill>
                   <a:srgbClr val="3B2B26"/>
                 </a:solidFill>
-                <a:latin typeface="微软雅黑"/>
-                <a:ea typeface="微软雅黑"/>
-                <a:cs typeface="微软雅黑"/>
+                <a:latin typeface="微软雅黑" panose="020B0503020204020204" charset="-122"/>
+                <a:ea typeface="微软雅黑" panose="020B0503020204020204" charset="-122"/>
+                <a:cs typeface="微软雅黑" panose="020B0503020204020204" charset="-122"/>
               </a:rPr>
               <a:t>AR 呈现</a:t>
             </a:r>
@@ -9467,12 +9984,20 @@
                 <a:solidFill>
                   <a:srgbClr val="6B5850"/>
                 </a:solidFill>
-                <a:latin typeface="微软雅黑"/>
-                <a:ea typeface="微软雅黑"/>
-                <a:cs typeface="微软雅黑"/>
+                <a:latin typeface="微软雅黑" panose="020B0503020204020204" charset="-122"/>
+                <a:ea typeface="微软雅黑" panose="020B0503020204020204" charset="-122"/>
+                <a:cs typeface="微软雅黑" panose="020B0503020204020204" charset="-122"/>
               </a:rPr>
               <a:t>  目前同类多为 iPhone 生态，安卓侧仍是空白</a:t>
             </a:r>
+            <a:endParaRPr sz="1300" b="0">
+              <a:solidFill>
+                <a:srgbClr val="6B5850"/>
+              </a:solidFill>
+              <a:latin typeface="微软雅黑" panose="020B0503020204020204" charset="-122"/>
+              <a:ea typeface="微软雅黑" panose="020B0503020204020204" charset="-122"/>
+              <a:cs typeface="微软雅黑" panose="020B0503020204020204" charset="-122"/>
+            </a:endParaRPr>
           </a:p>
           <a:p>
             <a:pPr>
@@ -9485,9 +10010,9 @@
                 <a:solidFill>
                   <a:srgbClr val="A03A35"/>
                 </a:solidFill>
-                <a:latin typeface="微软雅黑"/>
-                <a:ea typeface="微软雅黑"/>
-                <a:cs typeface="微软雅黑"/>
+                <a:latin typeface="微软雅黑" panose="020B0503020204020204" charset="-122"/>
+                <a:ea typeface="微软雅黑" panose="020B0503020204020204" charset="-122"/>
+                <a:cs typeface="微软雅黑" panose="020B0503020204020204" charset="-122"/>
               </a:rPr>
               <a:t>▪  </a:t>
             </a:r>
@@ -9496,9 +10021,9 @@
                 <a:solidFill>
                   <a:srgbClr val="3B2B26"/>
                 </a:solidFill>
-                <a:latin typeface="微软雅黑"/>
-                <a:ea typeface="微软雅黑"/>
-                <a:cs typeface="微软雅黑"/>
+                <a:latin typeface="微软雅黑" panose="020B0503020204020204" charset="-122"/>
+                <a:ea typeface="微软雅黑" panose="020B0503020204020204" charset="-122"/>
+                <a:cs typeface="微软雅黑" panose="020B0503020204020204" charset="-122"/>
               </a:rPr>
               <a:t>系统级接入</a:t>
             </a:r>
@@ -9507,12 +10032,20 @@
                 <a:solidFill>
                   <a:srgbClr val="6B5850"/>
                 </a:solidFill>
-                <a:latin typeface="微软雅黑"/>
-                <a:ea typeface="微软雅黑"/>
-                <a:cs typeface="微软雅黑"/>
+                <a:latin typeface="微软雅黑" panose="020B0503020204020204" charset="-122"/>
+                <a:ea typeface="微软雅黑" panose="020B0503020204020204" charset="-122"/>
+                <a:cs typeface="微软雅黑" panose="020B0503020204020204" charset="-122"/>
               </a:rPr>
               <a:t>  希望她成为系统里的一个“常驻角色”，而非一个 App</a:t>
             </a:r>
+            <a:endParaRPr sz="1300" b="0">
+              <a:solidFill>
+                <a:srgbClr val="6B5850"/>
+              </a:solidFill>
+              <a:latin typeface="微软雅黑" panose="020B0503020204020204" charset="-122"/>
+              <a:ea typeface="微软雅黑" panose="020B0503020204020204" charset="-122"/>
+              <a:cs typeface="微软雅黑" panose="020B0503020204020204" charset="-122"/>
+            </a:endParaRPr>
           </a:p>
           <a:p>
             <a:pPr>
@@ -9525,9 +10058,9 @@
                 <a:solidFill>
                   <a:srgbClr val="A03A35"/>
                 </a:solidFill>
-                <a:latin typeface="微软雅黑"/>
-                <a:ea typeface="微软雅黑"/>
-                <a:cs typeface="微软雅黑"/>
+                <a:latin typeface="微软雅黑" panose="020B0503020204020204" charset="-122"/>
+                <a:ea typeface="微软雅黑" panose="020B0503020204020204" charset="-122"/>
+                <a:cs typeface="微软雅黑" panose="020B0503020204020204" charset="-122"/>
               </a:rPr>
               <a:t>▪  </a:t>
             </a:r>
@@ -9536,9 +10069,9 @@
                 <a:solidFill>
                   <a:srgbClr val="3B2B26"/>
                 </a:solidFill>
-                <a:latin typeface="微软雅黑"/>
-                <a:ea typeface="微软雅黑"/>
-                <a:cs typeface="微软雅黑"/>
+                <a:latin typeface="微软雅黑" panose="020B0503020204020204" charset="-122"/>
+                <a:ea typeface="微软雅黑" panose="020B0503020204020204" charset="-122"/>
+                <a:cs typeface="微软雅黑" panose="020B0503020204020204" charset="-122"/>
               </a:rPr>
               <a:t>开放生态</a:t>
             </a:r>
@@ -9547,12 +10080,20 @@
                 <a:solidFill>
                   <a:srgbClr val="6B5850"/>
                 </a:solidFill>
-                <a:latin typeface="微软雅黑"/>
-                <a:ea typeface="微软雅黑"/>
-                <a:cs typeface="微软雅黑"/>
+                <a:latin typeface="微软雅黑" panose="020B0503020204020204" charset="-122"/>
+                <a:ea typeface="微软雅黑" panose="020B0503020204020204" charset="-122"/>
+                <a:cs typeface="微软雅黑" panose="020B0503020204020204" charset="-122"/>
               </a:rPr>
               <a:t>  角色 / 语音 / 动作都以数据形式可替换</a:t>
             </a:r>
+            <a:endParaRPr sz="1300" b="0">
+              <a:solidFill>
+                <a:srgbClr val="6B5850"/>
+              </a:solidFill>
+              <a:latin typeface="微软雅黑" panose="020B0503020204020204" charset="-122"/>
+              <a:ea typeface="微软雅黑" panose="020B0503020204020204" charset="-122"/>
+              <a:cs typeface="微软雅黑" panose="020B0503020204020204" charset="-122"/>
+            </a:endParaRPr>
           </a:p>
         </p:txBody>
       </p:sp>
@@ -9573,7 +10114,7 @@
           <a:noFill/>
         </p:spPr>
         <p:txBody>
-          <a:bodyPr wrap="square" anchor="t" lIns="0" rIns="0" tIns="0" bIns="0">
+          <a:bodyPr wrap="square" lIns="0" tIns="0" rIns="0" bIns="0" anchor="t">
             <a:spAutoFit/>
           </a:bodyPr>
           <a:lstStyle/>
@@ -9588,39 +10129,23 @@
                 <a:solidFill>
                   <a:srgbClr val="6B5850"/>
                 </a:solidFill>
-                <a:latin typeface="Arial"/>
-                <a:ea typeface="Arial"/>
-                <a:cs typeface="Arial"/>
+                <a:latin typeface="Arial" panose="020B0604020202020204"/>
+                <a:ea typeface="Arial" panose="020B0604020202020204"/>
+                <a:cs typeface="Arial" panose="020B0604020202020204"/>
               </a:rPr>
               <a:t>22</a:t>
             </a:r>
-          </a:p>
-        </p:txBody>
-      </p:sp>
-      <p:pic>
-        <p:nvPicPr>
-          <p:cNvPr id="6" name="Picture 5" descr="S11-ar1.jpg"/>
-          <p:cNvPicPr>
-            <a:picLocks noChangeAspect="1"/>
-          </p:cNvPicPr>
-          <p:nvPr/>
-        </p:nvPicPr>
-        <p:blipFill>
-          <a:blip r:embed="rId3"/>
-          <a:stretch>
-            <a:fillRect/>
-          </a:stretch>
-        </p:blipFill>
-        <p:spPr>
-          <a:xfrm>
-            <a:off x="5436931" y="3931920"/>
-            <a:ext cx="1317831" cy="2697480"/>
-          </a:xfrm>
-          <a:prstGeom prst="rect">
-            <a:avLst/>
-          </a:prstGeom>
-        </p:spPr>
-      </p:pic>
+            <a:endParaRPr sz="1000" b="0">
+              <a:solidFill>
+                <a:srgbClr val="6B5850"/>
+              </a:solidFill>
+              <a:latin typeface="Arial" panose="020B0604020202020204"/>
+              <a:ea typeface="Arial" panose="020B0604020202020204"/>
+              <a:cs typeface="Arial" panose="020B0604020202020204"/>
+            </a:endParaRPr>
+          </a:p>
+        </p:txBody>
+      </p:sp>
     </p:spTree>
   </p:cSld>
   <p:clrMapOvr>
@@ -9630,7 +10155,7 @@
 </file>
 
 <file path=ppt/slides/slide23.xml><?xml version="1.0" encoding="utf-8"?>
-<p:sld xmlns:a="http://schemas.openxmlformats.org/drawingml/2006/main" xmlns:p="http://schemas.openxmlformats.org/presentationml/2006/main" xmlns:r="http://schemas.openxmlformats.org/officeDocument/2006/relationships">
+<p:sld xmlns:a="http://schemas.openxmlformats.org/drawingml/2006/main" xmlns:r="http://schemas.openxmlformats.org/officeDocument/2006/relationships" xmlns:p="http://schemas.openxmlformats.org/presentationml/2006/main">
   <p:cSld>
     <p:bg>
       <p:bgPr>
@@ -9664,7 +10189,7 @@
           <a:noFill/>
         </p:spPr>
         <p:txBody>
-          <a:bodyPr wrap="square" anchor="ctr" lIns="0" rIns="0" tIns="0" bIns="0">
+          <a:bodyPr wrap="square" lIns="0" tIns="0" rIns="0" bIns="0" anchor="ctr">
             <a:spAutoFit/>
           </a:bodyPr>
           <a:lstStyle/>
@@ -9682,12 +10207,20 @@
                 <a:solidFill>
                   <a:srgbClr val="3B2B26"/>
                 </a:solidFill>
-                <a:latin typeface="Arial"/>
-                <a:ea typeface="Arial"/>
-                <a:cs typeface="Arial"/>
+                <a:latin typeface="Arial" panose="020B0604020202020204"/>
+                <a:ea typeface="Arial" panose="020B0604020202020204"/>
+                <a:cs typeface="Arial" panose="020B0604020202020204"/>
               </a:rPr>
               <a:t>“先让她真的住进电脑里，再让她走到你身边”</a:t>
             </a:r>
+            <a:endParaRPr sz="2600" b="1">
+              <a:solidFill>
+                <a:srgbClr val="3B2B26"/>
+              </a:solidFill>
+              <a:latin typeface="Arial" panose="020B0604020202020204"/>
+              <a:ea typeface="Arial" panose="020B0604020202020204"/>
+              <a:cs typeface="Arial" panose="020B0604020202020204"/>
+            </a:endParaRPr>
           </a:p>
           <a:p>
             <a:pPr algn="ctr">
@@ -9700,12 +10233,20 @@
                 <a:solidFill>
                   <a:srgbClr val="6B5850"/>
                 </a:solidFill>
-                <a:latin typeface="Arial"/>
-                <a:ea typeface="Arial"/>
-                <a:cs typeface="Arial"/>
+                <a:latin typeface="Arial" panose="020B0604020202020204"/>
+                <a:ea typeface="Arial" panose="020B0604020202020204"/>
+                <a:cs typeface="Arial" panose="020B0604020202020204"/>
               </a:rPr>
               <a:t>—— 路线取舍：先做深关系，再谈形态自由</a:t>
             </a:r>
+            <a:endParaRPr sz="1400" b="0">
+              <a:solidFill>
+                <a:srgbClr val="6B5850"/>
+              </a:solidFill>
+              <a:latin typeface="Arial" panose="020B0604020202020204"/>
+              <a:ea typeface="Arial" panose="020B0604020202020204"/>
+              <a:cs typeface="Arial" panose="020B0604020202020204"/>
+            </a:endParaRPr>
           </a:p>
         </p:txBody>
       </p:sp>
@@ -9726,7 +10267,7 @@
           <a:noFill/>
         </p:spPr>
         <p:txBody>
-          <a:bodyPr wrap="square" anchor="t" lIns="0" rIns="0" tIns="0" bIns="0">
+          <a:bodyPr wrap="square" lIns="0" tIns="0" rIns="0" bIns="0" anchor="t">
             <a:spAutoFit/>
           </a:bodyPr>
           <a:lstStyle/>
@@ -9741,12 +10282,20 @@
                 <a:solidFill>
                   <a:srgbClr val="6B5850"/>
                 </a:solidFill>
-                <a:latin typeface="Arial"/>
-                <a:ea typeface="Arial"/>
-                <a:cs typeface="Arial"/>
+                <a:latin typeface="Arial" panose="020B0604020202020204"/>
+                <a:ea typeface="Arial" panose="020B0604020202020204"/>
+                <a:cs typeface="Arial" panose="020B0604020202020204"/>
               </a:rPr>
               <a:t>23</a:t>
             </a:r>
+            <a:endParaRPr sz="1000" b="0">
+              <a:solidFill>
+                <a:srgbClr val="6B5850"/>
+              </a:solidFill>
+              <a:latin typeface="Arial" panose="020B0604020202020204"/>
+              <a:ea typeface="Arial" panose="020B0604020202020204"/>
+              <a:cs typeface="Arial" panose="020B0604020202020204"/>
+            </a:endParaRPr>
           </a:p>
         </p:txBody>
       </p:sp>
@@ -9759,7 +10308,7 @@
 </file>
 
 <file path=ppt/slides/slide24.xml><?xml version="1.0" encoding="utf-8"?>
-<p:sld xmlns:a="http://schemas.openxmlformats.org/drawingml/2006/main" xmlns:p="http://schemas.openxmlformats.org/presentationml/2006/main" xmlns:r="http://schemas.openxmlformats.org/officeDocument/2006/relationships">
+<p:sld xmlns:a="http://schemas.openxmlformats.org/drawingml/2006/main" xmlns:r="http://schemas.openxmlformats.org/officeDocument/2006/relationships" xmlns:p="http://schemas.openxmlformats.org/presentationml/2006/main">
   <p:cSld>
     <p:bg>
       <p:bgPr>
@@ -9793,7 +10342,7 @@
           <a:noFill/>
         </p:spPr>
         <p:txBody>
-          <a:bodyPr wrap="square" anchor="ctr" lIns="0" rIns="0" tIns="0" bIns="0">
+          <a:bodyPr wrap="square" lIns="0" tIns="0" rIns="0" bIns="0" anchor="ctr">
             <a:spAutoFit/>
           </a:bodyPr>
           <a:lstStyle/>
@@ -9808,12 +10357,20 @@
                 <a:solidFill>
                   <a:srgbClr val="F7F1EA"/>
                 </a:solidFill>
-                <a:latin typeface="Arial"/>
-                <a:ea typeface="Arial"/>
-                <a:cs typeface="Arial"/>
+                <a:latin typeface="Arial" panose="020B0604020202020204"/>
+                <a:ea typeface="Arial" panose="020B0604020202020204"/>
+                <a:cs typeface="Arial" panose="020B0604020202020204"/>
               </a:rPr>
               <a:t>谢谢</a:t>
             </a:r>
+            <a:endParaRPr sz="4200" b="1">
+              <a:solidFill>
+                <a:srgbClr val="F7F1EA"/>
+              </a:solidFill>
+              <a:latin typeface="Arial" panose="020B0604020202020204"/>
+              <a:ea typeface="Arial" panose="020B0604020202020204"/>
+              <a:cs typeface="Arial" panose="020B0604020202020204"/>
+            </a:endParaRPr>
           </a:p>
           <a:p>
             <a:pPr algn="ctr">
@@ -9826,12 +10383,20 @@
                 <a:solidFill>
                   <a:srgbClr val="C9A35F"/>
                 </a:solidFill>
-                <a:latin typeface="Arial"/>
-                <a:ea typeface="Arial"/>
-                <a:cs typeface="Arial"/>
+                <a:latin typeface="Arial" panose="020B0604020202020204"/>
+                <a:ea typeface="Arial" panose="020B0604020202020204"/>
+                <a:cs typeface="Arial" panose="020B0604020202020204"/>
               </a:rPr>
               <a:t>现场演示：形象 · 换装 · 对话 · 记忆 · 桌面操作</a:t>
             </a:r>
+            <a:endParaRPr sz="1600" b="0">
+              <a:solidFill>
+                <a:srgbClr val="C9A35F"/>
+              </a:solidFill>
+              <a:latin typeface="Arial" panose="020B0604020202020204"/>
+              <a:ea typeface="Arial" panose="020B0604020202020204"/>
+              <a:cs typeface="Arial" panose="020B0604020202020204"/>
+            </a:endParaRPr>
           </a:p>
         </p:txBody>
       </p:sp>
@@ -9844,7 +10409,7 @@
 </file>
 
 <file path=ppt/slides/slide3.xml><?xml version="1.0" encoding="utf-8"?>
-<p:sld xmlns:a="http://schemas.openxmlformats.org/drawingml/2006/main" xmlns:p="http://schemas.openxmlformats.org/presentationml/2006/main" xmlns:r="http://schemas.openxmlformats.org/officeDocument/2006/relationships">
+<p:sld xmlns:a="http://schemas.openxmlformats.org/drawingml/2006/main" xmlns:r="http://schemas.openxmlformats.org/officeDocument/2006/relationships" xmlns:p="http://schemas.openxmlformats.org/presentationml/2006/main">
   <p:cSld>
     <p:bg>
       <p:bgPr>
@@ -9878,7 +10443,7 @@
           <a:noFill/>
         </p:spPr>
         <p:txBody>
-          <a:bodyPr wrap="square" anchor="t" lIns="0" rIns="0" tIns="0" bIns="0">
+          <a:bodyPr wrap="square" lIns="0" tIns="0" rIns="0" bIns="0" anchor="t">
             <a:spAutoFit/>
           </a:bodyPr>
           <a:lstStyle/>
@@ -9893,12 +10458,20 @@
                 <a:solidFill>
                   <a:srgbClr val="3B2B26"/>
                 </a:solidFill>
-                <a:latin typeface="Arial"/>
-                <a:ea typeface="Arial"/>
-                <a:cs typeface="Arial"/>
+                <a:latin typeface="Arial" panose="020B0604020202020204"/>
+                <a:ea typeface="Arial" panose="020B0604020202020204"/>
+                <a:cs typeface="Arial" panose="020B0604020202020204"/>
               </a:rPr>
               <a:t>2026：大厂集体入局，但走的是同一条线</a:t>
             </a:r>
+            <a:endParaRPr sz="3000" b="1">
+              <a:solidFill>
+                <a:srgbClr val="3B2B26"/>
+              </a:solidFill>
+              <a:latin typeface="Arial" panose="020B0604020202020204"/>
+              <a:ea typeface="Arial" panose="020B0604020202020204"/>
+              <a:cs typeface="Arial" panose="020B0604020202020204"/>
+            </a:endParaRPr>
           </a:p>
         </p:txBody>
       </p:sp>
@@ -9963,7 +10536,7 @@
           <a:noFill/>
         </p:spPr>
         <p:txBody>
-          <a:bodyPr wrap="square" anchor="t" lIns="0" rIns="0" tIns="0" bIns="0">
+          <a:bodyPr wrap="square" lIns="0" tIns="0" rIns="0" bIns="0" anchor="t">
             <a:spAutoFit/>
           </a:bodyPr>
           <a:lstStyle/>
@@ -9978,9 +10551,9 @@
                 <a:solidFill>
                   <a:srgbClr val="A03A35"/>
                 </a:solidFill>
-                <a:latin typeface="微软雅黑"/>
-                <a:ea typeface="微软雅黑"/>
-                <a:cs typeface="微软雅黑"/>
+                <a:latin typeface="微软雅黑" panose="020B0503020204020204" charset="-122"/>
+                <a:ea typeface="微软雅黑" panose="020B0503020204020204" charset="-122"/>
+                <a:cs typeface="微软雅黑" panose="020B0503020204020204" charset="-122"/>
               </a:rPr>
               <a:t>▪  </a:t>
             </a:r>
@@ -9989,9 +10562,9 @@
                 <a:solidFill>
                   <a:srgbClr val="3B2B26"/>
                 </a:solidFill>
-                <a:latin typeface="微软雅黑"/>
-                <a:ea typeface="微软雅黑"/>
-                <a:cs typeface="微软雅黑"/>
+                <a:latin typeface="微软雅黑" panose="020B0503020204020204" charset="-122"/>
+                <a:ea typeface="微软雅黑" panose="020B0503020204020204" charset="-122"/>
+                <a:cs typeface="微软雅黑" panose="020B0503020204020204" charset="-122"/>
               </a:rPr>
               <a:t>2026-04　Anthropic</a:t>
             </a:r>
@@ -10000,12 +10573,20 @@
                 <a:solidFill>
                   <a:srgbClr val="6B5850"/>
                 </a:solidFill>
-                <a:latin typeface="微软雅黑"/>
-                <a:ea typeface="微软雅黑"/>
-                <a:cs typeface="微软雅黑"/>
+                <a:latin typeface="微软雅黑" panose="020B0503020204020204" charset="-122"/>
+                <a:ea typeface="微软雅黑" panose="020B0503020204020204" charset="-122"/>
+                <a:cs typeface="微软雅黑" panose="020B0503020204020204" charset="-122"/>
               </a:rPr>
               <a:t>  Claude Code 加虚拟宠物 Buddy —— 陪着写代码</a:t>
             </a:r>
+            <a:endParaRPr sz="1300" b="0">
+              <a:solidFill>
+                <a:srgbClr val="6B5850"/>
+              </a:solidFill>
+              <a:latin typeface="微软雅黑" panose="020B0503020204020204" charset="-122"/>
+              <a:ea typeface="微软雅黑" panose="020B0503020204020204" charset="-122"/>
+              <a:cs typeface="微软雅黑" panose="020B0503020204020204" charset="-122"/>
+            </a:endParaRPr>
           </a:p>
           <a:p>
             <a:pPr>
@@ -10018,9 +10599,9 @@
                 <a:solidFill>
                   <a:srgbClr val="A03A35"/>
                 </a:solidFill>
-                <a:latin typeface="微软雅黑"/>
-                <a:ea typeface="微软雅黑"/>
-                <a:cs typeface="微软雅黑"/>
+                <a:latin typeface="微软雅黑" panose="020B0503020204020204" charset="-122"/>
+                <a:ea typeface="微软雅黑" panose="020B0503020204020204" charset="-122"/>
+                <a:cs typeface="微软雅黑" panose="020B0503020204020204" charset="-122"/>
               </a:rPr>
               <a:t>▪  </a:t>
             </a:r>
@@ -10029,9 +10610,9 @@
                 <a:solidFill>
                   <a:srgbClr val="3B2B26"/>
                 </a:solidFill>
-                <a:latin typeface="微软雅黑"/>
-                <a:ea typeface="微软雅黑"/>
-                <a:cs typeface="微软雅黑"/>
+                <a:latin typeface="微软雅黑" panose="020B0503020204020204" charset="-122"/>
+                <a:ea typeface="微软雅黑" panose="020B0503020204020204" charset="-122"/>
+                <a:cs typeface="微软雅黑" panose="020B0503020204020204" charset="-122"/>
               </a:rPr>
               <a:t>2026-04　元空AI（仓鼠元元）</a:t>
             </a:r>
@@ -10040,12 +10621,20 @@
                 <a:solidFill>
                   <a:srgbClr val="6B5850"/>
                 </a:solidFill>
-                <a:latin typeface="微软雅黑"/>
-                <a:ea typeface="微软雅黑"/>
-                <a:cs typeface="微软雅黑"/>
+                <a:latin typeface="微软雅黑" panose="020B0503020204020204" charset="-122"/>
+                <a:ea typeface="微软雅黑" panose="020B0503020204020204" charset="-122"/>
+                <a:cs typeface="微软雅黑" panose="020B0503020204020204" charset="-122"/>
               </a:rPr>
               <a:t>  自称“中国首个 AI 办公桌宠”，定位办公效率：划词即用、常驻多轮对话</a:t>
             </a:r>
+            <a:endParaRPr sz="1300" b="0">
+              <a:solidFill>
+                <a:srgbClr val="6B5850"/>
+              </a:solidFill>
+              <a:latin typeface="微软雅黑" panose="020B0503020204020204" charset="-122"/>
+              <a:ea typeface="微软雅黑" panose="020B0503020204020204" charset="-122"/>
+              <a:cs typeface="微软雅黑" panose="020B0503020204020204" charset="-122"/>
+            </a:endParaRPr>
           </a:p>
           <a:p>
             <a:pPr>
@@ -10058,9 +10647,9 @@
                 <a:solidFill>
                   <a:srgbClr val="A03A35"/>
                 </a:solidFill>
-                <a:latin typeface="微软雅黑"/>
-                <a:ea typeface="微软雅黑"/>
-                <a:cs typeface="微软雅黑"/>
+                <a:latin typeface="微软雅黑" panose="020B0503020204020204" charset="-122"/>
+                <a:ea typeface="微软雅黑" panose="020B0503020204020204" charset="-122"/>
+                <a:cs typeface="微软雅黑" panose="020B0503020204020204" charset="-122"/>
               </a:rPr>
               <a:t>▪  </a:t>
             </a:r>
@@ -10069,9 +10658,9 @@
                 <a:solidFill>
                   <a:srgbClr val="3B2B26"/>
                 </a:solidFill>
-                <a:latin typeface="微软雅黑"/>
-                <a:ea typeface="微软雅黑"/>
-                <a:cs typeface="微软雅黑"/>
+                <a:latin typeface="微软雅黑" panose="020B0503020204020204" charset="-122"/>
+                <a:ea typeface="微软雅黑" panose="020B0503020204020204" charset="-122"/>
+                <a:cs typeface="微软雅黑" panose="020B0503020204020204" charset="-122"/>
               </a:rPr>
               <a:t>2026-05　腾讯 WorkBuddy</a:t>
             </a:r>
@@ -10080,12 +10669,20 @@
                 <a:solidFill>
                   <a:srgbClr val="6B5850"/>
                 </a:solidFill>
-                <a:latin typeface="微软雅黑"/>
-                <a:ea typeface="微软雅黑"/>
-                <a:cs typeface="微软雅黑"/>
+                <a:latin typeface="微软雅黑" panose="020B0503020204020204" charset="-122"/>
+                <a:ea typeface="微软雅黑" panose="020B0503020204020204" charset="-122"/>
+                <a:cs typeface="微软雅黑" panose="020B0503020204020204" charset="-122"/>
               </a:rPr>
               <a:t>  上线养成玩法：积分 / 盲盒 / 装扮 / 派它去旅行</a:t>
             </a:r>
+            <a:endParaRPr sz="1300" b="0">
+              <a:solidFill>
+                <a:srgbClr val="6B5850"/>
+              </a:solidFill>
+              <a:latin typeface="微软雅黑" panose="020B0503020204020204" charset="-122"/>
+              <a:ea typeface="微软雅黑" panose="020B0503020204020204" charset="-122"/>
+              <a:cs typeface="微软雅黑" panose="020B0503020204020204" charset="-122"/>
+            </a:endParaRPr>
           </a:p>
           <a:p>
             <a:pPr>
@@ -10098,9 +10695,9 @@
                 <a:solidFill>
                   <a:srgbClr val="A03A35"/>
                 </a:solidFill>
-                <a:latin typeface="微软雅黑"/>
-                <a:ea typeface="微软雅黑"/>
-                <a:cs typeface="微软雅黑"/>
+                <a:latin typeface="微软雅黑" panose="020B0503020204020204" charset="-122"/>
+                <a:ea typeface="微软雅黑" panose="020B0503020204020204" charset="-122"/>
+                <a:cs typeface="微软雅黑" panose="020B0503020204020204" charset="-122"/>
               </a:rPr>
               <a:t>▪  </a:t>
             </a:r>
@@ -10109,9 +10706,9 @@
                 <a:solidFill>
                   <a:srgbClr val="3B2B26"/>
                 </a:solidFill>
-                <a:latin typeface="微软雅黑"/>
-                <a:ea typeface="微软雅黑"/>
-                <a:cs typeface="微软雅黑"/>
+                <a:latin typeface="微软雅黑" panose="020B0503020204020204" charset="-122"/>
+                <a:ea typeface="微软雅黑" panose="020B0503020204020204" charset="-122"/>
+                <a:cs typeface="微软雅黑" panose="020B0503020204020204" charset="-122"/>
               </a:rPr>
               <a:t>2026-09　腾讯 ×《和平精英》</a:t>
             </a:r>
@@ -10120,12 +10717,20 @@
                 <a:solidFill>
                   <a:srgbClr val="6B5850"/>
                 </a:solidFill>
-                <a:latin typeface="微软雅黑"/>
-                <a:ea typeface="微软雅黑"/>
-                <a:cs typeface="微软雅黑"/>
+                <a:latin typeface="微软雅黑" panose="020B0503020204020204" charset="-122"/>
+                <a:ea typeface="微软雅黑" panose="020B0503020204020204" charset="-122"/>
+                <a:cs typeface="微软雅黑" panose="020B0503020204020204" charset="-122"/>
               </a:rPr>
               <a:t>  Buddy 猫穿上游离子皮肤；开放平台首批 100+ 伙伴、10+ 品类</a:t>
             </a:r>
+            <a:endParaRPr sz="1300" b="0">
+              <a:solidFill>
+                <a:srgbClr val="6B5850"/>
+              </a:solidFill>
+              <a:latin typeface="微软雅黑" panose="020B0503020204020204" charset="-122"/>
+              <a:ea typeface="微软雅黑" panose="020B0503020204020204" charset="-122"/>
+              <a:cs typeface="微软雅黑" panose="020B0503020204020204" charset="-122"/>
+            </a:endParaRPr>
           </a:p>
           <a:p>
             <a:pPr>
@@ -10138,9 +10743,9 @@
                 <a:solidFill>
                   <a:srgbClr val="A03A35"/>
                 </a:solidFill>
-                <a:latin typeface="微软雅黑"/>
-                <a:ea typeface="微软雅黑"/>
-                <a:cs typeface="微软雅黑"/>
+                <a:latin typeface="微软雅黑" panose="020B0503020204020204" charset="-122"/>
+                <a:ea typeface="微软雅黑" panose="020B0503020204020204" charset="-122"/>
+                <a:cs typeface="微软雅黑" panose="020B0503020204020204" charset="-122"/>
               </a:rPr>
               <a:t>▪  </a:t>
             </a:r>
@@ -10149,9 +10754,9 @@
                 <a:solidFill>
                   <a:srgbClr val="3B2B26"/>
                 </a:solidFill>
-                <a:latin typeface="微软雅黑"/>
-                <a:ea typeface="微软雅黑"/>
-                <a:cs typeface="微软雅黑"/>
+                <a:latin typeface="微软雅黑" panose="020B0503020204020204" charset="-122"/>
+                <a:ea typeface="微软雅黑" panose="020B0503020204020204" charset="-122"/>
+                <a:cs typeface="微软雅黑" panose="020B0503020204020204" charset="-122"/>
               </a:rPr>
               <a:t>2026-03　PetClaw</a:t>
             </a:r>
@@ -10160,12 +10765,20 @@
                 <a:solidFill>
                   <a:srgbClr val="6B5850"/>
                 </a:solidFill>
-                <a:latin typeface="微软雅黑"/>
-                <a:ea typeface="微软雅黑"/>
-                <a:cs typeface="微软雅黑"/>
+                <a:latin typeface="微软雅黑" panose="020B0503020204020204" charset="-122"/>
+                <a:ea typeface="微软雅黑" panose="020B0503020204020204" charset="-122"/>
+                <a:cs typeface="微软雅黑" panose="020B0503020204020204" charset="-122"/>
               </a:rPr>
               <a:t>  自称 24 小时桌面伴侣：跨应用替你做事 + 长期记忆</a:t>
             </a:r>
+            <a:endParaRPr sz="1300" b="0">
+              <a:solidFill>
+                <a:srgbClr val="6B5850"/>
+              </a:solidFill>
+              <a:latin typeface="微软雅黑" panose="020B0503020204020204" charset="-122"/>
+              <a:ea typeface="微软雅黑" panose="020B0503020204020204" charset="-122"/>
+              <a:cs typeface="微软雅黑" panose="020B0503020204020204" charset="-122"/>
+            </a:endParaRPr>
           </a:p>
           <a:p>
             <a:pPr>
@@ -10178,9 +10791,9 @@
                 <a:solidFill>
                   <a:srgbClr val="A03A35"/>
                 </a:solidFill>
-                <a:latin typeface="微软雅黑"/>
-                <a:ea typeface="微软雅黑"/>
-                <a:cs typeface="微软雅黑"/>
+                <a:latin typeface="微软雅黑" panose="020B0503020204020204" charset="-122"/>
+                <a:ea typeface="微软雅黑" panose="020B0503020204020204" charset="-122"/>
+                <a:cs typeface="微软雅黑" panose="020B0503020204020204" charset="-122"/>
               </a:rPr>
               <a:t>▪  </a:t>
             </a:r>
@@ -10189,9 +10802,9 @@
                 <a:solidFill>
                   <a:srgbClr val="3B2B26"/>
                 </a:solidFill>
-                <a:latin typeface="微软雅黑"/>
-                <a:ea typeface="微软雅黑"/>
-                <a:cs typeface="微软雅黑"/>
+                <a:latin typeface="微软雅黑" panose="020B0503020204020204" charset="-122"/>
+                <a:ea typeface="微软雅黑" panose="020B0503020204020204" charset="-122"/>
+                <a:cs typeface="微软雅黑" panose="020B0503020204020204" charset="-122"/>
               </a:rPr>
               <a:t>读法：全部是「办公 / 生产力 + 一只通用宠物」</a:t>
             </a:r>
@@ -10200,12 +10813,20 @@
                 <a:solidFill>
                   <a:srgbClr val="6B5850"/>
                 </a:solidFill>
-                <a:latin typeface="微软雅黑"/>
-                <a:ea typeface="微软雅黑"/>
-                <a:cs typeface="微软雅黑"/>
+                <a:latin typeface="微软雅黑" panose="020B0503020204020204" charset="-122"/>
+                <a:ea typeface="微软雅黑" panose="020B0503020204020204" charset="-122"/>
+                <a:cs typeface="微软雅黑" panose="020B0503020204020204" charset="-122"/>
               </a:rPr>
               <a:t>  它们要的是任务；宠物是入口、是身份锚点 —— 但没有人负责回答“她是不是她本人”</a:t>
             </a:r>
+            <a:endParaRPr sz="1300" b="0">
+              <a:solidFill>
+                <a:srgbClr val="6B5850"/>
+              </a:solidFill>
+              <a:latin typeface="微软雅黑" panose="020B0503020204020204" charset="-122"/>
+              <a:ea typeface="微软雅黑" panose="020B0503020204020204" charset="-122"/>
+              <a:cs typeface="微软雅黑" panose="020B0503020204020204" charset="-122"/>
+            </a:endParaRPr>
           </a:p>
         </p:txBody>
       </p:sp>
@@ -10226,7 +10847,7 @@
           <a:noFill/>
         </p:spPr>
         <p:txBody>
-          <a:bodyPr wrap="square" anchor="t" lIns="0" rIns="0" tIns="0" bIns="0">
+          <a:bodyPr wrap="square" lIns="0" tIns="0" rIns="0" bIns="0" anchor="t">
             <a:spAutoFit/>
           </a:bodyPr>
           <a:lstStyle/>
@@ -10241,12 +10862,20 @@
                 <a:solidFill>
                   <a:srgbClr val="6B5850"/>
                 </a:solidFill>
-                <a:latin typeface="Arial"/>
-                <a:ea typeface="Arial"/>
-                <a:cs typeface="Arial"/>
+                <a:latin typeface="Arial" panose="020B0604020202020204"/>
+                <a:ea typeface="Arial" panose="020B0604020202020204"/>
+                <a:cs typeface="Arial" panose="020B0604020202020204"/>
               </a:rPr>
               <a:t>03</a:t>
             </a:r>
+            <a:endParaRPr sz="1000" b="0">
+              <a:solidFill>
+                <a:srgbClr val="6B5850"/>
+              </a:solidFill>
+              <a:latin typeface="Arial" panose="020B0604020202020204"/>
+              <a:ea typeface="Arial" panose="020B0604020202020204"/>
+              <a:cs typeface="Arial" panose="020B0604020202020204"/>
+            </a:endParaRPr>
           </a:p>
         </p:txBody>
       </p:sp>
@@ -10259,7 +10888,7 @@
 </file>
 
 <file path=ppt/slides/slide4.xml><?xml version="1.0" encoding="utf-8"?>
-<p:sld xmlns:a="http://schemas.openxmlformats.org/drawingml/2006/main" xmlns:p="http://schemas.openxmlformats.org/presentationml/2006/main" xmlns:r="http://schemas.openxmlformats.org/officeDocument/2006/relationships">
+<p:sld xmlns:a="http://schemas.openxmlformats.org/drawingml/2006/main" xmlns:r="http://schemas.openxmlformats.org/officeDocument/2006/relationships" xmlns:p="http://schemas.openxmlformats.org/presentationml/2006/main">
   <p:cSld>
     <p:bg>
       <p:bgPr>
@@ -10293,7 +10922,7 @@
           <a:noFill/>
         </p:spPr>
         <p:txBody>
-          <a:bodyPr wrap="square" anchor="t" lIns="0" rIns="0" tIns="0" bIns="0">
+          <a:bodyPr wrap="square" lIns="0" tIns="0" rIns="0" bIns="0" anchor="t">
             <a:spAutoFit/>
           </a:bodyPr>
           <a:lstStyle/>
@@ -10308,12 +10937,20 @@
                 <a:solidFill>
                   <a:srgbClr val="3B2B26"/>
                 </a:solidFill>
-                <a:latin typeface="Arial"/>
-                <a:ea typeface="Arial"/>
-                <a:cs typeface="Arial"/>
+                <a:latin typeface="Arial" panose="020B0604020202020204"/>
+                <a:ea typeface="Arial" panose="020B0604020202020204"/>
+                <a:cs typeface="Arial" panose="020B0604020202020204"/>
               </a:rPr>
               <a:t>市面上的四类做法</a:t>
             </a:r>
+            <a:endParaRPr sz="3000" b="1">
+              <a:solidFill>
+                <a:srgbClr val="3B2B26"/>
+              </a:solidFill>
+              <a:latin typeface="Arial" panose="020B0604020202020204"/>
+              <a:ea typeface="Arial" panose="020B0604020202020204"/>
+              <a:cs typeface="Arial" panose="020B0604020202020204"/>
+            </a:endParaRPr>
           </a:p>
         </p:txBody>
       </p:sp>
@@ -10378,7 +11015,7 @@
           <a:noFill/>
         </p:spPr>
         <p:txBody>
-          <a:bodyPr wrap="square" anchor="t" lIns="0" rIns="0" tIns="0" bIns="0">
+          <a:bodyPr wrap="square" lIns="0" tIns="0" rIns="0" bIns="0" anchor="t">
             <a:spAutoFit/>
           </a:bodyPr>
           <a:lstStyle/>
@@ -10393,34 +11030,42 @@
                 <a:solidFill>
                   <a:srgbClr val="A03A35"/>
                 </a:solidFill>
-                <a:latin typeface="微软雅黑"/>
-                <a:ea typeface="微软雅黑"/>
-                <a:cs typeface="微软雅黑"/>
-              </a:rPr>
-              <a:t>▪  </a:t>
+                <a:latin typeface="微软雅黑" panose="020B0503020204020204" charset="-122"/>
+                <a:ea typeface="微软雅黑" panose="020B0503020204020204" charset="-122"/>
+                <a:cs typeface="微软雅黑" panose="020B0503020204020204" charset="-122"/>
+              </a:rPr>
+              <a:t>▪  开源桌宠  Shimeji / Ukagaka（SSP） / VPet / uDesktopMascot</a:t>
             </a:r>
             <a:r>
               <a:rPr sz="1600" b="0">
                 <a:solidFill>
                   <a:srgbClr val="3B2B26"/>
                 </a:solidFill>
-                <a:latin typeface="微软雅黑"/>
-                <a:ea typeface="微软雅黑"/>
-                <a:cs typeface="微软雅黑"/>
-              </a:rPr>
-              <a:t>开源桌宠</a:t>
+                <a:latin typeface="微软雅黑" panose="020B0503020204020204" charset="-122"/>
+                <a:ea typeface="微软雅黑" panose="020B0503020204020204" charset="-122"/>
+                <a:cs typeface="微软雅黑" panose="020B0503020204020204" charset="-122"/>
+              </a:rPr>
+              <a:t/>
             </a:r>
             <a:r>
               <a:rPr sz="1300" b="0">
                 <a:solidFill>
                   <a:srgbClr val="6B5850"/>
                 </a:solidFill>
-                <a:latin typeface="微软雅黑"/>
-                <a:ea typeface="微软雅黑"/>
-                <a:cs typeface="微软雅黑"/>
-              </a:rPr>
-              <a:t>  Shimeji / Ukagaka(SSP) / VPet / uDesktopMascot</a:t>
-            </a:r>
+                <a:latin typeface="微软雅黑" panose="020B0503020204020204" charset="-122"/>
+                <a:ea typeface="微软雅黑" panose="020B0503020204020204" charset="-122"/>
+                <a:cs typeface="微软雅黑" panose="020B0503020204020204" charset="-122"/>
+              </a:rPr>
+              <a:t/>
+            </a:r>
+            <a:endParaRPr sz="1300" b="0">
+              <a:solidFill>
+                <a:srgbClr val="6B5850"/>
+              </a:solidFill>
+              <a:latin typeface="微软雅黑" panose="020B0503020204020204" charset="-122"/>
+              <a:ea typeface="微软雅黑" panose="020B0503020204020204" charset="-122"/>
+              <a:cs typeface="微软雅黑" panose="020B0503020204020204" charset="-122"/>
+            </a:endParaRPr>
           </a:p>
           <a:p>
             <a:pPr>
@@ -10433,9 +11078,9 @@
                 <a:solidFill>
                   <a:srgbClr val="A03A35"/>
                 </a:solidFill>
-                <a:latin typeface="微软雅黑"/>
-                <a:ea typeface="微软雅黑"/>
-                <a:cs typeface="微软雅黑"/>
+                <a:latin typeface="微软雅黑" panose="020B0503020204020204" charset="-122"/>
+                <a:ea typeface="微软雅黑" panose="020B0503020204020204" charset="-122"/>
+                <a:cs typeface="微软雅黑" panose="020B0503020204020204" charset="-122"/>
               </a:rPr>
               <a:t>▪  </a:t>
             </a:r>
@@ -10444,9 +11089,9 @@
                 <a:solidFill>
                   <a:srgbClr val="3B2B26"/>
                 </a:solidFill>
-                <a:latin typeface="微软雅黑"/>
-                <a:ea typeface="微软雅黑"/>
-                <a:cs typeface="微软雅黑"/>
+                <a:latin typeface="微软雅黑" panose="020B0503020204020204" charset="-122"/>
+                <a:ea typeface="微软雅黑" panose="020B0503020204020204" charset="-122"/>
+                <a:cs typeface="微软雅黑" panose="020B0503020204020204" charset="-122"/>
               </a:rPr>
               <a:t>Steam 商业桌宠</a:t>
             </a:r>
@@ -10455,12 +11100,20 @@
                 <a:solidFill>
                   <a:srgbClr val="6B5850"/>
                 </a:solidFill>
-                <a:latin typeface="微软雅黑"/>
-                <a:ea typeface="微软雅黑"/>
-                <a:cs typeface="微软雅黑"/>
+                <a:latin typeface="微软雅黑" panose="020B0503020204020204" charset="-122"/>
+                <a:ea typeface="微软雅黑" panose="020B0503020204020204" charset="-122"/>
+                <a:cs typeface="微软雅黑" panose="020B0503020204020204" charset="-122"/>
               </a:rPr>
               <a:t>  Desktop Mate / Live2DViewerEX / Wallpaper Engine</a:t>
             </a:r>
+            <a:endParaRPr sz="1300" b="0">
+              <a:solidFill>
+                <a:srgbClr val="6B5850"/>
+              </a:solidFill>
+              <a:latin typeface="微软雅黑" panose="020B0503020204020204" charset="-122"/>
+              <a:ea typeface="微软雅黑" panose="020B0503020204020204" charset="-122"/>
+              <a:cs typeface="微软雅黑" panose="020B0503020204020204" charset="-122"/>
+            </a:endParaRPr>
           </a:p>
           <a:p>
             <a:pPr>
@@ -10473,9 +11126,9 @@
                 <a:solidFill>
                   <a:srgbClr val="A03A35"/>
                 </a:solidFill>
-                <a:latin typeface="微软雅黑"/>
-                <a:ea typeface="微软雅黑"/>
-                <a:cs typeface="微软雅黑"/>
+                <a:latin typeface="微软雅黑" panose="020B0503020204020204" charset="-122"/>
+                <a:ea typeface="微软雅黑" panose="020B0503020204020204" charset="-122"/>
+                <a:cs typeface="微软雅黑" panose="020B0503020204020204" charset="-122"/>
               </a:rPr>
               <a:t>▪  </a:t>
             </a:r>
@@ -10484,9 +11137,9 @@
                 <a:solidFill>
                   <a:srgbClr val="3B2B26"/>
                 </a:solidFill>
-                <a:latin typeface="微软雅黑"/>
-                <a:ea typeface="微软雅黑"/>
-                <a:cs typeface="微软雅黑"/>
+                <a:latin typeface="微软雅黑" panose="020B0503020204020204" charset="-122"/>
+                <a:ea typeface="微软雅黑" panose="020B0503020204020204" charset="-122"/>
+                <a:cs typeface="微软雅黑" panose="020B0503020204020204" charset="-122"/>
               </a:rPr>
               <a:t>AI 桌宠新秀</a:t>
             </a:r>
@@ -10495,12 +11148,20 @@
                 <a:solidFill>
                   <a:srgbClr val="6B5850"/>
                 </a:solidFill>
-                <a:latin typeface="微软雅黑"/>
-                <a:ea typeface="微软雅黑"/>
-                <a:cs typeface="微软雅黑"/>
+                <a:latin typeface="微软雅黑" panose="020B0503020204020204" charset="-122"/>
+                <a:ea typeface="微软雅黑" panose="020B0503020204020204" charset="-122"/>
+                <a:cs typeface="微软雅黑" panose="020B0503020204020204" charset="-122"/>
               </a:rPr>
               <a:t>  Open-LLM-VTuber / MateEngine（接大模型、能说话）</a:t>
             </a:r>
+            <a:endParaRPr sz="1300" b="0">
+              <a:solidFill>
+                <a:srgbClr val="6B5850"/>
+              </a:solidFill>
+              <a:latin typeface="微软雅黑" panose="020B0503020204020204" charset="-122"/>
+              <a:ea typeface="微软雅黑" panose="020B0503020204020204" charset="-122"/>
+              <a:cs typeface="微软雅黑" panose="020B0503020204020204" charset="-122"/>
+            </a:endParaRPr>
           </a:p>
           <a:p>
             <a:pPr>
@@ -10513,9 +11174,9 @@
                 <a:solidFill>
                   <a:srgbClr val="A03A35"/>
                 </a:solidFill>
-                <a:latin typeface="微软雅黑"/>
-                <a:ea typeface="微软雅黑"/>
-                <a:cs typeface="微软雅黑"/>
+                <a:latin typeface="微软雅黑" panose="020B0503020204020204" charset="-122"/>
+                <a:ea typeface="微软雅黑" panose="020B0503020204020204" charset="-122"/>
+                <a:cs typeface="微软雅黑" panose="020B0503020204020204" charset="-122"/>
               </a:rPr>
               <a:t>▪  </a:t>
             </a:r>
@@ -10524,9 +11185,9 @@
                 <a:solidFill>
                   <a:srgbClr val="3B2B26"/>
                 </a:solidFill>
-                <a:latin typeface="微软雅黑"/>
-                <a:ea typeface="微软雅黑"/>
-                <a:cs typeface="微软雅黑"/>
+                <a:latin typeface="微软雅黑" panose="020B0503020204020204" charset="-122"/>
+                <a:ea typeface="微软雅黑" panose="020B0503020204020204" charset="-122"/>
+                <a:cs typeface="微软雅黑" panose="020B0503020204020204" charset="-122"/>
               </a:rPr>
               <a:t>抽象向热点</a:t>
             </a:r>
@@ -10535,12 +11196,20 @@
                 <a:solidFill>
                   <a:srgbClr val="6B5850"/>
                 </a:solidFill>
-                <a:latin typeface="微软雅黑"/>
-                <a:ea typeface="微软雅黑"/>
-                <a:cs typeface="微软雅黑"/>
+                <a:latin typeface="微软雅黑" panose="020B0503020204020204" charset="-122"/>
+                <a:ea typeface="微软雅黑" panose="020B0503020204020204" charset="-122"/>
+                <a:cs typeface="微软雅黑" panose="020B0503020204020204" charset="-122"/>
               </a:rPr>
               <a:t>  《你妈》—— 靠话题度出圈，功能其实很薄</a:t>
             </a:r>
+            <a:endParaRPr sz="1300" b="0">
+              <a:solidFill>
+                <a:srgbClr val="6B5850"/>
+              </a:solidFill>
+              <a:latin typeface="微软雅黑" panose="020B0503020204020204" charset="-122"/>
+              <a:ea typeface="微软雅黑" panose="020B0503020204020204" charset="-122"/>
+              <a:cs typeface="微软雅黑" panose="020B0503020204020204" charset="-122"/>
+            </a:endParaRPr>
           </a:p>
         </p:txBody>
       </p:sp>
@@ -10561,7 +11230,7 @@
           <a:noFill/>
         </p:spPr>
         <p:txBody>
-          <a:bodyPr wrap="square" anchor="t" lIns="0" rIns="0" tIns="0" bIns="0">
+          <a:bodyPr wrap="square" lIns="0" tIns="0" rIns="0" bIns="0" anchor="t">
             <a:spAutoFit/>
           </a:bodyPr>
           <a:lstStyle/>
@@ -10576,12 +11245,20 @@
                 <a:solidFill>
                   <a:srgbClr val="6B5850"/>
                 </a:solidFill>
-                <a:latin typeface="Arial"/>
-                <a:ea typeface="Arial"/>
-                <a:cs typeface="Arial"/>
+                <a:latin typeface="Arial" panose="020B0604020202020204"/>
+                <a:ea typeface="Arial" panose="020B0604020202020204"/>
+                <a:cs typeface="Arial" panose="020B0604020202020204"/>
               </a:rPr>
               <a:t>04</a:t>
             </a:r>
+            <a:endParaRPr sz="1000" b="0">
+              <a:solidFill>
+                <a:srgbClr val="6B5850"/>
+              </a:solidFill>
+              <a:latin typeface="Arial" panose="020B0604020202020204"/>
+              <a:ea typeface="Arial" panose="020B0604020202020204"/>
+              <a:cs typeface="Arial" panose="020B0604020202020204"/>
+            </a:endParaRPr>
           </a:p>
         </p:txBody>
       </p:sp>
@@ -10594,7 +11271,7 @@
 </file>
 
 <file path=ppt/slides/slide5.xml><?xml version="1.0" encoding="utf-8"?>
-<p:sld xmlns:a="http://schemas.openxmlformats.org/drawingml/2006/main" xmlns:p="http://schemas.openxmlformats.org/presentationml/2006/main" xmlns:r="http://schemas.openxmlformats.org/officeDocument/2006/relationships">
+<p:sld xmlns:a="http://schemas.openxmlformats.org/drawingml/2006/main" xmlns:r="http://schemas.openxmlformats.org/officeDocument/2006/relationships" xmlns:p="http://schemas.openxmlformats.org/presentationml/2006/main">
   <p:cSld>
     <p:bg>
       <p:bgPr>
@@ -10628,7 +11305,7 @@
           <a:noFill/>
         </p:spPr>
         <p:txBody>
-          <a:bodyPr wrap="square" anchor="t" lIns="0" rIns="0" tIns="0" bIns="0">
+          <a:bodyPr wrap="square" lIns="0" tIns="0" rIns="0" bIns="0" anchor="t">
             <a:spAutoFit/>
           </a:bodyPr>
           <a:lstStyle/>
@@ -10643,12 +11320,20 @@
                 <a:solidFill>
                   <a:srgbClr val="3B2B26"/>
                 </a:solidFill>
-                <a:latin typeface="Arial"/>
-                <a:ea typeface="Arial"/>
-                <a:cs typeface="Arial"/>
+                <a:latin typeface="Arial" panose="020B0604020202020204"/>
+                <a:ea typeface="Arial" panose="020B0604020202020204"/>
+                <a:cs typeface="Arial" panose="020B0604020202020204"/>
               </a:rPr>
               <a:t>开源桌宠：能力强在“动”，弱在“记”</a:t>
             </a:r>
+            <a:endParaRPr sz="3000" b="1">
+              <a:solidFill>
+                <a:srgbClr val="3B2B26"/>
+              </a:solidFill>
+              <a:latin typeface="Arial" panose="020B0604020202020204"/>
+              <a:ea typeface="Arial" panose="020B0604020202020204"/>
+              <a:cs typeface="Arial" panose="020B0604020202020204"/>
+            </a:endParaRPr>
           </a:p>
         </p:txBody>
       </p:sp>
@@ -10713,7 +11398,7 @@
           <a:noFill/>
         </p:spPr>
         <p:txBody>
-          <a:bodyPr wrap="square" anchor="t" lIns="0" rIns="0" tIns="0" bIns="0">
+          <a:bodyPr wrap="square" lIns="0" tIns="0" rIns="0" bIns="0" anchor="t">
             <a:spAutoFit/>
           </a:bodyPr>
           <a:lstStyle/>
@@ -10728,12 +11413,20 @@
                 <a:solidFill>
                   <a:srgbClr val="A03A35"/>
                 </a:solidFill>
-                <a:latin typeface="Arial"/>
-                <a:ea typeface="Arial"/>
-                <a:cs typeface="Arial"/>
+                <a:latin typeface="Arial" panose="020B0604020202020204"/>
+                <a:ea typeface="Arial" panose="020B0604020202020204"/>
+                <a:cs typeface="Arial" panose="020B0604020202020204"/>
               </a:rPr>
               <a:t>已经做得很好</a:t>
             </a:r>
+            <a:endParaRPr sz="2000" b="1">
+              <a:solidFill>
+                <a:srgbClr val="A03A35"/>
+              </a:solidFill>
+              <a:latin typeface="Arial" panose="020B0604020202020204"/>
+              <a:ea typeface="Arial" panose="020B0604020202020204"/>
+              <a:cs typeface="Arial" panose="020B0604020202020204"/>
+            </a:endParaRPr>
           </a:p>
         </p:txBody>
       </p:sp>
@@ -10798,7 +11491,7 @@
           <a:noFill/>
         </p:spPr>
         <p:txBody>
-          <a:bodyPr wrap="square" anchor="t" lIns="0" rIns="0" tIns="0" bIns="0">
+          <a:bodyPr wrap="square" lIns="0" tIns="0" rIns="0" bIns="0" anchor="t">
             <a:spAutoFit/>
           </a:bodyPr>
           <a:lstStyle/>
@@ -10813,9 +11506,9 @@
                 <a:solidFill>
                   <a:srgbClr val="A03A35"/>
                 </a:solidFill>
-                <a:latin typeface="微软雅黑"/>
-                <a:ea typeface="微软雅黑"/>
-                <a:cs typeface="微软雅黑"/>
+                <a:latin typeface="微软雅黑" panose="020B0503020204020204" charset="-122"/>
+                <a:ea typeface="微软雅黑" panose="020B0503020204020204" charset="-122"/>
+                <a:cs typeface="微软雅黑" panose="020B0503020204020204" charset="-122"/>
               </a:rPr>
               <a:t>▪  </a:t>
             </a:r>
@@ -10824,9 +11517,9 @@
                 <a:solidFill>
                   <a:srgbClr val="3B2B26"/>
                 </a:solidFill>
-                <a:latin typeface="微软雅黑"/>
-                <a:ea typeface="微软雅黑"/>
-                <a:cs typeface="微软雅黑"/>
+                <a:latin typeface="微软雅黑" panose="020B0503020204020204" charset="-122"/>
+                <a:ea typeface="微软雅黑" panose="020B0503020204020204" charset="-122"/>
+                <a:cs typeface="微软雅黑" panose="020B0503020204020204" charset="-122"/>
               </a:rPr>
               <a:t>PNG 序列帧 + 物理</a:t>
             </a:r>
@@ -10835,12 +11528,20 @@
                 <a:solidFill>
                   <a:srgbClr val="6B5850"/>
                 </a:solidFill>
-                <a:latin typeface="微软雅黑"/>
-                <a:ea typeface="微软雅黑"/>
-                <a:cs typeface="微软雅黑"/>
+                <a:latin typeface="微软雅黑" panose="020B0503020204020204" charset="-122"/>
+                <a:ea typeface="微软雅黑" panose="020B0503020204020204" charset="-122"/>
+                <a:cs typeface="微软雅黑" panose="020B0503020204020204" charset="-122"/>
               </a:rPr>
               <a:t>  Shimeji 能在窗口间爬、会掉下去</a:t>
             </a:r>
+            <a:endParaRPr sz="1200" b="0">
+              <a:solidFill>
+                <a:srgbClr val="6B5850"/>
+              </a:solidFill>
+              <a:latin typeface="微软雅黑" panose="020B0503020204020204" charset="-122"/>
+              <a:ea typeface="微软雅黑" panose="020B0503020204020204" charset="-122"/>
+              <a:cs typeface="微软雅黑" panose="020B0503020204020204" charset="-122"/>
+            </a:endParaRPr>
           </a:p>
           <a:p>
             <a:pPr>
@@ -10853,9 +11554,9 @@
                 <a:solidFill>
                   <a:srgbClr val="A03A35"/>
                 </a:solidFill>
-                <a:latin typeface="微软雅黑"/>
-                <a:ea typeface="微软雅黑"/>
-                <a:cs typeface="微软雅黑"/>
+                <a:latin typeface="微软雅黑" panose="020B0503020204020204" charset="-122"/>
+                <a:ea typeface="微软雅黑" panose="020B0503020204020204" charset="-122"/>
+                <a:cs typeface="微软雅黑" panose="020B0503020204020204" charset="-122"/>
               </a:rPr>
               <a:t>▪  </a:t>
             </a:r>
@@ -10864,9 +11565,9 @@
                 <a:solidFill>
                   <a:srgbClr val="3B2B26"/>
                 </a:solidFill>
-                <a:latin typeface="微软雅黑"/>
-                <a:ea typeface="微软雅黑"/>
-                <a:cs typeface="微软雅黑"/>
+                <a:latin typeface="微软雅黑" panose="020B0503020204020204" charset="-122"/>
+                <a:ea typeface="微软雅黑" panose="020B0503020204020204" charset="-122"/>
+                <a:cs typeface="微软雅黑" panose="020B0503020204020204" charset="-122"/>
               </a:rPr>
               <a:t>脚本化互动</a:t>
             </a:r>
@@ -10875,12 +11576,20 @@
                 <a:solidFill>
                   <a:srgbClr val="6B5850"/>
                 </a:solidFill>
-                <a:latin typeface="微软雅黑"/>
-                <a:ea typeface="微软雅黑"/>
-                <a:cs typeface="微软雅黑"/>
+                <a:latin typeface="微软雅黑" panose="020B0503020204020204" charset="-122"/>
+                <a:ea typeface="微软雅黑" panose="020B0503020204020204" charset="-122"/>
+                <a:cs typeface="微软雅黑" panose="020B0503020204020204" charset="-122"/>
               </a:rPr>
               <a:t>  Ukagaka/SSP 有成熟的事件脚本体系</a:t>
             </a:r>
+            <a:endParaRPr sz="1200" b="0">
+              <a:solidFill>
+                <a:srgbClr val="6B5850"/>
+              </a:solidFill>
+              <a:latin typeface="微软雅黑" panose="020B0503020204020204" charset="-122"/>
+              <a:ea typeface="微软雅黑" panose="020B0503020204020204" charset="-122"/>
+              <a:cs typeface="微软雅黑" panose="020B0503020204020204" charset="-122"/>
+            </a:endParaRPr>
           </a:p>
           <a:p>
             <a:pPr>
@@ -10893,9 +11602,9 @@
                 <a:solidFill>
                   <a:srgbClr val="A03A35"/>
                 </a:solidFill>
-                <a:latin typeface="微软雅黑"/>
-                <a:ea typeface="微软雅黑"/>
-                <a:cs typeface="微软雅黑"/>
+                <a:latin typeface="微软雅黑" panose="020B0503020204020204" charset="-122"/>
+                <a:ea typeface="微软雅黑" panose="020B0503020204020204" charset="-122"/>
+                <a:cs typeface="微软雅黑" panose="020B0503020204020204" charset="-122"/>
               </a:rPr>
               <a:t>▪  </a:t>
             </a:r>
@@ -10904,9 +11613,9 @@
                 <a:solidFill>
                   <a:srgbClr val="3B2B26"/>
                 </a:solidFill>
-                <a:latin typeface="微软雅黑"/>
-                <a:ea typeface="微软雅黑"/>
-                <a:cs typeface="微软雅黑"/>
+                <a:latin typeface="微软雅黑" panose="020B0503020204020204" charset="-122"/>
+                <a:ea typeface="微软雅黑" panose="020B0503020204020204" charset="-122"/>
+                <a:cs typeface="微软雅黑" panose="020B0503020204020204" charset="-122"/>
               </a:rPr>
               <a:t>成长数值</a:t>
             </a:r>
@@ -10915,12 +11624,20 @@
                 <a:solidFill>
                   <a:srgbClr val="6B5850"/>
                 </a:solidFill>
-                <a:latin typeface="微软雅黑"/>
-                <a:ea typeface="微软雅黑"/>
-                <a:cs typeface="微软雅黑"/>
+                <a:latin typeface="微软雅黑" panose="020B0503020204020204" charset="-122"/>
+                <a:ea typeface="微软雅黑" panose="020B0503020204020204" charset="-122"/>
+                <a:cs typeface="微软雅黑" panose="020B0503020204020204" charset="-122"/>
               </a:rPr>
               <a:t>  VPet 有状态条、喂食等养成玩法</a:t>
             </a:r>
+            <a:endParaRPr sz="1200" b="0">
+              <a:solidFill>
+                <a:srgbClr val="6B5850"/>
+              </a:solidFill>
+              <a:latin typeface="微软雅黑" panose="020B0503020204020204" charset="-122"/>
+              <a:ea typeface="微软雅黑" panose="020B0503020204020204" charset="-122"/>
+              <a:cs typeface="微软雅黑" panose="020B0503020204020204" charset="-122"/>
+            </a:endParaRPr>
           </a:p>
         </p:txBody>
       </p:sp>
@@ -10941,7 +11658,7 @@
           <a:noFill/>
         </p:spPr>
         <p:txBody>
-          <a:bodyPr wrap="square" anchor="t" lIns="0" rIns="0" tIns="0" bIns="0">
+          <a:bodyPr wrap="square" lIns="0" tIns="0" rIns="0" bIns="0" anchor="t">
             <a:spAutoFit/>
           </a:bodyPr>
           <a:lstStyle/>
@@ -10956,12 +11673,20 @@
                 <a:solidFill>
                   <a:srgbClr val="C9A35F"/>
                 </a:solidFill>
-                <a:latin typeface="Arial"/>
-                <a:ea typeface="Arial"/>
-                <a:cs typeface="Arial"/>
+                <a:latin typeface="Arial" panose="020B0604020202020204"/>
+                <a:ea typeface="Arial" panose="020B0604020202020204"/>
+                <a:cs typeface="Arial" panose="020B0604020202020204"/>
               </a:rPr>
               <a:t>普遍缺的</a:t>
             </a:r>
+            <a:endParaRPr sz="2000" b="1">
+              <a:solidFill>
+                <a:srgbClr val="C9A35F"/>
+              </a:solidFill>
+              <a:latin typeface="Arial" panose="020B0604020202020204"/>
+              <a:ea typeface="Arial" panose="020B0604020202020204"/>
+              <a:cs typeface="Arial" panose="020B0604020202020204"/>
+            </a:endParaRPr>
           </a:p>
         </p:txBody>
       </p:sp>
@@ -11026,7 +11751,7 @@
           <a:noFill/>
         </p:spPr>
         <p:txBody>
-          <a:bodyPr wrap="square" anchor="t" lIns="0" rIns="0" tIns="0" bIns="0">
+          <a:bodyPr wrap="square" lIns="0" tIns="0" rIns="0" bIns="0" anchor="t">
             <a:spAutoFit/>
           </a:bodyPr>
           <a:lstStyle/>
@@ -11041,9 +11766,9 @@
                 <a:solidFill>
                   <a:srgbClr val="A03A35"/>
                 </a:solidFill>
-                <a:latin typeface="微软雅黑"/>
-                <a:ea typeface="微软雅黑"/>
-                <a:cs typeface="微软雅黑"/>
+                <a:latin typeface="微软雅黑" panose="020B0503020204020204" charset="-122"/>
+                <a:ea typeface="微软雅黑" panose="020B0503020204020204" charset="-122"/>
+                <a:cs typeface="微软雅黑" panose="020B0503020204020204" charset="-122"/>
               </a:rPr>
               <a:t>▪  </a:t>
             </a:r>
@@ -11052,9 +11777,9 @@
                 <a:solidFill>
                   <a:srgbClr val="3B2B26"/>
                 </a:solidFill>
-                <a:latin typeface="微软雅黑"/>
-                <a:ea typeface="微软雅黑"/>
-                <a:cs typeface="微软雅黑"/>
+                <a:latin typeface="微软雅黑" panose="020B0503020204020204" charset="-122"/>
+                <a:ea typeface="微软雅黑" panose="020B0503020204020204" charset="-122"/>
+                <a:cs typeface="微软雅黑" panose="020B0503020204020204" charset="-122"/>
               </a:rPr>
               <a:t>长期记忆</a:t>
             </a:r>
@@ -11063,12 +11788,20 @@
                 <a:solidFill>
                   <a:srgbClr val="6B5850"/>
                 </a:solidFill>
-                <a:latin typeface="微软雅黑"/>
-                <a:ea typeface="微软雅黑"/>
-                <a:cs typeface="微软雅黑"/>
+                <a:latin typeface="微软雅黑" panose="020B0503020204020204" charset="-122"/>
+                <a:ea typeface="微软雅黑" panose="020B0503020204020204" charset="-122"/>
+                <a:cs typeface="微软雅黑" panose="020B0503020204020204" charset="-122"/>
               </a:rPr>
               <a:t>  关掉就忘，不记得你是谁</a:t>
             </a:r>
+            <a:endParaRPr sz="1200" b="0">
+              <a:solidFill>
+                <a:srgbClr val="6B5850"/>
+              </a:solidFill>
+              <a:latin typeface="微软雅黑" panose="020B0503020204020204" charset="-122"/>
+              <a:ea typeface="微软雅黑" panose="020B0503020204020204" charset="-122"/>
+              <a:cs typeface="微软雅黑" panose="020B0503020204020204" charset="-122"/>
+            </a:endParaRPr>
           </a:p>
           <a:p>
             <a:pPr>
@@ -11081,9 +11814,9 @@
                 <a:solidFill>
                   <a:srgbClr val="A03A35"/>
                 </a:solidFill>
-                <a:latin typeface="微软雅黑"/>
-                <a:ea typeface="微软雅黑"/>
-                <a:cs typeface="微软雅黑"/>
+                <a:latin typeface="微软雅黑" panose="020B0503020204020204" charset="-122"/>
+                <a:ea typeface="微软雅黑" panose="020B0503020204020204" charset="-122"/>
+                <a:cs typeface="微软雅黑" panose="020B0503020204020204" charset="-122"/>
               </a:rPr>
               <a:t>▪  </a:t>
             </a:r>
@@ -11092,9 +11825,9 @@
                 <a:solidFill>
                   <a:srgbClr val="3B2B26"/>
                 </a:solidFill>
-                <a:latin typeface="微软雅黑"/>
-                <a:ea typeface="微软雅黑"/>
-                <a:cs typeface="微软雅黑"/>
+                <a:latin typeface="微软雅黑" panose="020B0503020204020204" charset="-122"/>
+                <a:ea typeface="微软雅黑" panose="020B0503020204020204" charset="-122"/>
+                <a:cs typeface="微软雅黑" panose="020B0503020204020204" charset="-122"/>
               </a:rPr>
               <a:t>真实语音</a:t>
             </a:r>
@@ -11103,12 +11836,20 @@
                 <a:solidFill>
                   <a:srgbClr val="6B5850"/>
                 </a:solidFill>
-                <a:latin typeface="微软雅黑"/>
-                <a:ea typeface="微软雅黑"/>
-                <a:cs typeface="微软雅黑"/>
+                <a:latin typeface="微软雅黑" panose="020B0503020204020204" charset="-122"/>
+                <a:ea typeface="微软雅黑" panose="020B0503020204020204" charset="-122"/>
+                <a:cs typeface="微软雅黑" panose="020B0503020204020204" charset="-122"/>
               </a:rPr>
               <a:t>  多为预设音效或 TTS 朗读</a:t>
             </a:r>
+            <a:endParaRPr sz="1200" b="0">
+              <a:solidFill>
+                <a:srgbClr val="6B5850"/>
+              </a:solidFill>
+              <a:latin typeface="微软雅黑" panose="020B0503020204020204" charset="-122"/>
+              <a:ea typeface="微软雅黑" panose="020B0503020204020204" charset="-122"/>
+              <a:cs typeface="微软雅黑" panose="020B0503020204020204" charset="-122"/>
+            </a:endParaRPr>
           </a:p>
           <a:p>
             <a:pPr>
@@ -11121,9 +11862,9 @@
                 <a:solidFill>
                   <a:srgbClr val="A03A35"/>
                 </a:solidFill>
-                <a:latin typeface="微软雅黑"/>
-                <a:ea typeface="微软雅黑"/>
-                <a:cs typeface="微软雅黑"/>
+                <a:latin typeface="微软雅黑" panose="020B0503020204020204" charset="-122"/>
+                <a:ea typeface="微软雅黑" panose="020B0503020204020204" charset="-122"/>
+                <a:cs typeface="微软雅黑" panose="020B0503020204020204" charset="-122"/>
               </a:rPr>
               <a:t>▪  </a:t>
             </a:r>
@@ -11132,9 +11873,9 @@
                 <a:solidFill>
                   <a:srgbClr val="3B2B26"/>
                 </a:solidFill>
-                <a:latin typeface="微软雅黑"/>
-                <a:ea typeface="微软雅黑"/>
-                <a:cs typeface="微软雅黑"/>
+                <a:latin typeface="微软雅黑" panose="020B0503020204020204" charset="-122"/>
+                <a:ea typeface="微软雅黑" panose="020B0503020204020204" charset="-122"/>
+                <a:cs typeface="微软雅黑" panose="020B0503020204020204" charset="-122"/>
               </a:rPr>
               <a:t>能替你干活</a:t>
             </a:r>
@@ -11143,12 +11884,20 @@
                 <a:solidFill>
                   <a:srgbClr val="6B5850"/>
                 </a:solidFill>
-                <a:latin typeface="微软雅黑"/>
-                <a:ea typeface="微软雅黑"/>
-                <a:cs typeface="微软雅黑"/>
+                <a:latin typeface="微软雅黑" panose="020B0503020204020204" charset="-122"/>
+                <a:ea typeface="微软雅黑" panose="020B0503020204020204" charset="-122"/>
+                <a:cs typeface="微软雅黑" panose="020B0503020204020204" charset="-122"/>
               </a:rPr>
               <a:t>  基本不碰本机操作</a:t>
             </a:r>
+            <a:endParaRPr sz="1200" b="0">
+              <a:solidFill>
+                <a:srgbClr val="6B5850"/>
+              </a:solidFill>
+              <a:latin typeface="微软雅黑" panose="020B0503020204020204" charset="-122"/>
+              <a:ea typeface="微软雅黑" panose="020B0503020204020204" charset="-122"/>
+              <a:cs typeface="微软雅黑" panose="020B0503020204020204" charset="-122"/>
+            </a:endParaRPr>
           </a:p>
         </p:txBody>
       </p:sp>
@@ -11169,7 +11918,7 @@
           <a:noFill/>
         </p:spPr>
         <p:txBody>
-          <a:bodyPr wrap="square" anchor="t" lIns="0" rIns="0" tIns="0" bIns="0">
+          <a:bodyPr wrap="square" lIns="0" tIns="0" rIns="0" bIns="0" anchor="t">
             <a:spAutoFit/>
           </a:bodyPr>
           <a:lstStyle/>
@@ -11184,12 +11933,20 @@
                 <a:solidFill>
                   <a:srgbClr val="6B5850"/>
                 </a:solidFill>
-                <a:latin typeface="Arial"/>
-                <a:ea typeface="Arial"/>
-                <a:cs typeface="Arial"/>
+                <a:latin typeface="Arial" panose="020B0604020202020204"/>
+                <a:ea typeface="Arial" panose="020B0604020202020204"/>
+                <a:cs typeface="Arial" panose="020B0604020202020204"/>
               </a:rPr>
               <a:t>05</a:t>
             </a:r>
+            <a:endParaRPr sz="1000" b="0">
+              <a:solidFill>
+                <a:srgbClr val="6B5850"/>
+              </a:solidFill>
+              <a:latin typeface="Arial" panose="020B0604020202020204"/>
+              <a:ea typeface="Arial" panose="020B0604020202020204"/>
+              <a:cs typeface="Arial" panose="020B0604020202020204"/>
+            </a:endParaRPr>
           </a:p>
         </p:txBody>
       </p:sp>
@@ -11202,7 +11959,7 @@
 </file>
 
 <file path=ppt/slides/slide6.xml><?xml version="1.0" encoding="utf-8"?>
-<p:sld xmlns:a="http://schemas.openxmlformats.org/drawingml/2006/main" xmlns:p="http://schemas.openxmlformats.org/presentationml/2006/main" xmlns:r="http://schemas.openxmlformats.org/officeDocument/2006/relationships">
+<p:sld xmlns:a="http://schemas.openxmlformats.org/drawingml/2006/main" xmlns:r="http://schemas.openxmlformats.org/officeDocument/2006/relationships" xmlns:p="http://schemas.openxmlformats.org/presentationml/2006/main">
   <p:cSld>
     <p:bg>
       <p:bgPr>
@@ -11236,7 +11993,7 @@
           <a:noFill/>
         </p:spPr>
         <p:txBody>
-          <a:bodyPr wrap="square" anchor="t" lIns="0" rIns="0" tIns="0" bIns="0">
+          <a:bodyPr wrap="square" lIns="0" tIns="0" rIns="0" bIns="0" anchor="t">
             <a:spAutoFit/>
           </a:bodyPr>
           <a:lstStyle/>
@@ -11251,12 +12008,20 @@
                 <a:solidFill>
                   <a:srgbClr val="3B2B26"/>
                 </a:solidFill>
-                <a:latin typeface="Arial"/>
-                <a:ea typeface="Arial"/>
-                <a:cs typeface="Arial"/>
+                <a:latin typeface="Arial" panose="020B0604020202020204"/>
+                <a:ea typeface="Arial" panose="020B0604020202020204"/>
+                <a:cs typeface="Arial" panose="020B0604020202020204"/>
               </a:rPr>
               <a:t>Steam 商业桌宠：卖点是“形象”和“皮肤”</a:t>
             </a:r>
+            <a:endParaRPr sz="3000" b="1">
+              <a:solidFill>
+                <a:srgbClr val="3B2B26"/>
+              </a:solidFill>
+              <a:latin typeface="Arial" panose="020B0604020202020204"/>
+              <a:ea typeface="Arial" panose="020B0604020202020204"/>
+              <a:cs typeface="Arial" panose="020B0604020202020204"/>
+            </a:endParaRPr>
           </a:p>
         </p:txBody>
       </p:sp>
@@ -11321,7 +12086,7 @@
           <a:noFill/>
         </p:spPr>
         <p:txBody>
-          <a:bodyPr wrap="square" anchor="t" lIns="0" rIns="0" tIns="0" bIns="0">
+          <a:bodyPr wrap="square" lIns="0" tIns="0" rIns="0" bIns="0" anchor="t">
             <a:spAutoFit/>
           </a:bodyPr>
           <a:lstStyle/>
@@ -11336,12 +12101,20 @@
                 <a:solidFill>
                   <a:srgbClr val="A03A35"/>
                 </a:solidFill>
-                <a:latin typeface="Arial"/>
-                <a:ea typeface="Arial"/>
-                <a:cs typeface="Arial"/>
+                <a:latin typeface="Arial" panose="020B0604020202020204"/>
+                <a:ea typeface="Arial" panose="020B0604020202020204"/>
+                <a:cs typeface="Arial" panose="020B0604020202020204"/>
               </a:rPr>
               <a:t>代表性产品</a:t>
             </a:r>
+            <a:endParaRPr sz="2000" b="1">
+              <a:solidFill>
+                <a:srgbClr val="A03A35"/>
+              </a:solidFill>
+              <a:latin typeface="Arial" panose="020B0604020202020204"/>
+              <a:ea typeface="Arial" panose="020B0604020202020204"/>
+              <a:cs typeface="Arial" panose="020B0604020202020204"/>
+            </a:endParaRPr>
           </a:p>
         </p:txBody>
       </p:sp>
@@ -11406,7 +12179,7 @@
           <a:noFill/>
         </p:spPr>
         <p:txBody>
-          <a:bodyPr wrap="square" anchor="t" lIns="0" rIns="0" tIns="0" bIns="0">
+          <a:bodyPr wrap="square" lIns="0" tIns="0" rIns="0" bIns="0" anchor="t">
             <a:spAutoFit/>
           </a:bodyPr>
           <a:lstStyle/>
@@ -11421,9 +12194,9 @@
                 <a:solidFill>
                   <a:srgbClr val="A03A35"/>
                 </a:solidFill>
-                <a:latin typeface="微软雅黑"/>
-                <a:ea typeface="微软雅黑"/>
-                <a:cs typeface="微软雅黑"/>
+                <a:latin typeface="微软雅黑" panose="020B0503020204020204" charset="-122"/>
+                <a:ea typeface="微软雅黑" panose="020B0503020204020204" charset="-122"/>
+                <a:cs typeface="微软雅黑" panose="020B0503020204020204" charset="-122"/>
               </a:rPr>
               <a:t>▪  </a:t>
             </a:r>
@@ -11432,9 +12205,9 @@
                 <a:solidFill>
                   <a:srgbClr val="3B2B26"/>
                 </a:solidFill>
-                <a:latin typeface="微软雅黑"/>
-                <a:ea typeface="微软雅黑"/>
-                <a:cs typeface="微软雅黑"/>
+                <a:latin typeface="微软雅黑" panose="020B0503020204020204" charset="-122"/>
+                <a:ea typeface="微软雅黑" panose="020B0503020204020204" charset="-122"/>
+                <a:cs typeface="微软雅黑" panose="020B0503020204020204" charset="-122"/>
               </a:rPr>
               <a:t>Desktop Mate</a:t>
             </a:r>
@@ -11443,12 +12216,20 @@
                 <a:solidFill>
                   <a:srgbClr val="6B5850"/>
                 </a:solidFill>
-                <a:latin typeface="微软雅黑"/>
-                <a:ea typeface="微软雅黑"/>
-                <a:cs typeface="微软雅黑"/>
+                <a:latin typeface="微软雅黑" panose="020B0503020204020204" charset="-122"/>
+                <a:ea typeface="微软雅黑" panose="020B0503020204020204" charset="-122"/>
+                <a:cs typeface="微软雅黑" panose="020B0503020204020204" charset="-122"/>
               </a:rPr>
               <a:t>  免费本体 + 角色 DLC，靠 IP 联名</a:t>
             </a:r>
+            <a:endParaRPr sz="1200" b="0">
+              <a:solidFill>
+                <a:srgbClr val="6B5850"/>
+              </a:solidFill>
+              <a:latin typeface="微软雅黑" panose="020B0503020204020204" charset="-122"/>
+              <a:ea typeface="微软雅黑" panose="020B0503020204020204" charset="-122"/>
+              <a:cs typeface="微软雅黑" panose="020B0503020204020204" charset="-122"/>
+            </a:endParaRPr>
           </a:p>
           <a:p>
             <a:pPr>
@@ -11461,9 +12242,9 @@
                 <a:solidFill>
                   <a:srgbClr val="A03A35"/>
                 </a:solidFill>
-                <a:latin typeface="微软雅黑"/>
-                <a:ea typeface="微软雅黑"/>
-                <a:cs typeface="微软雅黑"/>
+                <a:latin typeface="微软雅黑" panose="020B0503020204020204" charset="-122"/>
+                <a:ea typeface="微软雅黑" panose="020B0503020204020204" charset="-122"/>
+                <a:cs typeface="微软雅黑" panose="020B0503020204020204" charset="-122"/>
               </a:rPr>
               <a:t>▪  </a:t>
             </a:r>
@@ -11472,9 +12253,9 @@
                 <a:solidFill>
                   <a:srgbClr val="3B2B26"/>
                 </a:solidFill>
-                <a:latin typeface="微软雅黑"/>
-                <a:ea typeface="微软雅黑"/>
-                <a:cs typeface="微软雅黑"/>
+                <a:latin typeface="微软雅黑" panose="020B0503020204020204" charset="-122"/>
+                <a:ea typeface="微软雅黑" panose="020B0503020204020204" charset="-122"/>
+                <a:cs typeface="微软雅黑" panose="020B0503020204020204" charset="-122"/>
               </a:rPr>
               <a:t>Live2DViewerEX</a:t>
             </a:r>
@@ -11483,12 +12264,20 @@
                 <a:solidFill>
                   <a:srgbClr val="6B5850"/>
                 </a:solidFill>
-                <a:latin typeface="微软雅黑"/>
-                <a:ea typeface="微软雅黑"/>
-                <a:cs typeface="微软雅黑"/>
+                <a:latin typeface="微软雅黑" panose="020B0503020204020204" charset="-122"/>
+                <a:ea typeface="微软雅黑" panose="020B0503020204020204" charset="-122"/>
+                <a:cs typeface="微软雅黑" panose="020B0503020204020204" charset="-122"/>
               </a:rPr>
               <a:t>  把 Live2D 模型搬上桌面，创作生态强</a:t>
             </a:r>
+            <a:endParaRPr sz="1200" b="0">
+              <a:solidFill>
+                <a:srgbClr val="6B5850"/>
+              </a:solidFill>
+              <a:latin typeface="微软雅黑" panose="020B0503020204020204" charset="-122"/>
+              <a:ea typeface="微软雅黑" panose="020B0503020204020204" charset="-122"/>
+              <a:cs typeface="微软雅黑" panose="020B0503020204020204" charset="-122"/>
+            </a:endParaRPr>
           </a:p>
           <a:p>
             <a:pPr>
@@ -11501,9 +12290,9 @@
                 <a:solidFill>
                   <a:srgbClr val="A03A35"/>
                 </a:solidFill>
-                <a:latin typeface="微软雅黑"/>
-                <a:ea typeface="微软雅黑"/>
-                <a:cs typeface="微软雅黑"/>
+                <a:latin typeface="微软雅黑" panose="020B0503020204020204" charset="-122"/>
+                <a:ea typeface="微软雅黑" panose="020B0503020204020204" charset="-122"/>
+                <a:cs typeface="微软雅黑" panose="020B0503020204020204" charset="-122"/>
               </a:rPr>
               <a:t>▪  </a:t>
             </a:r>
@@ -11512,9 +12301,9 @@
                 <a:solidFill>
                   <a:srgbClr val="3B2B26"/>
                 </a:solidFill>
-                <a:latin typeface="微软雅黑"/>
-                <a:ea typeface="微软雅黑"/>
-                <a:cs typeface="微软雅黑"/>
+                <a:latin typeface="微软雅黑" panose="020B0503020204020204" charset="-122"/>
+                <a:ea typeface="微软雅黑" panose="020B0503020204020204" charset="-122"/>
+                <a:cs typeface="微软雅黑" panose="020B0503020204020204" charset="-122"/>
               </a:rPr>
               <a:t>Wallpaper Engine</a:t>
             </a:r>
@@ -11523,12 +12312,20 @@
                 <a:solidFill>
                   <a:srgbClr val="6B5850"/>
                 </a:solidFill>
-                <a:latin typeface="微软雅黑"/>
-                <a:ea typeface="微软雅黑"/>
-                <a:cs typeface="微软雅黑"/>
+                <a:latin typeface="微软雅黑" panose="020B0503020204020204" charset="-122"/>
+                <a:ea typeface="微软雅黑" panose="020B0503020204020204" charset="-122"/>
+                <a:cs typeface="微软雅黑" panose="020B0503020204020204" charset="-122"/>
               </a:rPr>
               <a:t>  动态壁纸式“桌面美化”，非角色陪伴</a:t>
             </a:r>
+            <a:endParaRPr sz="1200" b="0">
+              <a:solidFill>
+                <a:srgbClr val="6B5850"/>
+              </a:solidFill>
+              <a:latin typeface="微软雅黑" panose="020B0503020204020204" charset="-122"/>
+              <a:ea typeface="微软雅黑" panose="020B0503020204020204" charset="-122"/>
+              <a:cs typeface="微软雅黑" panose="020B0503020204020204" charset="-122"/>
+            </a:endParaRPr>
           </a:p>
         </p:txBody>
       </p:sp>
@@ -11549,7 +12346,7 @@
           <a:noFill/>
         </p:spPr>
         <p:txBody>
-          <a:bodyPr wrap="square" anchor="t" lIns="0" rIns="0" tIns="0" bIns="0">
+          <a:bodyPr wrap="square" lIns="0" tIns="0" rIns="0" bIns="0" anchor="t">
             <a:spAutoFit/>
           </a:bodyPr>
           <a:lstStyle/>
@@ -11564,12 +12361,20 @@
                 <a:solidFill>
                   <a:srgbClr val="C9A35F"/>
                 </a:solidFill>
-                <a:latin typeface="Arial"/>
-                <a:ea typeface="Arial"/>
-                <a:cs typeface="Arial"/>
+                <a:latin typeface="Arial" panose="020B0604020202020204"/>
+                <a:ea typeface="Arial" panose="020B0604020202020204"/>
+                <a:cs typeface="Arial" panose="020B0604020202020204"/>
               </a:rPr>
               <a:t>共同的天花板</a:t>
             </a:r>
+            <a:endParaRPr sz="2000" b="1">
+              <a:solidFill>
+                <a:srgbClr val="C9A35F"/>
+              </a:solidFill>
+              <a:latin typeface="Arial" panose="020B0604020202020204"/>
+              <a:ea typeface="Arial" panose="020B0604020202020204"/>
+              <a:cs typeface="Arial" panose="020B0604020202020204"/>
+            </a:endParaRPr>
           </a:p>
         </p:txBody>
       </p:sp>
@@ -11634,7 +12439,7 @@
           <a:noFill/>
         </p:spPr>
         <p:txBody>
-          <a:bodyPr wrap="square" anchor="t" lIns="0" rIns="0" tIns="0" bIns="0">
+          <a:bodyPr wrap="square" lIns="0" tIns="0" rIns="0" bIns="0" anchor="t">
             <a:spAutoFit/>
           </a:bodyPr>
           <a:lstStyle/>
@@ -11649,9 +12454,9 @@
                 <a:solidFill>
                   <a:srgbClr val="A03A35"/>
                 </a:solidFill>
-                <a:latin typeface="微软雅黑"/>
-                <a:ea typeface="微软雅黑"/>
-                <a:cs typeface="微软雅黑"/>
+                <a:latin typeface="微软雅黑" panose="020B0503020204020204" charset="-122"/>
+                <a:ea typeface="微软雅黑" panose="020B0503020204020204" charset="-122"/>
+                <a:cs typeface="微软雅黑" panose="020B0503020204020204" charset="-122"/>
               </a:rPr>
               <a:t>▪  </a:t>
             </a:r>
@@ -11660,9 +12465,9 @@
                 <a:solidFill>
                   <a:srgbClr val="3B2B26"/>
                 </a:solidFill>
-                <a:latin typeface="微软雅黑"/>
-                <a:ea typeface="微软雅黑"/>
-                <a:cs typeface="微软雅黑"/>
+                <a:latin typeface="微软雅黑" panose="020B0503020204020204" charset="-122"/>
+                <a:ea typeface="微软雅黑" panose="020B0503020204020204" charset="-122"/>
+                <a:cs typeface="微软雅黑" panose="020B0503020204020204" charset="-122"/>
               </a:rPr>
               <a:t>不接聊天软件</a:t>
             </a:r>
@@ -11671,12 +12476,20 @@
                 <a:solidFill>
                   <a:srgbClr val="6B5850"/>
                 </a:solidFill>
-                <a:latin typeface="微软雅黑"/>
-                <a:ea typeface="微软雅黑"/>
-                <a:cs typeface="微软雅黑"/>
+                <a:latin typeface="微软雅黑" panose="020B0503020204020204" charset="-122"/>
+                <a:ea typeface="微软雅黑" panose="020B0503020204020204" charset="-122"/>
+                <a:cs typeface="微软雅黑" panose="020B0503020204020204" charset="-122"/>
               </a:rPr>
               <a:t>  出不了桌面这个窗口</a:t>
             </a:r>
+            <a:endParaRPr sz="1200" b="0">
+              <a:solidFill>
+                <a:srgbClr val="6B5850"/>
+              </a:solidFill>
+              <a:latin typeface="微软雅黑" panose="020B0503020204020204" charset="-122"/>
+              <a:ea typeface="微软雅黑" panose="020B0503020204020204" charset="-122"/>
+              <a:cs typeface="微软雅黑" panose="020B0503020204020204" charset="-122"/>
+            </a:endParaRPr>
           </a:p>
           <a:p>
             <a:pPr>
@@ -11689,9 +12502,9 @@
                 <a:solidFill>
                   <a:srgbClr val="A03A35"/>
                 </a:solidFill>
-                <a:latin typeface="微软雅黑"/>
-                <a:ea typeface="微软雅黑"/>
-                <a:cs typeface="微软雅黑"/>
+                <a:latin typeface="微软雅黑" panose="020B0503020204020204" charset="-122"/>
+                <a:ea typeface="微软雅黑" panose="020B0503020204020204" charset="-122"/>
+                <a:cs typeface="微软雅黑" panose="020B0503020204020204" charset="-122"/>
               </a:rPr>
               <a:t>▪  </a:t>
             </a:r>
@@ -11700,9 +12513,9 @@
                 <a:solidFill>
                   <a:srgbClr val="3B2B26"/>
                 </a:solidFill>
-                <a:latin typeface="微软雅黑"/>
-                <a:ea typeface="微软雅黑"/>
-                <a:cs typeface="微软雅黑"/>
+                <a:latin typeface="微软雅黑" panose="020B0503020204020204" charset="-122"/>
+                <a:ea typeface="微软雅黑" panose="020B0503020204020204" charset="-122"/>
+                <a:cs typeface="微软雅黑" panose="020B0503020204020204" charset="-122"/>
               </a:rPr>
               <a:t>不理解你的生活</a:t>
             </a:r>
@@ -11711,12 +12524,20 @@
                 <a:solidFill>
                   <a:srgbClr val="6B5850"/>
                 </a:solidFill>
-                <a:latin typeface="微软雅黑"/>
-                <a:ea typeface="微软雅黑"/>
-                <a:cs typeface="微软雅黑"/>
+                <a:latin typeface="微软雅黑" panose="020B0503020204020204" charset="-122"/>
+                <a:ea typeface="微软雅黑" panose="020B0503020204020204" charset="-122"/>
+                <a:cs typeface="微软雅黑" panose="020B0503020204020204" charset="-122"/>
               </a:rPr>
               <a:t>  没有记忆、没有作息与习惯</a:t>
             </a:r>
+            <a:endParaRPr sz="1200" b="0">
+              <a:solidFill>
+                <a:srgbClr val="6B5850"/>
+              </a:solidFill>
+              <a:latin typeface="微软雅黑" panose="020B0503020204020204" charset="-122"/>
+              <a:ea typeface="微软雅黑" panose="020B0503020204020204" charset="-122"/>
+              <a:cs typeface="微软雅黑" panose="020B0503020204020204" charset="-122"/>
+            </a:endParaRPr>
           </a:p>
           <a:p>
             <a:pPr>
@@ -11729,9 +12550,9 @@
                 <a:solidFill>
                   <a:srgbClr val="A03A35"/>
                 </a:solidFill>
-                <a:latin typeface="微软雅黑"/>
-                <a:ea typeface="微软雅黑"/>
-                <a:cs typeface="微软雅黑"/>
+                <a:latin typeface="微软雅黑" panose="020B0503020204020204" charset="-122"/>
+                <a:ea typeface="微软雅黑" panose="020B0503020204020204" charset="-122"/>
+                <a:cs typeface="微软雅黑" panose="020B0503020204020204" charset="-122"/>
               </a:rPr>
               <a:t>▪  </a:t>
             </a:r>
@@ -11740,9 +12561,9 @@
                 <a:solidFill>
                   <a:srgbClr val="3B2B26"/>
                 </a:solidFill>
-                <a:latin typeface="微软雅黑"/>
-                <a:ea typeface="微软雅黑"/>
-                <a:cs typeface="微软雅黑"/>
+                <a:latin typeface="微软雅黑" panose="020B0503020204020204" charset="-122"/>
+                <a:ea typeface="微软雅黑" panose="020B0503020204020204" charset="-122"/>
+                <a:cs typeface="微软雅黑" panose="020B0503020204020204" charset="-122"/>
               </a:rPr>
               <a:t>不能代劳</a:t>
             </a:r>
@@ -11751,12 +12572,20 @@
                 <a:solidFill>
                   <a:srgbClr val="6B5850"/>
                 </a:solidFill>
-                <a:latin typeface="微软雅黑"/>
-                <a:ea typeface="微软雅黑"/>
-                <a:cs typeface="微软雅黑"/>
+                <a:latin typeface="微软雅黑" panose="020B0503020204020204" charset="-122"/>
+                <a:ea typeface="微软雅黑" panose="020B0503020204020204" charset="-122"/>
+                <a:cs typeface="微软雅黑" panose="020B0503020204020204" charset="-122"/>
               </a:rPr>
               <a:t>  不会替你操作电脑</a:t>
             </a:r>
+            <a:endParaRPr sz="1200" b="0">
+              <a:solidFill>
+                <a:srgbClr val="6B5850"/>
+              </a:solidFill>
+              <a:latin typeface="微软雅黑" panose="020B0503020204020204" charset="-122"/>
+              <a:ea typeface="微软雅黑" panose="020B0503020204020204" charset="-122"/>
+              <a:cs typeface="微软雅黑" panose="020B0503020204020204" charset="-122"/>
+            </a:endParaRPr>
           </a:p>
         </p:txBody>
       </p:sp>
@@ -11777,7 +12606,7 @@
           <a:noFill/>
         </p:spPr>
         <p:txBody>
-          <a:bodyPr wrap="square" anchor="t" lIns="0" rIns="0" tIns="0" bIns="0">
+          <a:bodyPr wrap="square" lIns="0" tIns="0" rIns="0" bIns="0" anchor="t">
             <a:spAutoFit/>
           </a:bodyPr>
           <a:lstStyle/>
@@ -11792,12 +12621,20 @@
                 <a:solidFill>
                   <a:srgbClr val="6B5850"/>
                 </a:solidFill>
-                <a:latin typeface="Arial"/>
-                <a:ea typeface="Arial"/>
-                <a:cs typeface="Arial"/>
+                <a:latin typeface="Arial" panose="020B0604020202020204"/>
+                <a:ea typeface="Arial" panose="020B0604020202020204"/>
+                <a:cs typeface="Arial" panose="020B0604020202020204"/>
               </a:rPr>
               <a:t>06</a:t>
             </a:r>
+            <a:endParaRPr sz="1000" b="0">
+              <a:solidFill>
+                <a:srgbClr val="6B5850"/>
+              </a:solidFill>
+              <a:latin typeface="Arial" panose="020B0604020202020204"/>
+              <a:ea typeface="Arial" panose="020B0604020202020204"/>
+              <a:cs typeface="Arial" panose="020B0604020202020204"/>
+            </a:endParaRPr>
           </a:p>
         </p:txBody>
       </p:sp>
@@ -11810,7 +12647,7 @@
 </file>
 
 <file path=ppt/slides/slide7.xml><?xml version="1.0" encoding="utf-8"?>
-<p:sld xmlns:a="http://schemas.openxmlformats.org/drawingml/2006/main" xmlns:p="http://schemas.openxmlformats.org/presentationml/2006/main" xmlns:r="http://schemas.openxmlformats.org/officeDocument/2006/relationships">
+<p:sld xmlns:a="http://schemas.openxmlformats.org/drawingml/2006/main" xmlns:r="http://schemas.openxmlformats.org/officeDocument/2006/relationships" xmlns:p="http://schemas.openxmlformats.org/presentationml/2006/main">
   <p:cSld>
     <p:bg>
       <p:bgPr>
@@ -11844,7 +12681,7 @@
           <a:noFill/>
         </p:spPr>
         <p:txBody>
-          <a:bodyPr wrap="square" anchor="t" lIns="0" rIns="0" tIns="0" bIns="0">
+          <a:bodyPr wrap="square" lIns="0" tIns="0" rIns="0" bIns="0" anchor="t">
             <a:spAutoFit/>
           </a:bodyPr>
           <a:lstStyle/>
@@ -11859,12 +12696,20 @@
                 <a:solidFill>
                   <a:srgbClr val="3B2B26"/>
                 </a:solidFill>
-                <a:latin typeface="Arial"/>
-                <a:ea typeface="Arial"/>
-                <a:cs typeface="Arial"/>
+                <a:latin typeface="Arial" panose="020B0604020202020204"/>
+                <a:ea typeface="Arial" panose="020B0604020202020204"/>
+                <a:cs typeface="Arial" panose="020B0604020202020204"/>
               </a:rPr>
               <a:t>另一条线：AI 聊天机器人（有脑无身）</a:t>
             </a:r>
+            <a:endParaRPr sz="3000" b="1">
+              <a:solidFill>
+                <a:srgbClr val="3B2B26"/>
+              </a:solidFill>
+              <a:latin typeface="Arial" panose="020B0604020202020204"/>
+              <a:ea typeface="Arial" panose="020B0604020202020204"/>
+              <a:cs typeface="Arial" panose="020B0604020202020204"/>
+            </a:endParaRPr>
           </a:p>
         </p:txBody>
       </p:sp>
@@ -11929,7 +12774,7 @@
           <a:noFill/>
         </p:spPr>
         <p:txBody>
-          <a:bodyPr wrap="square" anchor="t" lIns="0" rIns="0" tIns="0" bIns="0">
+          <a:bodyPr wrap="square" lIns="0" tIns="0" rIns="0" bIns="0" anchor="t">
             <a:spAutoFit/>
           </a:bodyPr>
           <a:lstStyle/>
@@ -11944,9 +12789,9 @@
                 <a:solidFill>
                   <a:srgbClr val="A03A35"/>
                 </a:solidFill>
-                <a:latin typeface="微软雅黑"/>
-                <a:ea typeface="微软雅黑"/>
-                <a:cs typeface="微软雅黑"/>
+                <a:latin typeface="微软雅黑" panose="020B0503020204020204" charset="-122"/>
+                <a:ea typeface="微软雅黑" panose="020B0503020204020204" charset="-122"/>
+                <a:cs typeface="微软雅黑" panose="020B0503020204020204" charset="-122"/>
               </a:rPr>
               <a:t>▪  </a:t>
             </a:r>
@@ -11955,9 +12800,9 @@
                 <a:solidFill>
                   <a:srgbClr val="3B2B26"/>
                 </a:solidFill>
-                <a:latin typeface="微软雅黑"/>
-                <a:ea typeface="微软雅黑"/>
-                <a:cs typeface="微软雅黑"/>
+                <a:latin typeface="微软雅黑" panose="020B0503020204020204" charset="-122"/>
+                <a:ea typeface="微软雅黑" panose="020B0503020204020204" charset="-122"/>
+                <a:cs typeface="微软雅黑" panose="020B0503020204020204" charset="-122"/>
               </a:rPr>
               <a:t>接 QQ / 微信的一大批</a:t>
             </a:r>
@@ -11966,12 +12811,20 @@
                 <a:solidFill>
                   <a:srgbClr val="6B5850"/>
                 </a:solidFill>
-                <a:latin typeface="微软雅黑"/>
-                <a:ea typeface="微软雅黑"/>
-                <a:cs typeface="微软雅黑"/>
+                <a:latin typeface="微软雅黑" panose="020B0503020204020204" charset="-122"/>
+                <a:ea typeface="微软雅黑" panose="020B0503020204020204" charset="-122"/>
+                <a:cs typeface="微软雅黑" panose="020B0503020204020204" charset="-122"/>
               </a:rPr>
               <a:t>  NapCatQQ / Lagrange / LLOneBot / AstrBot / LangBot</a:t>
             </a:r>
+            <a:endParaRPr sz="1300" b="0">
+              <a:solidFill>
+                <a:srgbClr val="6B5850"/>
+              </a:solidFill>
+              <a:latin typeface="微软雅黑" panose="020B0503020204020204" charset="-122"/>
+              <a:ea typeface="微软雅黑" panose="020B0503020204020204" charset="-122"/>
+              <a:cs typeface="微软雅黑" panose="020B0503020204020204" charset="-122"/>
+            </a:endParaRPr>
           </a:p>
           <a:p>
             <a:pPr>
@@ -11984,9 +12837,9 @@
                 <a:solidFill>
                   <a:srgbClr val="A03A35"/>
                 </a:solidFill>
-                <a:latin typeface="微软雅黑"/>
-                <a:ea typeface="微软雅黑"/>
-                <a:cs typeface="微软雅黑"/>
+                <a:latin typeface="微软雅黑" panose="020B0503020204020204" charset="-122"/>
+                <a:ea typeface="微软雅黑" panose="020B0503020204020204" charset="-122"/>
+                <a:cs typeface="微软雅黑" panose="020B0503020204020204" charset="-122"/>
               </a:rPr>
               <a:t>▪  </a:t>
             </a:r>
@@ -11995,9 +12848,9 @@
                 <a:solidFill>
                   <a:srgbClr val="3B2B26"/>
                 </a:solidFill>
-                <a:latin typeface="微软雅黑"/>
-                <a:ea typeface="微软雅黑"/>
-                <a:cs typeface="微软雅黑"/>
+                <a:latin typeface="微软雅黑" panose="020B0503020204020204" charset="-122"/>
+                <a:ea typeface="微软雅黑" panose="020B0503020204020204" charset="-122"/>
+                <a:cs typeface="微软雅黑" panose="020B0503020204020204" charset="-122"/>
               </a:rPr>
               <a:t>有形象的一大批</a:t>
             </a:r>
@@ -12006,12 +12859,20 @@
                 <a:solidFill>
                   <a:srgbClr val="6B5850"/>
                 </a:solidFill>
-                <a:latin typeface="微软雅黑"/>
-                <a:ea typeface="微软雅黑"/>
-                <a:cs typeface="微软雅黑"/>
+                <a:latin typeface="微软雅黑" panose="020B0503020204020204" charset="-122"/>
+                <a:ea typeface="微软雅黑" panose="020B0503020204020204" charset="-122"/>
+                <a:cs typeface="微软雅黑" panose="020B0503020204020204" charset="-122"/>
               </a:rPr>
               <a:t>  Open-LLM-VTuber / AIRI / SillyTavern</a:t>
             </a:r>
+            <a:endParaRPr sz="1300" b="0">
+              <a:solidFill>
+                <a:srgbClr val="6B5850"/>
+              </a:solidFill>
+              <a:latin typeface="微软雅黑" panose="020B0503020204020204" charset="-122"/>
+              <a:ea typeface="微软雅黑" panose="020B0503020204020204" charset="-122"/>
+              <a:cs typeface="微软雅黑" panose="020B0503020204020204" charset="-122"/>
+            </a:endParaRPr>
           </a:p>
           <a:p>
             <a:pPr>
@@ -12024,9 +12885,9 @@
                 <a:solidFill>
                   <a:srgbClr val="A03A35"/>
                 </a:solidFill>
-                <a:latin typeface="微软雅黑"/>
-                <a:ea typeface="微软雅黑"/>
-                <a:cs typeface="微软雅黑"/>
+                <a:latin typeface="微软雅黑" panose="020B0503020204020204" charset="-122"/>
+                <a:ea typeface="微软雅黑" panose="020B0503020204020204" charset="-122"/>
+                <a:cs typeface="微软雅黑" panose="020B0503020204020204" charset="-122"/>
               </a:rPr>
               <a:t>▪  </a:t>
             </a:r>
@@ -12035,9 +12896,9 @@
                 <a:solidFill>
                   <a:srgbClr val="3B2B26"/>
                 </a:solidFill>
-                <a:latin typeface="微软雅黑"/>
-                <a:ea typeface="微软雅黑"/>
-                <a:cs typeface="微软雅黑"/>
+                <a:latin typeface="微软雅黑" panose="020B0503020204020204" charset="-122"/>
+                <a:ea typeface="微软雅黑" panose="020B0503020204020204" charset="-122"/>
+                <a:cs typeface="微软雅黑" panose="020B0503020204020204" charset="-122"/>
               </a:rPr>
               <a:t>关键缺口</a:t>
             </a:r>
@@ -12046,12 +12907,20 @@
                 <a:solidFill>
                   <a:srgbClr val="6B5850"/>
                 </a:solidFill>
-                <a:latin typeface="微软雅黑"/>
-                <a:ea typeface="微软雅黑"/>
-                <a:cs typeface="微软雅黑"/>
+                <a:latin typeface="微软雅黑" panose="020B0503020204020204" charset="-122"/>
+                <a:ea typeface="微软雅黑" panose="020B0503020204020204" charset="-122"/>
+                <a:cs typeface="微软雅黑" panose="020B0503020204020204" charset="-122"/>
               </a:rPr>
               <a:t>  有形象的都不接 QQ/微信；接 QQ/微信的都没形象</a:t>
             </a:r>
+            <a:endParaRPr sz="1300" b="0">
+              <a:solidFill>
+                <a:srgbClr val="6B5850"/>
+              </a:solidFill>
+              <a:latin typeface="微软雅黑" panose="020B0503020204020204" charset="-122"/>
+              <a:ea typeface="微软雅黑" panose="020B0503020204020204" charset="-122"/>
+              <a:cs typeface="微软雅黑" panose="020B0503020204020204" charset="-122"/>
+            </a:endParaRPr>
           </a:p>
           <a:p>
             <a:pPr>
@@ -12064,9 +12933,9 @@
                 <a:solidFill>
                   <a:srgbClr val="A03A35"/>
                 </a:solidFill>
-                <a:latin typeface="微软雅黑"/>
-                <a:ea typeface="微软雅黑"/>
-                <a:cs typeface="微软雅黑"/>
+                <a:latin typeface="微软雅黑" panose="020B0503020204020204" charset="-122"/>
+                <a:ea typeface="微软雅黑" panose="020B0503020204020204" charset="-122"/>
+                <a:cs typeface="微软雅黑" panose="020B0503020204020204" charset="-122"/>
               </a:rPr>
               <a:t>▪  </a:t>
             </a:r>
@@ -12075,9 +12944,9 @@
                 <a:solidFill>
                   <a:srgbClr val="3B2B26"/>
                 </a:solidFill>
-                <a:latin typeface="微软雅黑"/>
-                <a:ea typeface="微软雅黑"/>
-                <a:cs typeface="微软雅黑"/>
+                <a:latin typeface="微软雅黑" panose="020B0503020204020204" charset="-122"/>
+                <a:ea typeface="微软雅黑" panose="020B0503020204020204" charset="-122"/>
+                <a:cs typeface="微软雅黑" panose="020B0503020204020204" charset="-122"/>
               </a:rPr>
               <a:t>已知唯一“四合一”</a:t>
             </a:r>
@@ -12086,12 +12955,20 @@
                 <a:solidFill>
                   <a:srgbClr val="6B5850"/>
                 </a:solidFill>
-                <a:latin typeface="微软雅黑"/>
-                <a:ea typeface="微软雅黑"/>
-                <a:cs typeface="微软雅黑"/>
+                <a:latin typeface="微软雅黑" panose="020B0503020204020204" charset="-122"/>
+                <a:ea typeface="微软雅黑" panose="020B0503020204020204" charset="-122"/>
+                <a:cs typeface="微软雅黑" panose="020B0503020204020204" charset="-122"/>
               </a:rPr>
               <a:t>  super-agent-party（形象 + 聊天软件 + 本地操作 + 语音）</a:t>
             </a:r>
+            <a:endParaRPr sz="1300" b="0">
+              <a:solidFill>
+                <a:srgbClr val="6B5850"/>
+              </a:solidFill>
+              <a:latin typeface="微软雅黑" panose="020B0503020204020204" charset="-122"/>
+              <a:ea typeface="微软雅黑" panose="020B0503020204020204" charset="-122"/>
+              <a:cs typeface="微软雅黑" panose="020B0503020204020204" charset="-122"/>
+            </a:endParaRPr>
           </a:p>
         </p:txBody>
       </p:sp>
@@ -12112,7 +12989,7 @@
           <a:noFill/>
         </p:spPr>
         <p:txBody>
-          <a:bodyPr wrap="square" anchor="t" lIns="0" rIns="0" tIns="0" bIns="0">
+          <a:bodyPr wrap="square" lIns="0" tIns="0" rIns="0" bIns="0" anchor="t">
             <a:spAutoFit/>
           </a:bodyPr>
           <a:lstStyle/>
@@ -12127,12 +13004,20 @@
                 <a:solidFill>
                   <a:srgbClr val="6B5850"/>
                 </a:solidFill>
-                <a:latin typeface="Arial"/>
-                <a:ea typeface="Arial"/>
-                <a:cs typeface="Arial"/>
+                <a:latin typeface="Arial" panose="020B0604020202020204"/>
+                <a:ea typeface="Arial" panose="020B0604020202020204"/>
+                <a:cs typeface="Arial" panose="020B0604020202020204"/>
               </a:rPr>
               <a:t>07</a:t>
             </a:r>
+            <a:endParaRPr sz="1000" b="0">
+              <a:solidFill>
+                <a:srgbClr val="6B5850"/>
+              </a:solidFill>
+              <a:latin typeface="Arial" panose="020B0604020202020204"/>
+              <a:ea typeface="Arial" panose="020B0604020202020204"/>
+              <a:cs typeface="Arial" panose="020B0604020202020204"/>
+            </a:endParaRPr>
           </a:p>
         </p:txBody>
       </p:sp>
@@ -12145,7 +13030,7 @@
 </file>
 
 <file path=ppt/slides/slide8.xml><?xml version="1.0" encoding="utf-8"?>
-<p:sld xmlns:a="http://schemas.openxmlformats.org/drawingml/2006/main" xmlns:p="http://schemas.openxmlformats.org/presentationml/2006/main" xmlns:r="http://schemas.openxmlformats.org/officeDocument/2006/relationships">
+<p:sld xmlns:a="http://schemas.openxmlformats.org/drawingml/2006/main" xmlns:r="http://schemas.openxmlformats.org/officeDocument/2006/relationships" xmlns:p="http://schemas.openxmlformats.org/presentationml/2006/main">
   <p:cSld>
     <p:bg>
       <p:bgPr>
@@ -12179,7 +13064,7 @@
           <a:noFill/>
         </p:spPr>
         <p:txBody>
-          <a:bodyPr wrap="square" anchor="t" lIns="0" rIns="0" tIns="0" bIns="0">
+          <a:bodyPr wrap="square" lIns="0" tIns="0" rIns="0" bIns="0" anchor="t">
             <a:spAutoFit/>
           </a:bodyPr>
           <a:lstStyle/>
@@ -12194,12 +13079,20 @@
                 <a:solidFill>
                   <a:srgbClr val="3B2B26"/>
                 </a:solidFill>
-                <a:latin typeface="Arial"/>
-                <a:ea typeface="Arial"/>
-                <a:cs typeface="Arial"/>
+                <a:latin typeface="Arial" panose="020B0604020202020204"/>
+                <a:ea typeface="Arial" panose="020B0604020202020204"/>
+                <a:cs typeface="Arial" panose="020B0604020202020204"/>
               </a:rPr>
               <a:t>我们的位置：办公线做「任务」，我们做「关系」</a:t>
             </a:r>
+            <a:endParaRPr sz="3000" b="1">
+              <a:solidFill>
+                <a:srgbClr val="3B2B26"/>
+              </a:solidFill>
+              <a:latin typeface="Arial" panose="020B0604020202020204"/>
+              <a:ea typeface="Arial" panose="020B0604020202020204"/>
+              <a:cs typeface="Arial" panose="020B0604020202020204"/>
+            </a:endParaRPr>
           </a:p>
         </p:txBody>
       </p:sp>
@@ -12264,7 +13157,7 @@
           <a:noFill/>
         </p:spPr>
         <p:txBody>
-          <a:bodyPr wrap="square" anchor="t" lIns="0" rIns="0" tIns="0" bIns="0">
+          <a:bodyPr wrap="square" lIns="0" tIns="0" rIns="0" bIns="0" anchor="t">
             <a:spAutoFit/>
           </a:bodyPr>
           <a:lstStyle/>
@@ -12279,9 +13172,9 @@
                 <a:solidFill>
                   <a:srgbClr val="A03A35"/>
                 </a:solidFill>
-                <a:latin typeface="微软雅黑"/>
-                <a:ea typeface="微软雅黑"/>
-                <a:cs typeface="微软雅黑"/>
+                <a:latin typeface="微软雅黑" panose="020B0503020204020204" charset="-122"/>
+                <a:ea typeface="微软雅黑" panose="020B0503020204020204" charset="-122"/>
+                <a:cs typeface="微软雅黑" panose="020B0503020204020204" charset="-122"/>
               </a:rPr>
               <a:t>▪  </a:t>
             </a:r>
@@ -12290,9 +13183,9 @@
                 <a:solidFill>
                   <a:srgbClr val="3B2B26"/>
                 </a:solidFill>
-                <a:latin typeface="微软雅黑"/>
-                <a:ea typeface="微软雅黑"/>
-                <a:cs typeface="微软雅黑"/>
+                <a:latin typeface="微软雅黑" panose="020B0503020204020204" charset="-122"/>
+                <a:ea typeface="微软雅黑" panose="020B0503020204020204" charset="-122"/>
+                <a:cs typeface="微软雅黑" panose="020B0503020204020204" charset="-122"/>
               </a:rPr>
               <a:t>主张</a:t>
             </a:r>
@@ -12301,12 +13194,20 @@
                 <a:solidFill>
                   <a:srgbClr val="6B5850"/>
                 </a:solidFill>
-                <a:latin typeface="微软雅黑"/>
-                <a:ea typeface="微软雅黑"/>
-                <a:cs typeface="微软雅黑"/>
+                <a:latin typeface="微软雅黑" panose="020B0503020204020204" charset="-122"/>
+                <a:ea typeface="微软雅黑" panose="020B0503020204020204" charset="-122"/>
+                <a:cs typeface="微软雅黑" panose="020B0503020204020204" charset="-122"/>
               </a:rPr>
               <a:t>  把「角色的人格连续性」当变量：她是不是她本人、还记不记得你</a:t>
             </a:r>
+            <a:endParaRPr sz="1300" b="0">
+              <a:solidFill>
+                <a:srgbClr val="6B5850"/>
+              </a:solidFill>
+              <a:latin typeface="微软雅黑" panose="020B0503020204020204" charset="-122"/>
+              <a:ea typeface="微软雅黑" panose="020B0503020204020204" charset="-122"/>
+              <a:cs typeface="微软雅黑" panose="020B0503020204020204" charset="-122"/>
+            </a:endParaRPr>
           </a:p>
           <a:p>
             <a:pPr>
@@ -12319,9 +13220,9 @@
                 <a:solidFill>
                   <a:srgbClr val="A03A35"/>
                 </a:solidFill>
-                <a:latin typeface="微软雅黑"/>
-                <a:ea typeface="微软雅黑"/>
-                <a:cs typeface="微软雅黑"/>
+                <a:latin typeface="微软雅黑" panose="020B0503020204020204" charset="-122"/>
+                <a:ea typeface="微软雅黑" panose="020B0503020204020204" charset="-122"/>
+                <a:cs typeface="微软雅黑" panose="020B0503020204020204" charset="-122"/>
               </a:rPr>
               <a:t>▪  </a:t>
             </a:r>
@@ -12330,9 +13231,9 @@
                 <a:solidFill>
                   <a:srgbClr val="3B2B26"/>
                 </a:solidFill>
-                <a:latin typeface="微软雅黑"/>
-                <a:ea typeface="微软雅黑"/>
-                <a:cs typeface="微软雅黑"/>
+                <a:latin typeface="微软雅黑" panose="020B0503020204020204" charset="-122"/>
+                <a:ea typeface="微软雅黑" panose="020B0503020204020204" charset="-122"/>
+                <a:cs typeface="微软雅黑" panose="020B0503020204020204" charset="-122"/>
               </a:rPr>
               <a:t>对照：办公线</a:t>
             </a:r>
@@ -12341,12 +13242,20 @@
                 <a:solidFill>
                   <a:srgbClr val="6B5850"/>
                 </a:solidFill>
-                <a:latin typeface="微软雅黑"/>
-                <a:ea typeface="微软雅黑"/>
-                <a:cs typeface="微软雅黑"/>
+                <a:latin typeface="微软雅黑" panose="020B0503020204020204" charset="-122"/>
+                <a:ea typeface="微软雅黑" panose="020B0503020204020204" charset="-122"/>
+                <a:cs typeface="微软雅黑" panose="020B0503020204020204" charset="-122"/>
               </a:rPr>
               <a:t>  腾讯 / Anthropic / OpenAI / 仓鼠元元的宠物是通用吉祥物，指标是效率与留存</a:t>
             </a:r>
+            <a:endParaRPr sz="1300" b="0">
+              <a:solidFill>
+                <a:srgbClr val="6B5850"/>
+              </a:solidFill>
+              <a:latin typeface="微软雅黑" panose="020B0503020204020204" charset="-122"/>
+              <a:ea typeface="微软雅黑" panose="020B0503020204020204" charset="-122"/>
+              <a:cs typeface="微软雅黑" panose="020B0503020204020204" charset="-122"/>
+            </a:endParaRPr>
           </a:p>
           <a:p>
             <a:pPr>
@@ -12359,9 +13268,9 @@
                 <a:solidFill>
                   <a:srgbClr val="A03A35"/>
                 </a:solidFill>
-                <a:latin typeface="微软雅黑"/>
-                <a:ea typeface="微软雅黑"/>
-                <a:cs typeface="微软雅黑"/>
+                <a:latin typeface="微软雅黑" panose="020B0503020204020204" charset="-122"/>
+                <a:ea typeface="微软雅黑" panose="020B0503020204020204" charset="-122"/>
+                <a:cs typeface="微软雅黑" panose="020B0503020204020204" charset="-122"/>
               </a:rPr>
               <a:t>▪  </a:t>
             </a:r>
@@ -12370,9 +13279,9 @@
                 <a:solidFill>
                   <a:srgbClr val="3B2B26"/>
                 </a:solidFill>
-                <a:latin typeface="微软雅黑"/>
-                <a:ea typeface="微软雅黑"/>
-                <a:cs typeface="微软雅黑"/>
+                <a:latin typeface="微软雅黑" panose="020B0503020204020204" charset="-122"/>
+                <a:ea typeface="微软雅黑" panose="020B0503020204020204" charset="-122"/>
+                <a:cs typeface="微软雅黑" panose="020B0503020204020204" charset="-122"/>
               </a:rPr>
               <a:t>形象</a:t>
             </a:r>
@@ -12381,12 +13290,20 @@
                 <a:solidFill>
                   <a:srgbClr val="6B5850"/>
                 </a:solidFill>
-                <a:latin typeface="微软雅黑"/>
-                <a:ea typeface="微软雅黑"/>
-                <a:cs typeface="微软雅黑"/>
+                <a:latin typeface="微软雅黑" panose="020B0503020204020204" charset="-122"/>
+                <a:ea typeface="微软雅黑" panose="020B0503020204020204" charset="-122"/>
+                <a:cs typeface="微软雅黑" panose="020B0503020204020204" charset="-122"/>
               </a:rPr>
               <a:t>  Live2D + 2D 立绘双形态，可换装、随情绪联动；QQ 侧与桌宠同一套装扮</a:t>
             </a:r>
+            <a:endParaRPr sz="1300" b="0">
+              <a:solidFill>
+                <a:srgbClr val="6B5850"/>
+              </a:solidFill>
+              <a:latin typeface="微软雅黑" panose="020B0503020204020204" charset="-122"/>
+              <a:ea typeface="微软雅黑" panose="020B0503020204020204" charset="-122"/>
+              <a:cs typeface="微软雅黑" panose="020B0503020204020204" charset="-122"/>
+            </a:endParaRPr>
           </a:p>
           <a:p>
             <a:pPr>
@@ -12399,9 +13316,9 @@
                 <a:solidFill>
                   <a:srgbClr val="A03A35"/>
                 </a:solidFill>
-                <a:latin typeface="微软雅黑"/>
-                <a:ea typeface="微软雅黑"/>
-                <a:cs typeface="微软雅黑"/>
+                <a:latin typeface="微软雅黑" panose="020B0503020204020204" charset="-122"/>
+                <a:ea typeface="微软雅黑" panose="020B0503020204020204" charset="-122"/>
+                <a:cs typeface="微软雅黑" panose="020B0503020204020204" charset="-122"/>
               </a:rPr>
               <a:t>▪  </a:t>
             </a:r>
@@ -12410,9 +13327,9 @@
                 <a:solidFill>
                   <a:srgbClr val="3B2B26"/>
                 </a:solidFill>
-                <a:latin typeface="微软雅黑"/>
-                <a:ea typeface="微软雅黑"/>
-                <a:cs typeface="微软雅黑"/>
+                <a:latin typeface="微软雅黑" panose="020B0503020204020204" charset="-122"/>
+                <a:ea typeface="微软雅黑" panose="020B0503020204020204" charset="-122"/>
+                <a:cs typeface="微软雅黑" panose="020B0503020204020204" charset="-122"/>
               </a:rPr>
               <a:t>人格与记忆</a:t>
             </a:r>
@@ -12421,12 +13338,20 @@
                 <a:solidFill>
                   <a:srgbClr val="6B5850"/>
                 </a:solidFill>
-                <a:latin typeface="微软雅黑"/>
-                <a:ea typeface="微软雅黑"/>
-                <a:cs typeface="微软雅黑"/>
+                <a:latin typeface="微软雅黑" panose="020B0503020204020204" charset="-122"/>
+                <a:ea typeface="微软雅黑" panose="020B0503020204020204" charset="-122"/>
+                <a:cs typeface="微软雅黑" panose="020B0503020204020204" charset="-122"/>
               </a:rPr>
               <a:t>  固定人设不 OOC、角色专属 GPT-SoVITS 声线、长期记忆与关系值（按相处证据抬升）</a:t>
             </a:r>
+            <a:endParaRPr sz="1300" b="0">
+              <a:solidFill>
+                <a:srgbClr val="6B5850"/>
+              </a:solidFill>
+              <a:latin typeface="微软雅黑" panose="020B0503020204020204" charset="-122"/>
+              <a:ea typeface="微软雅黑" panose="020B0503020204020204" charset="-122"/>
+              <a:cs typeface="微软雅黑" panose="020B0503020204020204" charset="-122"/>
+            </a:endParaRPr>
           </a:p>
           <a:p>
             <a:pPr>
@@ -12439,9 +13364,9 @@
                 <a:solidFill>
                   <a:srgbClr val="A03A35"/>
                 </a:solidFill>
-                <a:latin typeface="微软雅黑"/>
-                <a:ea typeface="微软雅黑"/>
-                <a:cs typeface="微软雅黑"/>
+                <a:latin typeface="微软雅黑" panose="020B0503020204020204" charset="-122"/>
+                <a:ea typeface="微软雅黑" panose="020B0503020204020204" charset="-122"/>
+                <a:cs typeface="微软雅黑" panose="020B0503020204020204" charset="-122"/>
               </a:rPr>
               <a:t>▪  </a:t>
             </a:r>
@@ -12450,9 +13375,9 @@
                 <a:solidFill>
                   <a:srgbClr val="3B2B26"/>
                 </a:solidFill>
-                <a:latin typeface="微软雅黑"/>
-                <a:ea typeface="微软雅黑"/>
-                <a:cs typeface="微软雅黑"/>
+                <a:latin typeface="微软雅黑" panose="020B0503020204020204" charset="-122"/>
+                <a:ea typeface="微软雅黑" panose="020B0503020204020204" charset="-122"/>
+                <a:cs typeface="微软雅黑" panose="020B0503020204020204" charset="-122"/>
               </a:rPr>
               <a:t>出桌面</a:t>
             </a:r>
@@ -12461,12 +13386,20 @@
                 <a:solidFill>
                   <a:srgbClr val="6B5850"/>
                 </a:solidFill>
-                <a:latin typeface="微软雅黑"/>
-                <a:ea typeface="微软雅黑"/>
-                <a:cs typeface="微软雅黑"/>
+                <a:latin typeface="微软雅黑" panose="020B0503020204020204" charset="-122"/>
+                <a:ea typeface="微软雅黑" panose="020B0503020204020204" charset="-122"/>
+                <a:cs typeface="微软雅黑" panose="020B0503020204020204" charset="-122"/>
               </a:rPr>
               <a:t>  QQ / 微信桥接同一套人设与记忆；手机端共用同一套协议与记忆文件</a:t>
             </a:r>
+            <a:endParaRPr sz="1300" b="0">
+              <a:solidFill>
+                <a:srgbClr val="6B5850"/>
+              </a:solidFill>
+              <a:latin typeface="微软雅黑" panose="020B0503020204020204" charset="-122"/>
+              <a:ea typeface="微软雅黑" panose="020B0503020204020204" charset="-122"/>
+              <a:cs typeface="微软雅黑" panose="020B0503020204020204" charset="-122"/>
+            </a:endParaRPr>
           </a:p>
           <a:p>
             <a:pPr>
@@ -12479,9 +13412,9 @@
                 <a:solidFill>
                   <a:srgbClr val="A03A35"/>
                 </a:solidFill>
-                <a:latin typeface="微软雅黑"/>
-                <a:ea typeface="微软雅黑"/>
-                <a:cs typeface="微软雅黑"/>
+                <a:latin typeface="微软雅黑" panose="020B0503020204020204" charset="-122"/>
+                <a:ea typeface="微软雅黑" panose="020B0503020204020204" charset="-122"/>
+                <a:cs typeface="微软雅黑" panose="020B0503020204020204" charset="-122"/>
               </a:rPr>
               <a:t>▪  </a:t>
             </a:r>
@@ -12490,9 +13423,9 @@
                 <a:solidFill>
                   <a:srgbClr val="3B2B26"/>
                 </a:solidFill>
-                <a:latin typeface="微软雅黑"/>
-                <a:ea typeface="微软雅黑"/>
-                <a:cs typeface="微软雅黑"/>
+                <a:latin typeface="微软雅黑" panose="020B0503020204020204" charset="-122"/>
+                <a:ea typeface="微软雅黑" panose="020B0503020204020204" charset="-122"/>
+                <a:cs typeface="微软雅黑" panose="020B0503020204020204" charset="-122"/>
               </a:rPr>
               <a:t>桌面操作</a:t>
             </a:r>
@@ -12501,12 +13434,20 @@
                 <a:solidFill>
                   <a:srgbClr val="6B5850"/>
                 </a:solidFill>
-                <a:latin typeface="微软雅黑"/>
-                <a:ea typeface="微软雅黑"/>
-                <a:cs typeface="微软雅黑"/>
+                <a:latin typeface="微软雅黑" panose="020B0503020204020204" charset="-122"/>
+                <a:ea typeface="微软雅黑" panose="020B0503020204020204" charset="-122"/>
+                <a:cs typeface="微软雅黑" panose="020B0503020204020204" charset="-122"/>
               </a:rPr>
               <a:t>  键鼠 / 看屏幕 / 文件只读访问 —— 能做事的角色，而不是只会聊天的窗口</a:t>
             </a:r>
+            <a:endParaRPr sz="1300" b="0">
+              <a:solidFill>
+                <a:srgbClr val="6B5850"/>
+              </a:solidFill>
+              <a:latin typeface="微软雅黑" panose="020B0503020204020204" charset="-122"/>
+              <a:ea typeface="微软雅黑" panose="020B0503020204020204" charset="-122"/>
+              <a:cs typeface="微软雅黑" panose="020B0503020204020204" charset="-122"/>
+            </a:endParaRPr>
           </a:p>
           <a:p>
             <a:pPr>
@@ -12519,9 +13460,9 @@
                 <a:solidFill>
                   <a:srgbClr val="A03A35"/>
                 </a:solidFill>
-                <a:latin typeface="微软雅黑"/>
-                <a:ea typeface="微软雅黑"/>
-                <a:cs typeface="微软雅黑"/>
+                <a:latin typeface="微软雅黑" panose="020B0503020204020204" charset="-122"/>
+                <a:ea typeface="微软雅黑" panose="020B0503020204020204" charset="-122"/>
+                <a:cs typeface="微软雅黑" panose="020B0503020204020204" charset="-122"/>
               </a:rPr>
               <a:t>▪  </a:t>
             </a:r>
@@ -12530,9 +13471,9 @@
                 <a:solidFill>
                   <a:srgbClr val="3B2B26"/>
                 </a:solidFill>
-                <a:latin typeface="微软雅黑"/>
-                <a:ea typeface="微软雅黑"/>
-                <a:cs typeface="微软雅黑"/>
+                <a:latin typeface="微软雅黑" panose="020B0503020204020204" charset="-122"/>
+                <a:ea typeface="微软雅黑" panose="020B0503020204020204" charset="-122"/>
+                <a:cs typeface="微软雅黑" panose="020B0503020204020204" charset="-122"/>
               </a:rPr>
               <a:t>诚实边界</a:t>
             </a:r>
@@ -12541,12 +13482,20 @@
                 <a:solidFill>
                   <a:srgbClr val="6B5850"/>
                 </a:solidFill>
-                <a:latin typeface="微软雅黑"/>
-                <a:ea typeface="微软雅黑"/>
-                <a:cs typeface="微软雅黑"/>
+                <a:latin typeface="微软雅黑" panose="020B0503020204020204" charset="-122"/>
+                <a:ea typeface="微软雅黑" panose="020B0503020204020204" charset="-122"/>
+                <a:cs typeface="微软雅黑" panose="020B0503020204020204" charset="-122"/>
               </a:rPr>
               <a:t>  并非首创：唯一查到把这几条同时做齐且活跃的是 super-agent-party（详见备注）</a:t>
             </a:r>
+            <a:endParaRPr sz="1300" b="0">
+              <a:solidFill>
+                <a:srgbClr val="6B5850"/>
+              </a:solidFill>
+              <a:latin typeface="微软雅黑" panose="020B0503020204020204" charset="-122"/>
+              <a:ea typeface="微软雅黑" panose="020B0503020204020204" charset="-122"/>
+              <a:cs typeface="微软雅黑" panose="020B0503020204020204" charset="-122"/>
+            </a:endParaRPr>
           </a:p>
         </p:txBody>
       </p:sp>
@@ -12567,7 +13516,7 @@
           <a:noFill/>
         </p:spPr>
         <p:txBody>
-          <a:bodyPr wrap="square" anchor="t" lIns="0" rIns="0" tIns="0" bIns="0">
+          <a:bodyPr wrap="square" lIns="0" tIns="0" rIns="0" bIns="0" anchor="t">
             <a:spAutoFit/>
           </a:bodyPr>
           <a:lstStyle/>
@@ -12582,12 +13531,20 @@
                 <a:solidFill>
                   <a:srgbClr val="6B5850"/>
                 </a:solidFill>
-                <a:latin typeface="Arial"/>
-                <a:ea typeface="Arial"/>
-                <a:cs typeface="Arial"/>
+                <a:latin typeface="Arial" panose="020B0604020202020204"/>
+                <a:ea typeface="Arial" panose="020B0604020202020204"/>
+                <a:cs typeface="Arial" panose="020B0604020202020204"/>
               </a:rPr>
               <a:t>08</a:t>
             </a:r>
+            <a:endParaRPr sz="1000" b="0">
+              <a:solidFill>
+                <a:srgbClr val="6B5850"/>
+              </a:solidFill>
+              <a:latin typeface="Arial" panose="020B0604020202020204"/>
+              <a:ea typeface="Arial" panose="020B0604020202020204"/>
+              <a:cs typeface="Arial" panose="020B0604020202020204"/>
+            </a:endParaRPr>
           </a:p>
         </p:txBody>
       </p:sp>
@@ -12600,7 +13557,7 @@
 </file>
 
 <file path=ppt/slides/slide9.xml><?xml version="1.0" encoding="utf-8"?>
-<p:sld xmlns:a="http://schemas.openxmlformats.org/drawingml/2006/main" xmlns:p="http://schemas.openxmlformats.org/presentationml/2006/main" xmlns:r="http://schemas.openxmlformats.org/officeDocument/2006/relationships">
+<p:sld xmlns:a="http://schemas.openxmlformats.org/drawingml/2006/main" xmlns:r="http://schemas.openxmlformats.org/officeDocument/2006/relationships" xmlns:p="http://schemas.openxmlformats.org/presentationml/2006/main">
   <p:cSld>
     <p:bg>
       <p:bgPr>
@@ -12634,7 +13591,7 @@
           <a:noFill/>
         </p:spPr>
         <p:txBody>
-          <a:bodyPr wrap="square" anchor="t" lIns="0" rIns="0" tIns="0" bIns="0">
+          <a:bodyPr wrap="square" lIns="0" tIns="0" rIns="0" bIns="0" anchor="t">
             <a:spAutoFit/>
           </a:bodyPr>
           <a:lstStyle/>
@@ -12649,12 +13606,20 @@
                 <a:solidFill>
                   <a:srgbClr val="3B2B26"/>
                 </a:solidFill>
-                <a:latin typeface="Arial"/>
-                <a:ea typeface="Arial"/>
-                <a:cs typeface="Arial"/>
+                <a:latin typeface="Arial" panose="020B0604020202020204"/>
+                <a:ea typeface="Arial" panose="020B0604020202020204"/>
+                <a:cs typeface="Arial" panose="020B0604020202020204"/>
               </a:rPr>
               <a:t>同一个「宠物」位置，两种完全不同的做法</a:t>
             </a:r>
+            <a:endParaRPr sz="3000" b="1">
+              <a:solidFill>
+                <a:srgbClr val="3B2B26"/>
+              </a:solidFill>
+              <a:latin typeface="Arial" panose="020B0604020202020204"/>
+              <a:ea typeface="Arial" panose="020B0604020202020204"/>
+              <a:cs typeface="Arial" panose="020B0604020202020204"/>
+            </a:endParaRPr>
           </a:p>
         </p:txBody>
       </p:sp>
@@ -12719,7 +13684,7 @@
           <a:noFill/>
         </p:spPr>
         <p:txBody>
-          <a:bodyPr wrap="square" anchor="t" lIns="0" rIns="0" tIns="0" bIns="0">
+          <a:bodyPr wrap="square" lIns="0" tIns="0" rIns="0" bIns="0" anchor="t">
             <a:spAutoFit/>
           </a:bodyPr>
           <a:lstStyle/>
@@ -12734,12 +13699,20 @@
                 <a:solidFill>
                   <a:srgbClr val="A03A35"/>
                 </a:solidFill>
-                <a:latin typeface="Arial"/>
-                <a:ea typeface="Arial"/>
-                <a:cs typeface="Arial"/>
+                <a:latin typeface="Arial" panose="020B0604020202020204"/>
+                <a:ea typeface="Arial" panose="020B0604020202020204"/>
+                <a:cs typeface="Arial" panose="020B0604020202020204"/>
               </a:rPr>
               <a:t>他们：办公 / 生产力线</a:t>
             </a:r>
+            <a:endParaRPr sz="2000" b="1">
+              <a:solidFill>
+                <a:srgbClr val="A03A35"/>
+              </a:solidFill>
+              <a:latin typeface="Arial" panose="020B0604020202020204"/>
+              <a:ea typeface="Arial" panose="020B0604020202020204"/>
+              <a:cs typeface="Arial" panose="020B0604020202020204"/>
+            </a:endParaRPr>
           </a:p>
         </p:txBody>
       </p:sp>
@@ -12804,7 +13777,7 @@
           <a:noFill/>
         </p:spPr>
         <p:txBody>
-          <a:bodyPr wrap="square" anchor="t" lIns="0" rIns="0" tIns="0" bIns="0">
+          <a:bodyPr wrap="square" lIns="0" tIns="0" rIns="0" bIns="0" anchor="t">
             <a:spAutoFit/>
           </a:bodyPr>
           <a:lstStyle/>
@@ -12819,9 +13792,9 @@
                 <a:solidFill>
                   <a:srgbClr val="A03A35"/>
                 </a:solidFill>
-                <a:latin typeface="微软雅黑"/>
-                <a:ea typeface="微软雅黑"/>
-                <a:cs typeface="微软雅黑"/>
+                <a:latin typeface="微软雅黑" panose="020B0503020204020204" charset="-122"/>
+                <a:ea typeface="微软雅黑" panose="020B0503020204020204" charset="-122"/>
+                <a:cs typeface="微软雅黑" panose="020B0503020204020204" charset="-122"/>
               </a:rPr>
               <a:t>▪  </a:t>
             </a:r>
@@ -12830,9 +13803,9 @@
                 <a:solidFill>
                   <a:srgbClr val="3B2B26"/>
                 </a:solidFill>
-                <a:latin typeface="微软雅黑"/>
-                <a:ea typeface="微软雅黑"/>
-                <a:cs typeface="微软雅黑"/>
+                <a:latin typeface="微软雅黑" panose="020B0503020204020204" charset="-122"/>
+                <a:ea typeface="微软雅黑" panose="020B0503020204020204" charset="-122"/>
+                <a:cs typeface="微软雅黑" panose="020B0503020204020204" charset="-122"/>
               </a:rPr>
               <a:t>宠物是通用吉祥物</a:t>
             </a:r>
@@ -12841,12 +13814,20 @@
                 <a:solidFill>
                   <a:srgbClr val="6B5850"/>
                 </a:solidFill>
-                <a:latin typeface="微软雅黑"/>
-                <a:ea typeface="微软雅黑"/>
-                <a:cs typeface="微软雅黑"/>
+                <a:latin typeface="微软雅黑" panose="020B0503020204020204" charset="-122"/>
+                <a:ea typeface="微软雅黑" panose="020B0503020204020204" charset="-122"/>
+                <a:cs typeface="微软雅黑" panose="020B0503020204020204" charset="-122"/>
               </a:rPr>
               <a:t>  一只猫、一只随机孵化的宠物；OpenAI 还允许自建 Custom Pet</a:t>
             </a:r>
+            <a:endParaRPr sz="1200" b="0">
+              <a:solidFill>
+                <a:srgbClr val="6B5850"/>
+              </a:solidFill>
+              <a:latin typeface="微软雅黑" panose="020B0503020204020204" charset="-122"/>
+              <a:ea typeface="微软雅黑" panose="020B0503020204020204" charset="-122"/>
+              <a:cs typeface="微软雅黑" panose="020B0503020204020204" charset="-122"/>
+            </a:endParaRPr>
           </a:p>
           <a:p>
             <a:pPr>
@@ -12859,9 +13840,9 @@
                 <a:solidFill>
                   <a:srgbClr val="A03A35"/>
                 </a:solidFill>
-                <a:latin typeface="微软雅黑"/>
-                <a:ea typeface="微软雅黑"/>
-                <a:cs typeface="微软雅黑"/>
+                <a:latin typeface="微软雅黑" panose="020B0503020204020204" charset="-122"/>
+                <a:ea typeface="微软雅黑" panose="020B0503020204020204" charset="-122"/>
+                <a:cs typeface="微软雅黑" panose="020B0503020204020204" charset="-122"/>
               </a:rPr>
               <a:t>▪  </a:t>
             </a:r>
@@ -12870,9 +13851,9 @@
                 <a:solidFill>
                   <a:srgbClr val="3B2B26"/>
                 </a:solidFill>
-                <a:latin typeface="微软雅黑"/>
-                <a:ea typeface="微软雅黑"/>
-                <a:cs typeface="微软雅黑"/>
+                <a:latin typeface="微软雅黑" panose="020B0503020204020204" charset="-122"/>
+                <a:ea typeface="微软雅黑" panose="020B0503020204020204" charset="-122"/>
+                <a:cs typeface="微软雅黑" panose="020B0503020204020204" charset="-122"/>
               </a:rPr>
               <a:t>目标是任务</a:t>
             </a:r>
@@ -12881,12 +13862,20 @@
                 <a:solidFill>
                   <a:srgbClr val="6B5850"/>
                 </a:solidFill>
-                <a:latin typeface="微软雅黑"/>
-                <a:ea typeface="微软雅黑"/>
-                <a:cs typeface="微软雅黑"/>
+                <a:latin typeface="微软雅黑" panose="020B0503020204020204" charset="-122"/>
+                <a:ea typeface="微软雅黑" panose="020B0503020204020204" charset="-122"/>
+                <a:cs typeface="微软雅黑" panose="020B0503020204020204" charset="-122"/>
               </a:rPr>
               <a:t>  替你翻译、整理、跑代码、跨应用执行（WorkBuddy 想做“Agent 时代的操作系统”）</a:t>
             </a:r>
+            <a:endParaRPr sz="1200" b="0">
+              <a:solidFill>
+                <a:srgbClr val="6B5850"/>
+              </a:solidFill>
+              <a:latin typeface="微软雅黑" panose="020B0503020204020204" charset="-122"/>
+              <a:ea typeface="微软雅黑" panose="020B0503020204020204" charset="-122"/>
+              <a:cs typeface="微软雅黑" panose="020B0503020204020204" charset="-122"/>
+            </a:endParaRPr>
           </a:p>
           <a:p>
             <a:pPr>
@@ -12899,9 +13888,9 @@
                 <a:solidFill>
                   <a:srgbClr val="A03A35"/>
                 </a:solidFill>
-                <a:latin typeface="微软雅黑"/>
-                <a:ea typeface="微软雅黑"/>
-                <a:cs typeface="微软雅黑"/>
+                <a:latin typeface="微软雅黑" panose="020B0503020204020204" charset="-122"/>
+                <a:ea typeface="微软雅黑" panose="020B0503020204020204" charset="-122"/>
+                <a:cs typeface="微软雅黑" panose="020B0503020204020204" charset="-122"/>
               </a:rPr>
               <a:t>▪  </a:t>
             </a:r>
@@ -12910,9 +13899,9 @@
                 <a:solidFill>
                   <a:srgbClr val="3B2B26"/>
                 </a:solidFill>
-                <a:latin typeface="微软雅黑"/>
-                <a:ea typeface="微软雅黑"/>
-                <a:cs typeface="微软雅黑"/>
+                <a:latin typeface="微软雅黑" panose="020B0503020204020204" charset="-122"/>
+                <a:ea typeface="微软雅黑" panose="020B0503020204020204" charset="-122"/>
+                <a:cs typeface="微软雅黑" panose="020B0503020204020204" charset="-122"/>
               </a:rPr>
               <a:t>指标是效率与留存</a:t>
             </a:r>
@@ -12921,12 +13910,20 @@
                 <a:solidFill>
                   <a:srgbClr val="6B5850"/>
                 </a:solidFill>
-                <a:latin typeface="微软雅黑"/>
-                <a:ea typeface="微软雅黑"/>
-                <a:cs typeface="微软雅黑"/>
+                <a:latin typeface="微软雅黑" panose="020B0503020204020204" charset="-122"/>
+                <a:ea typeface="微软雅黑" panose="020B0503020204020204" charset="-122"/>
+                <a:cs typeface="微软雅黑" panose="020B0503020204020204" charset="-122"/>
               </a:rPr>
               <a:t>  识别率、任务成功率、次日留存</a:t>
             </a:r>
+            <a:endParaRPr sz="1200" b="0">
+              <a:solidFill>
+                <a:srgbClr val="6B5850"/>
+              </a:solidFill>
+              <a:latin typeface="微软雅黑" panose="020B0503020204020204" charset="-122"/>
+              <a:ea typeface="微软雅黑" panose="020B0503020204020204" charset="-122"/>
+              <a:cs typeface="微软雅黑" panose="020B0503020204020204" charset="-122"/>
+            </a:endParaRPr>
           </a:p>
           <a:p>
             <a:pPr>
@@ -12939,9 +13936,9 @@
                 <a:solidFill>
                   <a:srgbClr val="A03A35"/>
                 </a:solidFill>
-                <a:latin typeface="微软雅黑"/>
-                <a:ea typeface="微软雅黑"/>
-                <a:cs typeface="微软雅黑"/>
+                <a:latin typeface="微软雅黑" panose="020B0503020204020204" charset="-122"/>
+                <a:ea typeface="微软雅黑" panose="020B0503020204020204" charset="-122"/>
+                <a:cs typeface="微软雅黑" panose="020B0503020204020204" charset="-122"/>
               </a:rPr>
               <a:t>▪  </a:t>
             </a:r>
@@ -12950,9 +13947,9 @@
                 <a:solidFill>
                   <a:srgbClr val="3B2B26"/>
                 </a:solidFill>
-                <a:latin typeface="微软雅黑"/>
-                <a:ea typeface="微软雅黑"/>
-                <a:cs typeface="微软雅黑"/>
+                <a:latin typeface="微软雅黑" panose="020B0503020204020204" charset="-122"/>
+                <a:ea typeface="微软雅黑" panose="020B0503020204020204" charset="-122"/>
+                <a:cs typeface="微软雅黑" panose="020B0503020204020204" charset="-122"/>
               </a:rPr>
               <a:t>不要求“是她本人”</a:t>
             </a:r>
@@ -12961,12 +13958,20 @@
                 <a:solidFill>
                   <a:srgbClr val="6B5850"/>
                 </a:solidFill>
-                <a:latin typeface="微软雅黑"/>
-                <a:ea typeface="微软雅黑"/>
-                <a:cs typeface="微软雅黑"/>
+                <a:latin typeface="微软雅黑" panose="020B0503020204020204" charset="-122"/>
+                <a:ea typeface="微软雅黑" panose="020B0503020204020204" charset="-122"/>
+                <a:cs typeface="微软雅黑" panose="020B0503020204020204" charset="-122"/>
               </a:rPr>
               <a:t>  所以换皮、联名、装扮都不影响产品成立</a:t>
             </a:r>
+            <a:endParaRPr sz="1200" b="0">
+              <a:solidFill>
+                <a:srgbClr val="6B5850"/>
+              </a:solidFill>
+              <a:latin typeface="微软雅黑" panose="020B0503020204020204" charset="-122"/>
+              <a:ea typeface="微软雅黑" panose="020B0503020204020204" charset="-122"/>
+              <a:cs typeface="微软雅黑" panose="020B0503020204020204" charset="-122"/>
+            </a:endParaRPr>
           </a:p>
           <a:p>
             <a:pPr>
@@ -12979,9 +13984,9 @@
                 <a:solidFill>
                   <a:srgbClr val="A03A35"/>
                 </a:solidFill>
-                <a:latin typeface="微软雅黑"/>
-                <a:ea typeface="微软雅黑"/>
-                <a:cs typeface="微软雅黑"/>
+                <a:latin typeface="微软雅黑" panose="020B0503020204020204" charset="-122"/>
+                <a:ea typeface="微软雅黑" panose="020B0503020204020204" charset="-122"/>
+                <a:cs typeface="微软雅黑" panose="020B0503020204020204" charset="-122"/>
               </a:rPr>
               <a:t>▪  </a:t>
             </a:r>
@@ -12990,9 +13995,9 @@
                 <a:solidFill>
                   <a:srgbClr val="3B2B26"/>
                 </a:solidFill>
-                <a:latin typeface="微软雅黑"/>
-                <a:ea typeface="微软雅黑"/>
-                <a:cs typeface="微软雅黑"/>
+                <a:latin typeface="微软雅黑" panose="020B0503020204020204" charset="-122"/>
+                <a:ea typeface="微软雅黑" panose="020B0503020204020204" charset="-122"/>
+                <a:cs typeface="微软雅黑" panose="020B0503020204020204" charset="-122"/>
               </a:rPr>
               <a:t>场景：办公桌 / 公共场所</a:t>
             </a:r>
@@ -13001,12 +14006,20 @@
                 <a:solidFill>
                   <a:srgbClr val="6B5850"/>
                 </a:solidFill>
-                <a:latin typeface="微软雅黑"/>
-                <a:ea typeface="微软雅黑"/>
-                <a:cs typeface="微软雅黑"/>
+                <a:latin typeface="微软雅黑" panose="020B0503020204020204" charset="-122"/>
+                <a:ea typeface="微软雅黑" panose="020B0503020204020204" charset="-122"/>
+                <a:cs typeface="微软雅黑" panose="020B0503020204020204" charset="-122"/>
               </a:rPr>
               <a:t>  mmHRI 这类研究甚至以医院病房、餐厅为例</a:t>
             </a:r>
+            <a:endParaRPr sz="1200" b="0">
+              <a:solidFill>
+                <a:srgbClr val="6B5850"/>
+              </a:solidFill>
+              <a:latin typeface="微软雅黑" panose="020B0503020204020204" charset="-122"/>
+              <a:ea typeface="微软雅黑" panose="020B0503020204020204" charset="-122"/>
+              <a:cs typeface="微软雅黑" panose="020B0503020204020204" charset="-122"/>
+            </a:endParaRPr>
           </a:p>
         </p:txBody>
       </p:sp>
@@ -13027,7 +14040,7 @@
           <a:noFill/>
         </p:spPr>
         <p:txBody>
-          <a:bodyPr wrap="square" anchor="t" lIns="0" rIns="0" tIns="0" bIns="0">
+          <a:bodyPr wrap="square" lIns="0" tIns="0" rIns="0" bIns="0" anchor="t">
             <a:spAutoFit/>
           </a:bodyPr>
           <a:lstStyle/>
@@ -13042,12 +14055,20 @@
                 <a:solidFill>
                   <a:srgbClr val="C9A35F"/>
                 </a:solidFill>
-                <a:latin typeface="Arial"/>
-                <a:ea typeface="Arial"/>
-                <a:cs typeface="Arial"/>
+                <a:latin typeface="Arial" panose="020B0604020202020204"/>
+                <a:ea typeface="Arial" panose="020B0604020202020204"/>
+                <a:cs typeface="Arial" panose="020B0604020202020204"/>
               </a:rPr>
               <a:t>我们：角色 / 关系线</a:t>
             </a:r>
+            <a:endParaRPr sz="2000" b="1">
+              <a:solidFill>
+                <a:srgbClr val="C9A35F"/>
+              </a:solidFill>
+              <a:latin typeface="Arial" panose="020B0604020202020204"/>
+              <a:ea typeface="Arial" panose="020B0604020202020204"/>
+              <a:cs typeface="Arial" panose="020B0604020202020204"/>
+            </a:endParaRPr>
           </a:p>
         </p:txBody>
       </p:sp>
@@ -13112,7 +14133,7 @@
           <a:noFill/>
         </p:spPr>
         <p:txBody>
-          <a:bodyPr wrap="square" anchor="t" lIns="0" rIns="0" tIns="0" bIns="0">
+          <a:bodyPr wrap="square" lIns="0" tIns="0" rIns="0" bIns="0" anchor="t">
             <a:spAutoFit/>
           </a:bodyPr>
           <a:lstStyle/>
@@ -13127,9 +14148,9 @@
                 <a:solidFill>
                   <a:srgbClr val="A03A35"/>
                 </a:solidFill>
-                <a:latin typeface="微软雅黑"/>
-                <a:ea typeface="微软雅黑"/>
-                <a:cs typeface="微软雅黑"/>
+                <a:latin typeface="微软雅黑" panose="020B0503020204020204" charset="-122"/>
+                <a:ea typeface="微软雅黑" panose="020B0503020204020204" charset="-122"/>
+                <a:cs typeface="微软雅黑" panose="020B0503020204020204" charset="-122"/>
               </a:rPr>
               <a:t>▪  </a:t>
             </a:r>
@@ -13138,9 +14159,9 @@
                 <a:solidFill>
                   <a:srgbClr val="3B2B26"/>
                 </a:solidFill>
-                <a:latin typeface="微软雅黑"/>
-                <a:ea typeface="微软雅黑"/>
-                <a:cs typeface="微软雅黑"/>
+                <a:latin typeface="微软雅黑" panose="020B0503020204020204" charset="-122"/>
+                <a:ea typeface="微软雅黑" panose="020B0503020204020204" charset="-122"/>
+                <a:cs typeface="微软雅黑" panose="020B0503020204020204" charset="-122"/>
               </a:rPr>
               <a:t>角色是具体的人</a:t>
             </a:r>
@@ -13149,12 +14170,20 @@
                 <a:solidFill>
                   <a:srgbClr val="6B5850"/>
                 </a:solidFill>
-                <a:latin typeface="微软雅黑"/>
-                <a:ea typeface="微软雅黑"/>
-                <a:cs typeface="微软雅黑"/>
+                <a:latin typeface="微软雅黑" panose="020B0503020204020204" charset="-122"/>
+                <a:ea typeface="微软雅黑" panose="020B0503020204020204" charset="-122"/>
+                <a:cs typeface="微软雅黑" panose="020B0503020204020204" charset="-122"/>
               </a:rPr>
               <a:t>  固定人设不 OOC、角色专属 GPT-SoVITS 声线、Live2D + 2D 双形态</a:t>
             </a:r>
+            <a:endParaRPr sz="1200" b="0">
+              <a:solidFill>
+                <a:srgbClr val="6B5850"/>
+              </a:solidFill>
+              <a:latin typeface="微软雅黑" panose="020B0503020204020204" charset="-122"/>
+              <a:ea typeface="微软雅黑" panose="020B0503020204020204" charset="-122"/>
+              <a:cs typeface="微软雅黑" panose="020B0503020204020204" charset="-122"/>
+            </a:endParaRPr>
           </a:p>
           <a:p>
             <a:pPr>
@@ -13167,9 +14196,9 @@
                 <a:solidFill>
                   <a:srgbClr val="A03A35"/>
                 </a:solidFill>
-                <a:latin typeface="微软雅黑"/>
-                <a:ea typeface="微软雅黑"/>
-                <a:cs typeface="微软雅黑"/>
+                <a:latin typeface="微软雅黑" panose="020B0503020204020204" charset="-122"/>
+                <a:ea typeface="微软雅黑" panose="020B0503020204020204" charset="-122"/>
+                <a:cs typeface="微软雅黑" panose="020B0503020204020204" charset="-122"/>
               </a:rPr>
               <a:t>▪  </a:t>
             </a:r>
@@ -13178,9 +14207,9 @@
                 <a:solidFill>
                   <a:srgbClr val="3B2B26"/>
                 </a:solidFill>
-                <a:latin typeface="微软雅黑"/>
-                <a:ea typeface="微软雅黑"/>
-                <a:cs typeface="微软雅黑"/>
+                <a:latin typeface="微软雅黑" panose="020B0503020204020204" charset="-122"/>
+                <a:ea typeface="微软雅黑" panose="020B0503020204020204" charset="-122"/>
+                <a:cs typeface="微软雅黑" panose="020B0503020204020204" charset="-122"/>
               </a:rPr>
               <a:t>目标是关系</a:t>
             </a:r>
@@ -13189,12 +14218,20 @@
                 <a:solidFill>
                   <a:srgbClr val="6B5850"/>
                 </a:solidFill>
-                <a:latin typeface="微软雅黑"/>
-                <a:ea typeface="微软雅黑"/>
-                <a:cs typeface="微软雅黑"/>
+                <a:latin typeface="微软雅黑" panose="020B0503020204020204" charset="-122"/>
+                <a:ea typeface="微软雅黑" panose="020B0503020204020204" charset="-122"/>
+                <a:cs typeface="微软雅黑" panose="020B0503020204020204" charset="-122"/>
               </a:rPr>
               <a:t>  长期记忆、习惯、日记、关系值 —— 按真实相处证据抬升，不靠嘴甜</a:t>
             </a:r>
+            <a:endParaRPr sz="1200" b="0">
+              <a:solidFill>
+                <a:srgbClr val="6B5850"/>
+              </a:solidFill>
+              <a:latin typeface="微软雅黑" panose="020B0503020204020204" charset="-122"/>
+              <a:ea typeface="微软雅黑" panose="020B0503020204020204" charset="-122"/>
+              <a:cs typeface="微软雅黑" panose="020B0503020204020204" charset="-122"/>
+            </a:endParaRPr>
           </a:p>
           <a:p>
             <a:pPr>
@@ -13207,9 +14244,9 @@
                 <a:solidFill>
                   <a:srgbClr val="A03A35"/>
                 </a:solidFill>
-                <a:latin typeface="微软雅黑"/>
-                <a:ea typeface="微软雅黑"/>
-                <a:cs typeface="微软雅黑"/>
+                <a:latin typeface="微软雅黑" panose="020B0503020204020204" charset="-122"/>
+                <a:ea typeface="微软雅黑" panose="020B0503020204020204" charset="-122"/>
+                <a:cs typeface="微软雅黑" panose="020B0503020204020204" charset="-122"/>
               </a:rPr>
               <a:t>▪  </a:t>
             </a:r>
@@ -13218,9 +14255,9 @@
                 <a:solidFill>
                   <a:srgbClr val="3B2B26"/>
                 </a:solidFill>
-                <a:latin typeface="微软雅黑"/>
-                <a:ea typeface="微软雅黑"/>
-                <a:cs typeface="微软雅黑"/>
+                <a:latin typeface="微软雅黑" panose="020B0503020204020204" charset="-122"/>
+                <a:ea typeface="微软雅黑" panose="020B0503020204020204" charset="-122"/>
+                <a:cs typeface="微软雅黑" panose="020B0503020204020204" charset="-122"/>
               </a:rPr>
               <a:t>指标是关系感知与打扰容忍度</a:t>
             </a:r>
@@ -13229,12 +14266,20 @@
                 <a:solidFill>
                   <a:srgbClr val="6B5850"/>
                 </a:solidFill>
-                <a:latin typeface="微软雅黑"/>
-                <a:ea typeface="微软雅黑"/>
-                <a:cs typeface="微软雅黑"/>
+                <a:latin typeface="微软雅黑" panose="020B0503020204020204" charset="-122"/>
+                <a:ea typeface="微软雅黑" panose="020B0503020204020204" charset="-122"/>
+                <a:cs typeface="微软雅黑" panose="020B0503020204020204" charset="-122"/>
               </a:rPr>
               <a:t>  她该不该开口、什么时候该安静，是核心体验问题</a:t>
             </a:r>
+            <a:endParaRPr sz="1200" b="0">
+              <a:solidFill>
+                <a:srgbClr val="6B5850"/>
+              </a:solidFill>
+              <a:latin typeface="微软雅黑" panose="020B0503020204020204" charset="-122"/>
+              <a:ea typeface="微软雅黑" panose="020B0503020204020204" charset="-122"/>
+              <a:cs typeface="微软雅黑" panose="020B0503020204020204" charset="-122"/>
+            </a:endParaRPr>
           </a:p>
           <a:p>
             <a:pPr>
@@ -13247,9 +14292,9 @@
                 <a:solidFill>
                   <a:srgbClr val="A03A35"/>
                 </a:solidFill>
-                <a:latin typeface="微软雅黑"/>
-                <a:ea typeface="微软雅黑"/>
-                <a:cs typeface="微软雅黑"/>
+                <a:latin typeface="微软雅黑" panose="020B0503020204020204" charset="-122"/>
+                <a:ea typeface="微软雅黑" panose="020B0503020204020204" charset="-122"/>
+                <a:cs typeface="微软雅黑" panose="020B0503020204020204" charset="-122"/>
               </a:rPr>
               <a:t>▪  </a:t>
             </a:r>
@@ -13258,9 +14303,9 @@
                 <a:solidFill>
                   <a:srgbClr val="3B2B26"/>
                 </a:solidFill>
-                <a:latin typeface="微软雅黑"/>
-                <a:ea typeface="微软雅黑"/>
-                <a:cs typeface="微软雅黑"/>
+                <a:latin typeface="微软雅黑" panose="020B0503020204020204" charset="-122"/>
+                <a:ea typeface="微软雅黑" panose="020B0503020204020204" charset="-122"/>
+                <a:cs typeface="微软雅黑" panose="020B0503020204020204" charset="-122"/>
               </a:rPr>
               <a:t>人格连续性是核心变量</a:t>
             </a:r>
@@ -13269,12 +14314,20 @@
                 <a:solidFill>
                   <a:srgbClr val="6B5850"/>
                 </a:solidFill>
-                <a:latin typeface="微软雅黑"/>
-                <a:ea typeface="微软雅黑"/>
-                <a:cs typeface="微软雅黑"/>
+                <a:latin typeface="微软雅黑" panose="020B0503020204020204" charset="-122"/>
+                <a:ea typeface="微软雅黑" panose="020B0503020204020204" charset="-122"/>
+                <a:cs typeface="微软雅黑" panose="020B0503020204020204" charset="-122"/>
               </a:rPr>
               <a:t>  换角色 = 换一个人，而不是换一张皮</a:t>
             </a:r>
+            <a:endParaRPr sz="1200" b="0">
+              <a:solidFill>
+                <a:srgbClr val="6B5850"/>
+              </a:solidFill>
+              <a:latin typeface="微软雅黑" panose="020B0503020204020204" charset="-122"/>
+              <a:ea typeface="微软雅黑" panose="020B0503020204020204" charset="-122"/>
+              <a:cs typeface="微软雅黑" panose="020B0503020204020204" charset="-122"/>
+            </a:endParaRPr>
           </a:p>
           <a:p>
             <a:pPr>
@@ -13287,9 +14340,9 @@
                 <a:solidFill>
                   <a:srgbClr val="A03A35"/>
                 </a:solidFill>
-                <a:latin typeface="微软雅黑"/>
-                <a:ea typeface="微软雅黑"/>
-                <a:cs typeface="微软雅黑"/>
+                <a:latin typeface="微软雅黑" panose="020B0503020204020204" charset="-122"/>
+                <a:ea typeface="微软雅黑" panose="020B0503020204020204" charset="-122"/>
+                <a:cs typeface="微软雅黑" panose="020B0503020204020204" charset="-122"/>
               </a:rPr>
               <a:t>▪  </a:t>
             </a:r>
@@ -13298,9 +14351,9 @@
                 <a:solidFill>
                   <a:srgbClr val="3B2B26"/>
                 </a:solidFill>
-                <a:latin typeface="微软雅黑"/>
-                <a:ea typeface="微软雅黑"/>
-                <a:cs typeface="微软雅黑"/>
+                <a:latin typeface="微软雅黑" panose="020B0503020204020204" charset="-122"/>
+                <a:ea typeface="微软雅黑" panose="020B0503020204020204" charset="-122"/>
+                <a:cs typeface="微软雅黑" panose="020B0503020204020204" charset="-122"/>
               </a:rPr>
               <a:t>场景：桌面 + 手机里的日常</a:t>
             </a:r>
@@ -13309,12 +14362,20 @@
                 <a:solidFill>
                   <a:srgbClr val="6B5850"/>
                 </a:solidFill>
-                <a:latin typeface="微软雅黑"/>
-                <a:ea typeface="微软雅黑"/>
-                <a:cs typeface="微软雅黑"/>
+                <a:latin typeface="微软雅黑" panose="020B0503020204020204" charset="-122"/>
+                <a:ea typeface="微软雅黑" panose="020B0503020204020204" charset="-122"/>
+                <a:cs typeface="微软雅黑" panose="020B0503020204020204" charset="-122"/>
               </a:rPr>
               <a:t>  QQ / 微信桥接同一套人设与记忆，手机端共用同一份记忆文件</a:t>
             </a:r>
+            <a:endParaRPr sz="1200" b="0">
+              <a:solidFill>
+                <a:srgbClr val="6B5850"/>
+              </a:solidFill>
+              <a:latin typeface="微软雅黑" panose="020B0503020204020204" charset="-122"/>
+              <a:ea typeface="微软雅黑" panose="020B0503020204020204" charset="-122"/>
+              <a:cs typeface="微软雅黑" panose="020B0503020204020204" charset="-122"/>
+            </a:endParaRPr>
           </a:p>
         </p:txBody>
       </p:sp>
@@ -13335,7 +14396,7 @@
           <a:noFill/>
         </p:spPr>
         <p:txBody>
-          <a:bodyPr wrap="square" anchor="t" lIns="0" rIns="0" tIns="0" bIns="0">
+          <a:bodyPr wrap="square" lIns="0" tIns="0" rIns="0" bIns="0" anchor="t">
             <a:spAutoFit/>
           </a:bodyPr>
           <a:lstStyle/>
@@ -13350,12 +14411,20 @@
                 <a:solidFill>
                   <a:srgbClr val="6B5850"/>
                 </a:solidFill>
-                <a:latin typeface="Arial"/>
-                <a:ea typeface="Arial"/>
-                <a:cs typeface="Arial"/>
+                <a:latin typeface="Arial" panose="020B0604020202020204"/>
+                <a:ea typeface="Arial" panose="020B0604020202020204"/>
+                <a:cs typeface="Arial" panose="020B0604020202020204"/>
               </a:rPr>
               <a:t>09</a:t>
             </a:r>
+            <a:endParaRPr sz="1000" b="0">
+              <a:solidFill>
+                <a:srgbClr val="6B5850"/>
+              </a:solidFill>
+              <a:latin typeface="Arial" panose="020B0604020202020204"/>
+              <a:ea typeface="Arial" panose="020B0604020202020204"/>
+              <a:cs typeface="Arial" panose="020B0604020202020204"/>
+            </a:endParaRPr>
           </a:p>
         </p:txBody>
       </p:sp>
@@ -13683,7 +14752,11 @@
       </a:style>
     </a:lnDef>
   </a:objectDefaults>
-  <a:extraClrSchemeLst/>
+  <a:extLst>
+    <a:ext uri="{05A4C25C-085E-4340-85A3-A5531E510DB2}">
+      <thm15:themeFamily xmlns:thm15="http://schemas.microsoft.com/office/thememl/2012/main" name="Office Theme" id="{62F939B6-93AF-4DB8-9C6B-D6C7DFDC589F}" vid="{4A3C46E8-61CC-4603-A589-7422A47A8E4A}"/>
+    </a:ext>
+  </a:extLst>
 </a:theme>
 </file>
 
@@ -14003,6 +15076,10 @@
       </a:style>
     </a:lnDef>
   </a:objectDefaults>
-  <a:extraClrSchemeLst/>
+  <a:extLst>
+    <a:ext uri="{05A4C25C-085E-4340-85A3-A5531E510DB2}">
+      <thm15:themeFamily xmlns:thm15="http://schemas.microsoft.com/office/thememl/2012/main" name="Office Theme" id="{62F939B6-93AF-4DB8-9C6B-D6C7DFDC589F}" vid="{4A3C46E8-61CC-4603-A589-7422A47A8E4A}"/>
+    </a:ext>
+  </a:extLst>
 </a:theme>
 </file>
--- a/dev/ppt/out/Deck.pptx
+++ b/dev/ppt/out/Deck.pptx
@@ -9394,7 +9394,7 @@
                 <a:ea typeface="Arial" panose="020B0604020202020204"/>
                 <a:cs typeface="Arial" panose="020B0604020202020204"/>
               </a:rPr>
-              <a:t>互动：从「看着你」到「看懂你」（已落地一半）</a:t>
+              <a:t>互动：从「看着你」到「看懂你」（代码链路已通，真机待验）</a:t>
             </a:r>
             <a:endParaRPr sz="3000" b="1">
               <a:solidFill>
@@ -9487,7 +9487,7 @@
                 <a:ea typeface="微软雅黑" panose="020B0503020204020204" charset="-122"/>
                 <a:cs typeface="微软雅黑" panose="020B0503020204020204" charset="-122"/>
               </a:rPr>
-              <a:t>▪  </a:t>
+              <a:t>▪  代码已通：手部 21 关键点检测  手机端接入 MediaPipe HandLandmarker；相机帧 → 关键点 → 命中她 → 反应，链路已通；**真机还没用真手验过** —— 要用真手须先关掉界面上的「试手」（那是假手），并先把 .vrm 模型 adb push 到 files/vrm/model.vrm</a:t>
             </a:r>
             <a:r>
               <a:rPr sz="1600" b="0">
@@ -9498,7 +9498,7 @@
                 <a:ea typeface="微软雅黑" panose="020B0503020204020204" charset="-122"/>
                 <a:cs typeface="微软雅黑" panose="020B0503020204020204" charset="-122"/>
               </a:rPr>
-              <a:t>已实现：手部 21 关键点检测</a:t>
+              <a:t/>
             </a:r>
             <a:r>
               <a:rPr sz="1300" b="0">
@@ -9509,7 +9509,7 @@
                 <a:ea typeface="微软雅黑" panose="020B0503020204020204" charset="-122"/>
                 <a:cs typeface="微软雅黑" panose="020B0503020204020204" charset="-122"/>
               </a:rPr>
-              <a:t>  手机端接入 MediaPipe HandLandmarker；相机帧 → 关键点 → 命中她 → 反应，链路已通</a:t>
+              <a:t/>
             </a:r>
             <a:endParaRPr sz="1300" b="0">
               <a:solidFill>
@@ -9535,7 +9535,7 @@
                 <a:ea typeface="微软雅黑" panose="020B0503020204020204" charset="-122"/>
                 <a:cs typeface="微软雅黑" panose="020B0503020204020204" charset="-122"/>
               </a:rPr>
-              <a:t>▪  </a:t>
+              <a:t>▪  代码已通：视线跟随  她自己「看着你的手」——关键点换算到屏幕后驱动 3D 角色的视线目标</a:t>
             </a:r>
             <a:r>
               <a:rPr sz="1600" b="0">
@@ -9546,7 +9546,7 @@
                 <a:ea typeface="微软雅黑" panose="020B0503020204020204" charset="-122"/>
                 <a:cs typeface="微软雅黑" panose="020B0503020204020204" charset="-122"/>
               </a:rPr>
-              <a:t>已实现：视线跟随</a:t>
+              <a:t/>
             </a:r>
             <a:r>
               <a:rPr sz="1300" b="0">
@@ -9557,7 +9557,7 @@
                 <a:ea typeface="微软雅黑" panose="020B0503020204020204" charset="-122"/>
                 <a:cs typeface="微软雅黑" panose="020B0503020204020204" charset="-122"/>
               </a:rPr>
-              <a:t>  她自己「看着你的手」——关键点换算到屏幕后驱动 3D 角色的视线目标</a:t>
+              <a:t/>
             </a:r>
             <a:endParaRPr sz="1300" b="0">
               <a:solidFill>
@@ -9583,7 +9583,7 @@
                 <a:ea typeface="微软雅黑" panose="020B0503020204020204" charset="-122"/>
                 <a:cs typeface="微软雅黑" panose="020B0503020204020204" charset="-122"/>
               </a:rPr>
-              <a:t>▪  </a:t>
+              <a:t>▪  代码已通：三个手势  捏合=捏脸、握拳、挥手；各自独立去抖（21 个单测：9+6+6）</a:t>
             </a:r>
             <a:r>
               <a:rPr sz="1600" b="0">
@@ -9594,7 +9594,7 @@
                 <a:ea typeface="微软雅黑" panose="020B0503020204020204" charset="-122"/>
                 <a:cs typeface="微软雅黑" panose="020B0503020204020204" charset="-122"/>
               </a:rPr>
-              <a:t>已实现：三个手势</a:t>
+              <a:t/>
             </a:r>
             <a:r>
               <a:rPr sz="1300" b="0">
@@ -9605,7 +9605,7 @@
                 <a:ea typeface="微软雅黑" panose="020B0503020204020204" charset="-122"/>
                 <a:cs typeface="微软雅黑" panose="020B0503020204020204" charset="-122"/>
               </a:rPr>
-              <a:t>  捏合=捏脸、握拳、挥手；各自独立去抖（21 个单测：9+6+6）</a:t>
+              <a:t/>
             </a:r>
             <a:endParaRPr sz="1300" b="0">
               <a:solidFill>
@@ -9679,7 +9679,7 @@
                 <a:ea typeface="微软雅黑" panose="020B0503020204020204" charset="-122"/>
                 <a:cs typeface="微软雅黑" panose="020B0503020204020204" charset="-122"/>
               </a:rPr>
-              <a:t>▪  </a:t>
+              <a:t>▪  未验证：真机  编译 / 21 个 JVM 单测 / JS 语法都过了，但**真机从未用真手验过** ——「手伸过去她眼睛是否跟着转」「捏一下她是否躲」都还是未知；真机只跑过假手的坐标链路（rotation=90，40 秒命中 4 次）</a:t>
             </a:r>
             <a:r>
               <a:rPr sz="1600" b="0">
@@ -9690,7 +9690,7 @@
                 <a:ea typeface="微软雅黑" panose="020B0503020204020204" charset="-122"/>
                 <a:cs typeface="微软雅黑" panose="020B0503020204020204" charset="-122"/>
               </a:rPr>
-              <a:t>还没做：真机调优</a:t>
+              <a:t/>
             </a:r>
             <a:r>
               <a:rPr sz="1300" b="0">
@@ -9701,7 +9701,7 @@
                 <a:ea typeface="微软雅黑" panose="020B0503020204020204" charset="-122"/>
                 <a:cs typeface="微软雅黑" panose="020B0503020204020204" charset="-122"/>
               </a:rPr>
-              <a:t>  编译与单测都过了，但「手伸过去她眼睛是否跟着转」要真机确认；偏差只调相机</a:t>
+              <a:t/>
             </a:r>
             <a:endParaRPr sz="1300" b="0">
               <a:solidFill>

--- a/dev/ppt/out/Deck.pptx
+++ b/dev/ppt/out/Deck.pptx
@@ -9487,7 +9487,7 @@
                 <a:ea typeface="微软雅黑" panose="020B0503020204020204" charset="-122"/>
                 <a:cs typeface="微软雅黑" panose="020B0503020204020204" charset="-122"/>
               </a:rPr>
-              <a:t>▪  代码已通：手部 21 关键点检测  手机端接入 MediaPipe HandLandmarker；相机帧 → 关键点 → 命中她 → 反应，链路已通；**真机还没用真手验过** —— 要用真手须先关掉界面上的「试手」（那是假手），并先把 .vrm 模型 adb push 到 files/vrm/model.vrm</a:t>
+              <a:t>▪  代码已通：手部 21 关键点检测  MediaPipe；相机帧 → 关键点 → 命中她 → 反应</a:t>
             </a:r>
             <a:r>
               <a:rPr sz="1600" b="0">
@@ -9535,7 +9535,7 @@
                 <a:ea typeface="微软雅黑" panose="020B0503020204020204" charset="-122"/>
                 <a:cs typeface="微软雅黑" panose="020B0503020204020204" charset="-122"/>
               </a:rPr>
-              <a:t>▪  代码已通：视线跟随  她自己「看着你的手」——关键点换算到屏幕后驱动 3D 角色的视线目标</a:t>
+              <a:t>▪  代码已通：视线跟随  她会「看着你的手」（关键点换算到屏幕，驱动 3D 视线目标）</a:t>
             </a:r>
             <a:r>
               <a:rPr sz="1600" b="0">
@@ -9583,7 +9583,7 @@
                 <a:ea typeface="微软雅黑" panose="020B0503020204020204" charset="-122"/>
                 <a:cs typeface="微软雅黑" panose="020B0503020204020204" charset="-122"/>
               </a:rPr>
-              <a:t>▪  代码已通：三个手势  捏合=捏脸、握拳、挥手；各自独立去抖（21 个单测：9+6+6）</a:t>
+              <a:t>▪  代码已通：三个手势  捏合=捏脸、握拳、挥手（各自去抖；21 个 JVM 单测）</a:t>
             </a:r>
             <a:r>
               <a:rPr sz="1600" b="0">
@@ -9631,7 +9631,7 @@
                 <a:ea typeface="微软雅黑" panose="020B0503020204020204" charset="-122"/>
                 <a:cs typeface="微软雅黑" panose="020B0503020204020204" charset="-122"/>
               </a:rPr>
-              <a:t>▪  </a:t>
+              <a:t>▪  下一步：更多手势 + 接进对话（比心 / 指向某处；挥手顺带一句问候）</a:t>
             </a:r>
             <a:r>
               <a:rPr sz="1600" b="0">
@@ -9642,7 +9642,7 @@
                 <a:ea typeface="微软雅黑" panose="020B0503020204020204" charset="-122"/>
                 <a:cs typeface="微软雅黑" panose="020B0503020204020204" charset="-122"/>
               </a:rPr>
-              <a:t>下一步：更多手势 + 接进对话</a:t>
+              <a:t/>
             </a:r>
             <a:r>
               <a:rPr sz="1300" b="0">
@@ -9653,7 +9653,7 @@
                 <a:ea typeface="微软雅黑" panose="020B0503020204020204" charset="-122"/>
                 <a:cs typeface="微软雅黑" panose="020B0503020204020204" charset="-122"/>
               </a:rPr>
-              <a:t>  比心 / 指向某处；挥手时顺便触发一句问候，把动作和她的性格连起来</a:t>
+              <a:t/>
             </a:r>
             <a:endParaRPr sz="1300" b="0">
               <a:solidFill>
@@ -9679,7 +9679,7 @@
                 <a:ea typeface="微软雅黑" panose="020B0503020204020204" charset="-122"/>
                 <a:cs typeface="微软雅黑" panose="020B0503020204020204" charset="-122"/>
               </a:rPr>
-              <a:t>▪  未验证：真机  编译 / 21 个 JVM 单测 / JS 语法都过了，但**真机从未用真手验过** ——「手伸过去她眼睛是否跟着转」「捏一下她是否躲」都还是未知；真机只跑过假手的坐标链路（rotation=90，40 秒命中 4 次）</a:t>
+              <a:t>▪  未验证：真机  编译·单测·JS 都过；真机从未用真手验过（须关掉「试手」、先 push .vrm）</a:t>
             </a:r>
             <a:r>
               <a:rPr sz="1600" b="0">

--- a/dev/ppt/out/Deck.pptx
+++ b/dev/ppt/out/Deck.pptx
@@ -24,8 +24,8 @@
     <p:sldId id="269" r:id="rId17"/>
     <p:sldId id="270" r:id="rId18"/>
     <p:sldId id="271" r:id="rId19"/>
-    <p:sldId id="272" r:id="rId20"/>
-    <p:sldId id="273" r:id="rId21"/>
+    <p:sldId id="273" r:id="rId20"/>
+    <p:sldId id="272" r:id="rId21"/>
     <p:sldId id="274" r:id="rId22"/>
     <p:sldId id="276" r:id="rId23"/>
     <p:sldId id="275" r:id="rId24"/>
@@ -1121,7 +1121,7 @@
           <a:lstStyle/>
           <a:p>
             <a:r>
-              <a:t>工程这块我想强调一句：这不是『我这儿能跑』。仓库自带 389 项自检，一条命令可复现，现在是全绿。换装差异、立绘底色这种观感问题，我们用像素级比对来验收。</a:t>
+              <a:t>第三部分，未来规划。</a:t>
             </a:r>
           </a:p>
         </p:txBody>
@@ -1191,7 +1191,7 @@
           <a:lstStyle/>
           <a:p>
             <a:r>
-              <a:t>第三部分，未来规划。</a:t>
+              <a:t>工程这块我想强调一句：这不是『我这儿能跑』。仓库自带 389 项自检，一条命令可复现，现在是全绿。换装差异、立绘底色这种观感问题，我们用像素级比对来验收。</a:t>
             </a:r>
           </a:p>
         </p:txBody>
@@ -7877,6 +7877,130 @@
     <p:bg>
       <p:bgPr>
         <a:solidFill>
+          <a:srgbClr val="3B2B26"/>
+        </a:solidFill>
+        <a:effectLst/>
+      </p:bgPr>
+    </p:bg>
+    <p:spTree>
+      <p:nvGrpSpPr>
+        <p:cNvPr id="1" name=""/>
+        <p:cNvGrpSpPr/>
+        <p:nvPr/>
+      </p:nvGrpSpPr>
+      <p:grpSpPr/>
+      <p:sp>
+        <p:nvSpPr>
+          <p:cNvPr id="2" name="TextBox 1"/>
+          <p:cNvSpPr txBox="1"/>
+          <p:nvPr/>
+        </p:nvSpPr>
+        <p:spPr>
+          <a:xfrm>
+            <a:off x="822960" y="2011680"/>
+            <a:ext cx="10058400" cy="1280160"/>
+          </a:xfrm>
+          <a:prstGeom prst="rect">
+            <a:avLst/>
+          </a:prstGeom>
+          <a:noFill/>
+        </p:spPr>
+        <p:txBody>
+          <a:bodyPr wrap="square" lIns="0" tIns="0" rIns="0" bIns="0" anchor="t">
+            <a:spAutoFit/>
+          </a:bodyPr>
+          <a:lstStyle/>
+          <a:p>
+            <a:pPr algn="l">
+              <a:spcAft>
+                <a:spcPts val="0"/>
+              </a:spcAft>
+            </a:pPr>
+            <a:r>
+              <a:rPr sz="6000" b="1">
+                <a:solidFill>
+                  <a:srgbClr val="A03A35"/>
+                </a:solidFill>
+                <a:latin typeface="Arial" panose="020B0604020202020204"/>
+                <a:ea typeface="Arial" panose="020B0604020202020204"/>
+                <a:cs typeface="Arial" panose="020B0604020202020204"/>
+              </a:rPr>
+              <a:t>03</a:t>
+            </a:r>
+            <a:endParaRPr sz="6000" b="1">
+              <a:solidFill>
+                <a:srgbClr val="A03A35"/>
+              </a:solidFill>
+              <a:latin typeface="Arial" panose="020B0604020202020204"/>
+              <a:ea typeface="Arial" panose="020B0604020202020204"/>
+              <a:cs typeface="Arial" panose="020B0604020202020204"/>
+            </a:endParaRPr>
+          </a:p>
+        </p:txBody>
+      </p:sp>
+      <p:sp>
+        <p:nvSpPr>
+          <p:cNvPr id="3" name="TextBox 2"/>
+          <p:cNvSpPr txBox="1"/>
+          <p:nvPr/>
+        </p:nvSpPr>
+        <p:spPr>
+          <a:xfrm>
+            <a:off x="822960" y="3383280"/>
+            <a:ext cx="10515600" cy="1097280"/>
+          </a:xfrm>
+          <a:prstGeom prst="rect">
+            <a:avLst/>
+          </a:prstGeom>
+          <a:noFill/>
+        </p:spPr>
+        <p:txBody>
+          <a:bodyPr wrap="square" lIns="0" tIns="0" rIns="0" bIns="0" anchor="t">
+            <a:spAutoFit/>
+          </a:bodyPr>
+          <a:lstStyle/>
+          <a:p>
+            <a:pPr algn="l">
+              <a:spcAft>
+                <a:spcPts val="0"/>
+              </a:spcAft>
+            </a:pPr>
+            <a:r>
+              <a:rPr sz="3400" b="1">
+                <a:solidFill>
+                  <a:srgbClr val="F7F1EA"/>
+                </a:solidFill>
+                <a:latin typeface="Arial" panose="020B0604020202020204"/>
+                <a:ea typeface="Arial" panose="020B0604020202020204"/>
+                <a:cs typeface="Arial" panose="020B0604020202020204"/>
+              </a:rPr>
+              <a:t>未来规划：从“桌面上”走向“在身边”</a:t>
+            </a:r>
+            <a:endParaRPr sz="3400" b="1">
+              <a:solidFill>
+                <a:srgbClr val="F7F1EA"/>
+              </a:solidFill>
+              <a:latin typeface="Arial" panose="020B0604020202020204"/>
+              <a:ea typeface="Arial" panose="020B0604020202020204"/>
+              <a:cs typeface="Arial" panose="020B0604020202020204"/>
+            </a:endParaRPr>
+          </a:p>
+        </p:txBody>
+      </p:sp>
+    </p:spTree>
+  </p:cSld>
+  <p:clrMapOvr>
+    <a:masterClrMapping/>
+  </p:clrMapOvr>
+</p:sld>
+</file>
+
+<file path=ppt/slides/slide18.xml><?xml version="1.0" encoding="utf-8"?>
+<p:sld xmlns:a="http://schemas.openxmlformats.org/drawingml/2006/main" xmlns:r="http://schemas.openxmlformats.org/officeDocument/2006/relationships" xmlns:p="http://schemas.openxmlformats.org/presentationml/2006/main">
+  <p:cSld>
+    <p:bg>
+      <p:bgPr>
+        <a:solidFill>
           <a:srgbClr val="F7F1EA"/>
         </a:solidFill>
         <a:effectLst/>
@@ -8270,130 +8394,6 @@
           </a:prstGeom>
         </p:spPr>
       </p:pic>
-    </p:spTree>
-  </p:cSld>
-  <p:clrMapOvr>
-    <a:masterClrMapping/>
-  </p:clrMapOvr>
-</p:sld>
-</file>
-
-<file path=ppt/slides/slide18.xml><?xml version="1.0" encoding="utf-8"?>
-<p:sld xmlns:a="http://schemas.openxmlformats.org/drawingml/2006/main" xmlns:r="http://schemas.openxmlformats.org/officeDocument/2006/relationships" xmlns:p="http://schemas.openxmlformats.org/presentationml/2006/main">
-  <p:cSld>
-    <p:bg>
-      <p:bgPr>
-        <a:solidFill>
-          <a:srgbClr val="3B2B26"/>
-        </a:solidFill>
-        <a:effectLst/>
-      </p:bgPr>
-    </p:bg>
-    <p:spTree>
-      <p:nvGrpSpPr>
-        <p:cNvPr id="1" name=""/>
-        <p:cNvGrpSpPr/>
-        <p:nvPr/>
-      </p:nvGrpSpPr>
-      <p:grpSpPr/>
-      <p:sp>
-        <p:nvSpPr>
-          <p:cNvPr id="2" name="TextBox 1"/>
-          <p:cNvSpPr txBox="1"/>
-          <p:nvPr/>
-        </p:nvSpPr>
-        <p:spPr>
-          <a:xfrm>
-            <a:off x="822960" y="2011680"/>
-            <a:ext cx="10058400" cy="1280160"/>
-          </a:xfrm>
-          <a:prstGeom prst="rect">
-            <a:avLst/>
-          </a:prstGeom>
-          <a:noFill/>
-        </p:spPr>
-        <p:txBody>
-          <a:bodyPr wrap="square" lIns="0" tIns="0" rIns="0" bIns="0" anchor="t">
-            <a:spAutoFit/>
-          </a:bodyPr>
-          <a:lstStyle/>
-          <a:p>
-            <a:pPr algn="l">
-              <a:spcAft>
-                <a:spcPts val="0"/>
-              </a:spcAft>
-            </a:pPr>
-            <a:r>
-              <a:rPr sz="6000" b="1">
-                <a:solidFill>
-                  <a:srgbClr val="A03A35"/>
-                </a:solidFill>
-                <a:latin typeface="Arial" panose="020B0604020202020204"/>
-                <a:ea typeface="Arial" panose="020B0604020202020204"/>
-                <a:cs typeface="Arial" panose="020B0604020202020204"/>
-              </a:rPr>
-              <a:t>03</a:t>
-            </a:r>
-            <a:endParaRPr sz="6000" b="1">
-              <a:solidFill>
-                <a:srgbClr val="A03A35"/>
-              </a:solidFill>
-              <a:latin typeface="Arial" panose="020B0604020202020204"/>
-              <a:ea typeface="Arial" panose="020B0604020202020204"/>
-              <a:cs typeface="Arial" panose="020B0604020202020204"/>
-            </a:endParaRPr>
-          </a:p>
-        </p:txBody>
-      </p:sp>
-      <p:sp>
-        <p:nvSpPr>
-          <p:cNvPr id="3" name="TextBox 2"/>
-          <p:cNvSpPr txBox="1"/>
-          <p:nvPr/>
-        </p:nvSpPr>
-        <p:spPr>
-          <a:xfrm>
-            <a:off x="822960" y="3383280"/>
-            <a:ext cx="10515600" cy="1097280"/>
-          </a:xfrm>
-          <a:prstGeom prst="rect">
-            <a:avLst/>
-          </a:prstGeom>
-          <a:noFill/>
-        </p:spPr>
-        <p:txBody>
-          <a:bodyPr wrap="square" lIns="0" tIns="0" rIns="0" bIns="0" anchor="t">
-            <a:spAutoFit/>
-          </a:bodyPr>
-          <a:lstStyle/>
-          <a:p>
-            <a:pPr algn="l">
-              <a:spcAft>
-                <a:spcPts val="0"/>
-              </a:spcAft>
-            </a:pPr>
-            <a:r>
-              <a:rPr sz="3400" b="1">
-                <a:solidFill>
-                  <a:srgbClr val="F7F1EA"/>
-                </a:solidFill>
-                <a:latin typeface="Arial" panose="020B0604020202020204"/>
-                <a:ea typeface="Arial" panose="020B0604020202020204"/>
-                <a:cs typeface="Arial" panose="020B0604020202020204"/>
-              </a:rPr>
-              <a:t>未来规划：从“桌面上”走向“在身边”</a:t>
-            </a:r>
-            <a:endParaRPr sz="3400" b="1">
-              <a:solidFill>
-                <a:srgbClr val="F7F1EA"/>
-              </a:solidFill>
-              <a:latin typeface="Arial" panose="020B0604020202020204"/>
-              <a:ea typeface="Arial" panose="020B0604020202020204"/>
-              <a:cs typeface="Arial" panose="020B0604020202020204"/>
-            </a:endParaRPr>
-          </a:p>
-        </p:txBody>
-      </p:sp>
     </p:spTree>
   </p:cSld>
   <p:clrMapOvr>
@@ -9115,7 +9115,18 @@
                 <a:ea typeface="微软雅黑" panose="020B0503020204020204" charset="-122"/>
                 <a:cs typeface="微软雅黑" panose="020B0503020204020204" charset="-122"/>
               </a:rPr>
-              <a:t>但已经有人做了（一）</a:t>
+              <a:t>已经有人做</a:t>
+            </a:r>
+            <a:r>
+              <a:rPr lang="zh-CN" sz="1600" b="0">
+                <a:solidFill>
+                  <a:srgbClr val="3B2B26"/>
+                </a:solidFill>
+                <a:latin typeface="微软雅黑" panose="020B0503020204020204" charset="-122"/>
+                <a:ea typeface="微软雅黑" panose="020B0503020204020204" charset="-122"/>
+                <a:cs typeface="微软雅黑" panose="020B0503020204020204" charset="-122"/>
+              </a:rPr>
+              <a:t>的：</a:t>
             </a:r>
             <a:r>
               <a:rPr sz="1300" b="0">
@@ -9126,7 +9137,7 @@
                 <a:ea typeface="微软雅黑" panose="020B0503020204020204" charset="-122"/>
                 <a:cs typeface="微软雅黑" panose="020B0503020204020204" charset="-122"/>
               </a:rPr>
-              <a:t>  mmHRI：毫米波做隐私友好人机交互，隔帘做机器人操作、动作识别 85%（2026-09）</a:t>
+              <a:t> mmHRI：毫米波做隐私友好人机交互，隔帘做机器人操作、动作识别 85%（2026-09）</a:t>
             </a:r>
             <a:endParaRPr sz="1300" b="0">
               <a:solidFill>
@@ -9155,15 +9166,28 @@
               <a:t>▪  </a:t>
             </a:r>
             <a:r>
-              <a:rPr sz="1600" b="0">
+              <a:rPr sz="1600">
                 <a:solidFill>
                   <a:srgbClr val="3B2B26"/>
                 </a:solidFill>
                 <a:latin typeface="微软雅黑" panose="020B0503020204020204" charset="-122"/>
                 <a:ea typeface="微软雅黑" panose="020B0503020204020204" charset="-122"/>
                 <a:cs typeface="微软雅黑" panose="020B0503020204020204" charset="-122"/>
-              </a:rPr>
-              <a:t>但已经有人做了（二）</a:t>
+                <a:sym typeface="+mn-ea"/>
+              </a:rPr>
+              <a:t>已经有人做</a:t>
+            </a:r>
+            <a:r>
+              <a:rPr lang="zh-CN" sz="1600">
+                <a:solidFill>
+                  <a:srgbClr val="3B2B26"/>
+                </a:solidFill>
+                <a:latin typeface="微软雅黑" panose="020B0503020204020204" charset="-122"/>
+                <a:ea typeface="微软雅黑" panose="020B0503020204020204" charset="-122"/>
+                <a:cs typeface="微软雅黑" panose="020B0503020204020204" charset="-122"/>
+                <a:sym typeface="+mn-ea"/>
+              </a:rPr>
+              <a:t>的：</a:t>
             </a:r>
             <a:r>
               <a:rPr sz="1300" b="0">
@@ -9489,28 +9513,6 @@
               </a:rPr>
               <a:t>▪  代码已通：手部 21 关键点检测  MediaPipe；相机帧 → 关键点 → 命中她 → 反应</a:t>
             </a:r>
-            <a:r>
-              <a:rPr sz="1600" b="0">
-                <a:solidFill>
-                  <a:srgbClr val="3B2B26"/>
-                </a:solidFill>
-                <a:latin typeface="微软雅黑" panose="020B0503020204020204" charset="-122"/>
-                <a:ea typeface="微软雅黑" panose="020B0503020204020204" charset="-122"/>
-                <a:cs typeface="微软雅黑" panose="020B0503020204020204" charset="-122"/>
-              </a:rPr>
-              <a:t/>
-            </a:r>
-            <a:r>
-              <a:rPr sz="1300" b="0">
-                <a:solidFill>
-                  <a:srgbClr val="6B5850"/>
-                </a:solidFill>
-                <a:latin typeface="微软雅黑" panose="020B0503020204020204" charset="-122"/>
-                <a:ea typeface="微软雅黑" panose="020B0503020204020204" charset="-122"/>
-                <a:cs typeface="微软雅黑" panose="020B0503020204020204" charset="-122"/>
-              </a:rPr>
-              <a:t/>
-            </a:r>
             <a:endParaRPr sz="1300" b="0">
               <a:solidFill>
                 <a:srgbClr val="6B5850"/>
@@ -9537,28 +9539,6 @@
               </a:rPr>
               <a:t>▪  代码已通：视线跟随  她会「看着你的手」（关键点换算到屏幕，驱动 3D 视线目标）</a:t>
             </a:r>
-            <a:r>
-              <a:rPr sz="1600" b="0">
-                <a:solidFill>
-                  <a:srgbClr val="3B2B26"/>
-                </a:solidFill>
-                <a:latin typeface="微软雅黑" panose="020B0503020204020204" charset="-122"/>
-                <a:ea typeface="微软雅黑" panose="020B0503020204020204" charset="-122"/>
-                <a:cs typeface="微软雅黑" panose="020B0503020204020204" charset="-122"/>
-              </a:rPr>
-              <a:t/>
-            </a:r>
-            <a:r>
-              <a:rPr sz="1300" b="0">
-                <a:solidFill>
-                  <a:srgbClr val="6B5850"/>
-                </a:solidFill>
-                <a:latin typeface="微软雅黑" panose="020B0503020204020204" charset="-122"/>
-                <a:ea typeface="微软雅黑" panose="020B0503020204020204" charset="-122"/>
-                <a:cs typeface="微软雅黑" panose="020B0503020204020204" charset="-122"/>
-              </a:rPr>
-              <a:t/>
-            </a:r>
             <a:endParaRPr sz="1300" b="0">
               <a:solidFill>
                 <a:srgbClr val="6B5850"/>
@@ -9585,28 +9565,6 @@
               </a:rPr>
               <a:t>▪  代码已通：三个手势  捏合=捏脸、握拳、挥手（各自去抖；21 个 JVM 单测）</a:t>
             </a:r>
-            <a:r>
-              <a:rPr sz="1600" b="0">
-                <a:solidFill>
-                  <a:srgbClr val="3B2B26"/>
-                </a:solidFill>
-                <a:latin typeface="微软雅黑" panose="020B0503020204020204" charset="-122"/>
-                <a:ea typeface="微软雅黑" panose="020B0503020204020204" charset="-122"/>
-                <a:cs typeface="微软雅黑" panose="020B0503020204020204" charset="-122"/>
-              </a:rPr>
-              <a:t/>
-            </a:r>
-            <a:r>
-              <a:rPr sz="1300" b="0">
-                <a:solidFill>
-                  <a:srgbClr val="6B5850"/>
-                </a:solidFill>
-                <a:latin typeface="微软雅黑" panose="020B0503020204020204" charset="-122"/>
-                <a:ea typeface="微软雅黑" panose="020B0503020204020204" charset="-122"/>
-                <a:cs typeface="微软雅黑" panose="020B0503020204020204" charset="-122"/>
-              </a:rPr>
-              <a:t/>
-            </a:r>
             <a:endParaRPr sz="1300" b="0">
               <a:solidFill>
                 <a:srgbClr val="6B5850"/>
@@ -9633,28 +9591,6 @@
               </a:rPr>
               <a:t>▪  下一步：更多手势 + 接进对话（比心 / 指向某处；挥手顺带一句问候）</a:t>
             </a:r>
-            <a:r>
-              <a:rPr sz="1600" b="0">
-                <a:solidFill>
-                  <a:srgbClr val="3B2B26"/>
-                </a:solidFill>
-                <a:latin typeface="微软雅黑" panose="020B0503020204020204" charset="-122"/>
-                <a:ea typeface="微软雅黑" panose="020B0503020204020204" charset="-122"/>
-                <a:cs typeface="微软雅黑" panose="020B0503020204020204" charset="-122"/>
-              </a:rPr>
-              <a:t/>
-            </a:r>
-            <a:r>
-              <a:rPr sz="1300" b="0">
-                <a:solidFill>
-                  <a:srgbClr val="6B5850"/>
-                </a:solidFill>
-                <a:latin typeface="微软雅黑" panose="020B0503020204020204" charset="-122"/>
-                <a:ea typeface="微软雅黑" panose="020B0503020204020204" charset="-122"/>
-                <a:cs typeface="微软雅黑" panose="020B0503020204020204" charset="-122"/>
-              </a:rPr>
-              <a:t/>
-            </a:r>
             <a:endParaRPr sz="1300" b="0">
               <a:solidFill>
                 <a:srgbClr val="6B5850"/>
@@ -9680,28 +9616,6 @@
                 <a:cs typeface="微软雅黑" panose="020B0503020204020204" charset="-122"/>
               </a:rPr>
               <a:t>▪  未验证：真机  编译·单测·JS 都过；真机从未用真手验过（须关掉「试手」、先 push .vrm）</a:t>
-            </a:r>
-            <a:r>
-              <a:rPr sz="1600" b="0">
-                <a:solidFill>
-                  <a:srgbClr val="3B2B26"/>
-                </a:solidFill>
-                <a:latin typeface="微软雅黑" panose="020B0503020204020204" charset="-122"/>
-                <a:ea typeface="微软雅黑" panose="020B0503020204020204" charset="-122"/>
-                <a:cs typeface="微软雅黑" panose="020B0503020204020204" charset="-122"/>
-              </a:rPr>
-              <a:t/>
-            </a:r>
-            <a:r>
-              <a:rPr sz="1300" b="0">
-                <a:solidFill>
-                  <a:srgbClr val="6B5850"/>
-                </a:solidFill>
-                <a:latin typeface="微软雅黑" panose="020B0503020204020204" charset="-122"/>
-                <a:ea typeface="微软雅黑" panose="020B0503020204020204" charset="-122"/>
-                <a:cs typeface="微软雅黑" panose="020B0503020204020204" charset="-122"/>
-              </a:rPr>
-              <a:t/>
             </a:r>
             <a:endParaRPr sz="1300" b="0">
               <a:solidFill>
@@ -11035,28 +10949,6 @@
                 <a:cs typeface="微软雅黑" panose="020B0503020204020204" charset="-122"/>
               </a:rPr>
               <a:t>▪  开源桌宠  Shimeji / Ukagaka（SSP） / VPet / uDesktopMascot</a:t>
-            </a:r>
-            <a:r>
-              <a:rPr sz="1600" b="0">
-                <a:solidFill>
-                  <a:srgbClr val="3B2B26"/>
-                </a:solidFill>
-                <a:latin typeface="微软雅黑" panose="020B0503020204020204" charset="-122"/>
-                <a:ea typeface="微软雅黑" panose="020B0503020204020204" charset="-122"/>
-                <a:cs typeface="微软雅黑" panose="020B0503020204020204" charset="-122"/>
-              </a:rPr>
-              <a:t/>
-            </a:r>
-            <a:r>
-              <a:rPr sz="1300" b="0">
-                <a:solidFill>
-                  <a:srgbClr val="6B5850"/>
-                </a:solidFill>
-                <a:latin typeface="微软雅黑" panose="020B0503020204020204" charset="-122"/>
-                <a:ea typeface="微软雅黑" panose="020B0503020204020204" charset="-122"/>
-                <a:cs typeface="微软雅黑" panose="020B0503020204020204" charset="-122"/>
-              </a:rPr>
-              <a:t/>
             </a:r>
             <a:endParaRPr sz="1300" b="0">
               <a:solidFill>
